--- a/docs/TripME_Presentation.pptx
+++ b/docs/TripME_Presentation.pptx
@@ -6522,7 +6522,7 @@
                 </a:solidFill>
                 <a:latin typeface="Segoe UI"/>
               </a:rPr>
-              <a:t>THE SOLUTION</a:t>
+              <a:t>PROPOSED SOLUTION</a:t>
             </a:r>
           </a:p>
         </p:txBody>
@@ -6558,7 +6558,7 @@
               </a:spcAft>
             </a:pPr>
             <a:r>
-              <a:rPr sz="3300" b="1" i="0">
+              <a:rPr sz="3000" b="1" i="0">
                 <a:solidFill>
                   <a:srgbClr val="0E1F1A"/>
                 </a:solidFill>
@@ -6577,8 +6577,8 @@
         </p:nvSpPr>
         <p:spPr>
           <a:xfrm>
-            <a:off x="502920" y="1783080"/>
-            <a:ext cx="1481328" cy="868680"/>
+            <a:off x="502920" y="1371600"/>
+            <a:ext cx="1481328" cy="566928"/>
           </a:xfrm>
           <a:prstGeom prst="roundRect">
             <a:avLst>
@@ -6613,7 +6613,7 @@
           <a:p>
             <a:pPr algn="ctr"/>
             <a:r>
-              <a:rPr sz="1250" b="1">
+              <a:rPr sz="1150" b="1">
                 <a:solidFill>
                   <a:srgbClr val="FFFFFF"/>
                 </a:solidFill>
@@ -6632,7 +6632,7 @@
         </p:nvSpPr>
         <p:spPr>
           <a:xfrm>
-            <a:off x="1947672" y="1984248"/>
+            <a:off x="1947672" y="1463040"/>
             <a:ext cx="320040" cy="365760"/>
           </a:xfrm>
           <a:prstGeom prst="rect">
@@ -6655,7 +6655,7 @@
               </a:spcAft>
             </a:pPr>
             <a:r>
-              <a:rPr sz="1600" b="1" i="0">
+              <a:rPr sz="1400" b="1" i="0">
                 <a:solidFill>
                   <a:srgbClr val="4E635C"/>
                 </a:solidFill>
@@ -6674,8 +6674,8 @@
         </p:nvSpPr>
         <p:spPr>
           <a:xfrm>
-            <a:off x="2125980" y="1783080"/>
-            <a:ext cx="1481328" cy="868680"/>
+            <a:off x="2125980" y="1371600"/>
+            <a:ext cx="1481328" cy="566928"/>
           </a:xfrm>
           <a:prstGeom prst="roundRect">
             <a:avLst>
@@ -6710,7 +6710,7 @@
           <a:p>
             <a:pPr algn="ctr"/>
             <a:r>
-              <a:rPr sz="1250" b="1">
+              <a:rPr sz="1150" b="1">
                 <a:solidFill>
                   <a:srgbClr val="FFFFFF"/>
                 </a:solidFill>
@@ -6729,7 +6729,7 @@
         </p:nvSpPr>
         <p:spPr>
           <a:xfrm>
-            <a:off x="3570732" y="1984248"/>
+            <a:off x="3570732" y="1463040"/>
             <a:ext cx="320040" cy="365760"/>
           </a:xfrm>
           <a:prstGeom prst="rect">
@@ -6752,7 +6752,7 @@
               </a:spcAft>
             </a:pPr>
             <a:r>
-              <a:rPr sz="1600" b="1" i="0">
+              <a:rPr sz="1400" b="1" i="0">
                 <a:solidFill>
                   <a:srgbClr val="4E635C"/>
                 </a:solidFill>
@@ -6771,8 +6771,8 @@
         </p:nvSpPr>
         <p:spPr>
           <a:xfrm>
-            <a:off x="3749040" y="1783080"/>
-            <a:ext cx="1481328" cy="868680"/>
+            <a:off x="3749040" y="1371600"/>
+            <a:ext cx="1481328" cy="566928"/>
           </a:xfrm>
           <a:prstGeom prst="roundRect">
             <a:avLst>
@@ -6807,7 +6807,7 @@
           <a:p>
             <a:pPr algn="ctr"/>
             <a:r>
-              <a:rPr sz="1250" b="1">
+              <a:rPr sz="1150" b="1">
                 <a:solidFill>
                   <a:srgbClr val="FFFFFF"/>
                 </a:solidFill>
@@ -6826,7 +6826,7 @@
         </p:nvSpPr>
         <p:spPr>
           <a:xfrm>
-            <a:off x="5193792" y="1984248"/>
+            <a:off x="5193792" y="1463040"/>
             <a:ext cx="320040" cy="365760"/>
           </a:xfrm>
           <a:prstGeom prst="rect">
@@ -6849,7 +6849,7 @@
               </a:spcAft>
             </a:pPr>
             <a:r>
-              <a:rPr sz="1600" b="1" i="0">
+              <a:rPr sz="1400" b="1" i="0">
                 <a:solidFill>
                   <a:srgbClr val="4E635C"/>
                 </a:solidFill>
@@ -6868,8 +6868,8 @@
         </p:nvSpPr>
         <p:spPr>
           <a:xfrm>
-            <a:off x="5372100" y="1783080"/>
-            <a:ext cx="1481328" cy="868680"/>
+            <a:off x="5372100" y="1371600"/>
+            <a:ext cx="1481328" cy="566928"/>
           </a:xfrm>
           <a:prstGeom prst="roundRect">
             <a:avLst>
@@ -6904,7 +6904,7 @@
           <a:p>
             <a:pPr algn="ctr"/>
             <a:r>
-              <a:rPr sz="1250" b="1">
+              <a:rPr sz="1150" b="1">
                 <a:solidFill>
                   <a:srgbClr val="FFFFFF"/>
                 </a:solidFill>
@@ -6923,7 +6923,7 @@
         </p:nvSpPr>
         <p:spPr>
           <a:xfrm>
-            <a:off x="6816852" y="1984248"/>
+            <a:off x="6816852" y="1463040"/>
             <a:ext cx="320040" cy="365760"/>
           </a:xfrm>
           <a:prstGeom prst="rect">
@@ -6946,7 +6946,7 @@
               </a:spcAft>
             </a:pPr>
             <a:r>
-              <a:rPr sz="1600" b="1" i="0">
+              <a:rPr sz="1400" b="1" i="0">
                 <a:solidFill>
                   <a:srgbClr val="4E635C"/>
                 </a:solidFill>
@@ -6965,8 +6965,8 @@
         </p:nvSpPr>
         <p:spPr>
           <a:xfrm>
-            <a:off x="6995160" y="1783080"/>
-            <a:ext cx="1481328" cy="868680"/>
+            <a:off x="6995160" y="1371600"/>
+            <a:ext cx="1481328" cy="566928"/>
           </a:xfrm>
           <a:prstGeom prst="roundRect">
             <a:avLst>
@@ -7001,7 +7001,7 @@
           <a:p>
             <a:pPr algn="ctr"/>
             <a:r>
-              <a:rPr sz="1250" b="1">
+              <a:rPr sz="1150" b="1">
                 <a:solidFill>
                   <a:srgbClr val="FFFFFF"/>
                 </a:solidFill>
@@ -7020,7 +7020,7 @@
         </p:nvSpPr>
         <p:spPr>
           <a:xfrm>
-            <a:off x="8439912" y="1984248"/>
+            <a:off x="8439912" y="1463040"/>
             <a:ext cx="320040" cy="365760"/>
           </a:xfrm>
           <a:prstGeom prst="rect">
@@ -7043,7 +7043,7 @@
               </a:spcAft>
             </a:pPr>
             <a:r>
-              <a:rPr sz="1600" b="1" i="0">
+              <a:rPr sz="1400" b="1" i="0">
                 <a:solidFill>
                   <a:srgbClr val="4E635C"/>
                 </a:solidFill>
@@ -7062,8 +7062,8 @@
         </p:nvSpPr>
         <p:spPr>
           <a:xfrm>
-            <a:off x="8618220" y="1783080"/>
-            <a:ext cx="1481328" cy="868680"/>
+            <a:off x="8618220" y="1371600"/>
+            <a:ext cx="1481328" cy="566928"/>
           </a:xfrm>
           <a:prstGeom prst="roundRect">
             <a:avLst>
@@ -7098,7 +7098,7 @@
           <a:p>
             <a:pPr algn="ctr"/>
             <a:r>
-              <a:rPr sz="1250" b="1">
+              <a:rPr sz="1150" b="1">
                 <a:solidFill>
                   <a:srgbClr val="0E1F1A"/>
                 </a:solidFill>
@@ -7117,7 +7117,7 @@
         </p:nvSpPr>
         <p:spPr>
           <a:xfrm>
-            <a:off x="10062972" y="1984248"/>
+            <a:off x="10062972" y="1463040"/>
             <a:ext cx="320040" cy="365760"/>
           </a:xfrm>
           <a:prstGeom prst="rect">
@@ -7140,7 +7140,7 @@
               </a:spcAft>
             </a:pPr>
             <a:r>
-              <a:rPr sz="1600" b="1" i="0">
+              <a:rPr sz="1400" b="1" i="0">
                 <a:solidFill>
                   <a:srgbClr val="4E635C"/>
                 </a:solidFill>
@@ -7159,8 +7159,8 @@
         </p:nvSpPr>
         <p:spPr>
           <a:xfrm>
-            <a:off x="10241280" y="1783080"/>
-            <a:ext cx="1481328" cy="868680"/>
+            <a:off x="10241280" y="1371600"/>
+            <a:ext cx="1481328" cy="566928"/>
           </a:xfrm>
           <a:prstGeom prst="roundRect">
             <a:avLst>
@@ -7195,7 +7195,7 @@
           <a:p>
             <a:pPr algn="ctr"/>
             <a:r>
-              <a:rPr sz="1250" b="1">
+              <a:rPr sz="1150" b="1">
                 <a:solidFill>
                   <a:srgbClr val="FFFFFF"/>
                 </a:solidFill>
@@ -7214,8 +7214,8 @@
         </p:nvSpPr>
         <p:spPr>
           <a:xfrm>
-            <a:off x="502920" y="2743200"/>
-            <a:ext cx="11155680" cy="365760"/>
+            <a:off x="502920" y="2057400"/>
+            <a:ext cx="11155680" cy="320040"/>
           </a:xfrm>
           <a:prstGeom prst="rect">
             <a:avLst/>
@@ -7237,7 +7237,7 @@
               </a:spcAft>
             </a:pPr>
             <a:r>
-              <a:rPr sz="1300" b="1" i="0">
+              <a:rPr sz="1200" b="1" i="0">
                 <a:solidFill>
                   <a:srgbClr val="C58200"/>
                 </a:solidFill>
@@ -7246,13 +7246,13 @@
               <a:t>↩  the backward edge — </a:t>
             </a:r>
             <a:r>
-              <a:rPr sz="1300" b="0" i="0">
+              <a:rPr sz="1200" b="0" i="0">
                 <a:solidFill>
                   <a:srgbClr val="0E1F1A"/>
                 </a:solidFill>
                 <a:latin typeface="Segoe UI"/>
               </a:rPr>
-              <a:t>the Referee audits Itinerary against Budget and can send the work BACK. Agents that can reject each other’s work are what make this a system, not a sequence.</a:t>
+              <a:t>the Referee can reject another agent’s work and send it BACK to be re-done. Agents that negotiate — not a sequence of prompts.</a:t>
             </a:r>
           </a:p>
         </p:txBody>
@@ -7265,8 +7265,8 @@
         </p:nvSpPr>
         <p:spPr>
           <a:xfrm>
-            <a:off x="502920" y="3291840"/>
-            <a:ext cx="11201400" cy="932688"/>
+            <a:off x="502920" y="2487168"/>
+            <a:ext cx="5532120" cy="804672"/>
           </a:xfrm>
           <a:prstGeom prst="roundRect">
             <a:avLst>
@@ -7313,8 +7313,50 @@
         </p:nvSpPr>
         <p:spPr>
           <a:xfrm>
-            <a:off x="731520" y="3383280"/>
-            <a:ext cx="3291840" cy="731520"/>
+            <a:off x="704088" y="2560320"/>
+            <a:ext cx="1572768" cy="658368"/>
+          </a:xfrm>
+          <a:prstGeom prst="rect">
+            <a:avLst/>
+          </a:prstGeom>
+          <a:noFill/>
+        </p:spPr>
+        <p:txBody>
+          <a:bodyPr wrap="square" anchor="t">
+            <a:spAutoFit/>
+          </a:bodyPr>
+          <a:lstStyle/>
+          <a:p>
+            <a:pPr algn="l">
+              <a:lnSpc>
+                <a:spcPct val="95000"/>
+              </a:lnSpc>
+              <a:spcAft>
+                <a:spcPts val="400"/>
+              </a:spcAft>
+            </a:pPr>
+            <a:r>
+              <a:rPr sz="1200" b="1" i="0">
+                <a:solidFill>
+                  <a:srgbClr val="14453D"/>
+                </a:solidFill>
+                <a:latin typeface="Segoe UI"/>
+              </a:rPr>
+              <a:t>Mood &amp; Intent</a:t>
+            </a:r>
+          </a:p>
+        </p:txBody>
+      </p:sp>
+      <p:sp>
+        <p:nvSpPr>
+          <p:cNvPr id="20" name="TextBox 19"/>
+          <p:cNvSpPr txBox="1"/>
+          <p:nvPr/>
+        </p:nvSpPr>
+        <p:spPr>
+          <a:xfrm>
+            <a:off x="2331720" y="2551176"/>
+            <a:ext cx="3584448" cy="713232"/>
           </a:xfrm>
           <a:prstGeom prst="rect">
             <a:avLst/>
@@ -7336,55 +7378,13 @@
               </a:spcAft>
             </a:pPr>
             <a:r>
-              <a:rPr sz="1450" b="1" i="0">
-                <a:solidFill>
-                  <a:srgbClr val="0E1F1A"/>
-                </a:solidFill>
-                <a:latin typeface="Segoe UI"/>
-              </a:rPr>
-              <a:t>LLM for judgment, code for money</a:t>
-            </a:r>
-          </a:p>
-        </p:txBody>
-      </p:sp>
-      <p:sp>
-        <p:nvSpPr>
-          <p:cNvPr id="20" name="TextBox 19"/>
-          <p:cNvSpPr txBox="1"/>
-          <p:nvPr/>
-        </p:nvSpPr>
-        <p:spPr>
-          <a:xfrm>
-            <a:off x="4160520" y="3383280"/>
-            <a:ext cx="7360920" cy="777240"/>
-          </a:xfrm>
-          <a:prstGeom prst="rect">
-            <a:avLst/>
-          </a:prstGeom>
-          <a:noFill/>
-        </p:spPr>
-        <p:txBody>
-          <a:bodyPr wrap="square" anchor="t">
-            <a:spAutoFit/>
-          </a:bodyPr>
-          <a:lstStyle/>
-          <a:p>
-            <a:pPr algn="l">
-              <a:lnSpc>
-                <a:spcPct val="105000"/>
-              </a:lnSpc>
-              <a:spcAft>
-                <a:spcPts val="400"/>
-              </a:spcAft>
-            </a:pPr>
-            <a:r>
-              <a:rPr sz="1200" b="0" i="0">
+              <a:rPr sz="1050" b="0" i="0">
                 <a:solidFill>
                   <a:srgbClr val="4E635C"/>
                 </a:solidFill>
                 <a:latin typeface="Segoe UI"/>
               </a:rPr>
-              <a:t>Models propose destinations and plans. Every rupee — totals, splits, re-pricing, approval thresholds — is computed deterministically in code. A model never touches arithmetic.</a:t>
+              <a:t>Turns a feeling + budget into a structured brief — never invents a preference the traveller didn’t express.</a:t>
             </a:r>
           </a:p>
         </p:txBody>
@@ -7397,8 +7397,8 @@
         </p:nvSpPr>
         <p:spPr>
           <a:xfrm>
-            <a:off x="502920" y="4352544"/>
-            <a:ext cx="11201400" cy="932688"/>
+            <a:off x="6199632" y="2487168"/>
+            <a:ext cx="5532120" cy="804672"/>
           </a:xfrm>
           <a:prstGeom prst="roundRect">
             <a:avLst>
@@ -7445,8 +7445,50 @@
         </p:nvSpPr>
         <p:spPr>
           <a:xfrm>
-            <a:off x="731520" y="4443983"/>
-            <a:ext cx="3291840" cy="731520"/>
+            <a:off x="6400800" y="2560320"/>
+            <a:ext cx="1572768" cy="658368"/>
+          </a:xfrm>
+          <a:prstGeom prst="rect">
+            <a:avLst/>
+          </a:prstGeom>
+          <a:noFill/>
+        </p:spPr>
+        <p:txBody>
+          <a:bodyPr wrap="square" anchor="t">
+            <a:spAutoFit/>
+          </a:bodyPr>
+          <a:lstStyle/>
+          <a:p>
+            <a:pPr algn="l">
+              <a:lnSpc>
+                <a:spcPct val="95000"/>
+              </a:lnSpc>
+              <a:spcAft>
+                <a:spcPts val="400"/>
+              </a:spcAft>
+            </a:pPr>
+            <a:r>
+              <a:rPr sz="1200" b="1" i="0">
+                <a:solidFill>
+                  <a:srgbClr val="14453D"/>
+                </a:solidFill>
+                <a:latin typeface="Segoe UI"/>
+              </a:rPr>
+              <a:t>Discovery</a:t>
+            </a:r>
+          </a:p>
+        </p:txBody>
+      </p:sp>
+      <p:sp>
+        <p:nvSpPr>
+          <p:cNvPr id="23" name="TextBox 22"/>
+          <p:cNvSpPr txBox="1"/>
+          <p:nvPr/>
+        </p:nvSpPr>
+        <p:spPr>
+          <a:xfrm>
+            <a:off x="8028432" y="2551176"/>
+            <a:ext cx="3584448" cy="713232"/>
           </a:xfrm>
           <a:prstGeom prst="rect">
             <a:avLst/>
@@ -7468,55 +7510,13 @@
               </a:spcAft>
             </a:pPr>
             <a:r>
-              <a:rPr sz="1450" b="1" i="0">
-                <a:solidFill>
-                  <a:srgbClr val="0E1F1A"/>
-                </a:solidFill>
-                <a:latin typeface="Segoe UI"/>
-              </a:rPr>
-              <a:t>Six travel paths, one architecture</a:t>
-            </a:r>
-          </a:p>
-        </p:txBody>
-      </p:sp>
-      <p:sp>
-        <p:nvSpPr>
-          <p:cNvPr id="23" name="TextBox 22"/>
-          <p:cNvSpPr txBox="1"/>
-          <p:nvPr/>
-        </p:nvSpPr>
-        <p:spPr>
-          <a:xfrm>
-            <a:off x="4160520" y="4443983"/>
-            <a:ext cx="7360920" cy="777240"/>
-          </a:xfrm>
-          <a:prstGeom prst="rect">
-            <a:avLst/>
-          </a:prstGeom>
-          <a:noFill/>
-        </p:spPr>
-        <p:txBody>
-          <a:bodyPr wrap="square" anchor="t">
-            <a:spAutoFit/>
-          </a:bodyPr>
-          <a:lstStyle/>
-          <a:p>
-            <a:pPr algn="l">
-              <a:lnSpc>
-                <a:spcPct val="105000"/>
-              </a:lnSpc>
-              <a:spcAft>
-                <a:spcPts val="400"/>
-              </a:spcAft>
-            </a:pPr>
-            <a:r>
-              <a:rPr sz="1200" b="0" i="0">
+              <a:rPr sz="1050" b="0" i="0">
                 <a:solidFill>
                   <a:srgbClr val="4E635C"/>
                 </a:solidFill>
                 <a:latin typeface="Segoe UI"/>
               </a:rPr>
-              <a:t>Solo, Couple, Group, Family, Pilgrimage, Corporate. Each changes what the agents do — corporate swaps mood for policy; groups get one Advocate agent per traveller.</a:t>
+              <a:t>Picks the destination with line-by-line evidence per non-negotiable; India-only scope enforced in the pipeline.</a:t>
             </a:r>
           </a:p>
         </p:txBody>
@@ -7529,8 +7529,8 @@
         </p:nvSpPr>
         <p:spPr>
           <a:xfrm>
-            <a:off x="502920" y="5413248"/>
-            <a:ext cx="11201400" cy="932688"/>
+            <a:off x="502920" y="3392424"/>
+            <a:ext cx="5532120" cy="804672"/>
           </a:xfrm>
           <a:prstGeom prst="roundRect">
             <a:avLst>
@@ -7577,8 +7577,50 @@
         </p:nvSpPr>
         <p:spPr>
           <a:xfrm>
-            <a:off x="731520" y="5504688"/>
-            <a:ext cx="3291840" cy="731520"/>
+            <a:off x="704088" y="3465576"/>
+            <a:ext cx="1572768" cy="658368"/>
+          </a:xfrm>
+          <a:prstGeom prst="rect">
+            <a:avLst/>
+          </a:prstGeom>
+          <a:noFill/>
+        </p:spPr>
+        <p:txBody>
+          <a:bodyPr wrap="square" anchor="t">
+            <a:spAutoFit/>
+          </a:bodyPr>
+          <a:lstStyle/>
+          <a:p>
+            <a:pPr algn="l">
+              <a:lnSpc>
+                <a:spcPct val="95000"/>
+              </a:lnSpc>
+              <a:spcAft>
+                <a:spcPts val="400"/>
+              </a:spcAft>
+            </a:pPr>
+            <a:r>
+              <a:rPr sz="1200" b="1" i="0">
+                <a:solidFill>
+                  <a:srgbClr val="14453D"/>
+                </a:solidFill>
+                <a:latin typeface="Segoe UI"/>
+              </a:rPr>
+              <a:t>Budget</a:t>
+            </a:r>
+          </a:p>
+        </p:txBody>
+      </p:sp>
+      <p:sp>
+        <p:nvSpPr>
+          <p:cNvPr id="26" name="TextBox 25"/>
+          <p:cNvSpPr txBox="1"/>
+          <p:nvPr/>
+        </p:nvSpPr>
+        <p:spPr>
+          <a:xfrm>
+            <a:off x="2331720" y="3456432"/>
+            <a:ext cx="3584448" cy="713232"/>
           </a:xfrm>
           <a:prstGeom prst="rect">
             <a:avLst/>
@@ -7600,62 +7642,680 @@
               </a:spcAft>
             </a:pPr>
             <a:r>
-              <a:rPr sz="1450" b="1" i="0">
-                <a:solidFill>
-                  <a:srgbClr val="0E1F1A"/>
-                </a:solidFill>
-                <a:latin typeface="Segoe UI"/>
-              </a:rPr>
-              <a:t>The traveller gets the last word</a:t>
-            </a:r>
-          </a:p>
-        </p:txBody>
-      </p:sp>
-      <p:sp>
-        <p:nvSpPr>
-          <p:cNvPr id="26" name="TextBox 25"/>
-          <p:cNvSpPr txBox="1"/>
-          <p:nvPr/>
-        </p:nvSpPr>
-        <p:spPr>
-          <a:xfrm>
-            <a:off x="4160520" y="5504688"/>
-            <a:ext cx="7360920" cy="777240"/>
-          </a:xfrm>
-          <a:prstGeom prst="rect">
-            <a:avLst/>
-          </a:prstGeom>
-          <a:noFill/>
-        </p:spPr>
-        <p:txBody>
-          <a:bodyPr wrap="square" anchor="t">
-            <a:spAutoFit/>
-          </a:bodyPr>
-          <a:lstStyle/>
-          <a:p>
-            <a:pPr algn="l">
-              <a:lnSpc>
-                <a:spcPct val="105000"/>
-              </a:lnSpc>
-              <a:spcAft>
-                <a:spcPts val="400"/>
-              </a:spcAft>
-            </a:pPr>
-            <a:r>
-              <a:rPr sz="1200" b="0" i="0">
+              <a:rPr sz="1050" b="0" i="0">
                 <a:solidFill>
                   <a:srgbClr val="4E635C"/>
                 </a:solidFill>
                 <a:latin typeface="Segoe UI"/>
               </a:rPr>
-              <a:t>Every decision is overridable. Change the stay and the whole trip re-prices instantly — and any approval on a changed amount is revoked. Consent is to a number.</a:t>
-            </a:r>
-          </a:p>
-        </p:txBody>
-      </p:sp>
-      <p:sp>
-        <p:nvSpPr>
-          <p:cNvPr id="27" name="TextBox 26"/>
+              <a:t>Allocates every rupee across transport, stay, food, activities and buffer — before anything is booked.</a:t>
+            </a:r>
+          </a:p>
+        </p:txBody>
+      </p:sp>
+      <p:sp>
+        <p:nvSpPr>
+          <p:cNvPr id="27" name="Rounded Rectangle 26"/>
+          <p:cNvSpPr/>
+          <p:nvPr/>
+        </p:nvSpPr>
+        <p:spPr>
+          <a:xfrm>
+            <a:off x="6199632" y="3392424"/>
+            <a:ext cx="5532120" cy="804672"/>
+          </a:xfrm>
+          <a:prstGeom prst="roundRect">
+            <a:avLst>
+              <a:gd name="adj" fmla="val 8000"/>
+            </a:avLst>
+          </a:prstGeom>
+          <a:solidFill>
+            <a:srgbClr val="FFFFFF"/>
+          </a:solidFill>
+          <a:ln w="12700">
+            <a:solidFill>
+              <a:srgbClr val="D8DFDB"/>
+            </a:solidFill>
+          </a:ln>
+          <a:effectLst/>
+        </p:spPr>
+        <p:style>
+          <a:lnRef idx="1">
+            <a:schemeClr val="accent1"/>
+          </a:lnRef>
+          <a:fillRef idx="3">
+            <a:schemeClr val="accent1"/>
+          </a:fillRef>
+          <a:effectRef idx="2">
+            <a:schemeClr val="accent1"/>
+          </a:effectRef>
+          <a:fontRef idx="minor">
+            <a:schemeClr val="lt1"/>
+          </a:fontRef>
+        </p:style>
+        <p:txBody>
+          <a:bodyPr rtlCol="0" anchor="ctr"/>
+          <a:lstStyle/>
+          <a:p>
+            <a:pPr algn="ctr"/>
+          </a:p>
+        </p:txBody>
+      </p:sp>
+      <p:sp>
+        <p:nvSpPr>
+          <p:cNvPr id="28" name="TextBox 27"/>
+          <p:cNvSpPr txBox="1"/>
+          <p:nvPr/>
+        </p:nvSpPr>
+        <p:spPr>
+          <a:xfrm>
+            <a:off x="6400800" y="3465576"/>
+            <a:ext cx="1572768" cy="658368"/>
+          </a:xfrm>
+          <a:prstGeom prst="rect">
+            <a:avLst/>
+          </a:prstGeom>
+          <a:noFill/>
+        </p:spPr>
+        <p:txBody>
+          <a:bodyPr wrap="square" anchor="t">
+            <a:spAutoFit/>
+          </a:bodyPr>
+          <a:lstStyle/>
+          <a:p>
+            <a:pPr algn="l">
+              <a:lnSpc>
+                <a:spcPct val="95000"/>
+              </a:lnSpc>
+              <a:spcAft>
+                <a:spcPts val="400"/>
+              </a:spcAft>
+            </a:pPr>
+            <a:r>
+              <a:rPr sz="1200" b="1" i="0">
+                <a:solidFill>
+                  <a:srgbClr val="14453D"/>
+                </a:solidFill>
+                <a:latin typeface="Segoe UI"/>
+              </a:rPr>
+              <a:t>Itinerary</a:t>
+            </a:r>
+          </a:p>
+        </p:txBody>
+      </p:sp>
+      <p:sp>
+        <p:nvSpPr>
+          <p:cNvPr id="29" name="TextBox 28"/>
+          <p:cNvSpPr txBox="1"/>
+          <p:nvPr/>
+        </p:nvSpPr>
+        <p:spPr>
+          <a:xfrm>
+            <a:off x="8028432" y="3456432"/>
+            <a:ext cx="3584448" cy="713232"/>
+          </a:xfrm>
+          <a:prstGeom prst="rect">
+            <a:avLst/>
+          </a:prstGeom>
+          <a:noFill/>
+        </p:spPr>
+        <p:txBody>
+          <a:bodyPr wrap="square" anchor="t">
+            <a:spAutoFit/>
+          </a:bodyPr>
+          <a:lstStyle/>
+          <a:p>
+            <a:pPr algn="l">
+              <a:lnSpc>
+                <a:spcPct val="100000"/>
+              </a:lnSpc>
+              <a:spcAft>
+                <a:spcPts val="400"/>
+              </a:spcAft>
+            </a:pPr>
+            <a:r>
+              <a:rPr sz="1050" b="0" i="0">
+                <a:solidFill>
+                  <a:srgbClr val="4E635C"/>
+                </a:solidFill>
+                <a:latin typeface="Segoe UI"/>
+              </a:rPr>
+              <a:t>Builds the day-by-day plan from real, map-resolved places — open data, not model memory.</a:t>
+            </a:r>
+          </a:p>
+        </p:txBody>
+      </p:sp>
+      <p:sp>
+        <p:nvSpPr>
+          <p:cNvPr id="30" name="Rounded Rectangle 29"/>
+          <p:cNvSpPr/>
+          <p:nvPr/>
+        </p:nvSpPr>
+        <p:spPr>
+          <a:xfrm>
+            <a:off x="502920" y="4297680"/>
+            <a:ext cx="5532120" cy="804672"/>
+          </a:xfrm>
+          <a:prstGeom prst="roundRect">
+            <a:avLst>
+              <a:gd name="adj" fmla="val 8000"/>
+            </a:avLst>
+          </a:prstGeom>
+          <a:solidFill>
+            <a:srgbClr val="FFFFFF"/>
+          </a:solidFill>
+          <a:ln w="12700">
+            <a:solidFill>
+              <a:srgbClr val="D8DFDB"/>
+            </a:solidFill>
+          </a:ln>
+          <a:effectLst/>
+        </p:spPr>
+        <p:style>
+          <a:lnRef idx="1">
+            <a:schemeClr val="accent1"/>
+          </a:lnRef>
+          <a:fillRef idx="3">
+            <a:schemeClr val="accent1"/>
+          </a:fillRef>
+          <a:effectRef idx="2">
+            <a:schemeClr val="accent1"/>
+          </a:effectRef>
+          <a:fontRef idx="minor">
+            <a:schemeClr val="lt1"/>
+          </a:fontRef>
+        </p:style>
+        <p:txBody>
+          <a:bodyPr rtlCol="0" anchor="ctr"/>
+          <a:lstStyle/>
+          <a:p>
+            <a:pPr algn="ctr"/>
+          </a:p>
+        </p:txBody>
+      </p:sp>
+      <p:sp>
+        <p:nvSpPr>
+          <p:cNvPr id="31" name="TextBox 30"/>
+          <p:cNvSpPr txBox="1"/>
+          <p:nvPr/>
+        </p:nvSpPr>
+        <p:spPr>
+          <a:xfrm>
+            <a:off x="704088" y="4370832"/>
+            <a:ext cx="1572768" cy="658368"/>
+          </a:xfrm>
+          <a:prstGeom prst="rect">
+            <a:avLst/>
+          </a:prstGeom>
+          <a:noFill/>
+        </p:spPr>
+        <p:txBody>
+          <a:bodyPr wrap="square" anchor="t">
+            <a:spAutoFit/>
+          </a:bodyPr>
+          <a:lstStyle/>
+          <a:p>
+            <a:pPr algn="l">
+              <a:lnSpc>
+                <a:spcPct val="95000"/>
+              </a:lnSpc>
+              <a:spcAft>
+                <a:spcPts val="400"/>
+              </a:spcAft>
+            </a:pPr>
+            <a:r>
+              <a:rPr sz="1200" b="1" i="0">
+                <a:solidFill>
+                  <a:srgbClr val="14453D"/>
+                </a:solidFill>
+                <a:latin typeface="Segoe UI"/>
+              </a:rPr>
+              <a:t>Booking</a:t>
+            </a:r>
+          </a:p>
+        </p:txBody>
+      </p:sp>
+      <p:sp>
+        <p:nvSpPr>
+          <p:cNvPr id="32" name="TextBox 31"/>
+          <p:cNvSpPr txBox="1"/>
+          <p:nvPr/>
+        </p:nvSpPr>
+        <p:spPr>
+          <a:xfrm>
+            <a:off x="2331720" y="4361688"/>
+            <a:ext cx="3584448" cy="713232"/>
+          </a:xfrm>
+          <a:prstGeom prst="rect">
+            <a:avLst/>
+          </a:prstGeom>
+          <a:noFill/>
+        </p:spPr>
+        <p:txBody>
+          <a:bodyPr wrap="square" anchor="t">
+            <a:spAutoFit/>
+          </a:bodyPr>
+          <a:lstStyle/>
+          <a:p>
+            <a:pPr algn="l">
+              <a:lnSpc>
+                <a:spcPct val="100000"/>
+              </a:lnSpc>
+              <a:spcAft>
+                <a:spcPts val="400"/>
+              </a:spcAft>
+            </a:pPr>
+            <a:r>
+              <a:rPr sz="1050" b="0" i="0">
+                <a:solidFill>
+                  <a:srgbClr val="4E635C"/>
+                </a:solidFill>
+                <a:latin typeface="Segoe UI"/>
+              </a:rPr>
+              <a:t>Prepares simulated, gated bookings with real deep links; spend above threshold needs explicit approval.</a:t>
+            </a:r>
+          </a:p>
+        </p:txBody>
+      </p:sp>
+      <p:sp>
+        <p:nvSpPr>
+          <p:cNvPr id="33" name="Rounded Rectangle 32"/>
+          <p:cNvSpPr/>
+          <p:nvPr/>
+        </p:nvSpPr>
+        <p:spPr>
+          <a:xfrm>
+            <a:off x="6199632" y="4297680"/>
+            <a:ext cx="5532120" cy="804672"/>
+          </a:xfrm>
+          <a:prstGeom prst="roundRect">
+            <a:avLst>
+              <a:gd name="adj" fmla="val 8000"/>
+            </a:avLst>
+          </a:prstGeom>
+          <a:solidFill>
+            <a:srgbClr val="FFFFFF"/>
+          </a:solidFill>
+          <a:ln w="12700">
+            <a:solidFill>
+              <a:srgbClr val="D8DFDB"/>
+            </a:solidFill>
+          </a:ln>
+          <a:effectLst/>
+        </p:spPr>
+        <p:style>
+          <a:lnRef idx="1">
+            <a:schemeClr val="accent1"/>
+          </a:lnRef>
+          <a:fillRef idx="3">
+            <a:schemeClr val="accent1"/>
+          </a:fillRef>
+          <a:effectRef idx="2">
+            <a:schemeClr val="accent1"/>
+          </a:effectRef>
+          <a:fontRef idx="minor">
+            <a:schemeClr val="lt1"/>
+          </a:fontRef>
+        </p:style>
+        <p:txBody>
+          <a:bodyPr rtlCol="0" anchor="ctr"/>
+          <a:lstStyle/>
+          <a:p>
+            <a:pPr algn="ctr"/>
+          </a:p>
+        </p:txBody>
+      </p:sp>
+      <p:sp>
+        <p:nvSpPr>
+          <p:cNvPr id="34" name="TextBox 33"/>
+          <p:cNvSpPr txBox="1"/>
+          <p:nvPr/>
+        </p:nvSpPr>
+        <p:spPr>
+          <a:xfrm>
+            <a:off x="6400800" y="4370832"/>
+            <a:ext cx="1572768" cy="658368"/>
+          </a:xfrm>
+          <a:prstGeom prst="rect">
+            <a:avLst/>
+          </a:prstGeom>
+          <a:noFill/>
+        </p:spPr>
+        <p:txBody>
+          <a:bodyPr wrap="square" anchor="t">
+            <a:spAutoFit/>
+          </a:bodyPr>
+          <a:lstStyle/>
+          <a:p>
+            <a:pPr algn="l">
+              <a:lnSpc>
+                <a:spcPct val="95000"/>
+              </a:lnSpc>
+              <a:spcAft>
+                <a:spcPts val="400"/>
+              </a:spcAft>
+            </a:pPr>
+            <a:r>
+              <a:rPr sz="1200" b="1" i="0">
+                <a:solidFill>
+                  <a:srgbClr val="14453D"/>
+                </a:solidFill>
+                <a:latin typeface="Segoe UI"/>
+              </a:rPr>
+              <a:t>Referee</a:t>
+            </a:r>
+          </a:p>
+        </p:txBody>
+      </p:sp>
+      <p:sp>
+        <p:nvSpPr>
+          <p:cNvPr id="35" name="TextBox 34"/>
+          <p:cNvSpPr txBox="1"/>
+          <p:nvPr/>
+        </p:nvSpPr>
+        <p:spPr>
+          <a:xfrm>
+            <a:off x="8028432" y="4361688"/>
+            <a:ext cx="3584448" cy="713232"/>
+          </a:xfrm>
+          <a:prstGeom prst="rect">
+            <a:avLst/>
+          </a:prstGeom>
+          <a:noFill/>
+        </p:spPr>
+        <p:txBody>
+          <a:bodyPr wrap="square" anchor="t">
+            <a:spAutoFit/>
+          </a:bodyPr>
+          <a:lstStyle/>
+          <a:p>
+            <a:pPr algn="l">
+              <a:lnSpc>
+                <a:spcPct val="100000"/>
+              </a:lnSpc>
+              <a:spcAft>
+                <a:spcPts val="400"/>
+              </a:spcAft>
+            </a:pPr>
+            <a:r>
+              <a:rPr sz="1050" b="0" i="0">
+                <a:solidFill>
+                  <a:srgbClr val="4E635C"/>
+                </a:solidFill>
+                <a:latin typeface="Segoe UI"/>
+              </a:rPr>
+              <a:t>Audits agents against each other, states conflicts in rupees; one Advocate per traveller in group mode.</a:t>
+            </a:r>
+          </a:p>
+        </p:txBody>
+      </p:sp>
+      <p:sp>
+        <p:nvSpPr>
+          <p:cNvPr id="36" name="Rounded Rectangle 35"/>
+          <p:cNvSpPr/>
+          <p:nvPr/>
+        </p:nvSpPr>
+        <p:spPr>
+          <a:xfrm>
+            <a:off x="502920" y="5202936"/>
+            <a:ext cx="5532120" cy="804672"/>
+          </a:xfrm>
+          <a:prstGeom prst="roundRect">
+            <a:avLst>
+              <a:gd name="adj" fmla="val 8000"/>
+            </a:avLst>
+          </a:prstGeom>
+          <a:solidFill>
+            <a:srgbClr val="FFFFFF"/>
+          </a:solidFill>
+          <a:ln w="12700">
+            <a:solidFill>
+              <a:srgbClr val="D8DFDB"/>
+            </a:solidFill>
+          </a:ln>
+          <a:effectLst/>
+        </p:spPr>
+        <p:style>
+          <a:lnRef idx="1">
+            <a:schemeClr val="accent1"/>
+          </a:lnRef>
+          <a:fillRef idx="3">
+            <a:schemeClr val="accent1"/>
+          </a:fillRef>
+          <a:effectRef idx="2">
+            <a:schemeClr val="accent1"/>
+          </a:effectRef>
+          <a:fontRef idx="minor">
+            <a:schemeClr val="lt1"/>
+          </a:fontRef>
+        </p:style>
+        <p:txBody>
+          <a:bodyPr rtlCol="0" anchor="ctr"/>
+          <a:lstStyle/>
+          <a:p>
+            <a:pPr algn="ctr"/>
+          </a:p>
+        </p:txBody>
+      </p:sp>
+      <p:sp>
+        <p:nvSpPr>
+          <p:cNvPr id="37" name="TextBox 36"/>
+          <p:cNvSpPr txBox="1"/>
+          <p:nvPr/>
+        </p:nvSpPr>
+        <p:spPr>
+          <a:xfrm>
+            <a:off x="704088" y="5276088"/>
+            <a:ext cx="1572768" cy="658368"/>
+          </a:xfrm>
+          <a:prstGeom prst="rect">
+            <a:avLst/>
+          </a:prstGeom>
+          <a:noFill/>
+        </p:spPr>
+        <p:txBody>
+          <a:bodyPr wrap="square" anchor="t">
+            <a:spAutoFit/>
+          </a:bodyPr>
+          <a:lstStyle/>
+          <a:p>
+            <a:pPr algn="l">
+              <a:lnSpc>
+                <a:spcPct val="95000"/>
+              </a:lnSpc>
+              <a:spcAft>
+                <a:spcPts val="400"/>
+              </a:spcAft>
+            </a:pPr>
+            <a:r>
+              <a:rPr sz="1200" b="1" i="0">
+                <a:solidFill>
+                  <a:srgbClr val="14453D"/>
+                </a:solidFill>
+                <a:latin typeface="Segoe UI"/>
+              </a:rPr>
+              <a:t>Notification</a:t>
+            </a:r>
+          </a:p>
+        </p:txBody>
+      </p:sp>
+      <p:sp>
+        <p:nvSpPr>
+          <p:cNvPr id="38" name="TextBox 37"/>
+          <p:cNvSpPr txBox="1"/>
+          <p:nvPr/>
+        </p:nvSpPr>
+        <p:spPr>
+          <a:xfrm>
+            <a:off x="2331720" y="5266944"/>
+            <a:ext cx="3584448" cy="713232"/>
+          </a:xfrm>
+          <a:prstGeom prst="rect">
+            <a:avLst/>
+          </a:prstGeom>
+          <a:noFill/>
+        </p:spPr>
+        <p:txBody>
+          <a:bodyPr wrap="square" anchor="t">
+            <a:spAutoFit/>
+          </a:bodyPr>
+          <a:lstStyle/>
+          <a:p>
+            <a:pPr algn="l">
+              <a:lnSpc>
+                <a:spcPct val="100000"/>
+              </a:lnSpc>
+              <a:spcAft>
+                <a:spcPts val="400"/>
+              </a:spcAft>
+            </a:pPr>
+            <a:r>
+              <a:rPr sz="1050" b="0" i="0">
+                <a:solidFill>
+                  <a:srgbClr val="4E635C"/>
+                </a:solidFill>
+                <a:latin typeface="Segoe UI"/>
+              </a:rPr>
+              <a:t>Builds opt-in, time-anchored reminders — only from the bookings the traveller actually accepted.</a:t>
+            </a:r>
+          </a:p>
+        </p:txBody>
+      </p:sp>
+      <p:sp>
+        <p:nvSpPr>
+          <p:cNvPr id="39" name="Rounded Rectangle 38"/>
+          <p:cNvSpPr/>
+          <p:nvPr/>
+        </p:nvSpPr>
+        <p:spPr>
+          <a:xfrm>
+            <a:off x="6199632" y="5202936"/>
+            <a:ext cx="5532120" cy="804672"/>
+          </a:xfrm>
+          <a:prstGeom prst="roundRect">
+            <a:avLst>
+              <a:gd name="adj" fmla="val 8000"/>
+            </a:avLst>
+          </a:prstGeom>
+          <a:solidFill>
+            <a:srgbClr val="FFFFFF"/>
+          </a:solidFill>
+          <a:ln w="12700">
+            <a:solidFill>
+              <a:srgbClr val="FFB52E"/>
+            </a:solidFill>
+          </a:ln>
+          <a:effectLst/>
+        </p:spPr>
+        <p:style>
+          <a:lnRef idx="1">
+            <a:schemeClr val="accent1"/>
+          </a:lnRef>
+          <a:fillRef idx="3">
+            <a:schemeClr val="accent1"/>
+          </a:fillRef>
+          <a:effectRef idx="2">
+            <a:schemeClr val="accent1"/>
+          </a:effectRef>
+          <a:fontRef idx="minor">
+            <a:schemeClr val="lt1"/>
+          </a:fontRef>
+        </p:style>
+        <p:txBody>
+          <a:bodyPr rtlCol="0" anchor="ctr"/>
+          <a:lstStyle/>
+          <a:p>
+            <a:pPr algn="ctr"/>
+          </a:p>
+        </p:txBody>
+      </p:sp>
+      <p:sp>
+        <p:nvSpPr>
+          <p:cNvPr id="40" name="TextBox 39"/>
+          <p:cNvSpPr txBox="1"/>
+          <p:nvPr/>
+        </p:nvSpPr>
+        <p:spPr>
+          <a:xfrm>
+            <a:off x="6400800" y="5276088"/>
+            <a:ext cx="1572768" cy="658368"/>
+          </a:xfrm>
+          <a:prstGeom prst="rect">
+            <a:avLst/>
+          </a:prstGeom>
+          <a:noFill/>
+        </p:spPr>
+        <p:txBody>
+          <a:bodyPr wrap="square" anchor="t">
+            <a:spAutoFit/>
+          </a:bodyPr>
+          <a:lstStyle/>
+          <a:p>
+            <a:pPr algn="l">
+              <a:lnSpc>
+                <a:spcPct val="95000"/>
+              </a:lnSpc>
+              <a:spcAft>
+                <a:spcPts val="400"/>
+              </a:spcAft>
+            </a:pPr>
+            <a:r>
+              <a:rPr sz="1200" b="1" i="0">
+                <a:solidFill>
+                  <a:srgbClr val="C58200"/>
+                </a:solidFill>
+                <a:latin typeface="Segoe UI"/>
+              </a:rPr>
+              <a:t>The design rules</a:t>
+            </a:r>
+          </a:p>
+        </p:txBody>
+      </p:sp>
+      <p:sp>
+        <p:nvSpPr>
+          <p:cNvPr id="41" name="TextBox 40"/>
+          <p:cNvSpPr txBox="1"/>
+          <p:nvPr/>
+        </p:nvSpPr>
+        <p:spPr>
+          <a:xfrm>
+            <a:off x="8028432" y="5266944"/>
+            <a:ext cx="3584448" cy="713232"/>
+          </a:xfrm>
+          <a:prstGeom prst="rect">
+            <a:avLst/>
+          </a:prstGeom>
+          <a:noFill/>
+        </p:spPr>
+        <p:txBody>
+          <a:bodyPr wrap="square" anchor="t">
+            <a:spAutoFit/>
+          </a:bodyPr>
+          <a:lstStyle/>
+          <a:p>
+            <a:pPr algn="l">
+              <a:lnSpc>
+                <a:spcPct val="100000"/>
+              </a:lnSpc>
+              <a:spcAft>
+                <a:spcPts val="400"/>
+              </a:spcAft>
+            </a:pPr>
+            <a:r>
+              <a:rPr sz="1050" b="0" i="0">
+                <a:solidFill>
+                  <a:srgbClr val="4E635C"/>
+                </a:solidFill>
+                <a:latin typeface="Segoe UI"/>
+              </a:rPr>
+              <a:t>LLM for judgment, code for money — a model never touches arithmetic. Six travel paths, one architecture. The traveller gets the last word.</a:t>
+            </a:r>
+          </a:p>
+        </p:txBody>
+      </p:sp>
+      <p:sp>
+        <p:nvSpPr>
+          <p:cNvPr id="42" name="TextBox 41"/>
           <p:cNvSpPr txBox="1"/>
           <p:nvPr/>
         </p:nvSpPr>
@@ -7697,7 +8357,7 @@
       </p:sp>
       <p:sp>
         <p:nvSpPr>
-          <p:cNvPr id="28" name="TextBox 27"/>
+          <p:cNvPr id="43" name="TextBox 42"/>
           <p:cNvSpPr txBox="1"/>
           <p:nvPr/>
         </p:nvSpPr>
@@ -7800,7 +8460,7 @@
                 </a:solidFill>
                 <a:latin typeface="Segoe UI"/>
               </a:rPr>
-              <a:t>IMPLEMENTATION — CAUGHT LIVE ON THE DEPLOYED PRODUCT</a:t>
+              <a:t>IMPLEMENTATION — HOW WE BUILT IT</a:t>
             </a:r>
           </a:p>
         </p:txBody>
@@ -7836,154 +8496,27 @@
               </a:spcAft>
             </a:pPr>
             <a:r>
-              <a:rPr sz="3000" b="1" i="0">
+              <a:rPr sz="2900" b="1" i="0">
                 <a:solidFill>
                   <a:srgbClr val="0E1F1A"/>
                 </a:solidFill>
                 <a:latin typeface="Segoe UI"/>
               </a:rPr>
-              <a:t>The Referee rejected two agents’ work — on camera</a:t>
-            </a:r>
-          </a:p>
-        </p:txBody>
-      </p:sp>
-      <p:pic>
-        <p:nvPicPr>
-          <p:cNvPr id="4" name="Picture 3" descr="27-agent-stream-midway.png"/>
-          <p:cNvPicPr>
-            <a:picLocks noChangeAspect="1"/>
-          </p:cNvPicPr>
-          <p:nvPr/>
-        </p:nvPicPr>
-        <p:blipFill>
-          <a:blip r:embed="rId2"/>
-          <a:stretch>
-            <a:fillRect/>
-          </a:stretch>
-        </p:blipFill>
+              <a:t>An agile process, a lean stack, AI only where it earns its place</a:t>
+            </a:r>
+          </a:p>
+        </p:txBody>
+      </p:sp>
+      <p:sp>
+        <p:nvSpPr>
+          <p:cNvPr id="4" name="Rounded Rectangle 3"/>
+          <p:cNvSpPr/>
+          <p:nvPr/>
+        </p:nvSpPr>
         <p:spPr>
           <a:xfrm>
             <a:off x="502920" y="1554480"/>
-            <a:ext cx="6720840" cy="4200525"/>
-          </a:xfrm>
-          <a:prstGeom prst="rect">
-            <a:avLst/>
-          </a:prstGeom>
-          <a:ln w="12700">
-            <a:solidFill>
-              <a:srgbClr val="D8DFDB"/>
-            </a:solidFill>
-          </a:ln>
-          <a:effectLst/>
-        </p:spPr>
-      </p:pic>
-      <p:sp>
-        <p:nvSpPr>
-          <p:cNvPr id="5" name="Rounded Rectangle 4"/>
-          <p:cNvSpPr/>
-          <p:nvPr/>
-        </p:nvSpPr>
-        <p:spPr>
-          <a:xfrm>
-            <a:off x="502920" y="5486400"/>
-            <a:ext cx="6720840" cy="566928"/>
-          </a:xfrm>
-          <a:prstGeom prst="roundRect">
-            <a:avLst>
-              <a:gd name="adj" fmla="val 8000"/>
-            </a:avLst>
-          </a:prstGeom>
-          <a:solidFill>
-            <a:srgbClr val="0E1F1A"/>
-          </a:solidFill>
-          <a:ln>
-            <a:noFill/>
-          </a:ln>
-          <a:effectLst/>
-        </p:spPr>
-        <p:style>
-          <a:lnRef idx="1">
-            <a:schemeClr val="accent1"/>
-          </a:lnRef>
-          <a:fillRef idx="3">
-            <a:schemeClr val="accent1"/>
-          </a:fillRef>
-          <a:effectRef idx="2">
-            <a:schemeClr val="accent1"/>
-          </a:effectRef>
-          <a:fontRef idx="minor">
-            <a:schemeClr val="lt1"/>
-          </a:fontRef>
-        </p:style>
-        <p:txBody>
-          <a:bodyPr rtlCol="0" anchor="ctr"/>
-          <a:lstStyle/>
-          <a:p>
-            <a:pPr algn="ctr"/>
-          </a:p>
-        </p:txBody>
-      </p:sp>
-      <p:sp>
-        <p:nvSpPr>
-          <p:cNvPr id="6" name="TextBox 5"/>
-          <p:cNvSpPr txBox="1"/>
-          <p:nvPr/>
-        </p:nvSpPr>
-        <p:spPr>
-          <a:xfrm>
-            <a:off x="685800" y="5568696"/>
-            <a:ext cx="6400800" cy="411480"/>
-          </a:xfrm>
-          <a:prstGeom prst="rect">
-            <a:avLst/>
-          </a:prstGeom>
-          <a:noFill/>
-        </p:spPr>
-        <p:txBody>
-          <a:bodyPr wrap="square" anchor="t">
-            <a:spAutoFit/>
-          </a:bodyPr>
-          <a:lstStyle/>
-          <a:p>
-            <a:pPr algn="l">
-              <a:lnSpc>
-                <a:spcPct val="100000"/>
-              </a:lnSpc>
-              <a:spcAft>
-                <a:spcPts val="400"/>
-              </a:spcAft>
-            </a:pPr>
-            <a:r>
-              <a:rPr sz="1150" b="0" i="0">
-                <a:solidFill>
-                  <a:srgbClr val="EEF4EF"/>
-                </a:solidFill>
-                <a:latin typeface="Segoe UI"/>
-              </a:rPr>
-              <a:t>Live run · solo · ₹25,000 · from Pune  —  </a:t>
-            </a:r>
-            <a:r>
-              <a:rPr sz="1150" b="1" i="0">
-                <a:solidFill>
-                  <a:srgbClr val="FFB52E"/>
-                </a:solidFill>
-                <a:latin typeface="Segoe UI"/>
-              </a:rPr>
-              <a:t>₹10,000 of activities vs a ₹5,000 allocation → sent backwards → both agents re-ran</a:t>
-            </a:r>
-          </a:p>
-        </p:txBody>
-      </p:sp>
-      <p:sp>
-        <p:nvSpPr>
-          <p:cNvPr id="7" name="Rounded Rectangle 6"/>
-          <p:cNvSpPr/>
-          <p:nvPr/>
-        </p:nvSpPr>
-        <p:spPr>
-          <a:xfrm>
-            <a:off x="7452360" y="1554480"/>
-            <a:ext cx="4251960" cy="2084831"/>
+            <a:ext cx="3648456" cy="4114800"/>
           </a:xfrm>
           <a:prstGeom prst="roundRect">
             <a:avLst>
@@ -8024,14 +8557,14 @@
       </p:sp>
       <p:sp>
         <p:nvSpPr>
-          <p:cNvPr id="8" name="TextBox 7"/>
-          <p:cNvSpPr txBox="1"/>
-          <p:nvPr/>
-        </p:nvSpPr>
-        <p:spPr>
-          <a:xfrm>
-            <a:off x="7680960" y="1691640"/>
-            <a:ext cx="3840480" cy="365760"/>
+          <p:cNvPr id="5" name="TextBox 4"/>
+          <p:cNvSpPr txBox="1"/>
+          <p:nvPr/>
+        </p:nvSpPr>
+        <p:spPr>
+          <a:xfrm>
+            <a:off x="704088" y="1691640"/>
+            <a:ext cx="3200400" cy="320040"/>
           </a:xfrm>
           <a:prstGeom prst="rect">
             <a:avLst/>
@@ -8053,126 +8586,145 @@
               </a:spcAft>
             </a:pPr>
             <a:r>
-              <a:rPr sz="1100" b="1" i="0">
+              <a:rPr sz="1150" b="1" i="0">
                 <a:solidFill>
                   <a:srgbClr val="C58200"/>
                 </a:solidFill>
                 <a:latin typeface="Segoe UI"/>
               </a:rPr>
-              <a:t>WHAT YOU ARE SEEING</a:t>
-            </a:r>
-          </a:p>
-        </p:txBody>
-      </p:sp>
-      <p:sp>
-        <p:nvSpPr>
-          <p:cNvPr id="9" name="TextBox 8"/>
-          <p:cNvSpPr txBox="1"/>
-          <p:nvPr/>
-        </p:nvSpPr>
-        <p:spPr>
-          <a:xfrm>
-            <a:off x="7680960" y="2029968"/>
-            <a:ext cx="3840480" cy="1554480"/>
-          </a:xfrm>
-          <a:prstGeom prst="rect">
-            <a:avLst/>
-          </a:prstGeom>
-          <a:noFill/>
-        </p:spPr>
-        <p:txBody>
-          <a:bodyPr wrap="square" anchor="t">
-            <a:spAutoFit/>
-          </a:bodyPr>
-          <a:lstStyle/>
-          <a:p>
-            <a:pPr algn="l">
-              <a:lnSpc>
-                <a:spcPct val="112000"/>
-              </a:lnSpc>
-              <a:spcAft>
-                <a:spcPts val="400"/>
-              </a:spcAft>
-            </a:pPr>
-            <a:r>
-              <a:rPr sz="1200" b="0" i="0">
+              <a:t>PROCESS</a:t>
+            </a:r>
+          </a:p>
+        </p:txBody>
+      </p:sp>
+      <p:sp>
+        <p:nvSpPr>
+          <p:cNvPr id="6" name="TextBox 5"/>
+          <p:cNvSpPr txBox="1"/>
+          <p:nvPr/>
+        </p:nvSpPr>
+        <p:spPr>
+          <a:xfrm>
+            <a:off x="704088" y="2048256"/>
+            <a:ext cx="3273552" cy="3520440"/>
+          </a:xfrm>
+          <a:prstGeom prst="rect">
+            <a:avLst/>
+          </a:prstGeom>
+          <a:noFill/>
+        </p:spPr>
+        <p:txBody>
+          <a:bodyPr wrap="square" anchor="t">
+            <a:spAutoFit/>
+          </a:bodyPr>
+          <a:lstStyle/>
+          <a:p>
+            <a:pPr algn="l">
+              <a:lnSpc>
+                <a:spcPct val="110000"/>
+              </a:lnSpc>
+              <a:spcAft>
+                <a:spcPts val="400"/>
+              </a:spcAft>
+            </a:pPr>
+            <a:r>
+              <a:rPr sz="1050" b="0" i="0">
                 <a:solidFill>
                   <a:srgbClr val="0E1F1A"/>
                 </a:solidFill>
                 <a:latin typeface="Segoe UI"/>
               </a:rPr>
-              <a:t>Referee Agent · budget audit — conflict stated in rupees</a:t>
-            </a:r>
-          </a:p>
-          <a:p>
-            <a:pPr algn="l">
-              <a:lnSpc>
-                <a:spcPct val="112000"/>
-              </a:lnSpc>
-              <a:spcAft>
-                <a:spcPts val="400"/>
-              </a:spcAft>
-            </a:pPr>
-            <a:r>
-              <a:rPr sz="1200" b="0" i="0">
+              <a:t>Agile → Scrum, run in Jira: a 61-story backlog groomed into six sprints</a:t>
+            </a:r>
+          </a:p>
+          <a:p>
+            <a:pPr algn="l">
+              <a:lnSpc>
+                <a:spcPct val="110000"/>
+              </a:lnSpc>
+              <a:spcAft>
+                <a:spcPts val="400"/>
+              </a:spcAft>
+            </a:pPr>
+            <a:r>
+              <a:rPr sz="1050" b="0" i="0">
                 <a:solidFill>
                   <a:srgbClr val="0E1F1A"/>
                 </a:solidFill>
                 <a:latin typeface="Segoe UI"/>
               </a:rPr>
-              <a:t>Budget Agent · re-planning — “triggered by Referee”</a:t>
-            </a:r>
-          </a:p>
-          <a:p>
-            <a:pPr algn="l">
-              <a:lnSpc>
-                <a:spcPct val="112000"/>
-              </a:lnSpc>
-              <a:spcAft>
-                <a:spcPts val="400"/>
-              </a:spcAft>
-            </a:pPr>
-            <a:r>
-              <a:rPr sz="1200" b="0" i="0">
+              <a:t>Sequenced by data dependency — Booking cannot exist before Itinerary</a:t>
+            </a:r>
+          </a:p>
+          <a:p>
+            <a:pPr algn="l">
+              <a:lnSpc>
+                <a:spcPct val="110000"/>
+              </a:lnSpc>
+              <a:spcAft>
+                <a:spcPts val="400"/>
+              </a:spcAft>
+            </a:pPr>
+            <a:r>
+              <a:rPr sz="1050" b="0" i="0">
                 <a:solidFill>
                   <a:srgbClr val="0E1F1A"/>
                 </a:solidFill>
                 <a:latin typeface="Segoe UI"/>
               </a:rPr>
-              <a:t>Itinerary Agent · revised to fit</a:t>
-            </a:r>
-          </a:p>
-          <a:p>
-            <a:pPr algn="l">
-              <a:lnSpc>
-                <a:spcPct val="112000"/>
-              </a:lnSpc>
-              <a:spcAft>
-                <a:spcPts val="400"/>
-              </a:spcAft>
-            </a:pPr>
-            <a:r>
-              <a:rPr sz="1200" b="1" i="0">
+              <a:t>QA stories in every sprint, not batched at the end; moderated UAT with real users</a:t>
+            </a:r>
+          </a:p>
+          <a:p>
+            <a:pPr algn="l">
+              <a:lnSpc>
+                <a:spcPct val="110000"/>
+              </a:lnSpc>
+              <a:spcAft>
+                <a:spcPts val="400"/>
+              </a:spcAft>
+            </a:pPr>
+            <a:r>
+              <a:rPr sz="1050" b="0" i="0">
                 <a:solidFill>
                   <a:srgbClr val="0E1F1A"/>
                 </a:solidFill>
                 <a:latin typeface="Segoe UI"/>
               </a:rPr>
-              <a:t>Result: 9 agent calls · 58s · “Re-planned by Referee” in the header</a:t>
-            </a:r>
-          </a:p>
-        </p:txBody>
-      </p:sp>
-      <p:sp>
-        <p:nvSpPr>
-          <p:cNvPr id="10" name="Rounded Rectangle 9"/>
+              <a:t>Sprint 7 added on evidence: a plan you cannot change is a demo, not a product</a:t>
+            </a:r>
+          </a:p>
+          <a:p>
+            <a:pPr algn="l">
+              <a:lnSpc>
+                <a:spcPct val="110000"/>
+              </a:lnSpc>
+              <a:spcAft>
+                <a:spcPts val="400"/>
+              </a:spcAft>
+            </a:pPr>
+            <a:r>
+              <a:rPr sz="1050" b="0" i="0">
+                <a:solidFill>
+                  <a:srgbClr val="0E1F1A"/>
+                </a:solidFill>
+                <a:latin typeface="Segoe UI"/>
+              </a:rPr>
+              <a:t>A continuously maintained decision log — 27 entries; no call re-litigated</a:t>
+            </a:r>
+          </a:p>
+        </p:txBody>
+      </p:sp>
+      <p:sp>
+        <p:nvSpPr>
+          <p:cNvPr id="7" name="Rounded Rectangle 6"/>
           <p:cNvSpPr/>
           <p:nvPr/>
         </p:nvSpPr>
         <p:spPr>
           <a:xfrm>
-            <a:off x="7452360" y="3794760"/>
-            <a:ext cx="4251960" cy="2286000"/>
+            <a:off x="4315968" y="1554480"/>
+            <a:ext cx="3648456" cy="4114800"/>
           </a:xfrm>
           <a:prstGeom prst="roundRect">
             <a:avLst>
@@ -8180,7 +8732,480 @@
             </a:avLst>
           </a:prstGeom>
           <a:solidFill>
-            <a:srgbClr val="14453D"/>
+            <a:srgbClr val="FFFFFF"/>
+          </a:solidFill>
+          <a:ln w="12700">
+            <a:solidFill>
+              <a:srgbClr val="D8DFDB"/>
+            </a:solidFill>
+          </a:ln>
+          <a:effectLst/>
+        </p:spPr>
+        <p:style>
+          <a:lnRef idx="1">
+            <a:schemeClr val="accent1"/>
+          </a:lnRef>
+          <a:fillRef idx="3">
+            <a:schemeClr val="accent1"/>
+          </a:fillRef>
+          <a:effectRef idx="2">
+            <a:schemeClr val="accent1"/>
+          </a:effectRef>
+          <a:fontRef idx="minor">
+            <a:schemeClr val="lt1"/>
+          </a:fontRef>
+        </p:style>
+        <p:txBody>
+          <a:bodyPr rtlCol="0" anchor="ctr"/>
+          <a:lstStyle/>
+          <a:p>
+            <a:pPr algn="ctr"/>
+          </a:p>
+        </p:txBody>
+      </p:sp>
+      <p:sp>
+        <p:nvSpPr>
+          <p:cNvPr id="8" name="TextBox 7"/>
+          <p:cNvSpPr txBox="1"/>
+          <p:nvPr/>
+        </p:nvSpPr>
+        <p:spPr>
+          <a:xfrm>
+            <a:off x="4517136" y="1691640"/>
+            <a:ext cx="3200400" cy="320040"/>
+          </a:xfrm>
+          <a:prstGeom prst="rect">
+            <a:avLst/>
+          </a:prstGeom>
+          <a:noFill/>
+        </p:spPr>
+        <p:txBody>
+          <a:bodyPr wrap="square" anchor="t">
+            <a:spAutoFit/>
+          </a:bodyPr>
+          <a:lstStyle/>
+          <a:p>
+            <a:pPr algn="l">
+              <a:lnSpc>
+                <a:spcPct val="100000"/>
+              </a:lnSpc>
+              <a:spcAft>
+                <a:spcPts val="400"/>
+              </a:spcAft>
+            </a:pPr>
+            <a:r>
+              <a:rPr sz="1150" b="1" i="0">
+                <a:solidFill>
+                  <a:srgbClr val="C58200"/>
+                </a:solidFill>
+                <a:latin typeface="Segoe UI"/>
+              </a:rPr>
+              <a:t>TOOLS &amp; FRAMEWORKS</a:t>
+            </a:r>
+          </a:p>
+        </p:txBody>
+      </p:sp>
+      <p:sp>
+        <p:nvSpPr>
+          <p:cNvPr id="9" name="TextBox 8"/>
+          <p:cNvSpPr txBox="1"/>
+          <p:nvPr/>
+        </p:nvSpPr>
+        <p:spPr>
+          <a:xfrm>
+            <a:off x="4517136" y="2048256"/>
+            <a:ext cx="3273552" cy="3520440"/>
+          </a:xfrm>
+          <a:prstGeom prst="rect">
+            <a:avLst/>
+          </a:prstGeom>
+          <a:noFill/>
+        </p:spPr>
+        <p:txBody>
+          <a:bodyPr wrap="square" anchor="t">
+            <a:spAutoFit/>
+          </a:bodyPr>
+          <a:lstStyle/>
+          <a:p>
+            <a:pPr algn="l">
+              <a:lnSpc>
+                <a:spcPct val="110000"/>
+              </a:lnSpc>
+              <a:spcAft>
+                <a:spcPts val="400"/>
+              </a:spcAft>
+            </a:pPr>
+            <a:r>
+              <a:rPr sz="1050" b="0" i="0">
+                <a:solidFill>
+                  <a:srgbClr val="0E1F1A"/>
+                </a:solidFill>
+                <a:latin typeface="Segoe UI"/>
+              </a:rPr>
+              <a:t>Next.js App Router + TypeScript — UI and server routes in one deployable</a:t>
+            </a:r>
+          </a:p>
+          <a:p>
+            <a:pPr algn="l">
+              <a:lnSpc>
+                <a:spcPct val="110000"/>
+              </a:lnSpc>
+              <a:spcAft>
+                <a:spcPts val="400"/>
+              </a:spcAft>
+            </a:pPr>
+            <a:r>
+              <a:rPr sz="1050" b="0" i="0">
+                <a:solidFill>
+                  <a:srgbClr val="0E1F1A"/>
+                </a:solidFill>
+                <a:latin typeface="Segoe UI"/>
+              </a:rPr>
+              <a:t>Tailwind CSS v4 on a fixed design system — pine, marigold, Plex Mono for money</a:t>
+            </a:r>
+          </a:p>
+          <a:p>
+            <a:pPr algn="l">
+              <a:lnSpc>
+                <a:spcPct val="110000"/>
+              </a:lnSpc>
+              <a:spcAft>
+                <a:spcPts val="400"/>
+              </a:spcAft>
+            </a:pPr>
+            <a:r>
+              <a:rPr sz="1050" b="0" i="0">
+                <a:solidFill>
+                  <a:srgbClr val="0E1F1A"/>
+                </a:solidFill>
+                <a:latin typeface="Segoe UI"/>
+              </a:rPr>
+              <a:t>Vercel — push-to-deploy on every commit to main</a:t>
+            </a:r>
+          </a:p>
+          <a:p>
+            <a:pPr algn="l">
+              <a:lnSpc>
+                <a:spcPct val="110000"/>
+              </a:lnSpc>
+              <a:spcAft>
+                <a:spcPts val="400"/>
+              </a:spcAft>
+            </a:pPr>
+            <a:r>
+              <a:rPr sz="1050" b="0" i="0">
+                <a:solidFill>
+                  <a:srgbClr val="0E1F1A"/>
+                </a:solidFill>
+                <a:latin typeface="Segoe UI"/>
+              </a:rPr>
+              <a:t>Auth.js + Google OAuth + a password-less test user; the gate sits at commitment</a:t>
+            </a:r>
+          </a:p>
+          <a:p>
+            <a:pPr algn="l">
+              <a:lnSpc>
+                <a:spcPct val="110000"/>
+              </a:lnSpc>
+              <a:spcAft>
+                <a:spcPts val="400"/>
+              </a:spcAft>
+            </a:pPr>
+            <a:r>
+              <a:rPr sz="1050" b="0" i="0">
+                <a:solidFill>
+                  <a:srgbClr val="0E1F1A"/>
+                </a:solidFill>
+                <a:latin typeface="Segoe UI"/>
+              </a:rPr>
+              <a:t>OpenStreetMap + Nominatim + Wikipedia — real places, licensed photos, keyless</a:t>
+            </a:r>
+          </a:p>
+          <a:p>
+            <a:pPr algn="l">
+              <a:lnSpc>
+                <a:spcPct val="110000"/>
+              </a:lnSpc>
+              <a:spcAft>
+                <a:spcPts val="400"/>
+              </a:spcAft>
+            </a:pPr>
+            <a:r>
+              <a:rPr sz="1050" b="0" i="0">
+                <a:solidFill>
+                  <a:srgbClr val="0E1F1A"/>
+                </a:solidFill>
+                <a:latin typeface="Segoe UI"/>
+              </a:rPr>
+              <a:t>Trips in browser storage — a privacy position, not a missing database</a:t>
+            </a:r>
+          </a:p>
+        </p:txBody>
+      </p:sp>
+      <p:sp>
+        <p:nvSpPr>
+          <p:cNvPr id="10" name="Rounded Rectangle 9"/>
+          <p:cNvSpPr/>
+          <p:nvPr/>
+        </p:nvSpPr>
+        <p:spPr>
+          <a:xfrm>
+            <a:off x="8129016" y="1554480"/>
+            <a:ext cx="3648456" cy="4114800"/>
+          </a:xfrm>
+          <a:prstGeom prst="roundRect">
+            <a:avLst>
+              <a:gd name="adj" fmla="val 8000"/>
+            </a:avLst>
+          </a:prstGeom>
+          <a:solidFill>
+            <a:srgbClr val="FFFFFF"/>
+          </a:solidFill>
+          <a:ln w="12700">
+            <a:solidFill>
+              <a:srgbClr val="D8DFDB"/>
+            </a:solidFill>
+          </a:ln>
+          <a:effectLst/>
+        </p:spPr>
+        <p:style>
+          <a:lnRef idx="1">
+            <a:schemeClr val="accent1"/>
+          </a:lnRef>
+          <a:fillRef idx="3">
+            <a:schemeClr val="accent1"/>
+          </a:fillRef>
+          <a:effectRef idx="2">
+            <a:schemeClr val="accent1"/>
+          </a:effectRef>
+          <a:fontRef idx="minor">
+            <a:schemeClr val="lt1"/>
+          </a:fontRef>
+        </p:style>
+        <p:txBody>
+          <a:bodyPr rtlCol="0" anchor="ctr"/>
+          <a:lstStyle/>
+          <a:p>
+            <a:pPr algn="ctr"/>
+          </a:p>
+        </p:txBody>
+      </p:sp>
+      <p:sp>
+        <p:nvSpPr>
+          <p:cNvPr id="11" name="TextBox 10"/>
+          <p:cNvSpPr txBox="1"/>
+          <p:nvPr/>
+        </p:nvSpPr>
+        <p:spPr>
+          <a:xfrm>
+            <a:off x="8330184" y="1691640"/>
+            <a:ext cx="3200400" cy="320040"/>
+          </a:xfrm>
+          <a:prstGeom prst="rect">
+            <a:avLst/>
+          </a:prstGeom>
+          <a:noFill/>
+        </p:spPr>
+        <p:txBody>
+          <a:bodyPr wrap="square" anchor="t">
+            <a:spAutoFit/>
+          </a:bodyPr>
+          <a:lstStyle/>
+          <a:p>
+            <a:pPr algn="l">
+              <a:lnSpc>
+                <a:spcPct val="100000"/>
+              </a:lnSpc>
+              <a:spcAft>
+                <a:spcPts val="400"/>
+              </a:spcAft>
+            </a:pPr>
+            <a:r>
+              <a:rPr sz="1150" b="1" i="0">
+                <a:solidFill>
+                  <a:srgbClr val="C58200"/>
+                </a:solidFill>
+                <a:latin typeface="Segoe UI"/>
+              </a:rPr>
+              <a:t>AI &amp; MODELS</a:t>
+            </a:r>
+          </a:p>
+        </p:txBody>
+      </p:sp>
+      <p:sp>
+        <p:nvSpPr>
+          <p:cNvPr id="12" name="TextBox 11"/>
+          <p:cNvSpPr txBox="1"/>
+          <p:nvPr/>
+        </p:nvSpPr>
+        <p:spPr>
+          <a:xfrm>
+            <a:off x="8330184" y="2048256"/>
+            <a:ext cx="3273552" cy="3520440"/>
+          </a:xfrm>
+          <a:prstGeom prst="rect">
+            <a:avLst/>
+          </a:prstGeom>
+          <a:noFill/>
+        </p:spPr>
+        <p:txBody>
+          <a:bodyPr wrap="square" anchor="t">
+            <a:spAutoFit/>
+          </a:bodyPr>
+          <a:lstStyle/>
+          <a:p>
+            <a:pPr algn="l">
+              <a:lnSpc>
+                <a:spcPct val="110000"/>
+              </a:lnSpc>
+              <a:spcAft>
+                <a:spcPts val="400"/>
+              </a:spcAft>
+            </a:pPr>
+            <a:r>
+              <a:rPr sz="1050" b="0" i="0">
+                <a:solidFill>
+                  <a:srgbClr val="0E1F1A"/>
+                </a:solidFill>
+                <a:latin typeface="Segoe UI"/>
+              </a:rPr>
+              <a:t>Three Groq-hosted models, routed per agent by job:</a:t>
+            </a:r>
+          </a:p>
+          <a:p>
+            <a:pPr algn="l">
+              <a:lnSpc>
+                <a:spcPct val="110000"/>
+              </a:lnSpc>
+              <a:spcAft>
+                <a:spcPts val="400"/>
+              </a:spcAft>
+            </a:pPr>
+            <a:r>
+              <a:rPr sz="1050" b="0" i="0">
+                <a:solidFill>
+                  <a:srgbClr val="0E1F1A"/>
+                </a:solidFill>
+                <a:latin typeface="Segoe UI"/>
+              </a:rPr>
+              <a:t>• gpt-oss-120b — reasoning: Discovery, Itinerary, Budget</a:t>
+            </a:r>
+          </a:p>
+          <a:p>
+            <a:pPr algn="l">
+              <a:lnSpc>
+                <a:spcPct val="110000"/>
+              </a:lnSpc>
+              <a:spcAft>
+                <a:spcPts val="400"/>
+              </a:spcAft>
+            </a:pPr>
+            <a:r>
+              <a:rPr sz="1050" b="0" i="0">
+                <a:solidFill>
+                  <a:srgbClr val="0E1F1A"/>
+                </a:solidFill>
+                <a:latin typeface="Segoe UI"/>
+              </a:rPr>
+              <a:t>• qwen3.8-27b — arbitration: Referee, consensus, intent</a:t>
+            </a:r>
+          </a:p>
+          <a:p>
+            <a:pPr algn="l">
+              <a:lnSpc>
+                <a:spcPct val="110000"/>
+              </a:lnSpc>
+              <a:spcAft>
+                <a:spcPts val="400"/>
+              </a:spcAft>
+            </a:pPr>
+            <a:r>
+              <a:rPr sz="1050" b="0" i="0">
+                <a:solidFill>
+                  <a:srgbClr val="0E1F1A"/>
+                </a:solidFill>
+                <a:latin typeface="Segoe UI"/>
+              </a:rPr>
+              <a:t>• gpt-oss-20b — structural: Booking, Advocates, translation</a:t>
+            </a:r>
+          </a:p>
+          <a:p>
+            <a:pPr algn="l">
+              <a:lnSpc>
+                <a:spcPct val="110000"/>
+              </a:lnSpc>
+              <a:spcAft>
+                <a:spcPts val="400"/>
+              </a:spcAft>
+            </a:pPr>
+            <a:r>
+              <a:rPr sz="1050" b="0" i="0">
+                <a:solidFill>
+                  <a:srgbClr val="0E1F1A"/>
+                </a:solidFill>
+                <a:latin typeface="Segoe UI"/>
+              </a:rPr>
+              <a:t>Typed JSON-schema handoffs — every output validated before it enters trip-state</a:t>
+            </a:r>
+          </a:p>
+          <a:p>
+            <a:pPr algn="l">
+              <a:lnSpc>
+                <a:spcPct val="110000"/>
+              </a:lnSpc>
+              <a:spcAft>
+                <a:spcPts val="400"/>
+              </a:spcAft>
+            </a:pPr>
+            <a:r>
+              <a:rPr sz="1050" b="0" i="0">
+                <a:solidFill>
+                  <a:srgbClr val="0E1F1A"/>
+                </a:solidFill>
+                <a:latin typeface="Segoe UI"/>
+              </a:rPr>
+              <a:t>Per-agent failover chains across all three — quota, schema errors, even model retirement</a:t>
+            </a:r>
+          </a:p>
+          <a:p>
+            <a:pPr algn="l">
+              <a:lnSpc>
+                <a:spcPct val="110000"/>
+              </a:lnSpc>
+              <a:spcAft>
+                <a:spcPts val="400"/>
+              </a:spcAft>
+            </a:pPr>
+            <a:r>
+              <a:rPr sz="1050" b="0" i="0">
+                <a:solidFill>
+                  <a:srgbClr val="0E1F1A"/>
+                </a:solidFill>
+                <a:latin typeface="Segoe UI"/>
+              </a:rPr>
+              <a:t>Deterministic money layer in code; translation runs after generation completes</a:t>
+            </a:r>
+          </a:p>
+        </p:txBody>
+      </p:sp>
+      <p:sp>
+        <p:nvSpPr>
+          <p:cNvPr id="13" name="Rounded Rectangle 12"/>
+          <p:cNvSpPr/>
+          <p:nvPr/>
+        </p:nvSpPr>
+        <p:spPr>
+          <a:xfrm>
+            <a:off x="502920" y="5806440"/>
+            <a:ext cx="11201400" cy="530352"/>
+          </a:xfrm>
+          <a:prstGeom prst="roundRect">
+            <a:avLst>
+              <a:gd name="adj" fmla="val 8000"/>
+            </a:avLst>
+          </a:prstGeom>
+          <a:solidFill>
+            <a:srgbClr val="0E1F1A"/>
           </a:solidFill>
           <a:ln>
             <a:noFill/>
@@ -8211,14 +9236,14 @@
       </p:sp>
       <p:sp>
         <p:nvSpPr>
-          <p:cNvPr id="11" name="TextBox 10"/>
-          <p:cNvSpPr txBox="1"/>
-          <p:nvPr/>
-        </p:nvSpPr>
-        <p:spPr>
-          <a:xfrm>
-            <a:off x="7680960" y="3931920"/>
-            <a:ext cx="3840480" cy="365760"/>
+          <p:cNvPr id="14" name="TextBox 13"/>
+          <p:cNvSpPr txBox="1"/>
+          <p:nvPr/>
+        </p:nvSpPr>
+        <p:spPr>
+          <a:xfrm>
+            <a:off x="777240" y="5888736"/>
+            <a:ext cx="10789920" cy="384048"/>
           </a:xfrm>
           <a:prstGeom prst="rect">
             <a:avLst/>
@@ -8240,100 +9265,29 @@
               </a:spcAft>
             </a:pPr>
             <a:r>
-              <a:rPr sz="1100" b="1" i="0">
+              <a:rPr sz="1250" b="1" i="0">
                 <a:solidFill>
                   <a:srgbClr val="FFB52E"/>
                 </a:solidFill>
                 <a:latin typeface="Segoe UI"/>
               </a:rPr>
-              <a:t>AND FOR GROUPS</a:t>
-            </a:r>
-          </a:p>
-        </p:txBody>
-      </p:sp>
-      <p:sp>
-        <p:nvSpPr>
-          <p:cNvPr id="12" name="TextBox 11"/>
-          <p:cNvSpPr txBox="1"/>
-          <p:nvPr/>
-        </p:nvSpPr>
-        <p:spPr>
-          <a:xfrm>
-            <a:off x="7680960" y="4261104"/>
-            <a:ext cx="3840480" cy="1737360"/>
-          </a:xfrm>
-          <a:prstGeom prst="rect">
-            <a:avLst/>
-          </a:prstGeom>
-          <a:noFill/>
-        </p:spPr>
-        <p:txBody>
-          <a:bodyPr wrap="square" anchor="t">
-            <a:spAutoFit/>
-          </a:bodyPr>
-          <a:lstStyle/>
-          <a:p>
-            <a:pPr algn="l">
-              <a:lnSpc>
-                <a:spcPct val="115000"/>
-              </a:lnSpc>
-              <a:spcAft>
-                <a:spcPts val="400"/>
-              </a:spcAft>
-            </a:pPr>
-            <a:r>
-              <a:rPr sz="1250" b="0" i="0">
+              <a:t>Total infrastructure cost: ₹0 </a:t>
+            </a:r>
+            <a:r>
+              <a:rPr sz="1200" b="0" i="0">
                 <a:solidFill>
                   <a:srgbClr val="EEF4EF"/>
                 </a:solidFill>
                 <a:latin typeface="Segoe UI"/>
               </a:rPr>
-              <a:t>One Advocate agent per traveller.</a:t>
-            </a:r>
-          </a:p>
-          <a:p>
-            <a:pPr algn="l">
-              <a:lnSpc>
-                <a:spcPct val="115000"/>
-              </a:lnSpc>
-              <a:spcAft>
-                <a:spcPts val="400"/>
-              </a:spcAft>
-            </a:pPr>
-            <a:r>
-              <a:rPr sz="1250" b="0" i="0">
-                <a:solidFill>
-                  <a:srgbClr val="EEF4EF"/>
-                </a:solidFill>
-                <a:latin typeface="Segoe UI"/>
-              </a:rPr>
-              <a:t>The Referee publishes who conceded what, with a satisfaction score per person.</a:t>
-            </a:r>
-          </a:p>
-          <a:p>
-            <a:pPr algn="l">
-              <a:lnSpc>
-                <a:spcPct val="115000"/>
-              </a:lnSpc>
-              <a:spcAft>
-                <a:spcPts val="400"/>
-              </a:spcAft>
-            </a:pPr>
-            <a:r>
-              <a:rPr sz="1250" b="1" i="0">
-                <a:solidFill>
-                  <a:srgbClr val="FFB52E"/>
-                </a:solidFill>
-                <a:latin typeface="Segoe UI"/>
-              </a:rPr>
-              <a:t>The fairness floor, in writing: “Nobody conceded twice.”</a:t>
-            </a:r>
-          </a:p>
-        </p:txBody>
-      </p:sp>
-      <p:sp>
-        <p:nvSpPr>
-          <p:cNvPr id="13" name="TextBox 12"/>
+              <a:t>— every dependency inside a free tier. The constraint drove the engineering: three-model failover, identical-brief caching, zero-quota sample trips.</a:t>
+            </a:r>
+          </a:p>
+        </p:txBody>
+      </p:sp>
+      <p:sp>
+        <p:nvSpPr>
+          <p:cNvPr id="15" name="TextBox 14"/>
           <p:cNvSpPr txBox="1"/>
           <p:nvPr/>
         </p:nvSpPr>
@@ -8375,7 +9329,7 @@
       </p:sp>
       <p:sp>
         <p:nvSpPr>
-          <p:cNvPr id="14" name="TextBox 13"/>
+          <p:cNvPr id="16" name="TextBox 15"/>
           <p:cNvSpPr txBox="1"/>
           <p:nvPr/>
         </p:nvSpPr>
@@ -9416,7 +10370,7 @@
                 </a:solidFill>
                 <a:latin typeface="Segoe UI"/>
               </a:rPr>
-              <a:t>OUTCOMES, VALIDATION &amp; WHAT’S NEXT</a:t>
+              <a:t>KEY OUTCOMES &amp; IMPACT</a:t>
             </a:r>
           </a:p>
         </p:txBody>
@@ -9458,7 +10412,7 @@
                 </a:solidFill>
                 <a:latin typeface="Segoe UI"/>
               </a:rPr>
-              <a:t>Instrumented targets, honest scope, a sequenced launch</a:t>
+              <a:t>What TripME delivers — today, and measured</a:t>
             </a:r>
           </a:p>
         </p:txBody>
@@ -9471,8 +10425,8 @@
         </p:nvSpPr>
         <p:spPr>
           <a:xfrm>
-            <a:off x="502920" y="1600200"/>
-            <a:ext cx="5623560" cy="2834640"/>
+            <a:off x="502920" y="1554480"/>
+            <a:ext cx="5532120" cy="3017520"/>
           </a:xfrm>
           <a:prstGeom prst="roundRect">
             <a:avLst>
@@ -9519,8 +10473,8 @@
         </p:nvSpPr>
         <p:spPr>
           <a:xfrm>
-            <a:off x="731520" y="1719072"/>
-            <a:ext cx="5120640" cy="365760"/>
+            <a:off x="731520" y="1691640"/>
+            <a:ext cx="5029200" cy="320040"/>
           </a:xfrm>
           <a:prstGeom prst="rect">
             <a:avLst/>
@@ -9548,7 +10502,7 @@
                 </a:solidFill>
                 <a:latin typeface="Segoe UI"/>
               </a:rPr>
-              <a:t>HOW WE KNOW IT WORKS — MVP TARGETS</a:t>
+              <a:t>OUTCOMES — SHIPPED AND VERIFIED</a:t>
             </a:r>
           </a:p>
         </p:txBody>
@@ -9561,8 +10515,189 @@
         </p:nvSpPr>
         <p:spPr>
           <a:xfrm>
-            <a:off x="731520" y="2103120"/>
-            <a:ext cx="2377440" cy="365760"/>
+            <a:off x="731520" y="2048256"/>
+            <a:ext cx="5120640" cy="2423160"/>
+          </a:xfrm>
+          <a:prstGeom prst="rect">
+            <a:avLst/>
+          </a:prstGeom>
+          <a:noFill/>
+        </p:spPr>
+        <p:txBody>
+          <a:bodyPr wrap="square" anchor="t">
+            <a:spAutoFit/>
+          </a:bodyPr>
+          <a:lstStyle/>
+          <a:p>
+            <a:pPr algn="l">
+              <a:lnSpc>
+                <a:spcPct val="116000"/>
+              </a:lnSpc>
+              <a:spcAft>
+                <a:spcPts val="400"/>
+              </a:spcAft>
+            </a:pPr>
+            <a:r>
+              <a:rPr sz="1200" b="1" i="0">
+                <a:solidFill>
+                  <a:srgbClr val="0E1F1A"/>
+                </a:solidFill>
+                <a:latin typeface="Segoe UI"/>
+              </a:rPr>
+              <a:t>Complete MVP live</a:t>
+            </a:r>
+            <a:r>
+              <a:rPr sz="1200" b="0" i="0">
+                <a:solidFill>
+                  <a:srgbClr val="0E1F1A"/>
+                </a:solidFill>
+                <a:latin typeface="Segoe UI"/>
+              </a:rPr>
+              <a:t> — 18 features, all 6 travel paths, 7 languages, on a real URL</a:t>
+            </a:r>
+          </a:p>
+          <a:p>
+            <a:pPr algn="l">
+              <a:lnSpc>
+                <a:spcPct val="116000"/>
+              </a:lnSpc>
+              <a:spcAft>
+                <a:spcPts val="400"/>
+              </a:spcAft>
+            </a:pPr>
+            <a:r>
+              <a:rPr sz="1200" b="1" i="0">
+                <a:solidFill>
+                  <a:srgbClr val="0E1F1A"/>
+                </a:solidFill>
+                <a:latin typeface="Segoe UI"/>
+              </a:rPr>
+              <a:t>4–6 hours → under 60 seconds</a:t>
+            </a:r>
+            <a:r>
+              <a:rPr sz="1200" b="0" i="0">
+                <a:solidFill>
+                  <a:srgbClr val="0E1F1A"/>
+                </a:solidFill>
+                <a:latin typeface="Segoe UI"/>
+              </a:rPr>
+              <a:t> of agent time — measured and printed on every plan (34–58s)</a:t>
+            </a:r>
+          </a:p>
+          <a:p>
+            <a:pPr algn="l">
+              <a:lnSpc>
+                <a:spcPct val="116000"/>
+              </a:lnSpc>
+              <a:spcAft>
+                <a:spcPts val="400"/>
+              </a:spcAft>
+            </a:pPr>
+            <a:r>
+              <a:rPr sz="1200" b="1" i="0">
+                <a:solidFill>
+                  <a:srgbClr val="0E1F1A"/>
+                </a:solidFill>
+                <a:latin typeface="Segoe UI"/>
+              </a:rPr>
+              <a:t>Arbitration is real</a:t>
+            </a:r>
+            <a:r>
+              <a:rPr sz="1200" b="0" i="0">
+                <a:solidFill>
+                  <a:srgbClr val="0E1F1A"/>
+                </a:solidFill>
+                <a:latin typeface="Segoe UI"/>
+              </a:rPr>
+              <a:t> — the Referee rejected two agents’ work on a live run and re-planned it (9 calls, 58s)</a:t>
+            </a:r>
+          </a:p>
+          <a:p>
+            <a:pPr algn="l">
+              <a:lnSpc>
+                <a:spcPct val="116000"/>
+              </a:lnSpc>
+              <a:spcAft>
+                <a:spcPts val="400"/>
+              </a:spcAft>
+            </a:pPr>
+            <a:r>
+              <a:rPr sz="1200" b="1" i="0">
+                <a:solidFill>
+                  <a:srgbClr val="0E1F1A"/>
+                </a:solidFill>
+                <a:latin typeface="Segoe UI"/>
+              </a:rPr>
+              <a:t>Survived a provider outage</a:t>
+            </a:r>
+            <a:r>
+              <a:rPr sz="1200" b="0" i="0">
+                <a:solidFill>
+                  <a:srgbClr val="0E1F1A"/>
+                </a:solidFill>
+                <a:latin typeface="Segoe UI"/>
+              </a:rPr>
+              <a:t> — both original models were retired by Groq; failover absorbed it</a:t>
+            </a:r>
+          </a:p>
+        </p:txBody>
+      </p:sp>
+      <p:sp>
+        <p:nvSpPr>
+          <p:cNvPr id="7" name="Rounded Rectangle 6"/>
+          <p:cNvSpPr/>
+          <p:nvPr/>
+        </p:nvSpPr>
+        <p:spPr>
+          <a:xfrm>
+            <a:off x="6199632" y="1554480"/>
+            <a:ext cx="5532120" cy="3017520"/>
+          </a:xfrm>
+          <a:prstGeom prst="roundRect">
+            <a:avLst>
+              <a:gd name="adj" fmla="val 8000"/>
+            </a:avLst>
+          </a:prstGeom>
+          <a:solidFill>
+            <a:srgbClr val="14453D"/>
+          </a:solidFill>
+          <a:ln>
+            <a:noFill/>
+          </a:ln>
+          <a:effectLst/>
+        </p:spPr>
+        <p:style>
+          <a:lnRef idx="1">
+            <a:schemeClr val="accent1"/>
+          </a:lnRef>
+          <a:fillRef idx="3">
+            <a:schemeClr val="accent1"/>
+          </a:fillRef>
+          <a:effectRef idx="2">
+            <a:schemeClr val="accent1"/>
+          </a:effectRef>
+          <a:fontRef idx="minor">
+            <a:schemeClr val="lt1"/>
+          </a:fontRef>
+        </p:style>
+        <p:txBody>
+          <a:bodyPr rtlCol="0" anchor="ctr"/>
+          <a:lstStyle/>
+          <a:p>
+            <a:pPr algn="ctr"/>
+          </a:p>
+        </p:txBody>
+      </p:sp>
+      <p:sp>
+        <p:nvSpPr>
+          <p:cNvPr id="8" name="TextBox 7"/>
+          <p:cNvSpPr txBox="1"/>
+          <p:nvPr/>
+        </p:nvSpPr>
+        <p:spPr>
+          <a:xfrm>
+            <a:off x="6428232" y="1691640"/>
+            <a:ext cx="5029200" cy="320040"/>
           </a:xfrm>
           <a:prstGeom prst="rect">
             <a:avLst/>
@@ -9584,84 +10719,70 @@
               </a:spcAft>
             </a:pPr>
             <a:r>
+              <a:rPr sz="1100" b="1" i="0">
+                <a:solidFill>
+                  <a:srgbClr val="FFB52E"/>
+                </a:solidFill>
+                <a:latin typeface="Segoe UI"/>
+              </a:rPr>
+              <a:t>IMPACT — WHAT CHANGES FOR THE TRAVELLER</a:t>
+            </a:r>
+          </a:p>
+        </p:txBody>
+      </p:sp>
+      <p:sp>
+        <p:nvSpPr>
+          <p:cNvPr id="9" name="TextBox 8"/>
+          <p:cNvSpPr txBox="1"/>
+          <p:nvPr/>
+        </p:nvSpPr>
+        <p:spPr>
+          <a:xfrm>
+            <a:off x="6428232" y="2048256"/>
+            <a:ext cx="5120640" cy="2423160"/>
+          </a:xfrm>
+          <a:prstGeom prst="rect">
+            <a:avLst/>
+          </a:prstGeom>
+          <a:noFill/>
+        </p:spPr>
+        <p:txBody>
+          <a:bodyPr wrap="square" anchor="t">
+            <a:spAutoFit/>
+          </a:bodyPr>
+          <a:lstStyle/>
+          <a:p>
+            <a:pPr algn="l">
+              <a:lnSpc>
+                <a:spcPct val="116000"/>
+              </a:lnSpc>
+              <a:spcAft>
+                <a:spcPts val="400"/>
+              </a:spcAft>
+            </a:pPr>
+            <a:r>
               <a:rPr sz="1200" b="1" i="0">
                 <a:solidFill>
-                  <a:srgbClr val="0E1F1A"/>
-                </a:solidFill>
-                <a:latin typeface="Segoe UI"/>
-              </a:rPr>
-              <a:t>Plan completion</a:t>
-            </a:r>
-          </a:p>
-        </p:txBody>
-      </p:sp>
-      <p:sp>
-        <p:nvSpPr>
-          <p:cNvPr id="7" name="TextBox 6"/>
-          <p:cNvSpPr txBox="1"/>
-          <p:nvPr/>
-        </p:nvSpPr>
-        <p:spPr>
-          <a:xfrm>
-            <a:off x="3154680" y="2103120"/>
-            <a:ext cx="2880360" cy="365760"/>
-          </a:xfrm>
-          <a:prstGeom prst="rect">
-            <a:avLst/>
-          </a:prstGeom>
-          <a:noFill/>
-        </p:spPr>
-        <p:txBody>
-          <a:bodyPr wrap="square" anchor="t">
-            <a:spAutoFit/>
-          </a:bodyPr>
-          <a:lstStyle/>
-          <a:p>
-            <a:pPr algn="l">
-              <a:lnSpc>
-                <a:spcPct val="100000"/>
-              </a:lnSpc>
-              <a:spcAft>
-                <a:spcPts val="400"/>
-              </a:spcAft>
-            </a:pPr>
-            <a:r>
-              <a:rPr sz="1150" b="0" i="0">
-                <a:solidFill>
-                  <a:srgbClr val="4E635C"/>
-                </a:solidFill>
-                <a:latin typeface="Segoe UI"/>
-              </a:rPr>
-              <a:t>&gt; 70% of started briefs</a:t>
-            </a:r>
-          </a:p>
-        </p:txBody>
-      </p:sp>
-      <p:sp>
-        <p:nvSpPr>
-          <p:cNvPr id="8" name="TextBox 7"/>
-          <p:cNvSpPr txBox="1"/>
-          <p:nvPr/>
-        </p:nvSpPr>
-        <p:spPr>
-          <a:xfrm>
-            <a:off x="731520" y="2551176"/>
-            <a:ext cx="2377440" cy="365760"/>
-          </a:xfrm>
-          <a:prstGeom prst="rect">
-            <a:avLst/>
-          </a:prstGeom>
-          <a:noFill/>
-        </p:spPr>
-        <p:txBody>
-          <a:bodyPr wrap="square" anchor="t">
-            <a:spAutoFit/>
-          </a:bodyPr>
-          <a:lstStyle/>
-          <a:p>
-            <a:pPr algn="l">
-              <a:lnSpc>
-                <a:spcPct val="100000"/>
+                  <a:srgbClr val="FFFFFF"/>
+                </a:solidFill>
+                <a:latin typeface="Segoe UI"/>
+              </a:rPr>
+              <a:t>One brief replaces 6–8 apps</a:t>
+            </a:r>
+            <a:r>
+              <a:rPr sz="1200" b="0" i="0">
+                <a:solidFill>
+                  <a:srgbClr val="EEF4EF"/>
+                </a:solidFill>
+                <a:latin typeface="Segoe UI"/>
+              </a:rPr>
+              <a:t> — context entered once, carried end to end</a:t>
+            </a:r>
+          </a:p>
+          <a:p>
+            <a:pPr algn="l">
+              <a:lnSpc>
+                <a:spcPct val="116000"/>
               </a:lnSpc>
               <a:spcAft>
                 <a:spcPts val="400"/>
@@ -9670,82 +10791,26 @@
             <a:r>
               <a:rPr sz="1200" b="1" i="0">
                 <a:solidFill>
-                  <a:srgbClr val="0E1F1A"/>
-                </a:solidFill>
-                <a:latin typeface="Segoe UI"/>
-              </a:rPr>
-              <a:t>Agent time to plan</a:t>
-            </a:r>
-          </a:p>
-        </p:txBody>
-      </p:sp>
-      <p:sp>
-        <p:nvSpPr>
-          <p:cNvPr id="9" name="TextBox 8"/>
-          <p:cNvSpPr txBox="1"/>
-          <p:nvPr/>
-        </p:nvSpPr>
-        <p:spPr>
-          <a:xfrm>
-            <a:off x="3154680" y="2551176"/>
-            <a:ext cx="2880360" cy="365760"/>
-          </a:xfrm>
-          <a:prstGeom prst="rect">
-            <a:avLst/>
-          </a:prstGeom>
-          <a:noFill/>
-        </p:spPr>
-        <p:txBody>
-          <a:bodyPr wrap="square" anchor="t">
-            <a:spAutoFit/>
-          </a:bodyPr>
-          <a:lstStyle/>
-          <a:p>
-            <a:pPr algn="l">
-              <a:lnSpc>
-                <a:spcPct val="100000"/>
-              </a:lnSpc>
-              <a:spcAft>
-                <a:spcPts val="400"/>
-              </a:spcAft>
-            </a:pPr>
-            <a:r>
-              <a:rPr sz="1150" b="0" i="0">
-                <a:solidFill>
-                  <a:srgbClr val="4E635C"/>
-                </a:solidFill>
-                <a:latin typeface="Segoe UI"/>
-              </a:rPr>
-              <a:t>median &lt; 60s — measured on-screen (34–58s)</a:t>
-            </a:r>
-          </a:p>
-        </p:txBody>
-      </p:sp>
-      <p:sp>
-        <p:nvSpPr>
-          <p:cNvPr id="10" name="TextBox 9"/>
-          <p:cNvSpPr txBox="1"/>
-          <p:nvPr/>
-        </p:nvSpPr>
-        <p:spPr>
-          <a:xfrm>
-            <a:off x="731520" y="2999232"/>
-            <a:ext cx="2377440" cy="365760"/>
-          </a:xfrm>
-          <a:prstGeom prst="rect">
-            <a:avLst/>
-          </a:prstGeom>
-          <a:noFill/>
-        </p:spPr>
-        <p:txBody>
-          <a:bodyPr wrap="square" anchor="t">
-            <a:spAutoFit/>
-          </a:bodyPr>
-          <a:lstStyle/>
-          <a:p>
-            <a:pPr algn="l">
-              <a:lnSpc>
-                <a:spcPct val="100000"/>
+                  <a:srgbClr val="FFFFFF"/>
+                </a:solidFill>
+                <a:latin typeface="Segoe UI"/>
+              </a:rPr>
+              <a:t>Budget enforced during planning</a:t>
+            </a:r>
+            <a:r>
+              <a:rPr sz="1200" b="0" i="0">
+                <a:solidFill>
+                  <a:srgbClr val="EEF4EF"/>
+                </a:solidFill>
+                <a:latin typeface="Segoe UI"/>
+              </a:rPr>
+              <a:t> — not reconciled after the money is gone</a:t>
+            </a:r>
+          </a:p>
+          <a:p>
+            <a:pPr algn="l">
+              <a:lnSpc>
+                <a:spcPct val="116000"/>
               </a:lnSpc>
               <a:spcAft>
                 <a:spcPts val="400"/>
@@ -9754,82 +10819,26 @@
             <a:r>
               <a:rPr sz="1200" b="1" i="0">
                 <a:solidFill>
-                  <a:srgbClr val="0E1F1A"/>
-                </a:solidFill>
-                <a:latin typeface="Segoe UI"/>
-              </a:rPr>
-              <a:t>Referee comprehension</a:t>
-            </a:r>
-          </a:p>
-        </p:txBody>
-      </p:sp>
-      <p:sp>
-        <p:nvSpPr>
-          <p:cNvPr id="11" name="TextBox 10"/>
-          <p:cNvSpPr txBox="1"/>
-          <p:nvPr/>
-        </p:nvSpPr>
-        <p:spPr>
-          <a:xfrm>
-            <a:off x="3154680" y="2999232"/>
-            <a:ext cx="2880360" cy="365760"/>
-          </a:xfrm>
-          <a:prstGeom prst="rect">
-            <a:avLst/>
-          </a:prstGeom>
-          <a:noFill/>
-        </p:spPr>
-        <p:txBody>
-          <a:bodyPr wrap="square" anchor="t">
-            <a:spAutoFit/>
-          </a:bodyPr>
-          <a:lstStyle/>
-          <a:p>
-            <a:pPr algn="l">
-              <a:lnSpc>
-                <a:spcPct val="100000"/>
-              </a:lnSpc>
-              <a:spcAft>
-                <a:spcPts val="400"/>
-              </a:spcAft>
-            </a:pPr>
-            <a:r>
-              <a:rPr sz="1150" b="0" i="0">
-                <a:solidFill>
-                  <a:srgbClr val="4E635C"/>
-                </a:solidFill>
-                <a:latin typeface="Segoe UI"/>
-              </a:rPr>
-              <a:t>&gt; 50% of testers can explain it</a:t>
-            </a:r>
-          </a:p>
-        </p:txBody>
-      </p:sp>
-      <p:sp>
-        <p:nvSpPr>
-          <p:cNvPr id="12" name="TextBox 11"/>
-          <p:cNvSpPr txBox="1"/>
-          <p:nvPr/>
-        </p:nvSpPr>
-        <p:spPr>
-          <a:xfrm>
-            <a:off x="731520" y="3447288"/>
-            <a:ext cx="2377440" cy="365760"/>
-          </a:xfrm>
-          <a:prstGeom prst="rect">
-            <a:avLst/>
-          </a:prstGeom>
-          <a:noFill/>
-        </p:spPr>
-        <p:txBody>
-          <a:bodyPr wrap="square" anchor="t">
-            <a:spAutoFit/>
-          </a:bodyPr>
-          <a:lstStyle/>
-          <a:p>
-            <a:pPr algn="l">
-              <a:lnSpc>
-                <a:spcPct val="100000"/>
+                  <a:srgbClr val="FFFFFF"/>
+                </a:solidFill>
+                <a:latin typeface="Segoe UI"/>
+              </a:rPr>
+              <a:t>Groups reach a defensible plan</a:t>
+            </a:r>
+            <a:r>
+              <a:rPr sz="1200" b="0" i="0">
+                <a:solidFill>
+                  <a:srgbClr val="EEF4EF"/>
+                </a:solidFill>
+                <a:latin typeface="Segoe UI"/>
+              </a:rPr>
+              <a:t> — a published concession matrix; nobody concedes twice</a:t>
+            </a:r>
+          </a:p>
+          <a:p>
+            <a:pPr algn="l">
+              <a:lnSpc>
+                <a:spcPct val="116000"/>
               </a:lnSpc>
               <a:spcAft>
                 <a:spcPts val="400"/>
@@ -9838,151 +10847,34 @@
             <a:r>
               <a:rPr sz="1200" b="1" i="0">
                 <a:solidFill>
-                  <a:srgbClr val="0E1F1A"/>
-                </a:solidFill>
-                <a:latin typeface="Segoe UI"/>
-              </a:rPr>
-              <a:t>Override rate</a:t>
-            </a:r>
-          </a:p>
-        </p:txBody>
-      </p:sp>
-      <p:sp>
-        <p:nvSpPr>
-          <p:cNvPr id="13" name="TextBox 12"/>
-          <p:cNvSpPr txBox="1"/>
-          <p:nvPr/>
-        </p:nvSpPr>
-        <p:spPr>
-          <a:xfrm>
-            <a:off x="3154680" y="3447288"/>
-            <a:ext cx="2880360" cy="365760"/>
-          </a:xfrm>
-          <a:prstGeom prst="rect">
-            <a:avLst/>
-          </a:prstGeom>
-          <a:noFill/>
-        </p:spPr>
-        <p:txBody>
-          <a:bodyPr wrap="square" anchor="t">
-            <a:spAutoFit/>
-          </a:bodyPr>
-          <a:lstStyle/>
-          <a:p>
-            <a:pPr algn="l">
-              <a:lnSpc>
-                <a:spcPct val="100000"/>
-              </a:lnSpc>
-              <a:spcAft>
-                <a:spcPts val="400"/>
-              </a:spcAft>
-            </a:pPr>
-            <a:r>
-              <a:rPr sz="1150" b="0" i="0">
-                <a:solidFill>
-                  <a:srgbClr val="4E635C"/>
-                </a:solidFill>
-                <a:latin typeface="Segoe UI"/>
-              </a:rPr>
-              <a:t>&gt; 30% change something — the plan is theirs</a:t>
-            </a:r>
-          </a:p>
-        </p:txBody>
-      </p:sp>
-      <p:sp>
-        <p:nvSpPr>
-          <p:cNvPr id="14" name="TextBox 13"/>
-          <p:cNvSpPr txBox="1"/>
-          <p:nvPr/>
-        </p:nvSpPr>
-        <p:spPr>
-          <a:xfrm>
-            <a:off x="731520" y="3895344"/>
-            <a:ext cx="2377440" cy="365760"/>
-          </a:xfrm>
-          <a:prstGeom prst="rect">
-            <a:avLst/>
-          </a:prstGeom>
-          <a:noFill/>
-        </p:spPr>
-        <p:txBody>
-          <a:bodyPr wrap="square" anchor="t">
-            <a:spAutoFit/>
-          </a:bodyPr>
-          <a:lstStyle/>
-          <a:p>
-            <a:pPr algn="l">
-              <a:lnSpc>
-                <a:spcPct val="100000"/>
-              </a:lnSpc>
-              <a:spcAft>
-                <a:spcPts val="400"/>
-              </a:spcAft>
-            </a:pPr>
-            <a:r>
-              <a:rPr sz="1200" b="1" i="0">
-                <a:solidFill>
-                  <a:srgbClr val="0E1F1A"/>
-                </a:solidFill>
-                <a:latin typeface="Segoe UI"/>
-              </a:rPr>
-              <a:t>Confirm rate · 30-day return</a:t>
-            </a:r>
-          </a:p>
-        </p:txBody>
-      </p:sp>
-      <p:sp>
-        <p:nvSpPr>
-          <p:cNvPr id="15" name="TextBox 14"/>
-          <p:cNvSpPr txBox="1"/>
-          <p:nvPr/>
-        </p:nvSpPr>
-        <p:spPr>
-          <a:xfrm>
-            <a:off x="3154680" y="3895344"/>
-            <a:ext cx="2880360" cy="365760"/>
-          </a:xfrm>
-          <a:prstGeom prst="rect">
-            <a:avLst/>
-          </a:prstGeom>
-          <a:noFill/>
-        </p:spPr>
-        <p:txBody>
-          <a:bodyPr wrap="square" anchor="t">
-            <a:spAutoFit/>
-          </a:bodyPr>
-          <a:lstStyle/>
-          <a:p>
-            <a:pPr algn="l">
-              <a:lnSpc>
-                <a:spcPct val="100000"/>
-              </a:lnSpc>
-              <a:spcAft>
-                <a:spcPts val="400"/>
-              </a:spcAft>
-            </a:pPr>
-            <a:r>
-              <a:rPr sz="1150" b="0" i="0">
-                <a:solidFill>
-                  <a:srgbClr val="4E635C"/>
-                </a:solidFill>
-                <a:latin typeface="Segoe UI"/>
-              </a:rPr>
-              <a:t>&gt; 25% · &gt; 20%</a:t>
-            </a:r>
-          </a:p>
-        </p:txBody>
-      </p:sp>
-      <p:sp>
-        <p:nvSpPr>
-          <p:cNvPr id="16" name="Rounded Rectangle 15"/>
+                  <a:srgbClr val="FFFFFF"/>
+                </a:solidFill>
+                <a:latin typeface="Segoe UI"/>
+              </a:rPr>
+              <a:t>Honesty as shipped UI</a:t>
+            </a:r>
+            <a:r>
+              <a:rPr sz="1200" b="0" i="0">
+                <a:solidFill>
+                  <a:srgbClr val="EEF4EF"/>
+                </a:solidFill>
+                <a:latin typeface="Segoe UI"/>
+              </a:rPr>
+              <a:t> — simulated labelled, prices marked est., scope stated up front</a:t>
+            </a:r>
+          </a:p>
+        </p:txBody>
+      </p:sp>
+      <p:sp>
+        <p:nvSpPr>
+          <p:cNvPr id="10" name="Rounded Rectangle 9"/>
           <p:cNvSpPr/>
           <p:nvPr/>
         </p:nvSpPr>
         <p:spPr>
           <a:xfrm>
-            <a:off x="6400800" y="1600200"/>
-            <a:ext cx="5303520" cy="2834640"/>
+            <a:off x="502920" y="4736592"/>
+            <a:ext cx="11201400" cy="658368"/>
           </a:xfrm>
           <a:prstGeom prst="roundRect">
             <a:avLst>
@@ -10023,14 +10915,14 @@
       </p:sp>
       <p:sp>
         <p:nvSpPr>
-          <p:cNvPr id="17" name="TextBox 16"/>
-          <p:cNvSpPr txBox="1"/>
-          <p:nvPr/>
-        </p:nvSpPr>
-        <p:spPr>
-          <a:xfrm>
-            <a:off x="6629400" y="1719072"/>
-            <a:ext cx="4846320" cy="365760"/>
+          <p:cNvPr id="11" name="TextBox 10"/>
+          <p:cNvSpPr txBox="1"/>
+          <p:nvPr/>
+        </p:nvSpPr>
+        <p:spPr>
+          <a:xfrm>
+            <a:off x="731520" y="4837176"/>
+            <a:ext cx="10789920" cy="457200"/>
           </a:xfrm>
           <a:prstGeom prst="rect">
             <a:avLst/>
@@ -10052,162 +10944,36 @@
               </a:spcAft>
             </a:pPr>
             <a:r>
-              <a:rPr sz="1100" b="1" i="0">
-                <a:solidFill>
-                  <a:srgbClr val="C58200"/>
-                </a:solidFill>
-                <a:latin typeface="Segoe UI"/>
-              </a:rPr>
-              <a:t>NEXT — IN ORDER</a:t>
-            </a:r>
-          </a:p>
-        </p:txBody>
-      </p:sp>
-      <p:sp>
-        <p:nvSpPr>
-          <p:cNvPr id="18" name="TextBox 17"/>
-          <p:cNvSpPr txBox="1"/>
-          <p:nvPr/>
-        </p:nvSpPr>
-        <p:spPr>
-          <a:xfrm>
-            <a:off x="6629400" y="2103120"/>
-            <a:ext cx="4846320" cy="2194560"/>
-          </a:xfrm>
-          <a:prstGeom prst="rect">
-            <a:avLst/>
-          </a:prstGeom>
-          <a:noFill/>
-        </p:spPr>
-        <p:txBody>
-          <a:bodyPr wrap="square" anchor="t">
-            <a:spAutoFit/>
-          </a:bodyPr>
-          <a:lstStyle/>
-          <a:p>
-            <a:pPr algn="l">
-              <a:lnSpc>
-                <a:spcPct val="125000"/>
-              </a:lnSpc>
-              <a:spcAft>
-                <a:spcPts val="400"/>
-              </a:spcAft>
-            </a:pPr>
-            <a:r>
-              <a:rPr sz="1250" b="1" i="0">
+              <a:rPr sz="1150" b="1" i="0">
                 <a:solidFill>
                   <a:srgbClr val="14453D"/>
                 </a:solidFill>
                 <a:latin typeface="Segoe UI"/>
               </a:rPr>
-              <a:t>1  </a:t>
-            </a:r>
-            <a:r>
-              <a:rPr sz="1250" b="0" i="0">
-                <a:solidFill>
-                  <a:srgbClr val="0E1F1A"/>
-                </a:solidFill>
-                <a:latin typeface="Segoe UI"/>
-              </a:rPr>
-              <a:t>Launch to two personas only — solo &amp; couple; groups and families at month 3+</a:t>
-            </a:r>
-          </a:p>
-          <a:p>
-            <a:pPr algn="l">
-              <a:lnSpc>
-                <a:spcPct val="125000"/>
-              </a:lnSpc>
-              <a:spcAft>
-                <a:spcPts val="400"/>
-              </a:spcAft>
-            </a:pPr>
-            <a:r>
-              <a:rPr sz="1250" b="1" i="0">
-                <a:solidFill>
-                  <a:srgbClr val="14453D"/>
-                </a:solidFill>
-                <a:latin typeface="Segoe UI"/>
-              </a:rPr>
-              <a:t>2  </a:t>
-            </a:r>
-            <a:r>
-              <a:rPr sz="1250" b="0" i="0">
-                <a:solidFill>
-                  <a:srgbClr val="0E1F1A"/>
-                </a:solidFill>
-                <a:latin typeface="Segoe UI"/>
-              </a:rPr>
-              <a:t>Real booking execution behind the same approval gates</a:t>
-            </a:r>
-          </a:p>
-          <a:p>
-            <a:pPr algn="l">
-              <a:lnSpc>
-                <a:spcPct val="125000"/>
-              </a:lnSpc>
-              <a:spcAft>
-                <a:spcPts val="400"/>
-              </a:spcAft>
-            </a:pPr>
-            <a:r>
-              <a:rPr sz="1250" b="1" i="0">
-                <a:solidFill>
-                  <a:srgbClr val="14453D"/>
-                </a:solidFill>
-                <a:latin typeface="Segoe UI"/>
-              </a:rPr>
-              <a:t>3  </a:t>
-            </a:r>
-            <a:r>
-              <a:rPr sz="1250" b="0" i="0">
-                <a:solidFill>
-                  <a:srgbClr val="0E1F1A"/>
-                </a:solidFill>
-                <a:latin typeface="Segoe UI"/>
-              </a:rPr>
-              <a:t>Voice input &amp; large-text — owed before pilgrimage acquisition is honest</a:t>
-            </a:r>
-          </a:p>
-          <a:p>
-            <a:pPr algn="l">
-              <a:lnSpc>
-                <a:spcPct val="125000"/>
-              </a:lnSpc>
-              <a:spcAft>
-                <a:spcPts val="400"/>
-              </a:spcAft>
-            </a:pPr>
-            <a:r>
-              <a:rPr sz="1250" b="1" i="0">
-                <a:solidFill>
-                  <a:srgbClr val="14453D"/>
-                </a:solidFill>
-                <a:latin typeface="Segoe UI"/>
-              </a:rPr>
-              <a:t>4  </a:t>
-            </a:r>
-            <a:r>
-              <a:rPr sz="1250" b="0" i="0">
-                <a:solidFill>
-                  <a:srgbClr val="0E1F1A"/>
-                </a:solidFill>
-                <a:latin typeface="Segoe UI"/>
-              </a:rPr>
-              <a:t>Monetise: commission · Pro tier · early-bird plan lock-in</a:t>
-            </a:r>
-          </a:p>
-        </p:txBody>
-      </p:sp>
-      <p:sp>
-        <p:nvSpPr>
-          <p:cNvPr id="19" name="Rounded Rectangle 18"/>
+              <a:t>Validation gates for the beta: </a:t>
+            </a:r>
+            <a:r>
+              <a:rPr sz="1150" b="0" i="0">
+                <a:solidFill>
+                  <a:srgbClr val="4E635C"/>
+                </a:solidFill>
+                <a:latin typeface="Segoe UI"/>
+              </a:rPr>
+              <a:t>&gt;70% plan completion · &lt;60s median agent time · &gt;50% can explain the Referee · &gt;30% override something · &gt;25% confirm · &gt;20% return in 30 days</a:t>
+            </a:r>
+          </a:p>
+        </p:txBody>
+      </p:sp>
+      <p:sp>
+        <p:nvSpPr>
+          <p:cNvPr id="12" name="Rounded Rectangle 11"/>
           <p:cNvSpPr/>
           <p:nvPr/>
         </p:nvSpPr>
         <p:spPr>
           <a:xfrm>
-            <a:off x="502920" y="4663440"/>
-            <a:ext cx="11201400" cy="1234440"/>
+            <a:off x="502920" y="5559552"/>
+            <a:ext cx="11201400" cy="768096"/>
           </a:xfrm>
           <a:prstGeom prst="roundRect">
             <a:avLst>
@@ -10246,36 +11012,36 @@
       </p:sp>
       <p:sp>
         <p:nvSpPr>
-          <p:cNvPr id="20" name="TextBox 19"/>
-          <p:cNvSpPr txBox="1"/>
-          <p:nvPr/>
-        </p:nvSpPr>
-        <p:spPr>
-          <a:xfrm>
-            <a:off x="822960" y="4846320"/>
-            <a:ext cx="7772400" cy="914400"/>
-          </a:xfrm>
-          <a:prstGeom prst="rect">
-            <a:avLst/>
-          </a:prstGeom>
-          <a:noFill/>
-        </p:spPr>
-        <p:txBody>
-          <a:bodyPr wrap="square" anchor="t">
-            <a:spAutoFit/>
-          </a:bodyPr>
-          <a:lstStyle/>
-          <a:p>
-            <a:pPr algn="l">
-              <a:lnSpc>
-                <a:spcPct val="120000"/>
-              </a:lnSpc>
-              <a:spcAft>
-                <a:spcPts val="400"/>
-              </a:spcAft>
-            </a:pPr>
-            <a:r>
-              <a:rPr sz="1700" b="1" i="0">
+          <p:cNvPr id="13" name="TextBox 12"/>
+          <p:cNvSpPr txBox="1"/>
+          <p:nvPr/>
+        </p:nvSpPr>
+        <p:spPr>
+          <a:xfrm>
+            <a:off x="822960" y="5678424"/>
+            <a:ext cx="7772400" cy="548640"/>
+          </a:xfrm>
+          <a:prstGeom prst="rect">
+            <a:avLst/>
+          </a:prstGeom>
+          <a:noFill/>
+        </p:spPr>
+        <p:txBody>
+          <a:bodyPr wrap="square" anchor="t">
+            <a:spAutoFit/>
+          </a:bodyPr>
+          <a:lstStyle/>
+          <a:p>
+            <a:pPr algn="l">
+              <a:lnSpc>
+                <a:spcPct val="100000"/>
+              </a:lnSpc>
+              <a:spcAft>
+                <a:spcPts val="400"/>
+              </a:spcAft>
+            </a:pPr>
+            <a:r>
+              <a:rPr sz="1500" b="1" i="0">
                 <a:solidFill>
                   <a:srgbClr val="EEF4EF"/>
                 </a:solidFill>
@@ -10284,7 +11050,7 @@
               <a:t>Try it now — </a:t>
             </a:r>
             <a:r>
-              <a:rPr sz="1700" b="1" i="0">
+              <a:rPr sz="1500" b="1" i="0">
                 <a:solidFill>
                   <a:srgbClr val="FFB52E"/>
                 </a:solidFill>
@@ -10292,38 +11058,28 @@
               </a:rPr>
               <a:t>tripme-khaki.vercel.app</a:t>
             </a:r>
-          </a:p>
-          <a:p>
-            <a:pPr algn="l">
-              <a:lnSpc>
-                <a:spcPct val="120000"/>
-              </a:lnSpc>
-              <a:spcAft>
-                <a:spcPts val="400"/>
-              </a:spcAft>
-            </a:pPr>
-            <a:r>
-              <a:rPr sz="1200" b="0" i="0">
+            <a:r>
+              <a:rPr sz="1100" b="0" i="0">
                 <a:solidFill>
                   <a:srgbClr val="9DB3AC"/>
                 </a:solidFill>
                 <a:latin typeface="Segoe UI"/>
               </a:rPr>
-              <a:t>wireframes: /wireframes.html · source: github.com/divyamsingh4444/tripme</a:t>
-            </a:r>
-          </a:p>
-        </p:txBody>
-      </p:sp>
-      <p:sp>
-        <p:nvSpPr>
-          <p:cNvPr id="21" name="TextBox 20"/>
-          <p:cNvSpPr txBox="1"/>
-          <p:nvPr/>
-        </p:nvSpPr>
-        <p:spPr>
-          <a:xfrm>
-            <a:off x="8778240" y="4864608"/>
-            <a:ext cx="2743200" cy="822960"/>
+              <a:t>   ·   wireframes: /wireframes.html</a:t>
+            </a:r>
+          </a:p>
+        </p:txBody>
+      </p:sp>
+      <p:sp>
+        <p:nvSpPr>
+          <p:cNvPr id="14" name="TextBox 13"/>
+          <p:cNvSpPr txBox="1"/>
+          <p:nvPr/>
+        </p:nvSpPr>
+        <p:spPr>
+          <a:xfrm>
+            <a:off x="8503920" y="5687568"/>
+            <a:ext cx="3017520" cy="502920"/>
           </a:xfrm>
           <a:prstGeom prst="rect">
             <a:avLst/>
@@ -10338,14 +11094,14 @@
           <a:p>
             <a:pPr algn="r">
               <a:lnSpc>
-                <a:spcPct val="110000"/>
-              </a:lnSpc>
-              <a:spcAft>
-                <a:spcPts val="400"/>
-              </a:spcAft>
-            </a:pPr>
-            <a:r>
-              <a:rPr sz="1500" b="1" i="0">
+                <a:spcPct val="105000"/>
+              </a:lnSpc>
+              <a:spcAft>
+                <a:spcPts val="400"/>
+              </a:spcAft>
+            </a:pPr>
+            <a:r>
+              <a:rPr sz="1250" b="1" i="0">
                 <a:solidFill>
                   <a:srgbClr val="EEF4EF"/>
                 </a:solidFill>
@@ -10359,7 +11115,7 @@
       </p:sp>
       <p:sp>
         <p:nvSpPr>
-          <p:cNvPr id="22" name="TextBox 21"/>
+          <p:cNvPr id="15" name="TextBox 14"/>
           <p:cNvSpPr txBox="1"/>
           <p:nvPr/>
         </p:nvSpPr>
@@ -10401,7 +11157,7 @@
       </p:sp>
       <p:sp>
         <p:nvSpPr>
-          <p:cNvPr id="23" name="TextBox 22"/>
+          <p:cNvPr id="16" name="TextBox 15"/>
           <p:cNvSpPr txBox="1"/>
           <p:nvPr/>
         </p:nvSpPr>

--- a/docs/TripME_Presentation.pptx
+++ b/docs/TripME_Presentation.pptx
@@ -4202,7 +4202,7 @@
                 </a:solidFill>
                 <a:latin typeface="Segoe UI"/>
               </a:rPr>
-              <a:t>APPENDIX A2</a:t>
+              <a:t>APPENDIX A3</a:t>
             </a:r>
           </a:p>
         </p:txBody>
@@ -4244,7 +4244,7 @@
                 </a:solidFill>
                 <a:latin typeface="Segoe UI"/>
               </a:rPr>
-              <a:t>Tech: what we built with vs the funded version</a:t>
+              <a:t>Challenges we actually hit (and what each taught us)</a:t>
             </a:r>
           </a:p>
         </p:txBody>
@@ -4258,7 +4258,7 @@
         <p:spPr>
           <a:xfrm>
             <a:off x="502920" y="1645920"/>
-            <a:ext cx="5532120" cy="4206240"/>
+            <a:ext cx="11201400" cy="859536"/>
           </a:xfrm>
           <a:prstGeom prst="roundRect">
             <a:avLst>
@@ -4306,8 +4306,8 @@
         </p:nvSpPr>
         <p:spPr>
           <a:xfrm>
-            <a:off x="731520" y="1783080"/>
-            <a:ext cx="5029200" cy="365760"/>
+            <a:off x="731520" y="1719072"/>
+            <a:ext cx="3108960" cy="731520"/>
           </a:xfrm>
           <a:prstGeom prst="rect">
             <a:avLst/>
@@ -4322,20 +4322,20 @@
           <a:p>
             <a:pPr algn="l">
               <a:lnSpc>
-                <a:spcPct val="100000"/>
-              </a:lnSpc>
-              <a:spcAft>
-                <a:spcPts val="400"/>
-              </a:spcAft>
-            </a:pPr>
-            <a:r>
-              <a:rPr sz="1200" b="1" i="0">
-                <a:solidFill>
-                  <a:srgbClr val="14453D"/>
-                </a:solidFill>
-                <a:latin typeface="Segoe UI"/>
-              </a:rPr>
-              <a:t>ACTUALLY BUILT</a:t>
+                <a:spcPct val="98000"/>
+              </a:lnSpc>
+              <a:spcAft>
+                <a:spcPts val="400"/>
+              </a:spcAft>
+            </a:pPr>
+            <a:r>
+              <a:rPr sz="1300" b="1" i="0">
+                <a:solidFill>
+                  <a:srgbClr val="0E1F1A"/>
+                </a:solidFill>
+                <a:latin typeface="Segoe UI"/>
+              </a:rPr>
+              <a:t>Free-tier quota died mid-build</a:t>
             </a:r>
           </a:p>
         </p:txBody>
@@ -4348,8 +4348,8 @@
         </p:nvSpPr>
         <p:spPr>
           <a:xfrm>
-            <a:off x="731520" y="2148840"/>
-            <a:ext cx="5120640" cy="3566160"/>
+            <a:off x="3977639" y="1719072"/>
+            <a:ext cx="7543800" cy="777240"/>
           </a:xfrm>
           <a:prstGeom prst="rect">
             <a:avLst/>
@@ -4364,115 +4364,20 @@
           <a:p>
             <a:pPr algn="l">
               <a:lnSpc>
-                <a:spcPct val="118000"/>
-              </a:lnSpc>
-              <a:spcAft>
-                <a:spcPts val="400"/>
-              </a:spcAft>
-            </a:pPr>
-            <a:r>
-              <a:rPr sz="1200" b="0" i="0">
-                <a:solidFill>
-                  <a:srgbClr val="0E1F1A"/>
-                </a:solidFill>
-                <a:latin typeface="Segoe UI"/>
-              </a:rPr>
-              <a:t>Next.js App Router + TypeScript on Vercel — push-to-deploy</a:t>
-            </a:r>
-          </a:p>
-          <a:p>
-            <a:pPr algn="l">
-              <a:lnSpc>
-                <a:spcPct val="118000"/>
-              </a:lnSpc>
-              <a:spcAft>
-                <a:spcPts val="400"/>
-              </a:spcAft>
-            </a:pPr>
-            <a:r>
-              <a:rPr sz="1200" b="0" i="0">
-                <a:solidFill>
-                  <a:srgbClr val="0E1F1A"/>
-                </a:solidFill>
-                <a:latin typeface="Segoe UI"/>
-              </a:rPr>
-              <a:t>Groq: llama-3.3-70b · gpt-oss-120b · llama-3.1-8b — per-agent failover chains</a:t>
-            </a:r>
-          </a:p>
-          <a:p>
-            <a:pPr algn="l">
-              <a:lnSpc>
-                <a:spcPct val="118000"/>
-              </a:lnSpc>
-              <a:spcAft>
-                <a:spcPts val="400"/>
-              </a:spcAft>
-            </a:pPr>
-            <a:r>
-              <a:rPr sz="1200" b="0" i="0">
-                <a:solidFill>
-                  <a:srgbClr val="0E1F1A"/>
-                </a:solidFill>
-                <a:latin typeface="Segoe UI"/>
-              </a:rPr>
-              <a:t>Failover on 429 / 400 / 413 / 422 / 503 — quota becomes a slowdown, not an outage</a:t>
-            </a:r>
-          </a:p>
-          <a:p>
-            <a:pPr algn="l">
-              <a:lnSpc>
-                <a:spcPct val="118000"/>
-              </a:lnSpc>
-              <a:spcAft>
-                <a:spcPts val="400"/>
-              </a:spcAft>
-            </a:pPr>
-            <a:r>
-              <a:rPr sz="1200" b="0" i="0">
-                <a:solidFill>
-                  <a:srgbClr val="0E1F1A"/>
-                </a:solidFill>
-                <a:latin typeface="Segoe UI"/>
-              </a:rPr>
-              <a:t>OpenStreetMap + Nominatim + Wikipedia — real, keyless, licensed places &amp; photos</a:t>
-            </a:r>
-          </a:p>
-          <a:p>
-            <a:pPr algn="l">
-              <a:lnSpc>
-                <a:spcPct val="118000"/>
-              </a:lnSpc>
-              <a:spcAft>
-                <a:spcPts val="400"/>
-              </a:spcAft>
-            </a:pPr>
-            <a:r>
-              <a:rPr sz="1200" b="0" i="0">
-                <a:solidFill>
-                  <a:srgbClr val="0E1F1A"/>
-                </a:solidFill>
-                <a:latin typeface="Segoe UI"/>
-              </a:rPr>
-              <a:t>Auth.js + Google OAuth + password-less demo user · trips stay in the browser</a:t>
-            </a:r>
-          </a:p>
-          <a:p>
-            <a:pPr algn="l">
-              <a:lnSpc>
-                <a:spcPct val="118000"/>
-              </a:lnSpc>
-              <a:spcAft>
-                <a:spcPts val="400"/>
-              </a:spcAft>
-            </a:pPr>
-            <a:r>
-              <a:rPr sz="1200" b="0" i="0">
-                <a:solidFill>
-                  <a:srgbClr val="0E1F1A"/>
-                </a:solidFill>
-                <a:latin typeface="Segoe UI"/>
-              </a:rPr>
-              <a:t>Total infrastructure cost: ₹0 — every dependency inside a free tier</a:t>
+                <a:spcPct val="102000"/>
+              </a:lnSpc>
+              <a:spcAft>
+                <a:spcPts val="400"/>
+              </a:spcAft>
+            </a:pPr>
+            <a:r>
+              <a:rPr sz="1100" b="0" i="0">
+                <a:solidFill>
+                  <a:srgbClr val="4E635C"/>
+                </a:solidFill>
+                <a:latin typeface="Segoe UI"/>
+              </a:rPr>
+              <a:t>The real limit was tokens-per-day, visible only in the 429 body. Built three-model per-agent failover; verified with the primary model fully exhausted.</a:t>
             </a:r>
           </a:p>
         </p:txBody>
@@ -4485,8 +4390,8 @@
         </p:nvSpPr>
         <p:spPr>
           <a:xfrm>
-            <a:off x="6199632" y="1645920"/>
-            <a:ext cx="5532120" cy="4206240"/>
+            <a:off x="502920" y="2596896"/>
+            <a:ext cx="11201400" cy="859536"/>
           </a:xfrm>
           <a:prstGeom prst="roundRect">
             <a:avLst>
@@ -4534,8 +4439,8 @@
         </p:nvSpPr>
         <p:spPr>
           <a:xfrm>
-            <a:off x="6428232" y="1783080"/>
-            <a:ext cx="5029200" cy="365760"/>
+            <a:off x="731520" y="2670048"/>
+            <a:ext cx="3108960" cy="731520"/>
           </a:xfrm>
           <a:prstGeom prst="rect">
             <a:avLst/>
@@ -4550,20 +4455,20 @@
           <a:p>
             <a:pPr algn="l">
               <a:lnSpc>
-                <a:spcPct val="100000"/>
-              </a:lnSpc>
-              <a:spcAft>
-                <a:spcPts val="400"/>
-              </a:spcAft>
-            </a:pPr>
-            <a:r>
-              <a:rPr sz="1200" b="1" i="0">
-                <a:solidFill>
-                  <a:srgbClr val="C58200"/>
-                </a:solidFill>
-                <a:latin typeface="Segoe UI"/>
-              </a:rPr>
-              <a:t>FUNDED VERSION — AND WHY NOT NOW</a:t>
+                <a:spcPct val="98000"/>
+              </a:lnSpc>
+              <a:spcAft>
+                <a:spcPts val="400"/>
+              </a:spcAft>
+            </a:pPr>
+            <a:r>
+              <a:rPr sz="1300" b="1" i="0">
+                <a:solidFill>
+                  <a:srgbClr val="0E1F1A"/>
+                </a:solidFill>
+                <a:latin typeface="Segoe UI"/>
+              </a:rPr>
+              <a:t>One model 400’d on a nested schema</a:t>
             </a:r>
           </a:p>
         </p:txBody>
@@ -4576,8 +4481,8 @@
         </p:nvSpPr>
         <p:spPr>
           <a:xfrm>
-            <a:off x="6428232" y="2148840"/>
-            <a:ext cx="5120640" cy="3017520"/>
+            <a:off x="3977639" y="2670048"/>
+            <a:ext cx="7543800" cy="777240"/>
           </a:xfrm>
           <a:prstGeom prst="rect">
             <a:avLst/>
@@ -4592,91 +4497,83 @@
           <a:p>
             <a:pPr algn="l">
               <a:lnSpc>
-                <a:spcPct val="118000"/>
-              </a:lnSpc>
-              <a:spcAft>
-                <a:spcPts val="400"/>
-              </a:spcAft>
-            </a:pPr>
-            <a:r>
-              <a:rPr sz="1200" b="0" i="0">
-                <a:solidFill>
-                  <a:srgbClr val="0E1F1A"/>
-                </a:solidFill>
-                <a:latin typeface="Segoe UI"/>
-              </a:rPr>
-              <a:t>LangGraph-class runtime — retries, checkpointing, observability at scale</a:t>
-            </a:r>
-          </a:p>
-          <a:p>
-            <a:pPr algn="l">
-              <a:lnSpc>
-                <a:spcPct val="118000"/>
-              </a:lnSpc>
-              <a:spcAft>
-                <a:spcPts val="400"/>
-              </a:spcAft>
-            </a:pPr>
-            <a:r>
-              <a:rPr sz="1200" b="0" i="0">
-                <a:solidFill>
-                  <a:srgbClr val="0E1F1A"/>
-                </a:solidFill>
-                <a:latin typeface="Segoe UI"/>
-              </a:rPr>
-              <a:t>Vector store for cross-trip preference memory; relational store for transactions</a:t>
-            </a:r>
-          </a:p>
-          <a:p>
-            <a:pPr algn="l">
-              <a:lnSpc>
-                <a:spcPct val="118000"/>
-              </a:lnSpc>
-              <a:spcAft>
-                <a:spcPts val="400"/>
-              </a:spcAft>
-            </a:pPr>
-            <a:r>
-              <a:rPr sz="1200" b="0" i="0">
-                <a:solidFill>
-                  <a:srgbClr val="0E1F1A"/>
-                </a:solidFill>
-                <a:latin typeface="Segoe UI"/>
-              </a:rPr>
-              <a:t>FCM/APNs push, SMS &amp; voice gateways — closed-app reminder delivery</a:t>
-            </a:r>
-          </a:p>
-          <a:p>
-            <a:pPr algn="l">
-              <a:lnSpc>
-                <a:spcPct val="118000"/>
-              </a:lnSpc>
-              <a:spcAft>
-                <a:spcPts val="400"/>
-              </a:spcAft>
-            </a:pPr>
-            <a:r>
-              <a:rPr sz="1200" b="0" i="0">
-                <a:solidFill>
-                  <a:srgbClr val="0E1F1A"/>
-                </a:solidFill>
-                <a:latin typeface="Segoe UI"/>
-              </a:rPr>
-              <a:t>Amadeus/Travelport, Uber/Ola, IRCTC behind one adapter — real bookings</a:t>
-            </a:r>
-          </a:p>
-        </p:txBody>
-      </p:sp>
-      <p:sp>
-        <p:nvSpPr>
-          <p:cNvPr id="10" name="TextBox 9"/>
+                <a:spcPct val="102000"/>
+              </a:lnSpc>
+              <a:spcAft>
+                <a:spcPts val="400"/>
+              </a:spcAft>
+            </a:pPr>
+            <a:r>
+              <a:rPr sz="1100" b="0" i="0">
+                <a:solidFill>
+                  <a:srgbClr val="4E635C"/>
+                </a:solidFill>
+                <a:latin typeface="Segoe UI"/>
+              </a:rPr>
+              <a:t>gpt-oss rejects a schema Llama accepts — took the Pilgrimage path down in production. Failover now covers 400/413/422/503, not just quota.</a:t>
+            </a:r>
+          </a:p>
+        </p:txBody>
+      </p:sp>
+      <p:sp>
+        <p:nvSpPr>
+          <p:cNvPr id="10" name="Rounded Rectangle 9"/>
+          <p:cNvSpPr/>
+          <p:nvPr/>
+        </p:nvSpPr>
+        <p:spPr>
+          <a:xfrm>
+            <a:off x="502920" y="3547872"/>
+            <a:ext cx="11201400" cy="859536"/>
+          </a:xfrm>
+          <a:prstGeom prst="roundRect">
+            <a:avLst>
+              <a:gd name="adj" fmla="val 8000"/>
+            </a:avLst>
+          </a:prstGeom>
+          <a:solidFill>
+            <a:srgbClr val="FFFFFF"/>
+          </a:solidFill>
+          <a:ln w="12700">
+            <a:solidFill>
+              <a:srgbClr val="D8DFDB"/>
+            </a:solidFill>
+          </a:ln>
+          <a:effectLst/>
+        </p:spPr>
+        <p:style>
+          <a:lnRef idx="1">
+            <a:schemeClr val="accent1"/>
+          </a:lnRef>
+          <a:fillRef idx="3">
+            <a:schemeClr val="accent1"/>
+          </a:fillRef>
+          <a:effectRef idx="2">
+            <a:schemeClr val="accent1"/>
+          </a:effectRef>
+          <a:fontRef idx="minor">
+            <a:schemeClr val="lt1"/>
+          </a:fontRef>
+        </p:style>
+        <p:txBody>
+          <a:bodyPr rtlCol="0" anchor="ctr"/>
+          <a:lstStyle/>
+          <a:p>
+            <a:pPr algn="ctr"/>
+            <a:endParaRPr/>
+          </a:p>
+        </p:txBody>
+      </p:sp>
+      <p:sp>
+        <p:nvSpPr>
+          <p:cNvPr id="11" name="TextBox 10"/>
           <p:cNvSpPr txBox="1"/>
           <p:nvPr/>
         </p:nvSpPr>
         <p:spPr>
           <a:xfrm>
-            <a:off x="6428232" y="5029200"/>
-            <a:ext cx="5120640" cy="731520"/>
+            <a:off x="731520" y="3621024"/>
+            <a:ext cx="3108960" cy="731520"/>
           </a:xfrm>
           <a:prstGeom prst="rect">
             <a:avLst/>
@@ -4691,20 +4588,328 @@
           <a:p>
             <a:pPr algn="l">
               <a:lnSpc>
-                <a:spcPct val="100000"/>
-              </a:lnSpc>
-              <a:spcAft>
-                <a:spcPts val="400"/>
-              </a:spcAft>
-            </a:pPr>
-            <a:r>
-              <a:rPr sz="1200" b="1" i="0">
+                <a:spcPct val="98000"/>
+              </a:lnSpc>
+              <a:spcAft>
+                <a:spcPts val="400"/>
+              </a:spcAft>
+            </a:pPr>
+            <a:r>
+              <a:rPr sz="1300" b="1" i="0">
+                <a:solidFill>
+                  <a:srgbClr val="0E1F1A"/>
+                </a:solidFill>
+                <a:latin typeface="Segoe UI"/>
+              </a:rPr>
+              <a:t>A few-shot example leaked into output</a:t>
+            </a:r>
+          </a:p>
+        </p:txBody>
+      </p:sp>
+      <p:sp>
+        <p:nvSpPr>
+          <p:cNvPr id="12" name="TextBox 11"/>
+          <p:cNvSpPr txBox="1"/>
+          <p:nvPr/>
+        </p:nvSpPr>
+        <p:spPr>
+          <a:xfrm>
+            <a:off x="3977639" y="3621024"/>
+            <a:ext cx="7543800" cy="777240"/>
+          </a:xfrm>
+          <a:prstGeom prst="rect">
+            <a:avLst/>
+          </a:prstGeom>
+          <a:noFill/>
+        </p:spPr>
+        <p:txBody>
+          <a:bodyPr wrap="square" anchor="t">
+            <a:spAutoFit/>
+          </a:bodyPr>
+          <a:lstStyle/>
+          <a:p>
+            <a:pPr algn="l">
+              <a:lnSpc>
+                <a:spcPct val="102000"/>
+              </a:lnSpc>
+              <a:spcAft>
+                <a:spcPts val="400"/>
+              </a:spcAft>
+            </a:pPr>
+            <a:r>
+              <a:rPr sz="1100" b="0" i="0">
                 <a:solidFill>
                   <a:srgbClr val="4E635C"/>
                 </a:solidFill>
                 <a:latin typeface="Segoe UI"/>
               </a:rPr>
-              <a:t>Adding these before validation would be infrastructure without a user.</a:t>
+              <a:t>The Booking prompt said “like Bengaluru → Gokarna…” and got no origin field — so Bengaluru appeared in everyone’s reminders. Fix: origin in the payload, no city named in any prompt. Verified from Guwahati.</a:t>
+            </a:r>
+          </a:p>
+        </p:txBody>
+      </p:sp>
+      <p:sp>
+        <p:nvSpPr>
+          <p:cNvPr id="13" name="Rounded Rectangle 12"/>
+          <p:cNvSpPr/>
+          <p:nvPr/>
+        </p:nvSpPr>
+        <p:spPr>
+          <a:xfrm>
+            <a:off x="502920" y="4498848"/>
+            <a:ext cx="11201400" cy="859536"/>
+          </a:xfrm>
+          <a:prstGeom prst="roundRect">
+            <a:avLst>
+              <a:gd name="adj" fmla="val 8000"/>
+            </a:avLst>
+          </a:prstGeom>
+          <a:solidFill>
+            <a:srgbClr val="FFFFFF"/>
+          </a:solidFill>
+          <a:ln w="12700">
+            <a:solidFill>
+              <a:srgbClr val="D8DFDB"/>
+            </a:solidFill>
+          </a:ln>
+          <a:effectLst/>
+        </p:spPr>
+        <p:style>
+          <a:lnRef idx="1">
+            <a:schemeClr val="accent1"/>
+          </a:lnRef>
+          <a:fillRef idx="3">
+            <a:schemeClr val="accent1"/>
+          </a:fillRef>
+          <a:effectRef idx="2">
+            <a:schemeClr val="accent1"/>
+          </a:effectRef>
+          <a:fontRef idx="minor">
+            <a:schemeClr val="lt1"/>
+          </a:fontRef>
+        </p:style>
+        <p:txBody>
+          <a:bodyPr rtlCol="0" anchor="ctr"/>
+          <a:lstStyle/>
+          <a:p>
+            <a:pPr algn="ctr"/>
+            <a:endParaRPr/>
+          </a:p>
+        </p:txBody>
+      </p:sp>
+      <p:sp>
+        <p:nvSpPr>
+          <p:cNvPr id="14" name="TextBox 13"/>
+          <p:cNvSpPr txBox="1"/>
+          <p:nvPr/>
+        </p:nvSpPr>
+        <p:spPr>
+          <a:xfrm>
+            <a:off x="731520" y="4572000"/>
+            <a:ext cx="3108960" cy="731520"/>
+          </a:xfrm>
+          <a:prstGeom prst="rect">
+            <a:avLst/>
+          </a:prstGeom>
+          <a:noFill/>
+        </p:spPr>
+        <p:txBody>
+          <a:bodyPr wrap="square" anchor="t">
+            <a:spAutoFit/>
+          </a:bodyPr>
+          <a:lstStyle/>
+          <a:p>
+            <a:pPr algn="l">
+              <a:lnSpc>
+                <a:spcPct val="98000"/>
+              </a:lnSpc>
+              <a:spcAft>
+                <a:spcPts val="400"/>
+              </a:spcAft>
+            </a:pPr>
+            <a:r>
+              <a:rPr sz="1300" b="1" i="0">
+                <a:solidFill>
+                  <a:srgbClr val="0E1F1A"/>
+                </a:solidFill>
+                <a:latin typeface="Segoe UI"/>
+              </a:rPr>
+              <a:t>Approvals survived price changes</a:t>
+            </a:r>
+          </a:p>
+        </p:txBody>
+      </p:sp>
+      <p:sp>
+        <p:nvSpPr>
+          <p:cNvPr id="15" name="TextBox 14"/>
+          <p:cNvSpPr txBox="1"/>
+          <p:nvPr/>
+        </p:nvSpPr>
+        <p:spPr>
+          <a:xfrm>
+            <a:off x="3977639" y="4572000"/>
+            <a:ext cx="7543800" cy="777240"/>
+          </a:xfrm>
+          <a:prstGeom prst="rect">
+            <a:avLst/>
+          </a:prstGeom>
+          <a:noFill/>
+        </p:spPr>
+        <p:txBody>
+          <a:bodyPr wrap="square" anchor="t">
+            <a:spAutoFit/>
+          </a:bodyPr>
+          <a:lstStyle/>
+          <a:p>
+            <a:pPr algn="l">
+              <a:lnSpc>
+                <a:spcPct val="102000"/>
+              </a:lnSpc>
+              <a:spcAft>
+                <a:spcPts val="400"/>
+              </a:spcAft>
+            </a:pPr>
+            <a:r>
+              <a:rPr sz="1100" b="0" i="0">
+                <a:solidFill>
+                  <a:srgbClr val="4E635C"/>
+                </a:solidFill>
+                <a:latin typeface="Segoe UI"/>
+              </a:rPr>
+              <a:t>You could approve ₹8,000 and confirm ₹14,000. Now any amount change revokes its approval — consent is to a number, not a line item.</a:t>
+            </a:r>
+          </a:p>
+        </p:txBody>
+      </p:sp>
+      <p:sp>
+        <p:nvSpPr>
+          <p:cNvPr id="16" name="Rounded Rectangle 15"/>
+          <p:cNvSpPr/>
+          <p:nvPr/>
+        </p:nvSpPr>
+        <p:spPr>
+          <a:xfrm>
+            <a:off x="502920" y="5449824"/>
+            <a:ext cx="11201400" cy="859536"/>
+          </a:xfrm>
+          <a:prstGeom prst="roundRect">
+            <a:avLst>
+              <a:gd name="adj" fmla="val 8000"/>
+            </a:avLst>
+          </a:prstGeom>
+          <a:solidFill>
+            <a:srgbClr val="FFFFFF"/>
+          </a:solidFill>
+          <a:ln w="12700">
+            <a:solidFill>
+              <a:srgbClr val="D8DFDB"/>
+            </a:solidFill>
+          </a:ln>
+          <a:effectLst/>
+        </p:spPr>
+        <p:style>
+          <a:lnRef idx="1">
+            <a:schemeClr val="accent1"/>
+          </a:lnRef>
+          <a:fillRef idx="3">
+            <a:schemeClr val="accent1"/>
+          </a:fillRef>
+          <a:effectRef idx="2">
+            <a:schemeClr val="accent1"/>
+          </a:effectRef>
+          <a:fontRef idx="minor">
+            <a:schemeClr val="lt1"/>
+          </a:fontRef>
+        </p:style>
+        <p:txBody>
+          <a:bodyPr rtlCol="0" anchor="ctr"/>
+          <a:lstStyle/>
+          <a:p>
+            <a:pPr algn="ctr"/>
+            <a:endParaRPr/>
+          </a:p>
+        </p:txBody>
+      </p:sp>
+      <p:sp>
+        <p:nvSpPr>
+          <p:cNvPr id="17" name="TextBox 16"/>
+          <p:cNvSpPr txBox="1"/>
+          <p:nvPr/>
+        </p:nvSpPr>
+        <p:spPr>
+          <a:xfrm>
+            <a:off x="731520" y="5522976"/>
+            <a:ext cx="3108960" cy="731520"/>
+          </a:xfrm>
+          <a:prstGeom prst="rect">
+            <a:avLst/>
+          </a:prstGeom>
+          <a:noFill/>
+        </p:spPr>
+        <p:txBody>
+          <a:bodyPr wrap="square" anchor="t">
+            <a:spAutoFit/>
+          </a:bodyPr>
+          <a:lstStyle/>
+          <a:p>
+            <a:pPr algn="l">
+              <a:lnSpc>
+                <a:spcPct val="98000"/>
+              </a:lnSpc>
+              <a:spcAft>
+                <a:spcPts val="400"/>
+              </a:spcAft>
+            </a:pPr>
+            <a:r>
+              <a:rPr sz="1300" b="1" i="0">
+                <a:solidFill>
+                  <a:srgbClr val="0E1F1A"/>
+                </a:solidFill>
+                <a:latin typeface="Segoe UI"/>
+              </a:rPr>
+              <a:t>Built features were invisible</a:t>
+            </a:r>
+          </a:p>
+        </p:txBody>
+      </p:sp>
+      <p:sp>
+        <p:nvSpPr>
+          <p:cNvPr id="18" name="TextBox 17"/>
+          <p:cNvSpPr txBox="1"/>
+          <p:nvPr/>
+        </p:nvSpPr>
+        <p:spPr>
+          <a:xfrm>
+            <a:off x="3977639" y="5522976"/>
+            <a:ext cx="7543800" cy="777240"/>
+          </a:xfrm>
+          <a:prstGeom prst="rect">
+            <a:avLst/>
+          </a:prstGeom>
+          <a:noFill/>
+        </p:spPr>
+        <p:txBody>
+          <a:bodyPr wrap="square" anchor="t">
+            <a:spAutoFit/>
+          </a:bodyPr>
+          <a:lstStyle/>
+          <a:p>
+            <a:pPr algn="l">
+              <a:lnSpc>
+                <a:spcPct val="102000"/>
+              </a:lnSpc>
+              <a:spcAft>
+                <a:spcPts val="400"/>
+              </a:spcAft>
+            </a:pPr>
+            <a:r>
+              <a:rPr sz="1100" b="0" i="0">
+                <a:solidFill>
+                  <a:srgbClr val="4E635C"/>
+                </a:solidFill>
+                <a:latin typeface="Segoe UI"/>
+              </a:rPr>
+              <a:t>Confirm, reminders, email all shipped — behind an unsignposted gate chain. A gate that hides what is behind it looks unbuilt. Fix: the four-step stepper on every plan.</a:t>
             </a:r>
           </a:p>
         </p:txBody>
@@ -4779,7 +4984,7 @@
                 </a:solidFill>
                 <a:latin typeface="Segoe UI"/>
               </a:rPr>
-              <a:t>APPENDIX A3</a:t>
+              <a:t>APPENDIX A4</a:t>
             </a:r>
           </a:p>
         </p:txBody>
@@ -4821,7 +5026,7 @@
                 </a:solidFill>
                 <a:latin typeface="Segoe UI"/>
               </a:rPr>
-              <a:t>Challenges we actually hit (and what each taught us)</a:t>
+              <a:t>Testing two failure modes · ethics as shipped behaviour</a:t>
             </a:r>
           </a:p>
         </p:txBody>
@@ -4835,7 +5040,7 @@
         <p:spPr>
           <a:xfrm>
             <a:off x="502920" y="1645920"/>
-            <a:ext cx="11201400" cy="859536"/>
+            <a:ext cx="5532120" cy="4297680"/>
           </a:xfrm>
           <a:prstGeom prst="roundRect">
             <a:avLst>
@@ -4883,8 +5088,8 @@
         </p:nvSpPr>
         <p:spPr>
           <a:xfrm>
-            <a:off x="731520" y="1719072"/>
-            <a:ext cx="3108960" cy="731520"/>
+            <a:off x="731520" y="1783080"/>
+            <a:ext cx="5029200" cy="365760"/>
           </a:xfrm>
           <a:prstGeom prst="rect">
             <a:avLst/>
@@ -4899,20 +5104,20 @@
           <a:p>
             <a:pPr algn="l">
               <a:lnSpc>
-                <a:spcPct val="98000"/>
-              </a:lnSpc>
-              <a:spcAft>
-                <a:spcPts val="400"/>
-              </a:spcAft>
-            </a:pPr>
-            <a:r>
-              <a:rPr sz="1300" b="1" i="0">
-                <a:solidFill>
-                  <a:srgbClr val="0E1F1A"/>
-                </a:solidFill>
-                <a:latin typeface="Segoe UI"/>
-              </a:rPr>
-              <a:t>Free-tier quota died mid-build</a:t>
+                <a:spcPct val="100000"/>
+              </a:lnSpc>
+              <a:spcAft>
+                <a:spcPts val="400"/>
+              </a:spcAft>
+            </a:pPr>
+            <a:r>
+              <a:rPr sz="1200" b="1" i="0">
+                <a:solidFill>
+                  <a:srgbClr val="14453D"/>
+                </a:solidFill>
+                <a:latin typeface="Segoe UI"/>
+              </a:rPr>
+              <a:t>TESTING</a:t>
             </a:r>
           </a:p>
         </p:txBody>
@@ -4925,8 +5130,8 @@
         </p:nvSpPr>
         <p:spPr>
           <a:xfrm>
-            <a:off x="3977639" y="1719072"/>
-            <a:ext cx="7543800" cy="777240"/>
+            <a:off x="731520" y="2148840"/>
+            <a:ext cx="5120640" cy="3657600"/>
           </a:xfrm>
           <a:prstGeom prst="rect">
             <a:avLst/>
@@ -4941,20 +5146,115 @@
           <a:p>
             <a:pPr algn="l">
               <a:lnSpc>
-                <a:spcPct val="102000"/>
-              </a:lnSpc>
-              <a:spcAft>
-                <a:spcPts val="400"/>
-              </a:spcAft>
-            </a:pPr>
-            <a:r>
-              <a:rPr sz="1100" b="0" i="0">
-                <a:solidFill>
-                  <a:srgbClr val="4E635C"/>
-                </a:solidFill>
-                <a:latin typeface="Segoe UI"/>
-              </a:rPr>
-              <a:t>The real limit was tokens-per-day, visible only in the 429 body. Built three-model per-agent failover; verified with the primary model fully exhausted.</a:t>
+                <a:spcPct val="115000"/>
+              </a:lnSpc>
+              <a:spcAft>
+                <a:spcPts val="400"/>
+              </a:spcAft>
+            </a:pPr>
+            <a:r>
+              <a:rPr sz="1150" b="0" i="0">
+                <a:solidFill>
+                  <a:srgbClr val="0E1F1A"/>
+                </a:solidFill>
+                <a:latin typeface="Segoe UI"/>
+              </a:rPr>
+              <a:t>Two failure modes: software bugs AND AI failures (hallucination, silent bad money decisions).</a:t>
+            </a:r>
+          </a:p>
+          <a:p>
+            <a:pPr algn="l">
+              <a:lnSpc>
+                <a:spcPct val="115000"/>
+              </a:lnSpc>
+              <a:spcAft>
+                <a:spcPts val="400"/>
+              </a:spcAft>
+            </a:pPr>
+            <a:r>
+              <a:rPr sz="1150" b="0" i="0">
+                <a:solidFill>
+                  <a:srgbClr val="0E1F1A"/>
+                </a:solidFill>
+                <a:latin typeface="Segoe UI"/>
+              </a:rPr>
+              <a:t>Offline regression per agent — fixed input/output suites re-run before any prompt change.</a:t>
+            </a:r>
+          </a:p>
+          <a:p>
+            <a:pPr algn="l">
+              <a:lnSpc>
+                <a:spcPct val="115000"/>
+              </a:lnSpc>
+              <a:spcAft>
+                <a:spcPts val="400"/>
+              </a:spcAft>
+            </a:pPr>
+            <a:r>
+              <a:rPr sz="1150" b="0" i="0">
+                <a:solidFill>
+                  <a:srgbClr val="0E1F1A"/>
+                </a:solidFill>
+                <a:latin typeface="Segoe UI"/>
+              </a:rPr>
+              <a:t>Observability — every agent decision and handoff logged; the raw JSON log is on every trip page.</a:t>
+            </a:r>
+          </a:p>
+          <a:p>
+            <a:pPr algn="l">
+              <a:lnSpc>
+                <a:spcPct val="115000"/>
+              </a:lnSpc>
+              <a:spcAft>
+                <a:spcPts val="400"/>
+              </a:spcAft>
+            </a:pPr>
+            <a:r>
+              <a:rPr sz="1150" b="0" i="0">
+                <a:solidFill>
+                  <a:srgbClr val="0E1F1A"/>
+                </a:solidFill>
+                <a:latin typeface="Segoe UI"/>
+              </a:rPr>
+              <a:t>RAG grounding — places from map data, not model memory.</a:t>
+            </a:r>
+          </a:p>
+          <a:p>
+            <a:pPr algn="l">
+              <a:lnSpc>
+                <a:spcPct val="115000"/>
+              </a:lnSpc>
+              <a:spcAft>
+                <a:spcPts val="400"/>
+              </a:spcAft>
+            </a:pPr>
+            <a:r>
+              <a:rPr sz="1150" b="0" i="0">
+                <a:solidFill>
+                  <a:srgbClr val="0E1F1A"/>
+                </a:solidFill>
+                <a:latin typeface="Segoe UI"/>
+              </a:rPr>
+              <a:t>Human-in-the-loop mandatory above the spend threshold.</a:t>
+            </a:r>
+          </a:p>
+          <a:p>
+            <a:pPr algn="l">
+              <a:lnSpc>
+                <a:spcPct val="115000"/>
+              </a:lnSpc>
+              <a:spcAft>
+                <a:spcPts val="400"/>
+              </a:spcAft>
+            </a:pPr>
+            <a:r>
+              <a:rPr sz="1150" b="0" i="0">
+                <a:solidFill>
+                  <a:srgbClr val="0E1F1A"/>
+                </a:solidFill>
+                <a:latin typeface="Segoe UI"/>
+              </a:rPr>
+              <a:t>Moderated UAT with 5–8 real users before release.</a:t>
             </a:r>
           </a:p>
         </p:txBody>
@@ -4967,8 +5267,8 @@
         </p:nvSpPr>
         <p:spPr>
           <a:xfrm>
-            <a:off x="502920" y="2596896"/>
-            <a:ext cx="11201400" cy="859536"/>
+            <a:off x="6199632" y="1645920"/>
+            <a:ext cx="5532120" cy="4297680"/>
           </a:xfrm>
           <a:prstGeom prst="roundRect">
             <a:avLst>
@@ -5016,8 +5316,8 @@
         </p:nvSpPr>
         <p:spPr>
           <a:xfrm>
-            <a:off x="731520" y="2670048"/>
-            <a:ext cx="3108960" cy="731520"/>
+            <a:off x="6428232" y="1783080"/>
+            <a:ext cx="5029200" cy="365760"/>
           </a:xfrm>
           <a:prstGeom prst="rect">
             <a:avLst/>
@@ -5032,20 +5332,20 @@
           <a:p>
             <a:pPr algn="l">
               <a:lnSpc>
-                <a:spcPct val="98000"/>
-              </a:lnSpc>
-              <a:spcAft>
-                <a:spcPts val="400"/>
-              </a:spcAft>
-            </a:pPr>
-            <a:r>
-              <a:rPr sz="1300" b="1" i="0">
-                <a:solidFill>
-                  <a:srgbClr val="0E1F1A"/>
-                </a:solidFill>
-                <a:latin typeface="Segoe UI"/>
-              </a:rPr>
-              <a:t>One model 400’d on a nested schema</a:t>
+                <a:spcPct val="100000"/>
+              </a:lnSpc>
+              <a:spcAft>
+                <a:spcPts val="400"/>
+              </a:spcAft>
+            </a:pPr>
+            <a:r>
+              <a:rPr sz="1200" b="1" i="0">
+                <a:solidFill>
+                  <a:srgbClr val="C58200"/>
+                </a:solidFill>
+                <a:latin typeface="Segoe UI"/>
+              </a:rPr>
+              <a:t>ETHICS — LIVE IN THE PRODUCT</a:t>
             </a:r>
           </a:p>
         </p:txBody>
@@ -5058,8 +5358,8 @@
         </p:nvSpPr>
         <p:spPr>
           <a:xfrm>
-            <a:off x="3977639" y="2670048"/>
-            <a:ext cx="7543800" cy="777240"/>
+            <a:off x="6428232" y="2148840"/>
+            <a:ext cx="5120640" cy="3657600"/>
           </a:xfrm>
           <a:prstGeom prst="rect">
             <a:avLst/>
@@ -5074,419 +5374,115 @@
           <a:p>
             <a:pPr algn="l">
               <a:lnSpc>
-                <a:spcPct val="102000"/>
-              </a:lnSpc>
-              <a:spcAft>
-                <a:spcPts val="400"/>
-              </a:spcAft>
-            </a:pPr>
-            <a:r>
-              <a:rPr sz="1100" b="0" i="0">
-                <a:solidFill>
-                  <a:srgbClr val="4E635C"/>
-                </a:solidFill>
-                <a:latin typeface="Segoe UI"/>
-              </a:rPr>
-              <a:t>gpt-oss rejects a schema Llama accepts — took the Pilgrimage path down in production. Failover now covers 400/413/422/503, not just quota.</a:t>
-            </a:r>
-          </a:p>
-        </p:txBody>
-      </p:sp>
-      <p:sp>
-        <p:nvSpPr>
-          <p:cNvPr id="10" name="Rounded Rectangle 9"/>
-          <p:cNvSpPr/>
-          <p:nvPr/>
-        </p:nvSpPr>
-        <p:spPr>
-          <a:xfrm>
-            <a:off x="502920" y="3547872"/>
-            <a:ext cx="11201400" cy="859536"/>
-          </a:xfrm>
-          <a:prstGeom prst="roundRect">
-            <a:avLst>
-              <a:gd name="adj" fmla="val 8000"/>
-            </a:avLst>
-          </a:prstGeom>
-          <a:solidFill>
-            <a:srgbClr val="FFFFFF"/>
-          </a:solidFill>
-          <a:ln w="12700">
-            <a:solidFill>
-              <a:srgbClr val="D8DFDB"/>
-            </a:solidFill>
-          </a:ln>
-          <a:effectLst/>
-        </p:spPr>
-        <p:style>
-          <a:lnRef idx="1">
-            <a:schemeClr val="accent1"/>
-          </a:lnRef>
-          <a:fillRef idx="3">
-            <a:schemeClr val="accent1"/>
-          </a:fillRef>
-          <a:effectRef idx="2">
-            <a:schemeClr val="accent1"/>
-          </a:effectRef>
-          <a:fontRef idx="minor">
-            <a:schemeClr val="lt1"/>
-          </a:fontRef>
-        </p:style>
-        <p:txBody>
-          <a:bodyPr rtlCol="0" anchor="ctr"/>
-          <a:lstStyle/>
-          <a:p>
-            <a:pPr algn="ctr"/>
-            <a:endParaRPr/>
-          </a:p>
-        </p:txBody>
-      </p:sp>
-      <p:sp>
-        <p:nvSpPr>
-          <p:cNvPr id="11" name="TextBox 10"/>
-          <p:cNvSpPr txBox="1"/>
-          <p:nvPr/>
-        </p:nvSpPr>
-        <p:spPr>
-          <a:xfrm>
-            <a:off x="731520" y="3621024"/>
-            <a:ext cx="3108960" cy="731520"/>
-          </a:xfrm>
-          <a:prstGeom prst="rect">
-            <a:avLst/>
-          </a:prstGeom>
-          <a:noFill/>
-        </p:spPr>
-        <p:txBody>
-          <a:bodyPr wrap="square" anchor="t">
-            <a:spAutoFit/>
-          </a:bodyPr>
-          <a:lstStyle/>
-          <a:p>
-            <a:pPr algn="l">
-              <a:lnSpc>
-                <a:spcPct val="98000"/>
-              </a:lnSpc>
-              <a:spcAft>
-                <a:spcPts val="400"/>
-              </a:spcAft>
-            </a:pPr>
-            <a:r>
-              <a:rPr sz="1300" b="1" i="0">
+                <a:spcPct val="115000"/>
+              </a:lnSpc>
+              <a:spcAft>
+                <a:spcPts val="400"/>
+              </a:spcAft>
+            </a:pPr>
+            <a:r>
+              <a:rPr sz="1150" b="0" i="0">
                 <a:solidFill>
                   <a:srgbClr val="0E1F1A"/>
                 </a:solidFill>
                 <a:latin typeface="Segoe UI"/>
               </a:rPr>
-              <a:t>A few-shot example leaked into output</a:t>
-            </a:r>
-          </a:p>
-        </p:txBody>
-      </p:sp>
-      <p:sp>
-        <p:nvSpPr>
-          <p:cNvPr id="12" name="TextBox 11"/>
-          <p:cNvSpPr txBox="1"/>
-          <p:nvPr/>
-        </p:nvSpPr>
-        <p:spPr>
-          <a:xfrm>
-            <a:off x="3977639" y="3621024"/>
-            <a:ext cx="7543800" cy="777240"/>
-          </a:xfrm>
-          <a:prstGeom prst="rect">
-            <a:avLst/>
-          </a:prstGeom>
-          <a:noFill/>
-        </p:spPr>
-        <p:txBody>
-          <a:bodyPr wrap="square" anchor="t">
-            <a:spAutoFit/>
-          </a:bodyPr>
-          <a:lstStyle/>
-          <a:p>
-            <a:pPr algn="l">
-              <a:lnSpc>
-                <a:spcPct val="102000"/>
-              </a:lnSpc>
-              <a:spcAft>
-                <a:spcPts val="400"/>
-              </a:spcAft>
-            </a:pPr>
-            <a:r>
-              <a:rPr sz="1100" b="0" i="0">
-                <a:solidFill>
-                  <a:srgbClr val="4E635C"/>
-                </a:solidFill>
-                <a:latin typeface="Segoe UI"/>
-              </a:rPr>
-              <a:t>The Booking prompt said “like Bengaluru → Gokarna…” and got no origin field — so Bengaluru appeared in everyone’s reminders. Fix: origin in the payload, no city named in any prompt. Verified from Guwahati.</a:t>
-            </a:r>
-          </a:p>
-        </p:txBody>
-      </p:sp>
-      <p:sp>
-        <p:nvSpPr>
-          <p:cNvPr id="13" name="Rounded Rectangle 12"/>
-          <p:cNvSpPr/>
-          <p:nvPr/>
-        </p:nvSpPr>
-        <p:spPr>
-          <a:xfrm>
-            <a:off x="502920" y="4498848"/>
-            <a:ext cx="11201400" cy="859536"/>
-          </a:xfrm>
-          <a:prstGeom prst="roundRect">
-            <a:avLst>
-              <a:gd name="adj" fmla="val 8000"/>
-            </a:avLst>
-          </a:prstGeom>
-          <a:solidFill>
-            <a:srgbClr val="FFFFFF"/>
-          </a:solidFill>
-          <a:ln w="12700">
-            <a:solidFill>
-              <a:srgbClr val="D8DFDB"/>
-            </a:solidFill>
-          </a:ln>
-          <a:effectLst/>
-        </p:spPr>
-        <p:style>
-          <a:lnRef idx="1">
-            <a:schemeClr val="accent1"/>
-          </a:lnRef>
-          <a:fillRef idx="3">
-            <a:schemeClr val="accent1"/>
-          </a:fillRef>
-          <a:effectRef idx="2">
-            <a:schemeClr val="accent1"/>
-          </a:effectRef>
-          <a:fontRef idx="minor">
-            <a:schemeClr val="lt1"/>
-          </a:fontRef>
-        </p:style>
-        <p:txBody>
-          <a:bodyPr rtlCol="0" anchor="ctr"/>
-          <a:lstStyle/>
-          <a:p>
-            <a:pPr algn="ctr"/>
-            <a:endParaRPr/>
-          </a:p>
-        </p:txBody>
-      </p:sp>
-      <p:sp>
-        <p:nvSpPr>
-          <p:cNvPr id="14" name="TextBox 13"/>
-          <p:cNvSpPr txBox="1"/>
-          <p:nvPr/>
-        </p:nvSpPr>
-        <p:spPr>
-          <a:xfrm>
-            <a:off x="731520" y="4572000"/>
-            <a:ext cx="3108960" cy="731520"/>
-          </a:xfrm>
-          <a:prstGeom prst="rect">
-            <a:avLst/>
-          </a:prstGeom>
-          <a:noFill/>
-        </p:spPr>
-        <p:txBody>
-          <a:bodyPr wrap="square" anchor="t">
-            <a:spAutoFit/>
-          </a:bodyPr>
-          <a:lstStyle/>
-          <a:p>
-            <a:pPr algn="l">
-              <a:lnSpc>
-                <a:spcPct val="98000"/>
-              </a:lnSpc>
-              <a:spcAft>
-                <a:spcPts val="400"/>
-              </a:spcAft>
-            </a:pPr>
-            <a:r>
-              <a:rPr sz="1300" b="1" i="0">
+              <a:t>Privacy: trips never leave the device — stated on the sign-in page.</a:t>
+            </a:r>
+          </a:p>
+          <a:p>
+            <a:pPr algn="l">
+              <a:lnSpc>
+                <a:spcPct val="115000"/>
+              </a:lnSpc>
+              <a:spcAft>
+                <a:spcPts val="400"/>
+              </a:spcAft>
+            </a:pPr>
+            <a:r>
+              <a:rPr sz="1150" b="0" i="0">
                 <a:solidFill>
                   <a:srgbClr val="0E1F1A"/>
                 </a:solidFill>
                 <a:latin typeface="Segoe UI"/>
               </a:rPr>
-              <a:t>Approvals survived price changes</a:t>
-            </a:r>
-          </a:p>
-        </p:txBody>
-      </p:sp>
-      <p:sp>
-        <p:nvSpPr>
-          <p:cNvPr id="15" name="TextBox 14"/>
-          <p:cNvSpPr txBox="1"/>
-          <p:nvPr/>
-        </p:nvSpPr>
-        <p:spPr>
-          <a:xfrm>
-            <a:off x="3977639" y="4572000"/>
-            <a:ext cx="7543800" cy="777240"/>
-          </a:xfrm>
-          <a:prstGeom prst="rect">
-            <a:avLst/>
-          </a:prstGeom>
-          <a:noFill/>
-        </p:spPr>
-        <p:txBody>
-          <a:bodyPr wrap="square" anchor="t">
-            <a:spAutoFit/>
-          </a:bodyPr>
-          <a:lstStyle/>
-          <a:p>
-            <a:pPr algn="l">
-              <a:lnSpc>
-                <a:spcPct val="102000"/>
-              </a:lnSpc>
-              <a:spcAft>
-                <a:spcPts val="400"/>
-              </a:spcAft>
-            </a:pPr>
-            <a:r>
-              <a:rPr sz="1100" b="0" i="0">
-                <a:solidFill>
-                  <a:srgbClr val="4E635C"/>
-                </a:solidFill>
-                <a:latin typeface="Segoe UI"/>
-              </a:rPr>
-              <a:t>You could approve ₹8,000 and confirm ₹14,000. Now any amount change revokes its approval — consent is to a number, not a line item.</a:t>
-            </a:r>
-          </a:p>
-        </p:txBody>
-      </p:sp>
-      <p:sp>
-        <p:nvSpPr>
-          <p:cNvPr id="16" name="Rounded Rectangle 15"/>
-          <p:cNvSpPr/>
-          <p:nvPr/>
-        </p:nvSpPr>
-        <p:spPr>
-          <a:xfrm>
-            <a:off x="502920" y="5449824"/>
-            <a:ext cx="11201400" cy="859536"/>
-          </a:xfrm>
-          <a:prstGeom prst="roundRect">
-            <a:avLst>
-              <a:gd name="adj" fmla="val 8000"/>
-            </a:avLst>
-          </a:prstGeom>
-          <a:solidFill>
-            <a:srgbClr val="FFFFFF"/>
-          </a:solidFill>
-          <a:ln w="12700">
-            <a:solidFill>
-              <a:srgbClr val="D8DFDB"/>
-            </a:solidFill>
-          </a:ln>
-          <a:effectLst/>
-        </p:spPr>
-        <p:style>
-          <a:lnRef idx="1">
-            <a:schemeClr val="accent1"/>
-          </a:lnRef>
-          <a:fillRef idx="3">
-            <a:schemeClr val="accent1"/>
-          </a:fillRef>
-          <a:effectRef idx="2">
-            <a:schemeClr val="accent1"/>
-          </a:effectRef>
-          <a:fontRef idx="minor">
-            <a:schemeClr val="lt1"/>
-          </a:fontRef>
-        </p:style>
-        <p:txBody>
-          <a:bodyPr rtlCol="0" anchor="ctr"/>
-          <a:lstStyle/>
-          <a:p>
-            <a:pPr algn="ctr"/>
-            <a:endParaRPr/>
-          </a:p>
-        </p:txBody>
-      </p:sp>
-      <p:sp>
-        <p:nvSpPr>
-          <p:cNvPr id="17" name="TextBox 16"/>
-          <p:cNvSpPr txBox="1"/>
-          <p:nvPr/>
-        </p:nvSpPr>
-        <p:spPr>
-          <a:xfrm>
-            <a:off x="731520" y="5522976"/>
-            <a:ext cx="3108960" cy="731520"/>
-          </a:xfrm>
-          <a:prstGeom prst="rect">
-            <a:avLst/>
-          </a:prstGeom>
-          <a:noFill/>
-        </p:spPr>
-        <p:txBody>
-          <a:bodyPr wrap="square" anchor="t">
-            <a:spAutoFit/>
-          </a:bodyPr>
-          <a:lstStyle/>
-          <a:p>
-            <a:pPr algn="l">
-              <a:lnSpc>
-                <a:spcPct val="98000"/>
-              </a:lnSpc>
-              <a:spcAft>
-                <a:spcPts val="400"/>
-              </a:spcAft>
-            </a:pPr>
-            <a:r>
-              <a:rPr sz="1300" b="1" i="0">
+              <a:t>No silent substitution: out-of-scope asks are named and explained.</a:t>
+            </a:r>
+          </a:p>
+          <a:p>
+            <a:pPr algn="l">
+              <a:lnSpc>
+                <a:spcPct val="115000"/>
+              </a:lnSpc>
+              <a:spcAft>
+                <a:spcPts val="400"/>
+              </a:spcAft>
+            </a:pPr>
+            <a:r>
+              <a:rPr sz="1150" b="0" i="0">
                 <a:solidFill>
                   <a:srgbClr val="0E1F1A"/>
                 </a:solidFill>
                 <a:latin typeface="Segoe UI"/>
               </a:rPr>
-              <a:t>Built features were invisible</a:t>
-            </a:r>
-          </a:p>
-        </p:txBody>
-      </p:sp>
-      <p:sp>
-        <p:nvSpPr>
-          <p:cNvPr id="18" name="TextBox 17"/>
-          <p:cNvSpPr txBox="1"/>
-          <p:nvPr/>
-        </p:nvSpPr>
-        <p:spPr>
-          <a:xfrm>
-            <a:off x="3977639" y="5522976"/>
-            <a:ext cx="7543800" cy="777240"/>
-          </a:xfrm>
-          <a:prstGeom prst="rect">
-            <a:avLst/>
-          </a:prstGeom>
-          <a:noFill/>
-        </p:spPr>
-        <p:txBody>
-          <a:bodyPr wrap="square" anchor="t">
-            <a:spAutoFit/>
-          </a:bodyPr>
-          <a:lstStyle/>
-          <a:p>
-            <a:pPr algn="l">
-              <a:lnSpc>
-                <a:spcPct val="102000"/>
-              </a:lnSpc>
-              <a:spcAft>
-                <a:spcPts val="400"/>
-              </a:spcAft>
-            </a:pPr>
-            <a:r>
-              <a:rPr sz="1100" b="0" i="0">
-                <a:solidFill>
-                  <a:srgbClr val="4E635C"/>
-                </a:solidFill>
-                <a:latin typeface="Segoe UI"/>
-              </a:rPr>
-              <a:t>Confirm, reminders, email all shipped — behind an unsignposted gate chain. A gate that hides what is behind it looks unbuilt. Fix: the four-step stepper on every plan.</a:t>
+              <a:t>Money: gates, revocation, code-computed arithmetic.</a:t>
+            </a:r>
+          </a:p>
+          <a:p>
+            <a:pPr algn="l">
+              <a:lnSpc>
+                <a:spcPct val="115000"/>
+              </a:lnSpc>
+              <a:spcAft>
+                <a:spcPts val="400"/>
+              </a:spcAft>
+            </a:pPr>
+            <a:r>
+              <a:rPr sz="1150" b="0" i="0">
+                <a:solidFill>
+                  <a:srgbClr val="0E1F1A"/>
+                </a:solidFill>
+                <a:latin typeface="Segoe UI"/>
+              </a:rPr>
+              <a:t>Reminders: opt-in, time-anchored, never engagement-tuned.</a:t>
+            </a:r>
+          </a:p>
+          <a:p>
+            <a:pPr algn="l">
+              <a:lnSpc>
+                <a:spcPct val="115000"/>
+              </a:lnSpc>
+              <a:spcAft>
+                <a:spcPts val="400"/>
+              </a:spcAft>
+            </a:pPr>
+            <a:r>
+              <a:rPr sz="1150" b="0" i="0">
+                <a:solidFill>
+                  <a:srgbClr val="0E1F1A"/>
+                </a:solidFill>
+                <a:latin typeface="Segoe UI"/>
+              </a:rPr>
+              <a:t>No dark patterns: no fake scarcity, no urgency styling, no forced sign-in before value.</a:t>
+            </a:r>
+          </a:p>
+          <a:p>
+            <a:pPr algn="l">
+              <a:lnSpc>
+                <a:spcPct val="115000"/>
+              </a:lnSpc>
+              <a:spcAft>
+                <a:spcPts val="400"/>
+              </a:spcAft>
+            </a:pPr>
+            <a:r>
+              <a:rPr sz="1150" b="0" i="0">
+                <a:solidFill>
+                  <a:srgbClr val="0E1F1A"/>
+                </a:solidFill>
+                <a:latin typeface="Segoe UI"/>
+              </a:rPr>
+              <a:t>Standing question at every review: could we defend this to a journalist?</a:t>
             </a:r>
           </a:p>
         </p:txBody>
@@ -5561,579 +5557,6 @@
                 </a:solidFill>
                 <a:latin typeface="Segoe UI"/>
               </a:rPr>
-              <a:t>APPENDIX A4</a:t>
-            </a:r>
-          </a:p>
-        </p:txBody>
-      </p:sp>
-      <p:sp>
-        <p:nvSpPr>
-          <p:cNvPr id="3" name="TextBox 2"/>
-          <p:cNvSpPr txBox="1"/>
-          <p:nvPr/>
-        </p:nvSpPr>
-        <p:spPr>
-          <a:xfrm>
-            <a:off x="502920" y="658368"/>
-            <a:ext cx="11155680" cy="822960"/>
-          </a:xfrm>
-          <a:prstGeom prst="rect">
-            <a:avLst/>
-          </a:prstGeom>
-          <a:noFill/>
-        </p:spPr>
-        <p:txBody>
-          <a:bodyPr wrap="square" anchor="t">
-            <a:spAutoFit/>
-          </a:bodyPr>
-          <a:lstStyle/>
-          <a:p>
-            <a:pPr algn="l">
-              <a:lnSpc>
-                <a:spcPct val="100000"/>
-              </a:lnSpc>
-              <a:spcAft>
-                <a:spcPts val="400"/>
-              </a:spcAft>
-            </a:pPr>
-            <a:r>
-              <a:rPr sz="2800" b="1" i="0">
-                <a:solidFill>
-                  <a:srgbClr val="0E1F1A"/>
-                </a:solidFill>
-                <a:latin typeface="Segoe UI"/>
-              </a:rPr>
-              <a:t>Testing two failure modes · ethics as shipped behaviour</a:t>
-            </a:r>
-          </a:p>
-        </p:txBody>
-      </p:sp>
-      <p:sp>
-        <p:nvSpPr>
-          <p:cNvPr id="4" name="Rounded Rectangle 3"/>
-          <p:cNvSpPr/>
-          <p:nvPr/>
-        </p:nvSpPr>
-        <p:spPr>
-          <a:xfrm>
-            <a:off x="502920" y="1645920"/>
-            <a:ext cx="5532120" cy="4297680"/>
-          </a:xfrm>
-          <a:prstGeom prst="roundRect">
-            <a:avLst>
-              <a:gd name="adj" fmla="val 8000"/>
-            </a:avLst>
-          </a:prstGeom>
-          <a:solidFill>
-            <a:srgbClr val="FFFFFF"/>
-          </a:solidFill>
-          <a:ln w="12700">
-            <a:solidFill>
-              <a:srgbClr val="D8DFDB"/>
-            </a:solidFill>
-          </a:ln>
-          <a:effectLst/>
-        </p:spPr>
-        <p:style>
-          <a:lnRef idx="1">
-            <a:schemeClr val="accent1"/>
-          </a:lnRef>
-          <a:fillRef idx="3">
-            <a:schemeClr val="accent1"/>
-          </a:fillRef>
-          <a:effectRef idx="2">
-            <a:schemeClr val="accent1"/>
-          </a:effectRef>
-          <a:fontRef idx="minor">
-            <a:schemeClr val="lt1"/>
-          </a:fontRef>
-        </p:style>
-        <p:txBody>
-          <a:bodyPr rtlCol="0" anchor="ctr"/>
-          <a:lstStyle/>
-          <a:p>
-            <a:pPr algn="ctr"/>
-            <a:endParaRPr/>
-          </a:p>
-        </p:txBody>
-      </p:sp>
-      <p:sp>
-        <p:nvSpPr>
-          <p:cNvPr id="5" name="TextBox 4"/>
-          <p:cNvSpPr txBox="1"/>
-          <p:nvPr/>
-        </p:nvSpPr>
-        <p:spPr>
-          <a:xfrm>
-            <a:off x="731520" y="1783080"/>
-            <a:ext cx="5029200" cy="365760"/>
-          </a:xfrm>
-          <a:prstGeom prst="rect">
-            <a:avLst/>
-          </a:prstGeom>
-          <a:noFill/>
-        </p:spPr>
-        <p:txBody>
-          <a:bodyPr wrap="square" anchor="t">
-            <a:spAutoFit/>
-          </a:bodyPr>
-          <a:lstStyle/>
-          <a:p>
-            <a:pPr algn="l">
-              <a:lnSpc>
-                <a:spcPct val="100000"/>
-              </a:lnSpc>
-              <a:spcAft>
-                <a:spcPts val="400"/>
-              </a:spcAft>
-            </a:pPr>
-            <a:r>
-              <a:rPr sz="1200" b="1" i="0">
-                <a:solidFill>
-                  <a:srgbClr val="14453D"/>
-                </a:solidFill>
-                <a:latin typeface="Segoe UI"/>
-              </a:rPr>
-              <a:t>TESTING</a:t>
-            </a:r>
-          </a:p>
-        </p:txBody>
-      </p:sp>
-      <p:sp>
-        <p:nvSpPr>
-          <p:cNvPr id="6" name="TextBox 5"/>
-          <p:cNvSpPr txBox="1"/>
-          <p:nvPr/>
-        </p:nvSpPr>
-        <p:spPr>
-          <a:xfrm>
-            <a:off x="731520" y="2148840"/>
-            <a:ext cx="5120640" cy="3657600"/>
-          </a:xfrm>
-          <a:prstGeom prst="rect">
-            <a:avLst/>
-          </a:prstGeom>
-          <a:noFill/>
-        </p:spPr>
-        <p:txBody>
-          <a:bodyPr wrap="square" anchor="t">
-            <a:spAutoFit/>
-          </a:bodyPr>
-          <a:lstStyle/>
-          <a:p>
-            <a:pPr algn="l">
-              <a:lnSpc>
-                <a:spcPct val="115000"/>
-              </a:lnSpc>
-              <a:spcAft>
-                <a:spcPts val="400"/>
-              </a:spcAft>
-            </a:pPr>
-            <a:r>
-              <a:rPr sz="1150" b="0" i="0">
-                <a:solidFill>
-                  <a:srgbClr val="0E1F1A"/>
-                </a:solidFill>
-                <a:latin typeface="Segoe UI"/>
-              </a:rPr>
-              <a:t>Two failure modes: software bugs AND AI failures (hallucination, silent bad money decisions).</a:t>
-            </a:r>
-          </a:p>
-          <a:p>
-            <a:pPr algn="l">
-              <a:lnSpc>
-                <a:spcPct val="115000"/>
-              </a:lnSpc>
-              <a:spcAft>
-                <a:spcPts val="400"/>
-              </a:spcAft>
-            </a:pPr>
-            <a:r>
-              <a:rPr sz="1150" b="0" i="0">
-                <a:solidFill>
-                  <a:srgbClr val="0E1F1A"/>
-                </a:solidFill>
-                <a:latin typeface="Segoe UI"/>
-              </a:rPr>
-              <a:t>Offline regression per agent — fixed input/output suites re-run before any prompt change.</a:t>
-            </a:r>
-          </a:p>
-          <a:p>
-            <a:pPr algn="l">
-              <a:lnSpc>
-                <a:spcPct val="115000"/>
-              </a:lnSpc>
-              <a:spcAft>
-                <a:spcPts val="400"/>
-              </a:spcAft>
-            </a:pPr>
-            <a:r>
-              <a:rPr sz="1150" b="0" i="0">
-                <a:solidFill>
-                  <a:srgbClr val="0E1F1A"/>
-                </a:solidFill>
-                <a:latin typeface="Segoe UI"/>
-              </a:rPr>
-              <a:t>Observability — every agent decision and handoff logged; the raw JSON log is on every trip page.</a:t>
-            </a:r>
-          </a:p>
-          <a:p>
-            <a:pPr algn="l">
-              <a:lnSpc>
-                <a:spcPct val="115000"/>
-              </a:lnSpc>
-              <a:spcAft>
-                <a:spcPts val="400"/>
-              </a:spcAft>
-            </a:pPr>
-            <a:r>
-              <a:rPr sz="1150" b="0" i="0">
-                <a:solidFill>
-                  <a:srgbClr val="0E1F1A"/>
-                </a:solidFill>
-                <a:latin typeface="Segoe UI"/>
-              </a:rPr>
-              <a:t>RAG grounding — places from map data, not model memory.</a:t>
-            </a:r>
-          </a:p>
-          <a:p>
-            <a:pPr algn="l">
-              <a:lnSpc>
-                <a:spcPct val="115000"/>
-              </a:lnSpc>
-              <a:spcAft>
-                <a:spcPts val="400"/>
-              </a:spcAft>
-            </a:pPr>
-            <a:r>
-              <a:rPr sz="1150" b="0" i="0">
-                <a:solidFill>
-                  <a:srgbClr val="0E1F1A"/>
-                </a:solidFill>
-                <a:latin typeface="Segoe UI"/>
-              </a:rPr>
-              <a:t>Human-in-the-loop mandatory above the spend threshold.</a:t>
-            </a:r>
-          </a:p>
-          <a:p>
-            <a:pPr algn="l">
-              <a:lnSpc>
-                <a:spcPct val="115000"/>
-              </a:lnSpc>
-              <a:spcAft>
-                <a:spcPts val="400"/>
-              </a:spcAft>
-            </a:pPr>
-            <a:r>
-              <a:rPr sz="1150" b="0" i="0">
-                <a:solidFill>
-                  <a:srgbClr val="0E1F1A"/>
-                </a:solidFill>
-                <a:latin typeface="Segoe UI"/>
-              </a:rPr>
-              <a:t>Moderated UAT with 5–8 real users before release.</a:t>
-            </a:r>
-          </a:p>
-        </p:txBody>
-      </p:sp>
-      <p:sp>
-        <p:nvSpPr>
-          <p:cNvPr id="7" name="Rounded Rectangle 6"/>
-          <p:cNvSpPr/>
-          <p:nvPr/>
-        </p:nvSpPr>
-        <p:spPr>
-          <a:xfrm>
-            <a:off x="6199632" y="1645920"/>
-            <a:ext cx="5532120" cy="4297680"/>
-          </a:xfrm>
-          <a:prstGeom prst="roundRect">
-            <a:avLst>
-              <a:gd name="adj" fmla="val 8000"/>
-            </a:avLst>
-          </a:prstGeom>
-          <a:solidFill>
-            <a:srgbClr val="FFFFFF"/>
-          </a:solidFill>
-          <a:ln w="12700">
-            <a:solidFill>
-              <a:srgbClr val="D8DFDB"/>
-            </a:solidFill>
-          </a:ln>
-          <a:effectLst/>
-        </p:spPr>
-        <p:style>
-          <a:lnRef idx="1">
-            <a:schemeClr val="accent1"/>
-          </a:lnRef>
-          <a:fillRef idx="3">
-            <a:schemeClr val="accent1"/>
-          </a:fillRef>
-          <a:effectRef idx="2">
-            <a:schemeClr val="accent1"/>
-          </a:effectRef>
-          <a:fontRef idx="minor">
-            <a:schemeClr val="lt1"/>
-          </a:fontRef>
-        </p:style>
-        <p:txBody>
-          <a:bodyPr rtlCol="0" anchor="ctr"/>
-          <a:lstStyle/>
-          <a:p>
-            <a:pPr algn="ctr"/>
-            <a:endParaRPr/>
-          </a:p>
-        </p:txBody>
-      </p:sp>
-      <p:sp>
-        <p:nvSpPr>
-          <p:cNvPr id="8" name="TextBox 7"/>
-          <p:cNvSpPr txBox="1"/>
-          <p:nvPr/>
-        </p:nvSpPr>
-        <p:spPr>
-          <a:xfrm>
-            <a:off x="6428232" y="1783080"/>
-            <a:ext cx="5029200" cy="365760"/>
-          </a:xfrm>
-          <a:prstGeom prst="rect">
-            <a:avLst/>
-          </a:prstGeom>
-          <a:noFill/>
-        </p:spPr>
-        <p:txBody>
-          <a:bodyPr wrap="square" anchor="t">
-            <a:spAutoFit/>
-          </a:bodyPr>
-          <a:lstStyle/>
-          <a:p>
-            <a:pPr algn="l">
-              <a:lnSpc>
-                <a:spcPct val="100000"/>
-              </a:lnSpc>
-              <a:spcAft>
-                <a:spcPts val="400"/>
-              </a:spcAft>
-            </a:pPr>
-            <a:r>
-              <a:rPr sz="1200" b="1" i="0">
-                <a:solidFill>
-                  <a:srgbClr val="C58200"/>
-                </a:solidFill>
-                <a:latin typeface="Segoe UI"/>
-              </a:rPr>
-              <a:t>ETHICS — LIVE IN THE PRODUCT</a:t>
-            </a:r>
-          </a:p>
-        </p:txBody>
-      </p:sp>
-      <p:sp>
-        <p:nvSpPr>
-          <p:cNvPr id="9" name="TextBox 8"/>
-          <p:cNvSpPr txBox="1"/>
-          <p:nvPr/>
-        </p:nvSpPr>
-        <p:spPr>
-          <a:xfrm>
-            <a:off x="6428232" y="2148840"/>
-            <a:ext cx="5120640" cy="3657600"/>
-          </a:xfrm>
-          <a:prstGeom prst="rect">
-            <a:avLst/>
-          </a:prstGeom>
-          <a:noFill/>
-        </p:spPr>
-        <p:txBody>
-          <a:bodyPr wrap="square" anchor="t">
-            <a:spAutoFit/>
-          </a:bodyPr>
-          <a:lstStyle/>
-          <a:p>
-            <a:pPr algn="l">
-              <a:lnSpc>
-                <a:spcPct val="115000"/>
-              </a:lnSpc>
-              <a:spcAft>
-                <a:spcPts val="400"/>
-              </a:spcAft>
-            </a:pPr>
-            <a:r>
-              <a:rPr sz="1150" b="0" i="0">
-                <a:solidFill>
-                  <a:srgbClr val="0E1F1A"/>
-                </a:solidFill>
-                <a:latin typeface="Segoe UI"/>
-              </a:rPr>
-              <a:t>Privacy: trips never leave the device — stated on the sign-in page.</a:t>
-            </a:r>
-          </a:p>
-          <a:p>
-            <a:pPr algn="l">
-              <a:lnSpc>
-                <a:spcPct val="115000"/>
-              </a:lnSpc>
-              <a:spcAft>
-                <a:spcPts val="400"/>
-              </a:spcAft>
-            </a:pPr>
-            <a:r>
-              <a:rPr sz="1150" b="0" i="0">
-                <a:solidFill>
-                  <a:srgbClr val="0E1F1A"/>
-                </a:solidFill>
-                <a:latin typeface="Segoe UI"/>
-              </a:rPr>
-              <a:t>No silent substitution: out-of-scope asks are named and explained.</a:t>
-            </a:r>
-          </a:p>
-          <a:p>
-            <a:pPr algn="l">
-              <a:lnSpc>
-                <a:spcPct val="115000"/>
-              </a:lnSpc>
-              <a:spcAft>
-                <a:spcPts val="400"/>
-              </a:spcAft>
-            </a:pPr>
-            <a:r>
-              <a:rPr sz="1150" b="0" i="0">
-                <a:solidFill>
-                  <a:srgbClr val="0E1F1A"/>
-                </a:solidFill>
-                <a:latin typeface="Segoe UI"/>
-              </a:rPr>
-              <a:t>Money: gates, revocation, code-computed arithmetic.</a:t>
-            </a:r>
-          </a:p>
-          <a:p>
-            <a:pPr algn="l">
-              <a:lnSpc>
-                <a:spcPct val="115000"/>
-              </a:lnSpc>
-              <a:spcAft>
-                <a:spcPts val="400"/>
-              </a:spcAft>
-            </a:pPr>
-            <a:r>
-              <a:rPr sz="1150" b="0" i="0">
-                <a:solidFill>
-                  <a:srgbClr val="0E1F1A"/>
-                </a:solidFill>
-                <a:latin typeface="Segoe UI"/>
-              </a:rPr>
-              <a:t>Reminders: opt-in, time-anchored, never engagement-tuned.</a:t>
-            </a:r>
-          </a:p>
-          <a:p>
-            <a:pPr algn="l">
-              <a:lnSpc>
-                <a:spcPct val="115000"/>
-              </a:lnSpc>
-              <a:spcAft>
-                <a:spcPts val="400"/>
-              </a:spcAft>
-            </a:pPr>
-            <a:r>
-              <a:rPr sz="1150" b="0" i="0">
-                <a:solidFill>
-                  <a:srgbClr val="0E1F1A"/>
-                </a:solidFill>
-                <a:latin typeface="Segoe UI"/>
-              </a:rPr>
-              <a:t>No dark patterns: no fake scarcity, no urgency styling, no forced sign-in before value.</a:t>
-            </a:r>
-          </a:p>
-          <a:p>
-            <a:pPr algn="l">
-              <a:lnSpc>
-                <a:spcPct val="115000"/>
-              </a:lnSpc>
-              <a:spcAft>
-                <a:spcPts val="400"/>
-              </a:spcAft>
-            </a:pPr>
-            <a:r>
-              <a:rPr sz="1150" b="0" i="0">
-                <a:solidFill>
-                  <a:srgbClr val="0E1F1A"/>
-                </a:solidFill>
-                <a:latin typeface="Segoe UI"/>
-              </a:rPr>
-              <a:t>Standing question at every review: could we defend this to a journalist?</a:t>
-            </a:r>
-          </a:p>
-        </p:txBody>
-      </p:sp>
-    </p:spTree>
-  </p:cSld>
-  <p:clrMapOvr>
-    <a:masterClrMapping/>
-  </p:clrMapOvr>
-</p:sld>
-</file>
-
-<file path=ppt/slides/slide13.xml><?xml version="1.0" encoding="utf-8"?>
-<p:sld xmlns:a="http://schemas.openxmlformats.org/drawingml/2006/main" xmlns:r="http://schemas.openxmlformats.org/officeDocument/2006/relationships" xmlns:p="http://schemas.openxmlformats.org/presentationml/2006/main">
-  <p:cSld>
-    <p:bg>
-      <p:bgPr>
-        <a:solidFill>
-          <a:srgbClr val="EEF4EF"/>
-        </a:solidFill>
-        <a:effectLst/>
-      </p:bgPr>
-    </p:bg>
-    <p:spTree>
-      <p:nvGrpSpPr>
-        <p:cNvPr id="1" name=""/>
-        <p:cNvGrpSpPr/>
-        <p:nvPr/>
-      </p:nvGrpSpPr>
-      <p:grpSpPr>
-        <a:xfrm>
-          <a:off x="0" y="0"/>
-          <a:ext cx="0" cy="0"/>
-          <a:chOff x="0" y="0"/>
-          <a:chExt cx="0" cy="0"/>
-        </a:xfrm>
-      </p:grpSpPr>
-      <p:sp>
-        <p:nvSpPr>
-          <p:cNvPr id="2" name="TextBox 1"/>
-          <p:cNvSpPr txBox="1"/>
-          <p:nvPr/>
-        </p:nvSpPr>
-        <p:spPr>
-          <a:xfrm>
-            <a:off x="502920" y="384048"/>
-            <a:ext cx="7315200" cy="365760"/>
-          </a:xfrm>
-          <a:prstGeom prst="rect">
-            <a:avLst/>
-          </a:prstGeom>
-          <a:noFill/>
-        </p:spPr>
-        <p:txBody>
-          <a:bodyPr wrap="square" anchor="t">
-            <a:spAutoFit/>
-          </a:bodyPr>
-          <a:lstStyle/>
-          <a:p>
-            <a:pPr algn="l">
-              <a:lnSpc>
-                <a:spcPct val="100000"/>
-              </a:lnSpc>
-              <a:spcAft>
-                <a:spcPts val="400"/>
-              </a:spcAft>
-            </a:pPr>
-            <a:r>
-              <a:rPr sz="1200" b="1" i="0">
-                <a:solidFill>
-                  <a:srgbClr val="C58200"/>
-                </a:solidFill>
-                <a:latin typeface="Segoe UI"/>
-              </a:rPr>
               <a:t>APPENDIX A5</a:t>
             </a:r>
           </a:p>
@@ -6583,6 +6006,10 @@
           </a:solidFill>
           <a:ln/>
         </p:spPr>
+        <p:txBody>
+          <a:bodyPr/>
+          <a:p/>
+        </p:txBody>
       </p:sp>
       <p:sp>
         <p:nvSpPr>
@@ -6729,6 +6156,10 @@
             </a:outerShdw>
           </a:effectLst>
         </p:spPr>
+        <p:txBody>
+          <a:bodyPr/>
+          <a:p/>
+        </p:txBody>
       </p:sp>
       <p:sp>
         <p:nvSpPr>
@@ -6749,6 +6180,10 @@
           </a:solidFill>
           <a:ln/>
         </p:spPr>
+        <p:txBody>
+          <a:bodyPr/>
+          <a:p/>
+        </p:txBody>
       </p:sp>
       <p:sp>
         <p:nvSpPr>
@@ -6942,6 +6377,10 @@
             </a:outerShdw>
           </a:effectLst>
         </p:spPr>
+        <p:txBody>
+          <a:bodyPr/>
+          <a:p/>
+        </p:txBody>
       </p:sp>
       <p:sp>
         <p:nvSpPr>
@@ -6962,6 +6401,10 @@
           </a:solidFill>
           <a:ln/>
         </p:spPr>
+        <p:txBody>
+          <a:bodyPr/>
+          <a:p/>
+        </p:txBody>
       </p:sp>
       <p:sp>
         <p:nvSpPr>
@@ -7155,6 +6598,10 @@
             </a:outerShdw>
           </a:effectLst>
         </p:spPr>
+        <p:txBody>
+          <a:bodyPr/>
+          <a:p/>
+        </p:txBody>
       </p:sp>
       <p:sp>
         <p:nvSpPr>
@@ -7175,6 +6622,10 @@
           </a:solidFill>
           <a:ln/>
         </p:spPr>
+        <p:txBody>
+          <a:bodyPr/>
+          <a:p/>
+        </p:txBody>
       </p:sp>
       <p:sp>
         <p:nvSpPr>
@@ -7368,6 +6819,10 @@
             </a:outerShdw>
           </a:effectLst>
         </p:spPr>
+        <p:txBody>
+          <a:bodyPr/>
+          <a:p/>
+        </p:txBody>
       </p:sp>
       <p:sp>
         <p:nvSpPr>
@@ -7388,6 +6843,10 @@
           </a:solidFill>
           <a:ln/>
         </p:spPr>
+        <p:txBody>
+          <a:bodyPr/>
+          <a:p/>
+        </p:txBody>
       </p:sp>
       <p:sp>
         <p:nvSpPr>
@@ -7581,6 +7040,10 @@
             </a:outerShdw>
           </a:effectLst>
         </p:spPr>
+        <p:txBody>
+          <a:bodyPr/>
+          <a:p/>
+        </p:txBody>
       </p:sp>
       <p:sp>
         <p:nvSpPr>
@@ -7601,6 +7064,10 @@
           </a:solidFill>
           <a:ln/>
         </p:spPr>
+        <p:txBody>
+          <a:bodyPr/>
+          <a:p/>
+        </p:txBody>
       </p:sp>
       <p:sp>
         <p:nvSpPr>
@@ -7782,6 +7249,10 @@
           </a:solidFill>
           <a:ln/>
         </p:spPr>
+        <p:txBody>
+          <a:bodyPr/>
+          <a:p/>
+        </p:txBody>
       </p:sp>
       <p:sp>
         <p:nvSpPr>
@@ -9923,20 +9394,14 @@
     <p:bg>
       <p:bgPr>
         <a:solidFill>
-          <a:srgbClr val="0E1F1A"/>
+          <a:srgbClr val="EEF4EF"/>
         </a:solidFill>
         <a:effectLst/>
       </p:bgPr>
     </p:bg>
     <p:spTree>
       <p:nvGrpSpPr>
-        <p:cNvPr id="1" name="">
-          <a:extLst>
-            <a:ext uri="{FF2B5EF4-FFF2-40B4-BE49-F238E27FC236}">
-              <a16:creationId xmlns:a16="http://schemas.microsoft.com/office/drawing/2014/main" id="{A384C8CA-500B-AE82-E4A6-7A2D6DA1EF6D}"/>
-            </a:ext>
-          </a:extLst>
-        </p:cNvPr>
+        <p:cNvPr id="1" name=""/>
         <p:cNvGrpSpPr/>
         <p:nvPr/>
       </p:nvGrpSpPr>
@@ -9950,29 +9415,195 @@
       </p:grpSpPr>
       <p:sp>
         <p:nvSpPr>
-          <p:cNvPr id="2" name="Rectangle 1">
-            <a:extLst>
-              <a:ext uri="{FF2B5EF4-FFF2-40B4-BE49-F238E27FC236}">
-                <a16:creationId xmlns:a16="http://schemas.microsoft.com/office/drawing/2014/main" id="{C266A641-68AA-FC2A-8E7D-23EC0A6BBDA0}"/>
-              </a:ext>
-            </a:extLst>
-          </p:cNvPr>
+          <p:cNvPr id="13" name="TextBox 12"/>
+          <p:cNvSpPr txBox="1"/>
+          <p:nvPr/>
+        </p:nvSpPr>
+        <p:spPr>
+          <a:xfrm>
+            <a:off x="502920" y="6473952"/>
+            <a:ext cx="8229600" cy="274320"/>
+          </a:xfrm>
+          <a:prstGeom prst="rect">
+            <a:avLst/>
+          </a:prstGeom>
+          <a:noFill/>
+        </p:spPr>
+        <p:txBody>
+          <a:bodyPr wrap="square" anchor="t">
+            <a:spAutoFit/>
+          </a:bodyPr>
+          <a:lstStyle/>
+          <a:p>
+            <a:pPr algn="l">
+              <a:lnSpc>
+                <a:spcPct val="100000"/>
+              </a:lnSpc>
+              <a:spcAft>
+                <a:spcPts val="400"/>
+              </a:spcAft>
+            </a:pPr>
+            <a:r>
+              <a:rPr sz="900" b="0" i="0">
+                <a:solidFill>
+                  <a:srgbClr val="4E635C"/>
+                </a:solidFill>
+                <a:latin typeface="Segoe UI"/>
+              </a:rPr>
+              <a:t>TripME · Team DEBUGGERS · tripme-khaki.vercel.app</a:t>
+            </a:r>
+          </a:p>
+        </p:txBody>
+      </p:sp>
+      <p:sp>
+        <p:nvSpPr>
+          <p:cNvPr id="14" name="TextBox 13"/>
+          <p:cNvSpPr txBox="1"/>
+          <p:nvPr/>
+        </p:nvSpPr>
+        <p:spPr>
+          <a:xfrm>
+            <a:off x="11247120" y="6473952"/>
+            <a:ext cx="548640" cy="274320"/>
+          </a:xfrm>
+          <a:prstGeom prst="rect">
+            <a:avLst/>
+          </a:prstGeom>
+          <a:noFill/>
+        </p:spPr>
+        <p:txBody>
+          <a:bodyPr wrap="square" anchor="t">
+            <a:spAutoFit/>
+          </a:bodyPr>
+          <a:lstStyle/>
+          <a:p>
+            <a:pPr algn="r">
+              <a:lnSpc>
+                <a:spcPct val="100000"/>
+              </a:lnSpc>
+              <a:spcAft>
+                <a:spcPts val="400"/>
+              </a:spcAft>
+            </a:pPr>
+            <a:r>
+              <a:rPr sz="900" b="0" i="0">
+                <a:solidFill>
+                  <a:srgbClr val="4E635C"/>
+                </a:solidFill>
+                <a:latin typeface="Segoe UI"/>
+              </a:rPr>
+              <a:t>4</a:t>
+            </a:r>
+          </a:p>
+        </p:txBody>
+      </p:sp>
+      <p:sp>
+        <p:nvSpPr>
+          <p:cNvPr id="15" name="TextBox 14"/>
+          <p:cNvSpPr txBox="1"/>
+          <p:nvPr/>
+        </p:nvSpPr>
+        <p:spPr>
+          <a:xfrm>
+            <a:off x="548640" y="384048"/>
+            <a:ext cx="9144000" cy="365760"/>
+          </a:xfrm>
+          <a:prstGeom prst="rect">
+            <a:avLst/>
+          </a:prstGeom>
+          <a:noFill/>
+        </p:spPr>
+        <p:txBody>
+          <a:bodyPr wrap="square">
+            <a:spAutoFit/>
+          </a:bodyPr>
+          <a:lstStyle/>
+          <a:p>
+            <a:pPr algn="l">
+              <a:lnSpc>
+                <a:spcPct val="100000"/>
+              </a:lnSpc>
+              <a:spcAft>
+                <a:spcPts val="400"/>
+              </a:spcAft>
+            </a:pPr>
+            <a:r>
+              <a:rPr sz="1200" b="1">
+                <a:solidFill>
+                  <a:srgbClr val="C58200"/>
+                </a:solidFill>
+                <a:latin typeface="Segoe UI"/>
+              </a:rPr>
+              <a:t>IMPLEMENTATION — HOW WE BUILT IT</a:t>
+            </a:r>
+          </a:p>
+        </p:txBody>
+      </p:sp>
+      <p:sp>
+        <p:nvSpPr>
+          <p:cNvPr id="16" name="TextBox 15"/>
+          <p:cNvSpPr txBox="1"/>
+          <p:nvPr/>
+        </p:nvSpPr>
+        <p:spPr>
+          <a:xfrm>
+            <a:off x="548640" y="658368"/>
+            <a:ext cx="11155680" cy="822960"/>
+          </a:xfrm>
+          <a:prstGeom prst="rect">
+            <a:avLst/>
+          </a:prstGeom>
+          <a:noFill/>
+        </p:spPr>
+        <p:txBody>
+          <a:bodyPr wrap="square">
+            <a:spAutoFit/>
+          </a:bodyPr>
+          <a:lstStyle/>
+          <a:p>
+            <a:pPr algn="l">
+              <a:lnSpc>
+                <a:spcPct val="100000"/>
+              </a:lnSpc>
+              <a:spcAft>
+                <a:spcPts val="400"/>
+              </a:spcAft>
+            </a:pPr>
+            <a:r>
+              <a:rPr sz="2800" b="1">
+                <a:solidFill>
+                  <a:srgbClr val="0E1F1A"/>
+                </a:solidFill>
+                <a:latin typeface="Segoe UI"/>
+              </a:rPr>
+              <a:t>A negotiating pipeline, a lean stack, AI only where it earns its place</a:t>
+            </a:r>
+          </a:p>
+        </p:txBody>
+      </p:sp>
+      <p:sp>
+        <p:nvSpPr>
+          <p:cNvPr id="17" name="Rounded Rectangle 16"/>
           <p:cNvSpPr/>
           <p:nvPr/>
         </p:nvSpPr>
         <p:spPr>
           <a:xfrm>
-            <a:off x="0" y="6309360"/>
-            <a:ext cx="12191695" cy="548640"/>
-          </a:xfrm>
-          <a:prstGeom prst="rect">
-            <a:avLst/>
+            <a:off x="502920" y="1554480"/>
+            <a:ext cx="3648456" cy="4114800"/>
+          </a:xfrm>
+          <a:prstGeom prst="roundRect">
+            <a:avLst>
+              <a:gd name="adj" fmla="val 8000"/>
+            </a:avLst>
           </a:prstGeom>
           <a:solidFill>
-            <a:srgbClr val="0E332D"/>
+            <a:srgbClr val="FFFFFF"/>
           </a:solidFill>
-          <a:ln>
-            <a:noFill/>
+          <a:ln w="12700">
+            <a:solidFill>
+              <a:srgbClr val="D8DFDB"/>
+            </a:solidFill>
           </a:ln>
           <a:effectLst/>
         </p:spPr>
@@ -9995,196 +9626,265 @@
           <a:lstStyle/>
           <a:p>
             <a:pPr algn="ctr"/>
-            <a:endParaRPr/>
-          </a:p>
-        </p:txBody>
-      </p:sp>
-      <p:sp>
-        <p:nvSpPr>
-          <p:cNvPr id="3" name="TextBox 2">
-            <a:extLst>
-              <a:ext uri="{FF2B5EF4-FFF2-40B4-BE49-F238E27FC236}">
-                <a16:creationId xmlns:a16="http://schemas.microsoft.com/office/drawing/2014/main" id="{E3049266-CE97-BE05-85CD-F8258D9D6554}"/>
-              </a:ext>
-            </a:extLst>
-          </p:cNvPr>
+          </a:p>
+        </p:txBody>
+      </p:sp>
+      <p:sp>
+        <p:nvSpPr>
+          <p:cNvPr id="18" name="TextBox 17"/>
           <p:cNvSpPr txBox="1"/>
           <p:nvPr/>
         </p:nvSpPr>
         <p:spPr>
           <a:xfrm>
-            <a:off x="822960" y="1417320"/>
-            <a:ext cx="10515600" cy="1097280"/>
-          </a:xfrm>
-          <a:prstGeom prst="rect">
-            <a:avLst/>
-          </a:prstGeom>
-          <a:noFill/>
-        </p:spPr>
-        <p:txBody>
-          <a:bodyPr wrap="square" anchor="t">
+            <a:off x="704088" y="1664208"/>
+            <a:ext cx="3291840" cy="502920"/>
+          </a:xfrm>
+          <a:prstGeom prst="rect">
+            <a:avLst/>
+          </a:prstGeom>
+          <a:noFill/>
+        </p:spPr>
+        <p:txBody>
+          <a:bodyPr wrap="square">
             <a:spAutoFit/>
           </a:bodyPr>
           <a:lstStyle/>
           <a:p>
             <a:pPr algn="l">
               <a:lnSpc>
-                <a:spcPct val="100000"/>
-              </a:lnSpc>
-              <a:spcAft>
-                <a:spcPts val="400"/>
-              </a:spcAft>
-            </a:pPr>
-            <a:r>
-              <a:rPr sz="6600" b="1" i="0" dirty="0" err="1">
-                <a:solidFill>
-                  <a:srgbClr val="FFFFFF"/>
-                </a:solidFill>
-                <a:latin typeface="Segoe UI"/>
-              </a:rPr>
-              <a:t>Trip</a:t>
-            </a:r>
-            <a:r>
-              <a:rPr sz="6600" b="1" i="0" dirty="0" err="1">
-                <a:solidFill>
-                  <a:srgbClr val="FFB52E"/>
-                </a:solidFill>
-                <a:latin typeface="Segoe UI"/>
-              </a:rPr>
-              <a:t>ME</a:t>
-            </a:r>
-            <a:endParaRPr sz="6600" b="1" i="0" dirty="0">
-              <a:solidFill>
-                <a:srgbClr val="FFB52E"/>
-              </a:solidFill>
-              <a:latin typeface="Segoe UI"/>
-            </a:endParaRPr>
-          </a:p>
-        </p:txBody>
-      </p:sp>
-      <p:sp>
-        <p:nvSpPr>
-          <p:cNvPr id="4" name="TextBox 3">
-            <a:extLst>
-              <a:ext uri="{FF2B5EF4-FFF2-40B4-BE49-F238E27FC236}">
-                <a16:creationId xmlns:a16="http://schemas.microsoft.com/office/drawing/2014/main" id="{A135C3CF-0343-4B6E-0329-129910E6D5AF}"/>
-              </a:ext>
-            </a:extLst>
-          </p:cNvPr>
+                <a:spcPct val="95000"/>
+              </a:lnSpc>
+              <a:spcAft>
+                <a:spcPts val="400"/>
+              </a:spcAft>
+            </a:pPr>
+            <a:r>
+              <a:rPr sz="1050" b="1">
+                <a:solidFill>
+                  <a:srgbClr val="C58200"/>
+                </a:solidFill>
+                <a:latin typeface="Segoe UI"/>
+              </a:rPr>
+              <a:t>THE PLANNING PROCESS — HOW AGENTS WORK TOGETHER</a:t>
+            </a:r>
+          </a:p>
+        </p:txBody>
+      </p:sp>
+      <p:sp>
+        <p:nvSpPr>
+          <p:cNvPr id="19" name="TextBox 18"/>
           <p:cNvSpPr txBox="1"/>
           <p:nvPr/>
         </p:nvSpPr>
         <p:spPr>
           <a:xfrm>
-            <a:off x="850392" y="2514600"/>
-            <a:ext cx="10515600" cy="640080"/>
-          </a:xfrm>
-          <a:prstGeom prst="rect">
-            <a:avLst/>
-          </a:prstGeom>
-          <a:noFill/>
-        </p:spPr>
-        <p:txBody>
-          <a:bodyPr wrap="square" anchor="t">
+            <a:off x="704088" y="2176272"/>
+            <a:ext cx="3273552" cy="3401568"/>
+          </a:xfrm>
+          <a:prstGeom prst="rect">
+            <a:avLst/>
+          </a:prstGeom>
+          <a:noFill/>
+        </p:spPr>
+        <p:txBody>
+          <a:bodyPr wrap="square">
             <a:spAutoFit/>
           </a:bodyPr>
           <a:lstStyle/>
           <a:p>
             <a:pPr algn="l">
               <a:lnSpc>
-                <a:spcPct val="100000"/>
-              </a:lnSpc>
-              <a:spcAft>
-                <a:spcPts val="400"/>
-              </a:spcAft>
-            </a:pPr>
-            <a:r>
-              <a:rPr sz="2700" b="1" i="0">
-                <a:solidFill>
-                  <a:srgbClr val="EEF4EF"/>
-                </a:solidFill>
-                <a:latin typeface="Segoe UI"/>
-              </a:rPr>
-              <a:t>One mood. One budget. One complete trip.</a:t>
-            </a:r>
-          </a:p>
-        </p:txBody>
-      </p:sp>
-      <p:sp>
-        <p:nvSpPr>
-          <p:cNvPr id="5" name="TextBox 4">
-            <a:extLst>
-              <a:ext uri="{FF2B5EF4-FFF2-40B4-BE49-F238E27FC236}">
-                <a16:creationId xmlns:a16="http://schemas.microsoft.com/office/drawing/2014/main" id="{91D82481-6052-C500-0692-B969A1500333}"/>
-              </a:ext>
-            </a:extLst>
-          </p:cNvPr>
-          <p:cNvSpPr txBox="1"/>
-          <p:nvPr/>
-        </p:nvSpPr>
-        <p:spPr>
-          <a:xfrm>
-            <a:off x="850392" y="3246120"/>
-            <a:ext cx="8412480" cy="634341"/>
-          </a:xfrm>
-          <a:prstGeom prst="rect">
-            <a:avLst/>
-          </a:prstGeom>
-          <a:noFill/>
-        </p:spPr>
-        <p:txBody>
-          <a:bodyPr wrap="square" anchor="t">
-            <a:spAutoFit/>
-          </a:bodyPr>
-          <a:lstStyle/>
-          <a:p>
-            <a:pPr algn="l">
-              <a:lnSpc>
-                <a:spcPct val="115000"/>
-              </a:lnSpc>
-              <a:spcAft>
-                <a:spcPts val="400"/>
-              </a:spcAft>
-            </a:pPr>
-            <a:r>
-              <a:rPr sz="1600" b="0" i="0" dirty="0">
-                <a:solidFill>
-                  <a:srgbClr val="9DB3AC"/>
-                </a:solidFill>
-                <a:latin typeface="Segoe UI"/>
-              </a:rPr>
-              <a:t>Seven AI agents that plan it, argue about it in front of you, and are held to your budget in code  built, deployed, and live.</a:t>
-            </a:r>
-          </a:p>
-        </p:txBody>
-      </p:sp>
-      <p:sp>
-        <p:nvSpPr>
-          <p:cNvPr id="6" name="Rounded Rectangle 5">
-            <a:extLst>
-              <a:ext uri="{FF2B5EF4-FFF2-40B4-BE49-F238E27FC236}">
-                <a16:creationId xmlns:a16="http://schemas.microsoft.com/office/drawing/2014/main" id="{F366B5D6-8ACF-0F5B-9091-DD64B9A44053}"/>
-              </a:ext>
-            </a:extLst>
-          </p:cNvPr>
+                <a:spcPct val="108000"/>
+              </a:lnSpc>
+              <a:spcAft>
+                <a:spcPts val="400"/>
+              </a:spcAft>
+            </a:pPr>
+            <a:r>
+              <a:rPr sz="1000" b="1">
+                <a:solidFill>
+                  <a:srgbClr val="14453D"/>
+                </a:solidFill>
+                <a:latin typeface="Segoe UI"/>
+              </a:rPr>
+              <a:t>1  </a:t>
+            </a:r>
+            <a:r>
+              <a:rPr sz="1000" b="0">
+                <a:solidFill>
+                  <a:srgbClr val="0E1F1A"/>
+                </a:solidFill>
+                <a:latin typeface="Segoe UI"/>
+              </a:rPr>
+              <a:t>One brief in — mood, budget, days, origin. Never a destination.</a:t>
+            </a:r>
+          </a:p>
+          <a:p>
+            <a:pPr algn="l">
+              <a:lnSpc>
+                <a:spcPct val="108000"/>
+              </a:lnSpc>
+              <a:spcAft>
+                <a:spcPts val="400"/>
+              </a:spcAft>
+            </a:pPr>
+            <a:r>
+              <a:rPr sz="1000" b="1">
+                <a:solidFill>
+                  <a:srgbClr val="14453D"/>
+                </a:solidFill>
+                <a:latin typeface="Segoe UI"/>
+              </a:rPr>
+              <a:t>2  </a:t>
+            </a:r>
+            <a:r>
+              <a:rPr sz="1000" b="0">
+                <a:solidFill>
+                  <a:srgbClr val="0E1F1A"/>
+                </a:solidFill>
+                <a:latin typeface="Segoe UI"/>
+              </a:rPr>
+              <a:t>Mood &amp; Intent structures it; each agent then receives only the slice of trip-state its job needs.</a:t>
+            </a:r>
+          </a:p>
+          <a:p>
+            <a:pPr algn="l">
+              <a:lnSpc>
+                <a:spcPct val="108000"/>
+              </a:lnSpc>
+              <a:spcAft>
+                <a:spcPts val="400"/>
+              </a:spcAft>
+            </a:pPr>
+            <a:r>
+              <a:rPr sz="1000" b="1">
+                <a:solidFill>
+                  <a:srgbClr val="14453D"/>
+                </a:solidFill>
+                <a:latin typeface="Segoe UI"/>
+              </a:rPr>
+              <a:t>3  </a:t>
+            </a:r>
+            <a:r>
+              <a:rPr sz="1000" b="0">
+                <a:solidFill>
+                  <a:srgbClr val="0E1F1A"/>
+                </a:solidFill>
+                <a:latin typeface="Segoe UI"/>
+              </a:rPr>
+              <a:t>Validated JSON handoffs carry it down the chain: Discovery → Budget → Itinerary → Booking.</a:t>
+            </a:r>
+          </a:p>
+          <a:p>
+            <a:pPr algn="l">
+              <a:lnSpc>
+                <a:spcPct val="108000"/>
+              </a:lnSpc>
+              <a:spcAft>
+                <a:spcPts val="400"/>
+              </a:spcAft>
+            </a:pPr>
+            <a:r>
+              <a:rPr sz="1000" b="1">
+                <a:solidFill>
+                  <a:srgbClr val="14453D"/>
+                </a:solidFill>
+                <a:latin typeface="Segoe UI"/>
+              </a:rPr>
+              <a:t>4  </a:t>
+            </a:r>
+            <a:r>
+              <a:rPr sz="1000" b="0">
+                <a:solidFill>
+                  <a:srgbClr val="0E1F1A"/>
+                </a:solidFill>
+                <a:latin typeface="Segoe UI"/>
+              </a:rPr>
+              <a:t>Code audits Itinerary against Budget; on conflict the Referee fires and sends work BACK — both agents re-run.</a:t>
+            </a:r>
+          </a:p>
+          <a:p>
+            <a:pPr algn="l">
+              <a:lnSpc>
+                <a:spcPct val="108000"/>
+              </a:lnSpc>
+              <a:spcAft>
+                <a:spcPts val="400"/>
+              </a:spcAft>
+            </a:pPr>
+            <a:r>
+              <a:rPr sz="1000" b="1">
+                <a:solidFill>
+                  <a:srgbClr val="14453D"/>
+                </a:solidFill>
+                <a:latin typeface="Segoe UI"/>
+              </a:rPr>
+              <a:t>5  </a:t>
+            </a:r>
+            <a:r>
+              <a:rPr sz="1000" b="0">
+                <a:solidFill>
+                  <a:srgbClr val="0E1F1A"/>
+                </a:solidFill>
+                <a:latin typeface="Segoe UI"/>
+              </a:rPr>
+              <a:t>In group mode one Advocate argues per traveller; the Referee blends them and publishes who conceded what.</a:t>
+            </a:r>
+          </a:p>
+          <a:p>
+            <a:pPr algn="l">
+              <a:lnSpc>
+                <a:spcPct val="108000"/>
+              </a:lnSpc>
+              <a:spcAft>
+                <a:spcPts val="400"/>
+              </a:spcAft>
+            </a:pPr>
+            <a:r>
+              <a:rPr sz="1000" b="1">
+                <a:solidFill>
+                  <a:srgbClr val="14453D"/>
+                </a:solidFill>
+                <a:latin typeface="Segoe UI"/>
+              </a:rPr>
+              <a:t>6  </a:t>
+            </a:r>
+            <a:r>
+              <a:rPr sz="1000" b="0">
+                <a:solidFill>
+                  <a:srgbClr val="0E1F1A"/>
+                </a:solidFill>
+                <a:latin typeface="Segoe UI"/>
+              </a:rPr>
+              <a:t>The traveller approves each spend, confirms, opts into reminders — every change re-prices in code.</a:t>
+            </a:r>
+          </a:p>
+        </p:txBody>
+      </p:sp>
+      <p:sp>
+        <p:nvSpPr>
+          <p:cNvPr id="20" name="Rounded Rectangle 19"/>
           <p:cNvSpPr/>
           <p:nvPr/>
         </p:nvSpPr>
         <p:spPr>
           <a:xfrm>
-            <a:off x="850392" y="4160520"/>
-            <a:ext cx="2168956" cy="292608"/>
+            <a:off x="4315968" y="1554480"/>
+            <a:ext cx="3648456" cy="4114800"/>
           </a:xfrm>
           <a:prstGeom prst="roundRect">
             <a:avLst>
-              <a:gd name="adj" fmla="val 50000"/>
+              <a:gd name="adj" fmla="val 8000"/>
             </a:avLst>
           </a:prstGeom>
           <a:solidFill>
-            <a:srgbClr val="14453D"/>
+            <a:srgbClr val="FFFFFF"/>
           </a:solidFill>
-          <a:ln>
-            <a:noFill/>
+          <a:ln w="12700">
+            <a:solidFill>
+              <a:srgbClr val="D8DFDB"/>
+            </a:solidFill>
           </a:ln>
           <a:effectLst/>
         </p:spPr>
@@ -10203,49 +9903,215 @@
           </a:fontRef>
         </p:style>
         <p:txBody>
-          <a:bodyPr wrap="none" tIns="0" bIns="0" rtlCol="0" anchor="ctr"/>
+          <a:bodyPr rtlCol="0" anchor="ctr"/>
           <a:lstStyle/>
           <a:p>
             <a:pPr algn="ctr"/>
+          </a:p>
+        </p:txBody>
+      </p:sp>
+      <p:sp>
+        <p:nvSpPr>
+          <p:cNvPr id="21" name="TextBox 20"/>
+          <p:cNvSpPr txBox="1"/>
+          <p:nvPr/>
+        </p:nvSpPr>
+        <p:spPr>
+          <a:xfrm>
+            <a:off x="4517136" y="1664208"/>
+            <a:ext cx="3291840" cy="502920"/>
+          </a:xfrm>
+          <a:prstGeom prst="rect">
+            <a:avLst/>
+          </a:prstGeom>
+          <a:noFill/>
+        </p:spPr>
+        <p:txBody>
+          <a:bodyPr wrap="square">
+            <a:spAutoFit/>
+          </a:bodyPr>
+          <a:lstStyle/>
+          <a:p>
+            <a:pPr algn="l">
+              <a:lnSpc>
+                <a:spcPct val="95000"/>
+              </a:lnSpc>
+              <a:spcAft>
+                <a:spcPts val="400"/>
+              </a:spcAft>
+            </a:pPr>
             <a:r>
               <a:rPr sz="1050" b="1">
                 <a:solidFill>
-                  <a:srgbClr val="EEF4EF"/>
-                </a:solidFill>
-                <a:latin typeface="Segoe UI"/>
-              </a:rPr>
-              <a:t>7 AGENTS · 1 BACKWARD EDGE</a:t>
-            </a:r>
-          </a:p>
-        </p:txBody>
-      </p:sp>
-      <p:sp>
-        <p:nvSpPr>
-          <p:cNvPr id="7" name="Rounded Rectangle 6">
-            <a:extLst>
-              <a:ext uri="{FF2B5EF4-FFF2-40B4-BE49-F238E27FC236}">
-                <a16:creationId xmlns:a16="http://schemas.microsoft.com/office/drawing/2014/main" id="{A5828E32-8BFE-1A9F-986B-13618CB1200C}"/>
-              </a:ext>
-            </a:extLst>
-          </p:cNvPr>
+                  <a:srgbClr val="C58200"/>
+                </a:solidFill>
+                <a:latin typeface="Segoe UI"/>
+              </a:rPr>
+              <a:t>TOOLS &amp; FRAMEWORKS</a:t>
+            </a:r>
+          </a:p>
+        </p:txBody>
+      </p:sp>
+      <p:sp>
+        <p:nvSpPr>
+          <p:cNvPr id="22" name="TextBox 21"/>
+          <p:cNvSpPr txBox="1"/>
+          <p:nvPr/>
+        </p:nvSpPr>
+        <p:spPr>
+          <a:xfrm>
+            <a:off x="4517136" y="2176272"/>
+            <a:ext cx="3273552" cy="3401568"/>
+          </a:xfrm>
+          <a:prstGeom prst="rect">
+            <a:avLst/>
+          </a:prstGeom>
+          <a:noFill/>
+        </p:spPr>
+        <p:txBody>
+          <a:bodyPr wrap="square">
+            <a:spAutoFit/>
+          </a:bodyPr>
+          <a:lstStyle/>
+          <a:p>
+            <a:pPr algn="l">
+              <a:lnSpc>
+                <a:spcPct val="108000"/>
+              </a:lnSpc>
+              <a:spcAft>
+                <a:spcPts val="400"/>
+              </a:spcAft>
+            </a:pPr>
+            <a:r>
+              <a:rPr sz="1000" b="0">
+                <a:solidFill>
+                  <a:srgbClr val="0E1F1A"/>
+                </a:solidFill>
+                <a:latin typeface="Segoe UI"/>
+              </a:rPr>
+              <a:t>Next.js App Router + TypeScript — UI and server routes in one deployable</a:t>
+            </a:r>
+          </a:p>
+          <a:p>
+            <a:pPr algn="l">
+              <a:lnSpc>
+                <a:spcPct val="108000"/>
+              </a:lnSpc>
+              <a:spcAft>
+                <a:spcPts val="400"/>
+              </a:spcAft>
+            </a:pPr>
+            <a:r>
+              <a:rPr sz="1000" b="0">
+                <a:solidFill>
+                  <a:srgbClr val="0E1F1A"/>
+                </a:solidFill>
+                <a:latin typeface="Segoe UI"/>
+              </a:rPr>
+              <a:t>Tailwind CSS v4 on a fixed design system — pine, marigold, Plex Mono for money</a:t>
+            </a:r>
+          </a:p>
+          <a:p>
+            <a:pPr algn="l">
+              <a:lnSpc>
+                <a:spcPct val="108000"/>
+              </a:lnSpc>
+              <a:spcAft>
+                <a:spcPts val="400"/>
+              </a:spcAft>
+            </a:pPr>
+            <a:r>
+              <a:rPr sz="1000" b="0">
+                <a:solidFill>
+                  <a:srgbClr val="0E1F1A"/>
+                </a:solidFill>
+                <a:latin typeface="Segoe UI"/>
+              </a:rPr>
+              <a:t>Vercel — push-to-deploy on every commit to main</a:t>
+            </a:r>
+          </a:p>
+          <a:p>
+            <a:pPr algn="l">
+              <a:lnSpc>
+                <a:spcPct val="108000"/>
+              </a:lnSpc>
+              <a:spcAft>
+                <a:spcPts val="400"/>
+              </a:spcAft>
+            </a:pPr>
+            <a:r>
+              <a:rPr sz="1000" b="0">
+                <a:solidFill>
+                  <a:srgbClr val="0E1F1A"/>
+                </a:solidFill>
+                <a:latin typeface="Segoe UI"/>
+              </a:rPr>
+              <a:t>Auth.js + Google OAuth + a password-less test user; the gate sits at commitment</a:t>
+            </a:r>
+          </a:p>
+          <a:p>
+            <a:pPr algn="l">
+              <a:lnSpc>
+                <a:spcPct val="108000"/>
+              </a:lnSpc>
+              <a:spcAft>
+                <a:spcPts val="400"/>
+              </a:spcAft>
+            </a:pPr>
+            <a:r>
+              <a:rPr sz="1000" b="0">
+                <a:solidFill>
+                  <a:srgbClr val="0E1F1A"/>
+                </a:solidFill>
+                <a:latin typeface="Segoe UI"/>
+              </a:rPr>
+              <a:t>OpenStreetMap + Nominatim + Wikipedia — real places, licensed photos, keyless</a:t>
+            </a:r>
+          </a:p>
+          <a:p>
+            <a:pPr algn="l">
+              <a:lnSpc>
+                <a:spcPct val="108000"/>
+              </a:lnSpc>
+              <a:spcAft>
+                <a:spcPts val="400"/>
+              </a:spcAft>
+            </a:pPr>
+            <a:r>
+              <a:rPr sz="1000" b="0">
+                <a:solidFill>
+                  <a:srgbClr val="0E1F1A"/>
+                </a:solidFill>
+                <a:latin typeface="Segoe UI"/>
+              </a:rPr>
+              <a:t>Trips in browser storage — a privacy position, not a missing database</a:t>
+            </a:r>
+          </a:p>
+        </p:txBody>
+      </p:sp>
+      <p:sp>
+        <p:nvSpPr>
+          <p:cNvPr id="23" name="Rounded Rectangle 22"/>
           <p:cNvSpPr/>
           <p:nvPr/>
         </p:nvSpPr>
         <p:spPr>
           <a:xfrm>
-            <a:off x="3183940" y="4160520"/>
-            <a:ext cx="1269187" cy="292608"/>
+            <a:off x="8129016" y="1554480"/>
+            <a:ext cx="3648456" cy="4114800"/>
           </a:xfrm>
           <a:prstGeom prst="roundRect">
             <a:avLst>
-              <a:gd name="adj" fmla="val 50000"/>
+              <a:gd name="adj" fmla="val 8000"/>
             </a:avLst>
           </a:prstGeom>
           <a:solidFill>
-            <a:srgbClr val="14453D"/>
+            <a:srgbClr val="FFFFFF"/>
           </a:solidFill>
-          <a:ln>
-            <a:noFill/>
+          <a:ln w="12700">
+            <a:solidFill>
+              <a:srgbClr val="D8DFDB"/>
+            </a:solidFill>
           </a:ln>
           <a:effectLst/>
         </p:spPr>
@@ -10264,46 +10130,229 @@
           </a:fontRef>
         </p:style>
         <p:txBody>
-          <a:bodyPr wrap="none" tIns="0" bIns="0" rtlCol="0" anchor="ctr"/>
+          <a:bodyPr rtlCol="0" anchor="ctr"/>
           <a:lstStyle/>
           <a:p>
             <a:pPr algn="ctr"/>
+          </a:p>
+        </p:txBody>
+      </p:sp>
+      <p:sp>
+        <p:nvSpPr>
+          <p:cNvPr id="24" name="TextBox 23"/>
+          <p:cNvSpPr txBox="1"/>
+          <p:nvPr/>
+        </p:nvSpPr>
+        <p:spPr>
+          <a:xfrm>
+            <a:off x="8330184" y="1664208"/>
+            <a:ext cx="3291840" cy="502920"/>
+          </a:xfrm>
+          <a:prstGeom prst="rect">
+            <a:avLst/>
+          </a:prstGeom>
+          <a:noFill/>
+        </p:spPr>
+        <p:txBody>
+          <a:bodyPr wrap="square">
+            <a:spAutoFit/>
+          </a:bodyPr>
+          <a:lstStyle/>
+          <a:p>
+            <a:pPr algn="l">
+              <a:lnSpc>
+                <a:spcPct val="95000"/>
+              </a:lnSpc>
+              <a:spcAft>
+                <a:spcPts val="400"/>
+              </a:spcAft>
+            </a:pPr>
             <a:r>
               <a:rPr sz="1050" b="1">
                 <a:solidFill>
-                  <a:srgbClr val="EEF4EF"/>
-                </a:solidFill>
-                <a:latin typeface="Segoe UI"/>
-              </a:rPr>
-              <a:t>6 TRAVEL PATHS</a:t>
-            </a:r>
-          </a:p>
-        </p:txBody>
-      </p:sp>
-      <p:sp>
-        <p:nvSpPr>
-          <p:cNvPr id="8" name="Rounded Rectangle 7">
-            <a:extLst>
-              <a:ext uri="{FF2B5EF4-FFF2-40B4-BE49-F238E27FC236}">
-                <a16:creationId xmlns:a16="http://schemas.microsoft.com/office/drawing/2014/main" id="{FB9D555B-91F3-3965-702A-B535484A50B9}"/>
-              </a:ext>
-            </a:extLst>
-          </p:cNvPr>
+                  <a:srgbClr val="C58200"/>
+                </a:solidFill>
+                <a:latin typeface="Segoe UI"/>
+              </a:rPr>
+              <a:t>AI &amp; MODELS</a:t>
+            </a:r>
+          </a:p>
+        </p:txBody>
+      </p:sp>
+      <p:sp>
+        <p:nvSpPr>
+          <p:cNvPr id="25" name="TextBox 24"/>
+          <p:cNvSpPr txBox="1"/>
+          <p:nvPr/>
+        </p:nvSpPr>
+        <p:spPr>
+          <a:xfrm>
+            <a:off x="8330184" y="2176272"/>
+            <a:ext cx="3273552" cy="3401568"/>
+          </a:xfrm>
+          <a:prstGeom prst="rect">
+            <a:avLst/>
+          </a:prstGeom>
+          <a:noFill/>
+        </p:spPr>
+        <p:txBody>
+          <a:bodyPr wrap="square">
+            <a:spAutoFit/>
+          </a:bodyPr>
+          <a:lstStyle/>
+          <a:p>
+            <a:pPr algn="l">
+              <a:lnSpc>
+                <a:spcPct val="108000"/>
+              </a:lnSpc>
+              <a:spcAft>
+                <a:spcPts val="400"/>
+              </a:spcAft>
+            </a:pPr>
+            <a:r>
+              <a:rPr sz="1000" b="0">
+                <a:solidFill>
+                  <a:srgbClr val="0E1F1A"/>
+                </a:solidFill>
+                <a:latin typeface="Segoe UI"/>
+              </a:rPr>
+              <a:t>Three Groq-hosted models, routed per agent by job:</a:t>
+            </a:r>
+          </a:p>
+          <a:p>
+            <a:pPr algn="l">
+              <a:lnSpc>
+                <a:spcPct val="108000"/>
+              </a:lnSpc>
+              <a:spcAft>
+                <a:spcPts val="400"/>
+              </a:spcAft>
+            </a:pPr>
+            <a:r>
+              <a:rPr sz="1000" b="0">
+                <a:solidFill>
+                  <a:srgbClr val="0E1F1A"/>
+                </a:solidFill>
+                <a:latin typeface="Segoe UI"/>
+              </a:rPr>
+              <a:t>• gpt-oss-120b — reasoning: Discovery, Itinerary, Budget</a:t>
+            </a:r>
+          </a:p>
+          <a:p>
+            <a:pPr algn="l">
+              <a:lnSpc>
+                <a:spcPct val="108000"/>
+              </a:lnSpc>
+              <a:spcAft>
+                <a:spcPts val="400"/>
+              </a:spcAft>
+            </a:pPr>
+            <a:r>
+              <a:rPr sz="1000" b="0">
+                <a:solidFill>
+                  <a:srgbClr val="0E1F1A"/>
+                </a:solidFill>
+                <a:latin typeface="Segoe UI"/>
+              </a:rPr>
+              <a:t>• qwen3.8-27b — arbitration: Referee, consensus, intent</a:t>
+            </a:r>
+          </a:p>
+          <a:p>
+            <a:pPr algn="l">
+              <a:lnSpc>
+                <a:spcPct val="108000"/>
+              </a:lnSpc>
+              <a:spcAft>
+                <a:spcPts val="400"/>
+              </a:spcAft>
+            </a:pPr>
+            <a:r>
+              <a:rPr sz="1000" b="0">
+                <a:solidFill>
+                  <a:srgbClr val="0E1F1A"/>
+                </a:solidFill>
+                <a:latin typeface="Segoe UI"/>
+              </a:rPr>
+              <a:t>• gpt-oss-20b — structural: Booking, Advocates, translation</a:t>
+            </a:r>
+          </a:p>
+          <a:p>
+            <a:pPr algn="l">
+              <a:lnSpc>
+                <a:spcPct val="108000"/>
+              </a:lnSpc>
+              <a:spcAft>
+                <a:spcPts val="400"/>
+              </a:spcAft>
+            </a:pPr>
+            <a:r>
+              <a:rPr sz="1000" b="0">
+                <a:solidFill>
+                  <a:srgbClr val="0E1F1A"/>
+                </a:solidFill>
+                <a:latin typeface="Segoe UI"/>
+              </a:rPr>
+              <a:t>Typed JSON-schema handoffs — every output validated before it enters trip-state</a:t>
+            </a:r>
+          </a:p>
+          <a:p>
+            <a:pPr algn="l">
+              <a:lnSpc>
+                <a:spcPct val="108000"/>
+              </a:lnSpc>
+              <a:spcAft>
+                <a:spcPts val="400"/>
+              </a:spcAft>
+            </a:pPr>
+            <a:r>
+              <a:rPr sz="1000" b="0">
+                <a:solidFill>
+                  <a:srgbClr val="0E1F1A"/>
+                </a:solidFill>
+                <a:latin typeface="Segoe UI"/>
+              </a:rPr>
+              <a:t>Per-agent failover chains across all three — quota, schema errors, even model retirement</a:t>
+            </a:r>
+          </a:p>
+          <a:p>
+            <a:pPr algn="l">
+              <a:lnSpc>
+                <a:spcPct val="108000"/>
+              </a:lnSpc>
+              <a:spcAft>
+                <a:spcPts val="400"/>
+              </a:spcAft>
+            </a:pPr>
+            <a:r>
+              <a:rPr sz="1000" b="0">
+                <a:solidFill>
+                  <a:srgbClr val="0E1F1A"/>
+                </a:solidFill>
+                <a:latin typeface="Segoe UI"/>
+              </a:rPr>
+              <a:t>Deterministic money layer in code; translation runs after generation completes</a:t>
+            </a:r>
+          </a:p>
+        </p:txBody>
+      </p:sp>
+      <p:sp>
+        <p:nvSpPr>
+          <p:cNvPr id="26" name="Rounded Rectangle 25"/>
           <p:cNvSpPr/>
           <p:nvPr/>
         </p:nvSpPr>
         <p:spPr>
           <a:xfrm>
-            <a:off x="4617720" y="4160520"/>
-            <a:ext cx="1044244" cy="292608"/>
+            <a:off x="502920" y="5806440"/>
+            <a:ext cx="11201400" cy="530352"/>
           </a:xfrm>
           <a:prstGeom prst="roundRect">
             <a:avLst>
-              <a:gd name="adj" fmla="val 50000"/>
+              <a:gd name="adj" fmla="val 8000"/>
             </a:avLst>
           </a:prstGeom>
           <a:solidFill>
-            <a:srgbClr val="14453D"/>
+            <a:srgbClr val="0E1F1A"/>
           </a:solidFill>
           <a:ln>
             <a:noFill/>
@@ -10325,142 +10374,36 @@
           </a:fontRef>
         </p:style>
         <p:txBody>
-          <a:bodyPr wrap="none" tIns="0" bIns="0" rtlCol="0" anchor="ctr"/>
+          <a:bodyPr rtlCol="0" anchor="ctr"/>
           <a:lstStyle/>
           <a:p>
             <a:pPr algn="ctr"/>
-            <a:r>
-              <a:rPr sz="1050" b="1">
-                <a:solidFill>
-                  <a:srgbClr val="EEF4EF"/>
-                </a:solidFill>
-                <a:latin typeface="Segoe UI"/>
-              </a:rPr>
-              <a:t>7 LANGUAGES</a:t>
-            </a:r>
-          </a:p>
-        </p:txBody>
-      </p:sp>
-      <p:sp>
-        <p:nvSpPr>
-          <p:cNvPr id="9" name="Rounded Rectangle 8">
-            <a:extLst>
-              <a:ext uri="{FF2B5EF4-FFF2-40B4-BE49-F238E27FC236}">
-                <a16:creationId xmlns:a16="http://schemas.microsoft.com/office/drawing/2014/main" id="{566083DC-1808-D0E5-1B68-5513C55809D8}"/>
-              </a:ext>
-            </a:extLst>
-          </p:cNvPr>
-          <p:cNvSpPr/>
-          <p:nvPr/>
-        </p:nvSpPr>
-        <p:spPr>
-          <a:xfrm>
-            <a:off x="5826556" y="4160520"/>
-            <a:ext cx="1494129" cy="292608"/>
-          </a:xfrm>
-          <a:prstGeom prst="roundRect">
-            <a:avLst>
-              <a:gd name="adj" fmla="val 50000"/>
-            </a:avLst>
-          </a:prstGeom>
-          <a:solidFill>
-            <a:srgbClr val="14453D"/>
-          </a:solidFill>
-          <a:ln>
-            <a:noFill/>
-          </a:ln>
-          <a:effectLst/>
-        </p:spPr>
-        <p:style>
-          <a:lnRef idx="1">
-            <a:schemeClr val="accent1"/>
-          </a:lnRef>
-          <a:fillRef idx="3">
-            <a:schemeClr val="accent1"/>
-          </a:fillRef>
-          <a:effectRef idx="2">
-            <a:schemeClr val="accent1"/>
-          </a:effectRef>
-          <a:fontRef idx="minor">
-            <a:schemeClr val="lt1"/>
-          </a:fontRef>
-        </p:style>
-        <p:txBody>
-          <a:bodyPr wrap="none" tIns="0" bIns="0" rtlCol="0" anchor="ctr"/>
-          <a:lstStyle/>
-          <a:p>
-            <a:pPr algn="ctr"/>
-            <a:r>
-              <a:rPr sz="1050" b="1">
-                <a:solidFill>
-                  <a:srgbClr val="EEF4EF"/>
-                </a:solidFill>
-                <a:latin typeface="Segoe UI"/>
-              </a:rPr>
-              <a:t>₹0 INFRASTRUCTURE</a:t>
-            </a:r>
-          </a:p>
-        </p:txBody>
-      </p:sp>
-      <p:pic>
-        <p:nvPicPr>
-          <p:cNvPr id="12" name="Picture 11" descr="image.png">
-            <a:extLst>
-              <a:ext uri="{FF2B5EF4-FFF2-40B4-BE49-F238E27FC236}">
-                <a16:creationId xmlns:a16="http://schemas.microsoft.com/office/drawing/2014/main" id="{CE38C0DF-871C-6F6A-48BF-E1A964E6289A}"/>
-              </a:ext>
-            </a:extLst>
-          </p:cNvPr>
-          <p:cNvPicPr>
-            <a:picLocks noChangeAspect="1"/>
-          </p:cNvPicPr>
-          <p:nvPr/>
-        </p:nvPicPr>
-        <p:blipFill>
-          <a:blip r:embed="rId2"/>
-          <a:stretch>
-            <a:fillRect/>
-          </a:stretch>
-        </p:blipFill>
-        <p:spPr>
-          <a:xfrm>
-            <a:off x="9646920" y="1417320"/>
-            <a:ext cx="1920240" cy="1920240"/>
-          </a:xfrm>
-          <a:prstGeom prst="rect">
-            <a:avLst/>
-          </a:prstGeom>
-        </p:spPr>
-      </p:pic>
-      <p:sp>
-        <p:nvSpPr>
-          <p:cNvPr id="13" name="TextBox 12">
-            <a:extLst>
-              <a:ext uri="{FF2B5EF4-FFF2-40B4-BE49-F238E27FC236}">
-                <a16:creationId xmlns:a16="http://schemas.microsoft.com/office/drawing/2014/main" id="{C869B929-777F-0258-566B-716D72899801}"/>
-              </a:ext>
-            </a:extLst>
-          </p:cNvPr>
+          </a:p>
+        </p:txBody>
+      </p:sp>
+      <p:sp>
+        <p:nvSpPr>
+          <p:cNvPr id="27" name="TextBox 26"/>
           <p:cNvSpPr txBox="1"/>
           <p:nvPr/>
         </p:nvSpPr>
         <p:spPr>
           <a:xfrm>
-            <a:off x="9509760" y="3456432"/>
-            <a:ext cx="2194560" cy="365760"/>
-          </a:xfrm>
-          <a:prstGeom prst="rect">
-            <a:avLst/>
-          </a:prstGeom>
-          <a:noFill/>
-        </p:spPr>
-        <p:txBody>
-          <a:bodyPr wrap="square" anchor="t">
+            <a:off x="777240" y="5888736"/>
+            <a:ext cx="10789920" cy="384048"/>
+          </a:xfrm>
+          <a:prstGeom prst="rect">
+            <a:avLst/>
+          </a:prstGeom>
+          <a:noFill/>
+        </p:spPr>
+        <p:txBody>
+          <a:bodyPr wrap="square">
             <a:spAutoFit/>
           </a:bodyPr>
           <a:lstStyle/>
           <a:p>
-            <a:pPr algn="ctr">
+            <a:pPr algn="l">
               <a:lnSpc>
                 <a:spcPct val="100000"/>
               </a:lnSpc>
@@ -10469,23 +10412,27 @@
               </a:spcAft>
             </a:pPr>
             <a:r>
-              <a:rPr sz="1100" b="0" i="0">
+              <a:rPr sz="1250" b="1">
+                <a:solidFill>
+                  <a:srgbClr val="FFB52E"/>
+                </a:solidFill>
+                <a:latin typeface="Segoe UI"/>
+              </a:rPr>
+              <a:t>Total infrastructure cost: ₹0 </a:t>
+            </a:r>
+            <a:r>
+              <a:rPr sz="1200" b="0">
                 <a:solidFill>
                   <a:srgbClr val="EEF4EF"/>
                 </a:solidFill>
                 <a:latin typeface="Segoe UI"/>
               </a:rPr>
-              <a:t>scan → live product</a:t>
+              <a:t>— every dependency inside a free tier. The constraint drove the engineering: three-model failover, identical-brief caching, zero-quota sample trips.</a:t>
             </a:r>
           </a:p>
         </p:txBody>
       </p:sp>
     </p:spTree>
-    <p:extLst>
-      <p:ext uri="{BB962C8B-B14F-4D97-AF65-F5344CB8AC3E}">
-        <p14:creationId xmlns:p14="http://schemas.microsoft.com/office/powerpoint/2010/main" val="909214517"/>
-      </p:ext>
-    </p:extLst>
   </p:cSld>
   <p:clrMapOvr>
     <a:masterClrMapping/>
@@ -10520,14 +10467,14 @@
       </p:grpSpPr>
       <p:sp>
         <p:nvSpPr>
-          <p:cNvPr id="13" name="TextBox 12"/>
+          <p:cNvPr id="2" name="TextBox 1"/>
           <p:cNvSpPr txBox="1"/>
           <p:nvPr/>
         </p:nvSpPr>
         <p:spPr>
           <a:xfrm>
-            <a:off x="502920" y="6473952"/>
-            <a:ext cx="8229600" cy="274320"/>
+            <a:off x="502920" y="384048"/>
+            <a:ext cx="7315200" cy="365760"/>
           </a:xfrm>
           <a:prstGeom prst="rect">
             <a:avLst/>
@@ -10549,27 +10496,27 @@
               </a:spcAft>
             </a:pPr>
             <a:r>
-              <a:rPr sz="900" b="0" i="0">
-                <a:solidFill>
-                  <a:srgbClr val="4E635C"/>
-                </a:solidFill>
-                <a:latin typeface="Segoe UI"/>
-              </a:rPr>
-              <a:t>TripME · Team DEBUGGERS · tripme-khaki.vercel.app</a:t>
-            </a:r>
-          </a:p>
-        </p:txBody>
-      </p:sp>
-      <p:sp>
-        <p:nvSpPr>
-          <p:cNvPr id="14" name="TextBox 13"/>
+              <a:rPr sz="1200" b="1" i="0">
+                <a:solidFill>
+                  <a:srgbClr val="C58200"/>
+                </a:solidFill>
+                <a:latin typeface="Segoe UI"/>
+              </a:rPr>
+              <a:t>WHAT SHIPPED — AND WHAT WE REFUSE TO FAKE</a:t>
+            </a:r>
+          </a:p>
+        </p:txBody>
+      </p:sp>
+      <p:sp>
+        <p:nvSpPr>
+          <p:cNvPr id="3" name="TextBox 2"/>
           <p:cNvSpPr txBox="1"/>
           <p:nvPr/>
         </p:nvSpPr>
         <p:spPr>
           <a:xfrm>
-            <a:off x="11247120" y="6473952"/>
-            <a:ext cx="548640" cy="274320"/>
+            <a:off x="502920" y="658368"/>
+            <a:ext cx="11155680" cy="822960"/>
           </a:xfrm>
           <a:prstGeom prst="rect">
             <a:avLst/>
@@ -10582,7 +10529,7 @@
           </a:bodyPr>
           <a:lstStyle/>
           <a:p>
-            <a:pPr algn="r">
+            <a:pPr algn="l">
               <a:lnSpc>
                 <a:spcPct val="100000"/>
               </a:lnSpc>
@@ -10591,40 +10538,130 @@
               </a:spcAft>
             </a:pPr>
             <a:r>
-              <a:rPr sz="900" b="0" i="0">
-                <a:solidFill>
-                  <a:srgbClr val="4E635C"/>
-                </a:solidFill>
-                <a:latin typeface="Segoe UI"/>
-              </a:rPr>
-              <a:t>4</a:t>
-            </a:r>
-          </a:p>
-        </p:txBody>
-      </p:sp>
-      <p:sp>
-        <p:nvSpPr>
-          <p:cNvPr id="15" name="TextBox 14"/>
+              <a:rPr sz="3000" b="1" i="0">
+                <a:solidFill>
+                  <a:srgbClr val="0E1F1A"/>
+                </a:solidFill>
+                <a:latin typeface="Segoe UI"/>
+              </a:rPr>
+              <a:t>A complete MVP that tells the truth about itself</a:t>
+            </a:r>
+          </a:p>
+        </p:txBody>
+      </p:sp>
+      <p:pic>
+        <p:nvPicPr>
+          <p:cNvPr id="4" name="Picture 3" descr="01-landing-hero.png"/>
+          <p:cNvPicPr>
+            <a:picLocks noChangeAspect="1"/>
+          </p:cNvPicPr>
+          <p:nvPr/>
+        </p:nvPicPr>
+        <p:blipFill>
+          <a:blip r:embed="rId2"/>
+          <a:stretch>
+            <a:fillRect/>
+          </a:stretch>
+        </p:blipFill>
+        <p:spPr>
+          <a:xfrm>
+            <a:off x="502920" y="1572768"/>
+            <a:ext cx="3657600" cy="2286000"/>
+          </a:xfrm>
+          <a:prstGeom prst="rect">
+            <a:avLst/>
+          </a:prstGeom>
+          <a:ln w="12700">
+            <a:solidFill>
+              <a:srgbClr val="D8DFDB"/>
+            </a:solidFill>
+          </a:ln>
+          <a:effectLst/>
+        </p:spPr>
+      </p:pic>
+      <p:pic>
+        <p:nvPicPr>
+          <p:cNvPr id="5" name="Picture 4" descr="12-trip-bookings.png"/>
+          <p:cNvPicPr>
+            <a:picLocks noChangeAspect="1"/>
+          </p:cNvPicPr>
+          <p:nvPr/>
+        </p:nvPicPr>
+        <p:blipFill>
+          <a:blip r:embed="rId3"/>
+          <a:stretch>
+            <a:fillRect/>
+          </a:stretch>
+        </p:blipFill>
+        <p:spPr>
+          <a:xfrm>
+            <a:off x="4315968" y="1572768"/>
+            <a:ext cx="3657600" cy="2286000"/>
+          </a:xfrm>
+          <a:prstGeom prst="rect">
+            <a:avLst/>
+          </a:prstGeom>
+          <a:ln w="12700">
+            <a:solidFill>
+              <a:srgbClr val="D8DFDB"/>
+            </a:solidFill>
+          </a:ln>
+          <a:effectLst/>
+        </p:spPr>
+      </p:pic>
+      <p:pic>
+        <p:nvPicPr>
+          <p:cNvPr id="6" name="Picture 5" descr="33-hindi-complete.png"/>
+          <p:cNvPicPr>
+            <a:picLocks noChangeAspect="1"/>
+          </p:cNvPicPr>
+          <p:nvPr/>
+        </p:nvPicPr>
+        <p:blipFill>
+          <a:blip r:embed="rId4"/>
+          <a:stretch>
+            <a:fillRect/>
+          </a:stretch>
+        </p:blipFill>
+        <p:spPr>
+          <a:xfrm>
+            <a:off x="8129016" y="1572768"/>
+            <a:ext cx="3657600" cy="2286000"/>
+          </a:xfrm>
+          <a:prstGeom prst="rect">
+            <a:avLst/>
+          </a:prstGeom>
+          <a:ln w="12700">
+            <a:solidFill>
+              <a:srgbClr val="D8DFDB"/>
+            </a:solidFill>
+          </a:ln>
+          <a:effectLst/>
+        </p:spPr>
+      </p:pic>
+      <p:sp>
+        <p:nvSpPr>
+          <p:cNvPr id="7" name="TextBox 6"/>
           <p:cNvSpPr txBox="1"/>
           <p:nvPr/>
         </p:nvSpPr>
         <p:spPr>
           <a:xfrm>
-            <a:off x="548640" y="384048"/>
-            <a:ext cx="9144000" cy="365760"/>
-          </a:xfrm>
-          <a:prstGeom prst="rect">
-            <a:avLst/>
-          </a:prstGeom>
-          <a:noFill/>
-        </p:spPr>
-        <p:txBody>
-          <a:bodyPr wrap="square">
+            <a:off x="502920" y="3913632"/>
+            <a:ext cx="3657600" cy="320040"/>
+          </a:xfrm>
+          <a:prstGeom prst="rect">
+            <a:avLst/>
+          </a:prstGeom>
+          <a:noFill/>
+        </p:spPr>
+        <p:txBody>
+          <a:bodyPr wrap="square" anchor="t">
             <a:spAutoFit/>
           </a:bodyPr>
           <a:lstStyle/>
           <a:p>
-            <a:pPr algn="l">
+            <a:pPr algn="ctr">
               <a:lnSpc>
                 <a:spcPct val="100000"/>
               </a:lnSpc>
@@ -10633,40 +10670,40 @@
               </a:spcAft>
             </a:pPr>
             <a:r>
-              <a:rPr sz="1200" b="1">
-                <a:solidFill>
-                  <a:srgbClr val="C58200"/>
-                </a:solidFill>
-                <a:latin typeface="Segoe UI"/>
-              </a:rPr>
-              <a:t>IMPLEMENTATION — HOW WE BUILT IT</a:t>
-            </a:r>
-          </a:p>
-        </p:txBody>
-      </p:sp>
-      <p:sp>
-        <p:nvSpPr>
-          <p:cNvPr id="16" name="TextBox 15"/>
+              <a:rPr sz="1050" b="1" i="0">
+                <a:solidFill>
+                  <a:srgbClr val="4E635C"/>
+                </a:solidFill>
+                <a:latin typeface="Segoe UI"/>
+              </a:rPr>
+              <a:t>Mood-first — no destination field</a:t>
+            </a:r>
+          </a:p>
+        </p:txBody>
+      </p:sp>
+      <p:sp>
+        <p:nvSpPr>
+          <p:cNvPr id="8" name="TextBox 7"/>
           <p:cNvSpPr txBox="1"/>
           <p:nvPr/>
         </p:nvSpPr>
         <p:spPr>
           <a:xfrm>
-            <a:off x="548640" y="658368"/>
-            <a:ext cx="11155680" cy="822960"/>
-          </a:xfrm>
-          <a:prstGeom prst="rect">
-            <a:avLst/>
-          </a:prstGeom>
-          <a:noFill/>
-        </p:spPr>
-        <p:txBody>
-          <a:bodyPr wrap="square">
+            <a:off x="4315968" y="3913632"/>
+            <a:ext cx="3657600" cy="320040"/>
+          </a:xfrm>
+          <a:prstGeom prst="rect">
+            <a:avLst/>
+          </a:prstGeom>
+          <a:noFill/>
+        </p:spPr>
+        <p:txBody>
+          <a:bodyPr wrap="square" anchor="t">
             <a:spAutoFit/>
           </a:bodyPr>
           <a:lstStyle/>
           <a:p>
-            <a:pPr algn="l">
+            <a:pPr algn="ctr">
               <a:lnSpc>
                 <a:spcPct val="100000"/>
               </a:lnSpc>
@@ -10675,27 +10712,69 @@
               </a:spcAft>
             </a:pPr>
             <a:r>
-              <a:rPr sz="2900" b="1">
-                <a:solidFill>
-                  <a:srgbClr val="0E1F1A"/>
-                </a:solidFill>
-                <a:latin typeface="Segoe UI"/>
-              </a:rPr>
-              <a:t>An agile process, a lean stack, AI only where it earns its place</a:t>
-            </a:r>
-          </a:p>
-        </p:txBody>
-      </p:sp>
-      <p:sp>
-        <p:nvSpPr>
-          <p:cNvPr id="17" name="Rounded Rectangle 16"/>
+              <a:rPr sz="1050" b="1" i="0">
+                <a:solidFill>
+                  <a:srgbClr val="4E635C"/>
+                </a:solidFill>
+                <a:latin typeface="Segoe UI"/>
+              </a:rPr>
+              <a:t>Approval gates · DEMO labels on every booking</a:t>
+            </a:r>
+          </a:p>
+        </p:txBody>
+      </p:sp>
+      <p:sp>
+        <p:nvSpPr>
+          <p:cNvPr id="9" name="TextBox 8"/>
+          <p:cNvSpPr txBox="1"/>
+          <p:nvPr/>
+        </p:nvSpPr>
+        <p:spPr>
+          <a:xfrm>
+            <a:off x="8129016" y="3913632"/>
+            <a:ext cx="3657600" cy="320040"/>
+          </a:xfrm>
+          <a:prstGeom prst="rect">
+            <a:avLst/>
+          </a:prstGeom>
+          <a:noFill/>
+        </p:spPr>
+        <p:txBody>
+          <a:bodyPr wrap="square" anchor="t">
+            <a:spAutoFit/>
+          </a:bodyPr>
+          <a:lstStyle/>
+          <a:p>
+            <a:pPr algn="ctr">
+              <a:lnSpc>
+                <a:spcPct val="100000"/>
+              </a:lnSpc>
+              <a:spcAft>
+                <a:spcPts val="400"/>
+              </a:spcAft>
+            </a:pPr>
+            <a:r>
+              <a:rPr sz="1050" b="1" i="0">
+                <a:solidFill>
+                  <a:srgbClr val="4E635C"/>
+                </a:solidFill>
+                <a:latin typeface="Segoe UI"/>
+              </a:rPr>
+              <a:t>Agent output translated — figures untouched</a:t>
+            </a:r>
+          </a:p>
+        </p:txBody>
+      </p:sp>
+      <p:sp>
+        <p:nvSpPr>
+          <p:cNvPr id="10" name="Rounded Rectangle 9"/>
           <p:cNvSpPr/>
           <p:nvPr/>
         </p:nvSpPr>
         <p:spPr>
           <a:xfrm>
-            <a:off x="502920" y="1554480"/>
-            <a:ext cx="3648456" cy="4114800"/>
+            <a:off x="502920" y="4343400"/>
+            <a:ext cx="5532120" cy="868680"/>
           </a:xfrm>
           <a:prstGeom prst="roundRect">
             <a:avLst>
@@ -10731,179 +10810,104 @@
           <a:lstStyle/>
           <a:p>
             <a:pPr algn="ctr"/>
-          </a:p>
-        </p:txBody>
-      </p:sp>
-      <p:sp>
-        <p:nvSpPr>
-          <p:cNvPr id="18" name="TextBox 17"/>
+            <a:endParaRPr/>
+          </a:p>
+        </p:txBody>
+      </p:sp>
+      <p:sp>
+        <p:nvSpPr>
+          <p:cNvPr id="11" name="TextBox 10"/>
           <p:cNvSpPr txBox="1"/>
           <p:nvPr/>
         </p:nvSpPr>
         <p:spPr>
           <a:xfrm>
-            <a:off x="704088" y="1691640"/>
-            <a:ext cx="3200400" cy="320040"/>
-          </a:xfrm>
-          <a:prstGeom prst="rect">
-            <a:avLst/>
-          </a:prstGeom>
-          <a:noFill/>
-        </p:spPr>
-        <p:txBody>
-          <a:bodyPr wrap="square">
+            <a:off x="731520" y="4416552"/>
+            <a:ext cx="1920240" cy="640080"/>
+          </a:xfrm>
+          <a:prstGeom prst="rect">
+            <a:avLst/>
+          </a:prstGeom>
+          <a:noFill/>
+        </p:spPr>
+        <p:txBody>
+          <a:bodyPr wrap="square" anchor="t">
             <a:spAutoFit/>
           </a:bodyPr>
           <a:lstStyle/>
           <a:p>
             <a:pPr algn="l">
               <a:lnSpc>
-                <a:spcPct val="100000"/>
-              </a:lnSpc>
-              <a:spcAft>
-                <a:spcPts val="400"/>
-              </a:spcAft>
-            </a:pPr>
-            <a:r>
-              <a:rPr sz="1150" b="1">
-                <a:solidFill>
-                  <a:srgbClr val="C58200"/>
-                </a:solidFill>
-                <a:latin typeface="Segoe UI"/>
-              </a:rPr>
-              <a:t>PROCESS</a:t>
-            </a:r>
-          </a:p>
-        </p:txBody>
-      </p:sp>
-      <p:sp>
-        <p:nvSpPr>
-          <p:cNvPr id="19" name="TextBox 18"/>
+                <a:spcPct val="95000"/>
+              </a:lnSpc>
+              <a:spcAft>
+                <a:spcPts val="400"/>
+              </a:spcAft>
+            </a:pPr>
+            <a:r>
+              <a:rPr sz="1350" b="1" i="0">
+                <a:solidFill>
+                  <a:srgbClr val="0E1F1A"/>
+                </a:solidFill>
+                <a:latin typeface="Segoe UI"/>
+              </a:rPr>
+              <a:t>18 MVP features</a:t>
+            </a:r>
+          </a:p>
+        </p:txBody>
+      </p:sp>
+      <p:sp>
+        <p:nvSpPr>
+          <p:cNvPr id="12" name="TextBox 11"/>
           <p:cNvSpPr txBox="1"/>
           <p:nvPr/>
         </p:nvSpPr>
         <p:spPr>
           <a:xfrm>
-            <a:off x="704088" y="2048256"/>
-            <a:ext cx="3273552" cy="3520440"/>
-          </a:xfrm>
-          <a:prstGeom prst="rect">
-            <a:avLst/>
-          </a:prstGeom>
-          <a:noFill/>
-        </p:spPr>
-        <p:txBody>
-          <a:bodyPr wrap="square">
+            <a:off x="2697480" y="4416552"/>
+            <a:ext cx="3246120" cy="731520"/>
+          </a:xfrm>
+          <a:prstGeom prst="rect">
+            <a:avLst/>
+          </a:prstGeom>
+          <a:noFill/>
+        </p:spPr>
+        <p:txBody>
+          <a:bodyPr wrap="square" anchor="t">
             <a:spAutoFit/>
           </a:bodyPr>
           <a:lstStyle/>
           <a:p>
             <a:pPr algn="l">
               <a:lnSpc>
-                <a:spcPct val="110000"/>
-              </a:lnSpc>
-              <a:spcAft>
-                <a:spcPts val="400"/>
-              </a:spcAft>
-            </a:pPr>
-            <a:r>
-              <a:rPr sz="1050" b="0">
-                <a:solidFill>
-                  <a:srgbClr val="0E1F1A"/>
-                </a:solidFill>
-                <a:latin typeface="Segoe UI"/>
-              </a:rPr>
-              <a:t>Agile → Scrum, run in Jira: a 61-story backlog groomed into six sprints</a:t>
-            </a:r>
-          </a:p>
-          <a:p>
-            <a:pPr algn="l">
-              <a:lnSpc>
-                <a:spcPct val="110000"/>
-              </a:lnSpc>
-              <a:spcAft>
-                <a:spcPts val="400"/>
-              </a:spcAft>
-            </a:pPr>
-            <a:r>
-              <a:rPr sz="1050" b="0">
-                <a:solidFill>
-                  <a:srgbClr val="0E1F1A"/>
-                </a:solidFill>
-                <a:latin typeface="Segoe UI"/>
-              </a:rPr>
-              <a:t>Sequenced by data dependency — Booking cannot exist before Itinerary</a:t>
-            </a:r>
-          </a:p>
-          <a:p>
-            <a:pPr algn="l">
-              <a:lnSpc>
-                <a:spcPct val="110000"/>
-              </a:lnSpc>
-              <a:spcAft>
-                <a:spcPts val="400"/>
-              </a:spcAft>
-            </a:pPr>
-            <a:r>
-              <a:rPr sz="1050" b="0">
-                <a:solidFill>
-                  <a:srgbClr val="0E1F1A"/>
-                </a:solidFill>
-                <a:latin typeface="Segoe UI"/>
-              </a:rPr>
-              <a:t>QA stories in every sprint, not batched at the end; moderated UAT with real users</a:t>
-            </a:r>
-          </a:p>
-          <a:p>
-            <a:pPr algn="l">
-              <a:lnSpc>
-                <a:spcPct val="110000"/>
-              </a:lnSpc>
-              <a:spcAft>
-                <a:spcPts val="400"/>
-              </a:spcAft>
-            </a:pPr>
-            <a:r>
-              <a:rPr sz="1050" b="0">
-                <a:solidFill>
-                  <a:srgbClr val="0E1F1A"/>
-                </a:solidFill>
-                <a:latin typeface="Segoe UI"/>
-              </a:rPr>
-              <a:t>Sprint 7 added on evidence: a plan you cannot change is a demo, not a product</a:t>
-            </a:r>
-          </a:p>
-          <a:p>
-            <a:pPr algn="l">
-              <a:lnSpc>
-                <a:spcPct val="110000"/>
-              </a:lnSpc>
-              <a:spcAft>
-                <a:spcPts val="400"/>
-              </a:spcAft>
-            </a:pPr>
-            <a:r>
-              <a:rPr sz="1050" b="0">
-                <a:solidFill>
-                  <a:srgbClr val="0E1F1A"/>
-                </a:solidFill>
-                <a:latin typeface="Segoe UI"/>
-              </a:rPr>
-              <a:t>A continuously maintained decision log — 27 entries; no call re-litigated</a:t>
-            </a:r>
-          </a:p>
-        </p:txBody>
-      </p:sp>
-      <p:sp>
-        <p:nvSpPr>
-          <p:cNvPr id="20" name="Rounded Rectangle 19"/>
+                <a:spcPct val="100000"/>
+              </a:lnSpc>
+              <a:spcAft>
+                <a:spcPts val="400"/>
+              </a:spcAft>
+            </a:pPr>
+            <a:r>
+              <a:rPr sz="1050" b="0" i="0">
+                <a:solidFill>
+                  <a:srgbClr val="4E635C"/>
+                </a:solidFill>
+                <a:latin typeface="Segoe UI"/>
+              </a:rPr>
+              <a:t>six paths · arbitration · override with re-pricing · reminders · settle-up · expense report</a:t>
+            </a:r>
+          </a:p>
+        </p:txBody>
+      </p:sp>
+      <p:sp>
+        <p:nvSpPr>
+          <p:cNvPr id="13" name="Rounded Rectangle 12"/>
           <p:cNvSpPr/>
           <p:nvPr/>
         </p:nvSpPr>
         <p:spPr>
           <a:xfrm>
-            <a:off x="4315968" y="1554480"/>
-            <a:ext cx="3648456" cy="4114800"/>
+            <a:off x="6199632" y="4343400"/>
+            <a:ext cx="5532120" cy="868680"/>
           </a:xfrm>
           <a:prstGeom prst="roundRect">
             <a:avLst>
@@ -10939,198 +10943,104 @@
           <a:lstStyle/>
           <a:p>
             <a:pPr algn="ctr"/>
-          </a:p>
-        </p:txBody>
-      </p:sp>
-      <p:sp>
-        <p:nvSpPr>
-          <p:cNvPr id="21" name="TextBox 20"/>
+            <a:endParaRPr/>
+          </a:p>
+        </p:txBody>
+      </p:sp>
+      <p:sp>
+        <p:nvSpPr>
+          <p:cNvPr id="14" name="TextBox 13"/>
           <p:cNvSpPr txBox="1"/>
           <p:nvPr/>
         </p:nvSpPr>
         <p:spPr>
           <a:xfrm>
-            <a:off x="4517136" y="1691640"/>
-            <a:ext cx="3200400" cy="320040"/>
-          </a:xfrm>
-          <a:prstGeom prst="rect">
-            <a:avLst/>
-          </a:prstGeom>
-          <a:noFill/>
-        </p:spPr>
-        <p:txBody>
-          <a:bodyPr wrap="square">
+            <a:off x="6428232" y="4416552"/>
+            <a:ext cx="1920240" cy="640080"/>
+          </a:xfrm>
+          <a:prstGeom prst="rect">
+            <a:avLst/>
+          </a:prstGeom>
+          <a:noFill/>
+        </p:spPr>
+        <p:txBody>
+          <a:bodyPr wrap="square" anchor="t">
             <a:spAutoFit/>
           </a:bodyPr>
           <a:lstStyle/>
           <a:p>
             <a:pPr algn="l">
               <a:lnSpc>
-                <a:spcPct val="100000"/>
-              </a:lnSpc>
-              <a:spcAft>
-                <a:spcPts val="400"/>
-              </a:spcAft>
-            </a:pPr>
-            <a:r>
-              <a:rPr sz="1150" b="1">
-                <a:solidFill>
-                  <a:srgbClr val="C58200"/>
-                </a:solidFill>
-                <a:latin typeface="Segoe UI"/>
-              </a:rPr>
-              <a:t>TOOLS &amp; FRAMEWORKS</a:t>
-            </a:r>
-          </a:p>
-        </p:txBody>
-      </p:sp>
-      <p:sp>
-        <p:nvSpPr>
-          <p:cNvPr id="22" name="TextBox 21"/>
+                <a:spcPct val="95000"/>
+              </a:lnSpc>
+              <a:spcAft>
+                <a:spcPts val="400"/>
+              </a:spcAft>
+            </a:pPr>
+            <a:r>
+              <a:rPr sz="1350" b="1" i="0">
+                <a:solidFill>
+                  <a:srgbClr val="0E1F1A"/>
+                </a:solidFill>
+                <a:latin typeface="Segoe UI"/>
+              </a:rPr>
+              <a:t>Honesty as a feature</a:t>
+            </a:r>
+          </a:p>
+        </p:txBody>
+      </p:sp>
+      <p:sp>
+        <p:nvSpPr>
+          <p:cNvPr id="15" name="TextBox 14"/>
           <p:cNvSpPr txBox="1"/>
           <p:nvPr/>
         </p:nvSpPr>
         <p:spPr>
           <a:xfrm>
-            <a:off x="4517136" y="2048256"/>
-            <a:ext cx="3273552" cy="3520440"/>
-          </a:xfrm>
-          <a:prstGeom prst="rect">
-            <a:avLst/>
-          </a:prstGeom>
-          <a:noFill/>
-        </p:spPr>
-        <p:txBody>
-          <a:bodyPr wrap="square">
+            <a:off x="8394192" y="4416552"/>
+            <a:ext cx="3246120" cy="731520"/>
+          </a:xfrm>
+          <a:prstGeom prst="rect">
+            <a:avLst/>
+          </a:prstGeom>
+          <a:noFill/>
+        </p:spPr>
+        <p:txBody>
+          <a:bodyPr wrap="square" anchor="t">
             <a:spAutoFit/>
           </a:bodyPr>
           <a:lstStyle/>
           <a:p>
             <a:pPr algn="l">
               <a:lnSpc>
-                <a:spcPct val="110000"/>
-              </a:lnSpc>
-              <a:spcAft>
-                <a:spcPts val="400"/>
-              </a:spcAft>
-            </a:pPr>
-            <a:r>
-              <a:rPr sz="1050" b="0">
-                <a:solidFill>
-                  <a:srgbClr val="0E1F1A"/>
-                </a:solidFill>
-                <a:latin typeface="Segoe UI"/>
-              </a:rPr>
-              <a:t>Next.js App Router + TypeScript — UI and server routes in one deployable</a:t>
-            </a:r>
-          </a:p>
-          <a:p>
-            <a:pPr algn="l">
-              <a:lnSpc>
-                <a:spcPct val="110000"/>
-              </a:lnSpc>
-              <a:spcAft>
-                <a:spcPts val="400"/>
-              </a:spcAft>
-            </a:pPr>
-            <a:r>
-              <a:rPr sz="1050" b="0">
-                <a:solidFill>
-                  <a:srgbClr val="0E1F1A"/>
-                </a:solidFill>
-                <a:latin typeface="Segoe UI"/>
-              </a:rPr>
-              <a:t>Tailwind CSS v4 on a fixed design system — pine, marigold, Plex Mono for money</a:t>
-            </a:r>
-          </a:p>
-          <a:p>
-            <a:pPr algn="l">
-              <a:lnSpc>
-                <a:spcPct val="110000"/>
-              </a:lnSpc>
-              <a:spcAft>
-                <a:spcPts val="400"/>
-              </a:spcAft>
-            </a:pPr>
-            <a:r>
-              <a:rPr sz="1050" b="0">
-                <a:solidFill>
-                  <a:srgbClr val="0E1F1A"/>
-                </a:solidFill>
-                <a:latin typeface="Segoe UI"/>
-              </a:rPr>
-              <a:t>Vercel — push-to-deploy on every commit to main</a:t>
-            </a:r>
-          </a:p>
-          <a:p>
-            <a:pPr algn="l">
-              <a:lnSpc>
-                <a:spcPct val="110000"/>
-              </a:lnSpc>
-              <a:spcAft>
-                <a:spcPts val="400"/>
-              </a:spcAft>
-            </a:pPr>
-            <a:r>
-              <a:rPr sz="1050" b="0">
-                <a:solidFill>
-                  <a:srgbClr val="0E1F1A"/>
-                </a:solidFill>
-                <a:latin typeface="Segoe UI"/>
-              </a:rPr>
-              <a:t>Auth.js + Google OAuth + a password-less test user; the gate sits at commitment</a:t>
-            </a:r>
-          </a:p>
-          <a:p>
-            <a:pPr algn="l">
-              <a:lnSpc>
-                <a:spcPct val="110000"/>
-              </a:lnSpc>
-              <a:spcAft>
-                <a:spcPts val="400"/>
-              </a:spcAft>
-            </a:pPr>
-            <a:r>
-              <a:rPr sz="1050" b="0">
-                <a:solidFill>
-                  <a:srgbClr val="0E1F1A"/>
-                </a:solidFill>
-                <a:latin typeface="Segoe UI"/>
-              </a:rPr>
-              <a:t>OpenStreetMap + Nominatim + Wikipedia — real places, licensed photos, keyless</a:t>
-            </a:r>
-          </a:p>
-          <a:p>
-            <a:pPr algn="l">
-              <a:lnSpc>
-                <a:spcPct val="110000"/>
-              </a:lnSpc>
-              <a:spcAft>
-                <a:spcPts val="400"/>
-              </a:spcAft>
-            </a:pPr>
-            <a:r>
-              <a:rPr sz="1050" b="0">
-                <a:solidFill>
-                  <a:srgbClr val="0E1F1A"/>
-                </a:solidFill>
-                <a:latin typeface="Segoe UI"/>
-              </a:rPr>
-              <a:t>Trips in browser storage — a privacy position, not a missing database</a:t>
-            </a:r>
-          </a:p>
-        </p:txBody>
-      </p:sp>
-      <p:sp>
-        <p:nvSpPr>
-          <p:cNvPr id="23" name="Rounded Rectangle 22"/>
+                <a:spcPct val="100000"/>
+              </a:lnSpc>
+              <a:spcAft>
+                <a:spcPts val="400"/>
+              </a:spcAft>
+            </a:pPr>
+            <a:r>
+              <a:rPr sz="1050" b="0" i="0">
+                <a:solidFill>
+                  <a:srgbClr val="4E635C"/>
+                </a:solidFill>
+                <a:latin typeface="Segoe UI"/>
+              </a:rPr>
+              <a:t>bookings labelled simulated · prices marked “est.” · India-only stated and enforced in the pipeline</a:t>
+            </a:r>
+          </a:p>
+        </p:txBody>
+      </p:sp>
+      <p:sp>
+        <p:nvSpPr>
+          <p:cNvPr id="16" name="Rounded Rectangle 15"/>
           <p:cNvSpPr/>
           <p:nvPr/>
         </p:nvSpPr>
         <p:spPr>
           <a:xfrm>
-            <a:off x="8129016" y="1554480"/>
-            <a:ext cx="3648456" cy="4114800"/>
+            <a:off x="502920" y="5349240"/>
+            <a:ext cx="5532120" cy="868680"/>
           </a:xfrm>
           <a:prstGeom prst="roundRect">
             <a:avLst>
@@ -11166,217 +11076,104 @@
           <a:lstStyle/>
           <a:p>
             <a:pPr algn="ctr"/>
-          </a:p>
-        </p:txBody>
-      </p:sp>
-      <p:sp>
-        <p:nvSpPr>
-          <p:cNvPr id="24" name="TextBox 23"/>
+            <a:endParaRPr/>
+          </a:p>
+        </p:txBody>
+      </p:sp>
+      <p:sp>
+        <p:nvSpPr>
+          <p:cNvPr id="17" name="TextBox 16"/>
           <p:cNvSpPr txBox="1"/>
           <p:nvPr/>
         </p:nvSpPr>
         <p:spPr>
           <a:xfrm>
-            <a:off x="8330184" y="1691640"/>
-            <a:ext cx="3200400" cy="320040"/>
-          </a:xfrm>
-          <a:prstGeom prst="rect">
-            <a:avLst/>
-          </a:prstGeom>
-          <a:noFill/>
-        </p:spPr>
-        <p:txBody>
-          <a:bodyPr wrap="square">
+            <a:off x="731520" y="5422392"/>
+            <a:ext cx="1920240" cy="640080"/>
+          </a:xfrm>
+          <a:prstGeom prst="rect">
+            <a:avLst/>
+          </a:prstGeom>
+          <a:noFill/>
+        </p:spPr>
+        <p:txBody>
+          <a:bodyPr wrap="square" anchor="t">
             <a:spAutoFit/>
           </a:bodyPr>
           <a:lstStyle/>
           <a:p>
             <a:pPr algn="l">
               <a:lnSpc>
-                <a:spcPct val="100000"/>
-              </a:lnSpc>
-              <a:spcAft>
-                <a:spcPts val="400"/>
-              </a:spcAft>
-            </a:pPr>
-            <a:r>
-              <a:rPr sz="1150" b="1">
-                <a:solidFill>
-                  <a:srgbClr val="C58200"/>
-                </a:solidFill>
-                <a:latin typeface="Segoe UI"/>
-              </a:rPr>
-              <a:t>AI &amp; MODELS</a:t>
-            </a:r>
-          </a:p>
-        </p:txBody>
-      </p:sp>
-      <p:sp>
-        <p:nvSpPr>
-          <p:cNvPr id="25" name="TextBox 24"/>
+                <a:spcPct val="95000"/>
+              </a:lnSpc>
+              <a:spcAft>
+                <a:spcPts val="400"/>
+              </a:spcAft>
+            </a:pPr>
+            <a:r>
+              <a:rPr sz="1350" b="1" i="0">
+                <a:solidFill>
+                  <a:srgbClr val="0E1F1A"/>
+                </a:solidFill>
+                <a:latin typeface="Segoe UI"/>
+              </a:rPr>
+              <a:t>₹0 infrastructure</a:t>
+            </a:r>
+          </a:p>
+        </p:txBody>
+      </p:sp>
+      <p:sp>
+        <p:nvSpPr>
+          <p:cNvPr id="18" name="TextBox 17"/>
           <p:cNvSpPr txBox="1"/>
           <p:nvPr/>
         </p:nvSpPr>
         <p:spPr>
           <a:xfrm>
-            <a:off x="8330184" y="2048256"/>
-            <a:ext cx="3273552" cy="3520440"/>
-          </a:xfrm>
-          <a:prstGeom prst="rect">
-            <a:avLst/>
-          </a:prstGeom>
-          <a:noFill/>
-        </p:spPr>
-        <p:txBody>
-          <a:bodyPr wrap="square">
+            <a:off x="2697480" y="5422392"/>
+            <a:ext cx="3246120" cy="731520"/>
+          </a:xfrm>
+          <a:prstGeom prst="rect">
+            <a:avLst/>
+          </a:prstGeom>
+          <a:noFill/>
+        </p:spPr>
+        <p:txBody>
+          <a:bodyPr wrap="square" anchor="t">
             <a:spAutoFit/>
           </a:bodyPr>
           <a:lstStyle/>
           <a:p>
             <a:pPr algn="l">
               <a:lnSpc>
-                <a:spcPct val="110000"/>
-              </a:lnSpc>
-              <a:spcAft>
-                <a:spcPts val="400"/>
-              </a:spcAft>
-            </a:pPr>
-            <a:r>
-              <a:rPr sz="1050" b="0">
-                <a:solidFill>
-                  <a:srgbClr val="0E1F1A"/>
-                </a:solidFill>
-                <a:latin typeface="Segoe UI"/>
-              </a:rPr>
-              <a:t>Three Groq-hosted models, routed per agent by job:</a:t>
-            </a:r>
-          </a:p>
-          <a:p>
-            <a:pPr algn="l">
-              <a:lnSpc>
-                <a:spcPct val="110000"/>
-              </a:lnSpc>
-              <a:spcAft>
-                <a:spcPts val="400"/>
-              </a:spcAft>
-            </a:pPr>
-            <a:r>
-              <a:rPr sz="1050" b="0">
-                <a:solidFill>
-                  <a:srgbClr val="0E1F1A"/>
-                </a:solidFill>
-                <a:latin typeface="Segoe UI"/>
-              </a:rPr>
-              <a:t>• gpt-oss-120b — reasoning: Discovery, Itinerary, Budget</a:t>
-            </a:r>
-          </a:p>
-          <a:p>
-            <a:pPr algn="l">
-              <a:lnSpc>
-                <a:spcPct val="110000"/>
-              </a:lnSpc>
-              <a:spcAft>
-                <a:spcPts val="400"/>
-              </a:spcAft>
-            </a:pPr>
-            <a:r>
-              <a:rPr sz="1050" b="0">
-                <a:solidFill>
-                  <a:srgbClr val="0E1F1A"/>
-                </a:solidFill>
-                <a:latin typeface="Segoe UI"/>
-              </a:rPr>
-              <a:t>• qwen3.8-27b — arbitration: Referee, consensus, intent</a:t>
-            </a:r>
-          </a:p>
-          <a:p>
-            <a:pPr algn="l">
-              <a:lnSpc>
-                <a:spcPct val="110000"/>
-              </a:lnSpc>
-              <a:spcAft>
-                <a:spcPts val="400"/>
-              </a:spcAft>
-            </a:pPr>
-            <a:r>
-              <a:rPr sz="1050" b="0">
-                <a:solidFill>
-                  <a:srgbClr val="0E1F1A"/>
-                </a:solidFill>
-                <a:latin typeface="Segoe UI"/>
-              </a:rPr>
-              <a:t>• gpt-oss-20b — structural: Booking, Advocates, translation</a:t>
-            </a:r>
-          </a:p>
-          <a:p>
-            <a:pPr algn="l">
-              <a:lnSpc>
-                <a:spcPct val="110000"/>
-              </a:lnSpc>
-              <a:spcAft>
-                <a:spcPts val="400"/>
-              </a:spcAft>
-            </a:pPr>
-            <a:r>
-              <a:rPr sz="1050" b="0">
-                <a:solidFill>
-                  <a:srgbClr val="0E1F1A"/>
-                </a:solidFill>
-                <a:latin typeface="Segoe UI"/>
-              </a:rPr>
-              <a:t>Typed JSON-schema handoffs — every output validated before it enters trip-state</a:t>
-            </a:r>
-          </a:p>
-          <a:p>
-            <a:pPr algn="l">
-              <a:lnSpc>
-                <a:spcPct val="110000"/>
-              </a:lnSpc>
-              <a:spcAft>
-                <a:spcPts val="400"/>
-              </a:spcAft>
-            </a:pPr>
-            <a:r>
-              <a:rPr sz="1050" b="0">
-                <a:solidFill>
-                  <a:srgbClr val="0E1F1A"/>
-                </a:solidFill>
-                <a:latin typeface="Segoe UI"/>
-              </a:rPr>
-              <a:t>Per-agent failover chains across all three — quota, schema errors, even model retirement</a:t>
-            </a:r>
-          </a:p>
-          <a:p>
-            <a:pPr algn="l">
-              <a:lnSpc>
-                <a:spcPct val="110000"/>
-              </a:lnSpc>
-              <a:spcAft>
-                <a:spcPts val="400"/>
-              </a:spcAft>
-            </a:pPr>
-            <a:r>
-              <a:rPr sz="1050" b="0">
-                <a:solidFill>
-                  <a:srgbClr val="0E1F1A"/>
-                </a:solidFill>
-                <a:latin typeface="Segoe UI"/>
-              </a:rPr>
-              <a:t>Deterministic money layer in code; translation runs after generation completes</a:t>
-            </a:r>
-          </a:p>
-        </p:txBody>
-      </p:sp>
-      <p:sp>
-        <p:nvSpPr>
-          <p:cNvPr id="26" name="Rounded Rectangle 25"/>
+                <a:spcPct val="100000"/>
+              </a:lnSpc>
+              <a:spcAft>
+                <a:spcPts val="400"/>
+              </a:spcAft>
+            </a:pPr>
+            <a:r>
+              <a:rPr sz="1050" b="0" i="0">
+                <a:solidFill>
+                  <a:srgbClr val="4E635C"/>
+                </a:solidFill>
+                <a:latin typeface="Segoe UI"/>
+              </a:rPr>
+              <a:t>three Groq models with per-agent failover · OpenStreetMap &amp; Wikipedia · Vercel — all free tier</a:t>
+            </a:r>
+          </a:p>
+        </p:txBody>
+      </p:sp>
+      <p:sp>
+        <p:nvSpPr>
+          <p:cNvPr id="19" name="Rounded Rectangle 18"/>
           <p:cNvSpPr/>
           <p:nvPr/>
         </p:nvSpPr>
         <p:spPr>
           <a:xfrm>
-            <a:off x="502920" y="5806440"/>
-            <a:ext cx="11201400" cy="530352"/>
+            <a:off x="6199632" y="5349240"/>
+            <a:ext cx="5532120" cy="868680"/>
           </a:xfrm>
           <a:prstGeom prst="roundRect">
             <a:avLst>
@@ -11384,10 +11181,12 @@
             </a:avLst>
           </a:prstGeom>
           <a:solidFill>
-            <a:srgbClr val="0E1F1A"/>
+            <a:srgbClr val="FFFFFF"/>
           </a:solidFill>
-          <a:ln>
-            <a:noFill/>
+          <a:ln w="12700">
+            <a:solidFill>
+              <a:srgbClr val="D8DFDB"/>
+            </a:solidFill>
           </a:ln>
           <a:effectLst/>
         </p:spPr>
@@ -11410,33 +11209,76 @@
           <a:lstStyle/>
           <a:p>
             <a:pPr algn="ctr"/>
-          </a:p>
-        </p:txBody>
-      </p:sp>
-      <p:sp>
-        <p:nvSpPr>
-          <p:cNvPr id="27" name="TextBox 26"/>
+            <a:endParaRPr/>
+          </a:p>
+        </p:txBody>
+      </p:sp>
+      <p:sp>
+        <p:nvSpPr>
+          <p:cNvPr id="20" name="TextBox 19"/>
           <p:cNvSpPr txBox="1"/>
           <p:nvPr/>
         </p:nvSpPr>
         <p:spPr>
           <a:xfrm>
-            <a:off x="777240" y="5888736"/>
-            <a:ext cx="10789920" cy="384048"/>
-          </a:xfrm>
-          <a:prstGeom prst="rect">
-            <a:avLst/>
-          </a:prstGeom>
-          <a:noFill/>
-        </p:spPr>
-        <p:txBody>
-          <a:bodyPr wrap="square">
+            <a:off x="6428232" y="5422392"/>
+            <a:ext cx="1920240" cy="640080"/>
+          </a:xfrm>
+          <a:prstGeom prst="rect">
+            <a:avLst/>
+          </a:prstGeom>
+          <a:noFill/>
+        </p:spPr>
+        <p:txBody>
+          <a:bodyPr wrap="square" anchor="t">
             <a:spAutoFit/>
           </a:bodyPr>
           <a:lstStyle/>
           <a:p>
             <a:pPr algn="l">
               <a:lnSpc>
+                <a:spcPct val="95000"/>
+              </a:lnSpc>
+              <a:spcAft>
+                <a:spcPts val="400"/>
+              </a:spcAft>
+            </a:pPr>
+            <a:r>
+              <a:rPr sz="1350" b="1" i="0">
+                <a:solidFill>
+                  <a:srgbClr val="0E1F1A"/>
+                </a:solidFill>
+                <a:latin typeface="Segoe UI"/>
+              </a:rPr>
+              <a:t>Privacy position</a:t>
+            </a:r>
+          </a:p>
+        </p:txBody>
+      </p:sp>
+      <p:sp>
+        <p:nvSpPr>
+          <p:cNvPr id="21" name="TextBox 20"/>
+          <p:cNvSpPr txBox="1"/>
+          <p:nvPr/>
+        </p:nvSpPr>
+        <p:spPr>
+          <a:xfrm>
+            <a:off x="8394192" y="5422392"/>
+            <a:ext cx="3246120" cy="731520"/>
+          </a:xfrm>
+          <a:prstGeom prst="rect">
+            <a:avLst/>
+          </a:prstGeom>
+          <a:noFill/>
+        </p:spPr>
+        <p:txBody>
+          <a:bodyPr wrap="square" anchor="t">
+            <a:spAutoFit/>
+          </a:bodyPr>
+          <a:lstStyle/>
+          <a:p>
+            <a:pPr algn="l">
+              <a:lnSpc>
                 <a:spcPct val="100000"/>
               </a:lnSpc>
               <a:spcAft>
@@ -11444,22 +11286,97 @@
               </a:spcAft>
             </a:pPr>
             <a:r>
-              <a:rPr sz="1250" b="1">
-                <a:solidFill>
-                  <a:srgbClr val="FFB52E"/>
-                </a:solidFill>
-                <a:latin typeface="Segoe UI"/>
-              </a:rPr>
-              <a:t>Total infrastructure cost: ₹0 </a:t>
-            </a:r>
-            <a:r>
-              <a:rPr sz="1200" b="0">
-                <a:solidFill>
-                  <a:srgbClr val="EEF4EF"/>
-                </a:solidFill>
-                <a:latin typeface="Segoe UI"/>
-              </a:rPr>
-              <a:t>— every dependency inside a free tier. The constraint drove the engineering: three-model failover, identical-brief caching, zero-quota sample trips.</a:t>
+              <a:rPr sz="1050" b="0" i="0">
+                <a:solidFill>
+                  <a:srgbClr val="4E635C"/>
+                </a:solidFill>
+                <a:latin typeface="Segoe UI"/>
+              </a:rPr>
+              <a:t>trips never leave the browser; an account stores only name, email, picture</a:t>
+            </a:r>
+          </a:p>
+        </p:txBody>
+      </p:sp>
+      <p:sp>
+        <p:nvSpPr>
+          <p:cNvPr id="22" name="TextBox 21"/>
+          <p:cNvSpPr txBox="1"/>
+          <p:nvPr/>
+        </p:nvSpPr>
+        <p:spPr>
+          <a:xfrm>
+            <a:off x="502920" y="6473952"/>
+            <a:ext cx="8229600" cy="274320"/>
+          </a:xfrm>
+          <a:prstGeom prst="rect">
+            <a:avLst/>
+          </a:prstGeom>
+          <a:noFill/>
+        </p:spPr>
+        <p:txBody>
+          <a:bodyPr wrap="square" anchor="t">
+            <a:spAutoFit/>
+          </a:bodyPr>
+          <a:lstStyle/>
+          <a:p>
+            <a:pPr algn="l">
+              <a:lnSpc>
+                <a:spcPct val="100000"/>
+              </a:lnSpc>
+              <a:spcAft>
+                <a:spcPts val="400"/>
+              </a:spcAft>
+            </a:pPr>
+            <a:r>
+              <a:rPr sz="900" b="0" i="0">
+                <a:solidFill>
+                  <a:srgbClr val="4E635C"/>
+                </a:solidFill>
+                <a:latin typeface="Segoe UI"/>
+              </a:rPr>
+              <a:t>TripME · Team DEBUGGERS · tripme-khaki.vercel.app</a:t>
+            </a:r>
+          </a:p>
+        </p:txBody>
+      </p:sp>
+      <p:sp>
+        <p:nvSpPr>
+          <p:cNvPr id="23" name="TextBox 22"/>
+          <p:cNvSpPr txBox="1"/>
+          <p:nvPr/>
+        </p:nvSpPr>
+        <p:spPr>
+          <a:xfrm>
+            <a:off x="11247120" y="6473952"/>
+            <a:ext cx="548640" cy="274320"/>
+          </a:xfrm>
+          <a:prstGeom prst="rect">
+            <a:avLst/>
+          </a:prstGeom>
+          <a:noFill/>
+        </p:spPr>
+        <p:txBody>
+          <a:bodyPr wrap="square" anchor="t">
+            <a:spAutoFit/>
+          </a:bodyPr>
+          <a:lstStyle/>
+          <a:p>
+            <a:pPr algn="r">
+              <a:lnSpc>
+                <a:spcPct val="100000"/>
+              </a:lnSpc>
+              <a:spcAft>
+                <a:spcPts val="400"/>
+              </a:spcAft>
+            </a:pPr>
+            <a:r>
+              <a:rPr sz="900" b="0" i="0">
+                <a:solidFill>
+                  <a:srgbClr val="4E635C"/>
+                </a:solidFill>
+                <a:latin typeface="Segoe UI"/>
+              </a:rPr>
+              <a:t>5</a:t>
             </a:r>
           </a:p>
         </p:txBody>
@@ -11499,14 +11416,14 @@
       </p:grpSpPr>
       <p:sp>
         <p:nvSpPr>
-          <p:cNvPr id="2" name="TextBox 1"/>
+          <p:cNvPr id="22" name="TextBox 21"/>
           <p:cNvSpPr txBox="1"/>
           <p:nvPr/>
         </p:nvSpPr>
         <p:spPr>
           <a:xfrm>
-            <a:off x="502920" y="384048"/>
-            <a:ext cx="7315200" cy="365760"/>
+            <a:off x="502920" y="6473952"/>
+            <a:ext cx="8229600" cy="274320"/>
           </a:xfrm>
           <a:prstGeom prst="rect">
             <a:avLst/>
@@ -11528,27 +11445,27 @@
               </a:spcAft>
             </a:pPr>
             <a:r>
-              <a:rPr sz="1200" b="1" i="0">
-                <a:solidFill>
-                  <a:srgbClr val="C58200"/>
-                </a:solidFill>
-                <a:latin typeface="Segoe UI"/>
-              </a:rPr>
-              <a:t>WHAT SHIPPED — AND WHAT WE REFUSE TO FAKE</a:t>
-            </a:r>
-          </a:p>
-        </p:txBody>
-      </p:sp>
-      <p:sp>
-        <p:nvSpPr>
-          <p:cNvPr id="3" name="TextBox 2"/>
+              <a:rPr sz="900" b="0" i="0">
+                <a:solidFill>
+                  <a:srgbClr val="4E635C"/>
+                </a:solidFill>
+                <a:latin typeface="Segoe UI"/>
+              </a:rPr>
+              <a:t>TripME · Team DEBUGGERS · tripme-khaki.vercel.app</a:t>
+            </a:r>
+          </a:p>
+        </p:txBody>
+      </p:sp>
+      <p:sp>
+        <p:nvSpPr>
+          <p:cNvPr id="23" name="TextBox 22"/>
           <p:cNvSpPr txBox="1"/>
           <p:nvPr/>
         </p:nvSpPr>
         <p:spPr>
           <a:xfrm>
-            <a:off x="502920" y="658368"/>
-            <a:ext cx="11155680" cy="822960"/>
+            <a:off x="11247120" y="6473952"/>
+            <a:ext cx="548640" cy="274320"/>
           </a:xfrm>
           <a:prstGeom prst="rect">
             <a:avLst/>
@@ -11561,7 +11478,7 @@
           </a:bodyPr>
           <a:lstStyle/>
           <a:p>
-            <a:pPr algn="l">
+            <a:pPr algn="r">
               <a:lnSpc>
                 <a:spcPct val="100000"/>
               </a:lnSpc>
@@ -11570,130 +11487,40 @@
               </a:spcAft>
             </a:pPr>
             <a:r>
-              <a:rPr sz="3000" b="1" i="0">
-                <a:solidFill>
-                  <a:srgbClr val="0E1F1A"/>
-                </a:solidFill>
-                <a:latin typeface="Segoe UI"/>
-              </a:rPr>
-              <a:t>A complete MVP that tells the truth about itself</a:t>
-            </a:r>
-          </a:p>
-        </p:txBody>
-      </p:sp>
-      <p:pic>
-        <p:nvPicPr>
-          <p:cNvPr id="4" name="Picture 3" descr="01-landing-hero.png"/>
-          <p:cNvPicPr>
-            <a:picLocks noChangeAspect="1"/>
-          </p:cNvPicPr>
-          <p:nvPr/>
-        </p:nvPicPr>
-        <p:blipFill>
-          <a:blip r:embed="rId2"/>
-          <a:stretch>
-            <a:fillRect/>
-          </a:stretch>
-        </p:blipFill>
-        <p:spPr>
-          <a:xfrm>
-            <a:off x="502920" y="1572768"/>
-            <a:ext cx="3657600" cy="2286000"/>
-          </a:xfrm>
-          <a:prstGeom prst="rect">
-            <a:avLst/>
-          </a:prstGeom>
-          <a:ln w="12700">
-            <a:solidFill>
-              <a:srgbClr val="D8DFDB"/>
-            </a:solidFill>
-          </a:ln>
-          <a:effectLst/>
-        </p:spPr>
-      </p:pic>
-      <p:pic>
-        <p:nvPicPr>
-          <p:cNvPr id="5" name="Picture 4" descr="12-trip-bookings.png"/>
-          <p:cNvPicPr>
-            <a:picLocks noChangeAspect="1"/>
-          </p:cNvPicPr>
-          <p:nvPr/>
-        </p:nvPicPr>
-        <p:blipFill>
-          <a:blip r:embed="rId3"/>
-          <a:stretch>
-            <a:fillRect/>
-          </a:stretch>
-        </p:blipFill>
-        <p:spPr>
-          <a:xfrm>
-            <a:off x="4315968" y="1572768"/>
-            <a:ext cx="3657600" cy="2286000"/>
-          </a:xfrm>
-          <a:prstGeom prst="rect">
-            <a:avLst/>
-          </a:prstGeom>
-          <a:ln w="12700">
-            <a:solidFill>
-              <a:srgbClr val="D8DFDB"/>
-            </a:solidFill>
-          </a:ln>
-          <a:effectLst/>
-        </p:spPr>
-      </p:pic>
-      <p:pic>
-        <p:nvPicPr>
-          <p:cNvPr id="6" name="Picture 5" descr="33-hindi-complete.png"/>
-          <p:cNvPicPr>
-            <a:picLocks noChangeAspect="1"/>
-          </p:cNvPicPr>
-          <p:nvPr/>
-        </p:nvPicPr>
-        <p:blipFill>
-          <a:blip r:embed="rId4"/>
-          <a:stretch>
-            <a:fillRect/>
-          </a:stretch>
-        </p:blipFill>
-        <p:spPr>
-          <a:xfrm>
-            <a:off x="8129016" y="1572768"/>
-            <a:ext cx="3657600" cy="2286000"/>
-          </a:xfrm>
-          <a:prstGeom prst="rect">
-            <a:avLst/>
-          </a:prstGeom>
-          <a:ln w="12700">
-            <a:solidFill>
-              <a:srgbClr val="D8DFDB"/>
-            </a:solidFill>
-          </a:ln>
-          <a:effectLst/>
-        </p:spPr>
-      </p:pic>
-      <p:sp>
-        <p:nvSpPr>
-          <p:cNvPr id="7" name="TextBox 6"/>
+              <a:rPr sz="900" b="0" i="0">
+                <a:solidFill>
+                  <a:srgbClr val="4E635C"/>
+                </a:solidFill>
+                <a:latin typeface="Segoe UI"/>
+              </a:rPr>
+              <a:t>6</a:t>
+            </a:r>
+          </a:p>
+        </p:txBody>
+      </p:sp>
+      <p:sp>
+        <p:nvSpPr>
+          <p:cNvPr id="24" name="TextBox 23"/>
           <p:cNvSpPr txBox="1"/>
           <p:nvPr/>
         </p:nvSpPr>
         <p:spPr>
           <a:xfrm>
-            <a:off x="502920" y="3913632"/>
-            <a:ext cx="3657600" cy="320040"/>
-          </a:xfrm>
-          <a:prstGeom prst="rect">
-            <a:avLst/>
-          </a:prstGeom>
-          <a:noFill/>
-        </p:spPr>
-        <p:txBody>
-          <a:bodyPr wrap="square" anchor="t">
+            <a:off x="548640" y="384048"/>
+            <a:ext cx="9144000" cy="365760"/>
+          </a:xfrm>
+          <a:prstGeom prst="rect">
+            <a:avLst/>
+          </a:prstGeom>
+          <a:noFill/>
+        </p:spPr>
+        <p:txBody>
+          <a:bodyPr wrap="square">
             <a:spAutoFit/>
           </a:bodyPr>
           <a:lstStyle/>
           <a:p>
-            <a:pPr algn="ctr">
+            <a:pPr algn="l">
               <a:lnSpc>
                 <a:spcPct val="100000"/>
               </a:lnSpc>
@@ -11702,40 +11529,40 @@
               </a:spcAft>
             </a:pPr>
             <a:r>
-              <a:rPr sz="1050" b="1" i="0">
-                <a:solidFill>
-                  <a:srgbClr val="4E635C"/>
-                </a:solidFill>
-                <a:latin typeface="Segoe UI"/>
-              </a:rPr>
-              <a:t>Mood-first — no destination field</a:t>
-            </a:r>
-          </a:p>
-        </p:txBody>
-      </p:sp>
-      <p:sp>
-        <p:nvSpPr>
-          <p:cNvPr id="8" name="TextBox 7"/>
+              <a:rPr sz="1200" b="1">
+                <a:solidFill>
+                  <a:srgbClr val="C58200"/>
+                </a:solidFill>
+                <a:latin typeface="Segoe UI"/>
+              </a:rPr>
+              <a:t>KEY OUTCOMES &amp; IMPACT</a:t>
+            </a:r>
+          </a:p>
+        </p:txBody>
+      </p:sp>
+      <p:sp>
+        <p:nvSpPr>
+          <p:cNvPr id="25" name="TextBox 24"/>
           <p:cNvSpPr txBox="1"/>
           <p:nvPr/>
         </p:nvSpPr>
         <p:spPr>
           <a:xfrm>
-            <a:off x="4315968" y="3913632"/>
-            <a:ext cx="3657600" cy="320040"/>
-          </a:xfrm>
-          <a:prstGeom prst="rect">
-            <a:avLst/>
-          </a:prstGeom>
-          <a:noFill/>
-        </p:spPr>
-        <p:txBody>
-          <a:bodyPr wrap="square" anchor="t">
+            <a:off x="548640" y="658368"/>
+            <a:ext cx="11155680" cy="822960"/>
+          </a:xfrm>
+          <a:prstGeom prst="rect">
+            <a:avLst/>
+          </a:prstGeom>
+          <a:noFill/>
+        </p:spPr>
+        <p:txBody>
+          <a:bodyPr wrap="square">
             <a:spAutoFit/>
           </a:bodyPr>
           <a:lstStyle/>
           <a:p>
-            <a:pPr algn="ctr">
+            <a:pPr algn="l">
               <a:lnSpc>
                 <a:spcPct val="100000"/>
               </a:lnSpc>
@@ -11744,69 +11571,27 @@
               </a:spcAft>
             </a:pPr>
             <a:r>
-              <a:rPr sz="1050" b="1" i="0">
-                <a:solidFill>
-                  <a:srgbClr val="4E635C"/>
-                </a:solidFill>
-                <a:latin typeface="Segoe UI"/>
-              </a:rPr>
-              <a:t>Approval gates · DEMO labels on every booking</a:t>
-            </a:r>
-          </a:p>
-        </p:txBody>
-      </p:sp>
-      <p:sp>
-        <p:nvSpPr>
-          <p:cNvPr id="9" name="TextBox 8"/>
-          <p:cNvSpPr txBox="1"/>
-          <p:nvPr/>
-        </p:nvSpPr>
-        <p:spPr>
-          <a:xfrm>
-            <a:off x="8129016" y="3913632"/>
-            <a:ext cx="3657600" cy="320040"/>
-          </a:xfrm>
-          <a:prstGeom prst="rect">
-            <a:avLst/>
-          </a:prstGeom>
-          <a:noFill/>
-        </p:spPr>
-        <p:txBody>
-          <a:bodyPr wrap="square" anchor="t">
-            <a:spAutoFit/>
-          </a:bodyPr>
-          <a:lstStyle/>
-          <a:p>
-            <a:pPr algn="ctr">
-              <a:lnSpc>
-                <a:spcPct val="100000"/>
-              </a:lnSpc>
-              <a:spcAft>
-                <a:spcPts val="400"/>
-              </a:spcAft>
-            </a:pPr>
-            <a:r>
-              <a:rPr sz="1050" b="1" i="0">
-                <a:solidFill>
-                  <a:srgbClr val="4E635C"/>
-                </a:solidFill>
-                <a:latin typeface="Segoe UI"/>
-              </a:rPr>
-              <a:t>Agent output translated — figures untouched</a:t>
-            </a:r>
-          </a:p>
-        </p:txBody>
-      </p:sp>
-      <p:sp>
-        <p:nvSpPr>
-          <p:cNvPr id="10" name="Rounded Rectangle 9"/>
+              <a:rPr sz="3000" b="1">
+                <a:solidFill>
+                  <a:srgbClr val="0E1F1A"/>
+                </a:solidFill>
+                <a:latin typeface="Segoe UI"/>
+              </a:rPr>
+              <a:t>What TripME delivers — today, and measured</a:t>
+            </a:r>
+          </a:p>
+        </p:txBody>
+      </p:sp>
+      <p:sp>
+        <p:nvSpPr>
+          <p:cNvPr id="26" name="Rounded Rectangle 25"/>
           <p:cNvSpPr/>
           <p:nvPr/>
         </p:nvSpPr>
         <p:spPr>
           <a:xfrm>
-            <a:off x="502920" y="4343400"/>
-            <a:ext cx="5532120" cy="868680"/>
+            <a:off x="502920" y="1554480"/>
+            <a:ext cx="5532120" cy="3017520"/>
           </a:xfrm>
           <a:prstGeom prst="roundRect">
             <a:avLst>
@@ -11842,104 +11627,196 @@
           <a:lstStyle/>
           <a:p>
             <a:pPr algn="ctr"/>
-            <a:endParaRPr/>
-          </a:p>
-        </p:txBody>
-      </p:sp>
-      <p:sp>
-        <p:nvSpPr>
-          <p:cNvPr id="11" name="TextBox 10"/>
+          </a:p>
+        </p:txBody>
+      </p:sp>
+      <p:sp>
+        <p:nvSpPr>
+          <p:cNvPr id="27" name="TextBox 26"/>
           <p:cNvSpPr txBox="1"/>
           <p:nvPr/>
         </p:nvSpPr>
         <p:spPr>
           <a:xfrm>
-            <a:off x="731520" y="4416552"/>
-            <a:ext cx="1920240" cy="640080"/>
-          </a:xfrm>
-          <a:prstGeom prst="rect">
-            <a:avLst/>
-          </a:prstGeom>
-          <a:noFill/>
-        </p:spPr>
-        <p:txBody>
-          <a:bodyPr wrap="square" anchor="t">
+            <a:off x="731520" y="1691640"/>
+            <a:ext cx="5029200" cy="320040"/>
+          </a:xfrm>
+          <a:prstGeom prst="rect">
+            <a:avLst/>
+          </a:prstGeom>
+          <a:noFill/>
+        </p:spPr>
+        <p:txBody>
+          <a:bodyPr wrap="square">
             <a:spAutoFit/>
           </a:bodyPr>
           <a:lstStyle/>
           <a:p>
             <a:pPr algn="l">
               <a:lnSpc>
-                <a:spcPct val="95000"/>
-              </a:lnSpc>
-              <a:spcAft>
-                <a:spcPts val="400"/>
-              </a:spcAft>
-            </a:pPr>
-            <a:r>
-              <a:rPr sz="1350" b="1" i="0">
-                <a:solidFill>
-                  <a:srgbClr val="0E1F1A"/>
-                </a:solidFill>
-                <a:latin typeface="Segoe UI"/>
-              </a:rPr>
-              <a:t>18 MVP features</a:t>
-            </a:r>
-          </a:p>
-        </p:txBody>
-      </p:sp>
-      <p:sp>
-        <p:nvSpPr>
-          <p:cNvPr id="12" name="TextBox 11"/>
+                <a:spcPct val="100000"/>
+              </a:lnSpc>
+              <a:spcAft>
+                <a:spcPts val="400"/>
+              </a:spcAft>
+            </a:pPr>
+            <a:r>
+              <a:rPr sz="1100" b="1">
+                <a:solidFill>
+                  <a:srgbClr val="C58200"/>
+                </a:solidFill>
+                <a:latin typeface="Segoe UI"/>
+              </a:rPr>
+              <a:t>OUTCOMES — SHIPPED AND VERIFIED</a:t>
+            </a:r>
+          </a:p>
+        </p:txBody>
+      </p:sp>
+      <p:sp>
+        <p:nvSpPr>
+          <p:cNvPr id="28" name="TextBox 27"/>
           <p:cNvSpPr txBox="1"/>
           <p:nvPr/>
         </p:nvSpPr>
         <p:spPr>
           <a:xfrm>
-            <a:off x="2697480" y="4416552"/>
-            <a:ext cx="3246120" cy="731520"/>
-          </a:xfrm>
-          <a:prstGeom prst="rect">
-            <a:avLst/>
-          </a:prstGeom>
-          <a:noFill/>
-        </p:spPr>
-        <p:txBody>
-          <a:bodyPr wrap="square" anchor="t">
+            <a:off x="731520" y="2048256"/>
+            <a:ext cx="5120640" cy="2423160"/>
+          </a:xfrm>
+          <a:prstGeom prst="rect">
+            <a:avLst/>
+          </a:prstGeom>
+          <a:noFill/>
+        </p:spPr>
+        <p:txBody>
+          <a:bodyPr wrap="square">
             <a:spAutoFit/>
           </a:bodyPr>
           <a:lstStyle/>
           <a:p>
             <a:pPr algn="l">
               <a:lnSpc>
-                <a:spcPct val="100000"/>
-              </a:lnSpc>
-              <a:spcAft>
-                <a:spcPts val="400"/>
-              </a:spcAft>
-            </a:pPr>
-            <a:r>
-              <a:rPr sz="1050" b="0" i="0">
-                <a:solidFill>
-                  <a:srgbClr val="4E635C"/>
-                </a:solidFill>
-                <a:latin typeface="Segoe UI"/>
-              </a:rPr>
-              <a:t>six paths · arbitration · override with re-pricing · reminders · settle-up · expense report</a:t>
-            </a:r>
-          </a:p>
-        </p:txBody>
-      </p:sp>
-      <p:sp>
-        <p:nvSpPr>
-          <p:cNvPr id="13" name="Rounded Rectangle 12"/>
+                <a:spcPct val="116000"/>
+              </a:lnSpc>
+              <a:spcAft>
+                <a:spcPts val="400"/>
+              </a:spcAft>
+            </a:pPr>
+            <a:r>
+              <a:rPr sz="1200" b="1">
+                <a:solidFill>
+                  <a:srgbClr val="0E1F1A"/>
+                </a:solidFill>
+                <a:latin typeface="Segoe UI"/>
+              </a:rPr>
+              <a:t>Complete MVP live</a:t>
+            </a:r>
+            <a:r>
+              <a:rPr sz="1200" b="0">
+                <a:solidFill>
+                  <a:srgbClr val="0E1F1A"/>
+                </a:solidFill>
+                <a:latin typeface="Segoe UI"/>
+              </a:rPr>
+              <a:t> — 18 features, all 6 travel paths, 7 languages, on a real URL</a:t>
+            </a:r>
+          </a:p>
+          <a:p>
+            <a:pPr algn="l">
+              <a:lnSpc>
+                <a:spcPct val="116000"/>
+              </a:lnSpc>
+              <a:spcAft>
+                <a:spcPts val="400"/>
+              </a:spcAft>
+            </a:pPr>
+            <a:r>
+              <a:rPr sz="1200" b="1">
+                <a:solidFill>
+                  <a:srgbClr val="0E1F1A"/>
+                </a:solidFill>
+                <a:latin typeface="Segoe UI"/>
+              </a:rPr>
+              <a:t>4–6 hours → under 60 seconds</a:t>
+            </a:r>
+            <a:r>
+              <a:rPr sz="1200" b="0">
+                <a:solidFill>
+                  <a:srgbClr val="0E1F1A"/>
+                </a:solidFill>
+                <a:latin typeface="Segoe UI"/>
+              </a:rPr>
+              <a:t> of agent time — measured and printed on every plan (34–58s)</a:t>
+            </a:r>
+          </a:p>
+          <a:p>
+            <a:pPr algn="l">
+              <a:lnSpc>
+                <a:spcPct val="116000"/>
+              </a:lnSpc>
+              <a:spcAft>
+                <a:spcPts val="400"/>
+              </a:spcAft>
+            </a:pPr>
+            <a:r>
+              <a:rPr sz="1200" b="1">
+                <a:solidFill>
+                  <a:srgbClr val="0E1F1A"/>
+                </a:solidFill>
+                <a:latin typeface="Segoe UI"/>
+              </a:rPr>
+              <a:t>Arbitration is real</a:t>
+            </a:r>
+            <a:r>
+              <a:rPr sz="1200" b="0">
+                <a:solidFill>
+                  <a:srgbClr val="0E1F1A"/>
+                </a:solidFill>
+                <a:latin typeface="Segoe UI"/>
+              </a:rPr>
+              <a:t> — the Referee rejected two agents’ work on a live run and re-planned it (9 calls, 58s)</a:t>
+            </a:r>
+          </a:p>
+          <a:p>
+            <a:pPr algn="l">
+              <a:lnSpc>
+                <a:spcPct val="116000"/>
+              </a:lnSpc>
+              <a:spcAft>
+                <a:spcPts val="400"/>
+              </a:spcAft>
+            </a:pPr>
+            <a:r>
+              <a:rPr sz="1200" b="1">
+                <a:solidFill>
+                  <a:srgbClr val="0E1F1A"/>
+                </a:solidFill>
+                <a:latin typeface="Segoe UI"/>
+              </a:rPr>
+              <a:t>Survived a provider outage</a:t>
+            </a:r>
+            <a:r>
+              <a:rPr sz="1200" b="0">
+                <a:solidFill>
+                  <a:srgbClr val="0E1F1A"/>
+                </a:solidFill>
+                <a:latin typeface="Segoe UI"/>
+              </a:rPr>
+              <a:t> — both original models were retired by Groq; failover absorbed it</a:t>
+            </a:r>
+          </a:p>
+        </p:txBody>
+      </p:sp>
+      <p:sp>
+        <p:nvSpPr>
+          <p:cNvPr id="29" name="Rounded Rectangle 28"/>
           <p:cNvSpPr/>
           <p:nvPr/>
         </p:nvSpPr>
         <p:spPr>
           <a:xfrm>
-            <a:off x="6199632" y="4343400"/>
-            <a:ext cx="5532120" cy="868680"/>
+            <a:off x="6199632" y="1554480"/>
+            <a:ext cx="5532120" cy="3017520"/>
           </a:xfrm>
           <a:prstGeom prst="roundRect">
             <a:avLst>
@@ -11947,12 +11824,10 @@
             </a:avLst>
           </a:prstGeom>
           <a:solidFill>
-            <a:srgbClr val="FFFFFF"/>
+            <a:srgbClr val="14453D"/>
           </a:solidFill>
-          <a:ln w="12700">
-            <a:solidFill>
-              <a:srgbClr val="D8DFDB"/>
-            </a:solidFill>
+          <a:ln>
+            <a:noFill/>
           </a:ln>
           <a:effectLst/>
         </p:spPr>
@@ -11975,104 +11850,196 @@
           <a:lstStyle/>
           <a:p>
             <a:pPr algn="ctr"/>
-            <a:endParaRPr/>
-          </a:p>
-        </p:txBody>
-      </p:sp>
-      <p:sp>
-        <p:nvSpPr>
-          <p:cNvPr id="14" name="TextBox 13"/>
+          </a:p>
+        </p:txBody>
+      </p:sp>
+      <p:sp>
+        <p:nvSpPr>
+          <p:cNvPr id="30" name="TextBox 29"/>
           <p:cNvSpPr txBox="1"/>
           <p:nvPr/>
         </p:nvSpPr>
         <p:spPr>
           <a:xfrm>
-            <a:off x="6428232" y="4416552"/>
-            <a:ext cx="1920240" cy="640080"/>
-          </a:xfrm>
-          <a:prstGeom prst="rect">
-            <a:avLst/>
-          </a:prstGeom>
-          <a:noFill/>
-        </p:spPr>
-        <p:txBody>
-          <a:bodyPr wrap="square" anchor="t">
+            <a:off x="6428232" y="1691640"/>
+            <a:ext cx="5029200" cy="320040"/>
+          </a:xfrm>
+          <a:prstGeom prst="rect">
+            <a:avLst/>
+          </a:prstGeom>
+          <a:noFill/>
+        </p:spPr>
+        <p:txBody>
+          <a:bodyPr wrap="square">
             <a:spAutoFit/>
           </a:bodyPr>
           <a:lstStyle/>
           <a:p>
             <a:pPr algn="l">
               <a:lnSpc>
-                <a:spcPct val="95000"/>
-              </a:lnSpc>
-              <a:spcAft>
-                <a:spcPts val="400"/>
-              </a:spcAft>
-            </a:pPr>
-            <a:r>
-              <a:rPr sz="1350" b="1" i="0">
-                <a:solidFill>
-                  <a:srgbClr val="0E1F1A"/>
-                </a:solidFill>
-                <a:latin typeface="Segoe UI"/>
-              </a:rPr>
-              <a:t>Honesty as a feature</a:t>
-            </a:r>
-          </a:p>
-        </p:txBody>
-      </p:sp>
-      <p:sp>
-        <p:nvSpPr>
-          <p:cNvPr id="15" name="TextBox 14"/>
+                <a:spcPct val="100000"/>
+              </a:lnSpc>
+              <a:spcAft>
+                <a:spcPts val="400"/>
+              </a:spcAft>
+            </a:pPr>
+            <a:r>
+              <a:rPr sz="1100" b="1">
+                <a:solidFill>
+                  <a:srgbClr val="FFB52E"/>
+                </a:solidFill>
+                <a:latin typeface="Segoe UI"/>
+              </a:rPr>
+              <a:t>IMPACT — WHAT CHANGES FOR THE TRAVELLER</a:t>
+            </a:r>
+          </a:p>
+        </p:txBody>
+      </p:sp>
+      <p:sp>
+        <p:nvSpPr>
+          <p:cNvPr id="31" name="TextBox 30"/>
           <p:cNvSpPr txBox="1"/>
           <p:nvPr/>
         </p:nvSpPr>
         <p:spPr>
           <a:xfrm>
-            <a:off x="8394192" y="4416552"/>
-            <a:ext cx="3246120" cy="731520"/>
-          </a:xfrm>
-          <a:prstGeom prst="rect">
-            <a:avLst/>
-          </a:prstGeom>
-          <a:noFill/>
-        </p:spPr>
-        <p:txBody>
-          <a:bodyPr wrap="square" anchor="t">
+            <a:off x="6428232" y="2048256"/>
+            <a:ext cx="5120640" cy="2423160"/>
+          </a:xfrm>
+          <a:prstGeom prst="rect">
+            <a:avLst/>
+          </a:prstGeom>
+          <a:noFill/>
+        </p:spPr>
+        <p:txBody>
+          <a:bodyPr wrap="square">
             <a:spAutoFit/>
           </a:bodyPr>
           <a:lstStyle/>
           <a:p>
             <a:pPr algn="l">
               <a:lnSpc>
-                <a:spcPct val="100000"/>
-              </a:lnSpc>
-              <a:spcAft>
-                <a:spcPts val="400"/>
-              </a:spcAft>
-            </a:pPr>
-            <a:r>
-              <a:rPr sz="1050" b="0" i="0">
-                <a:solidFill>
-                  <a:srgbClr val="4E635C"/>
-                </a:solidFill>
-                <a:latin typeface="Segoe UI"/>
-              </a:rPr>
-              <a:t>bookings labelled simulated · prices marked “est.” · India-only stated and enforced in the pipeline</a:t>
-            </a:r>
-          </a:p>
-        </p:txBody>
-      </p:sp>
-      <p:sp>
-        <p:nvSpPr>
-          <p:cNvPr id="16" name="Rounded Rectangle 15"/>
+                <a:spcPct val="116000"/>
+              </a:lnSpc>
+              <a:spcAft>
+                <a:spcPts val="400"/>
+              </a:spcAft>
+            </a:pPr>
+            <a:r>
+              <a:rPr sz="1200" b="1">
+                <a:solidFill>
+                  <a:srgbClr val="FFFFFF"/>
+                </a:solidFill>
+                <a:latin typeface="Segoe UI"/>
+              </a:rPr>
+              <a:t>One brief replaces 6–8 apps</a:t>
+            </a:r>
+            <a:r>
+              <a:rPr sz="1200" b="0">
+                <a:solidFill>
+                  <a:srgbClr val="EEF4EF"/>
+                </a:solidFill>
+                <a:latin typeface="Segoe UI"/>
+              </a:rPr>
+              <a:t> — context entered once, carried end to end</a:t>
+            </a:r>
+          </a:p>
+          <a:p>
+            <a:pPr algn="l">
+              <a:lnSpc>
+                <a:spcPct val="116000"/>
+              </a:lnSpc>
+              <a:spcAft>
+                <a:spcPts val="400"/>
+              </a:spcAft>
+            </a:pPr>
+            <a:r>
+              <a:rPr sz="1200" b="1">
+                <a:solidFill>
+                  <a:srgbClr val="FFFFFF"/>
+                </a:solidFill>
+                <a:latin typeface="Segoe UI"/>
+              </a:rPr>
+              <a:t>Budget enforced during planning</a:t>
+            </a:r>
+            <a:r>
+              <a:rPr sz="1200" b="0">
+                <a:solidFill>
+                  <a:srgbClr val="EEF4EF"/>
+                </a:solidFill>
+                <a:latin typeface="Segoe UI"/>
+              </a:rPr>
+              <a:t> — not reconciled after the money is gone</a:t>
+            </a:r>
+          </a:p>
+          <a:p>
+            <a:pPr algn="l">
+              <a:lnSpc>
+                <a:spcPct val="116000"/>
+              </a:lnSpc>
+              <a:spcAft>
+                <a:spcPts val="400"/>
+              </a:spcAft>
+            </a:pPr>
+            <a:r>
+              <a:rPr sz="1200" b="1">
+                <a:solidFill>
+                  <a:srgbClr val="FFFFFF"/>
+                </a:solidFill>
+                <a:latin typeface="Segoe UI"/>
+              </a:rPr>
+              <a:t>Groups reach a defensible plan</a:t>
+            </a:r>
+            <a:r>
+              <a:rPr sz="1200" b="0">
+                <a:solidFill>
+                  <a:srgbClr val="EEF4EF"/>
+                </a:solidFill>
+                <a:latin typeface="Segoe UI"/>
+              </a:rPr>
+              <a:t> — a published concession matrix; nobody concedes twice</a:t>
+            </a:r>
+          </a:p>
+          <a:p>
+            <a:pPr algn="l">
+              <a:lnSpc>
+                <a:spcPct val="116000"/>
+              </a:lnSpc>
+              <a:spcAft>
+                <a:spcPts val="400"/>
+              </a:spcAft>
+            </a:pPr>
+            <a:r>
+              <a:rPr sz="1200" b="1">
+                <a:solidFill>
+                  <a:srgbClr val="FFFFFF"/>
+                </a:solidFill>
+                <a:latin typeface="Segoe UI"/>
+              </a:rPr>
+              <a:t>Honesty as shipped UI</a:t>
+            </a:r>
+            <a:r>
+              <a:rPr sz="1200" b="0">
+                <a:solidFill>
+                  <a:srgbClr val="EEF4EF"/>
+                </a:solidFill>
+                <a:latin typeface="Segoe UI"/>
+              </a:rPr>
+              <a:t> — simulated labelled, prices marked est., scope stated up front</a:t>
+            </a:r>
+          </a:p>
+        </p:txBody>
+      </p:sp>
+      <p:sp>
+        <p:nvSpPr>
+          <p:cNvPr id="32" name="Rounded Rectangle 31"/>
           <p:cNvSpPr/>
           <p:nvPr/>
         </p:nvSpPr>
         <p:spPr>
           <a:xfrm>
-            <a:off x="502920" y="5349240"/>
-            <a:ext cx="5532120" cy="868680"/>
+            <a:off x="502920" y="4736592"/>
+            <a:ext cx="11201400" cy="658368"/>
           </a:xfrm>
           <a:prstGeom prst="roundRect">
             <a:avLst>
@@ -12108,76 +12075,33 @@
           <a:lstStyle/>
           <a:p>
             <a:pPr algn="ctr"/>
-            <a:endParaRPr/>
-          </a:p>
-        </p:txBody>
-      </p:sp>
-      <p:sp>
-        <p:nvSpPr>
-          <p:cNvPr id="17" name="TextBox 16"/>
+          </a:p>
+        </p:txBody>
+      </p:sp>
+      <p:sp>
+        <p:nvSpPr>
+          <p:cNvPr id="33" name="TextBox 32"/>
           <p:cNvSpPr txBox="1"/>
           <p:nvPr/>
         </p:nvSpPr>
         <p:spPr>
           <a:xfrm>
-            <a:off x="731520" y="5422392"/>
-            <a:ext cx="1920240" cy="640080"/>
-          </a:xfrm>
-          <a:prstGeom prst="rect">
-            <a:avLst/>
-          </a:prstGeom>
-          <a:noFill/>
-        </p:spPr>
-        <p:txBody>
-          <a:bodyPr wrap="square" anchor="t">
+            <a:off x="731520" y="4837176"/>
+            <a:ext cx="10789920" cy="457200"/>
+          </a:xfrm>
+          <a:prstGeom prst="rect">
+            <a:avLst/>
+          </a:prstGeom>
+          <a:noFill/>
+        </p:spPr>
+        <p:txBody>
+          <a:bodyPr wrap="square">
             <a:spAutoFit/>
           </a:bodyPr>
           <a:lstStyle/>
           <a:p>
             <a:pPr algn="l">
               <a:lnSpc>
-                <a:spcPct val="95000"/>
-              </a:lnSpc>
-              <a:spcAft>
-                <a:spcPts val="400"/>
-              </a:spcAft>
-            </a:pPr>
-            <a:r>
-              <a:rPr sz="1350" b="1" i="0">
-                <a:solidFill>
-                  <a:srgbClr val="0E1F1A"/>
-                </a:solidFill>
-                <a:latin typeface="Segoe UI"/>
-              </a:rPr>
-              <a:t>₹0 infrastructure</a:t>
-            </a:r>
-          </a:p>
-        </p:txBody>
-      </p:sp>
-      <p:sp>
-        <p:nvSpPr>
-          <p:cNvPr id="18" name="TextBox 17"/>
-          <p:cNvSpPr txBox="1"/>
-          <p:nvPr/>
-        </p:nvSpPr>
-        <p:spPr>
-          <a:xfrm>
-            <a:off x="2697480" y="5422392"/>
-            <a:ext cx="3246120" cy="731520"/>
-          </a:xfrm>
-          <a:prstGeom prst="rect">
-            <a:avLst/>
-          </a:prstGeom>
-          <a:noFill/>
-        </p:spPr>
-        <p:txBody>
-          <a:bodyPr wrap="square" anchor="t">
-            <a:spAutoFit/>
-          </a:bodyPr>
-          <a:lstStyle/>
-          <a:p>
-            <a:pPr algn="l">
-              <a:lnSpc>
                 <a:spcPct val="100000"/>
               </a:lnSpc>
               <a:spcAft>
@@ -12185,27 +12109,36 @@
               </a:spcAft>
             </a:pPr>
             <a:r>
-              <a:rPr sz="1050" b="0" i="0">
+              <a:rPr sz="1150" b="1">
+                <a:solidFill>
+                  <a:srgbClr val="14453D"/>
+                </a:solidFill>
+                <a:latin typeface="Segoe UI"/>
+              </a:rPr>
+              <a:t>Validation gates for the beta: </a:t>
+            </a:r>
+            <a:r>
+              <a:rPr sz="1150" b="0">
                 <a:solidFill>
                   <a:srgbClr val="4E635C"/>
                 </a:solidFill>
                 <a:latin typeface="Segoe UI"/>
               </a:rPr>
-              <a:t>three Groq models with per-agent failover · OpenStreetMap &amp; Wikipedia · Vercel — all free tier</a:t>
-            </a:r>
-          </a:p>
-        </p:txBody>
-      </p:sp>
-      <p:sp>
-        <p:nvSpPr>
-          <p:cNvPr id="19" name="Rounded Rectangle 18"/>
+              <a:t>&gt;70% plan completion · &lt;60s median agent time · &gt;50% can explain the Referee · &gt;30% override something · &gt;25% confirm · &gt;20% return in 30 days</a:t>
+            </a:r>
+          </a:p>
+        </p:txBody>
+      </p:sp>
+      <p:sp>
+        <p:nvSpPr>
+          <p:cNvPr id="34" name="Rounded Rectangle 33"/>
           <p:cNvSpPr/>
           <p:nvPr/>
         </p:nvSpPr>
         <p:spPr>
           <a:xfrm>
-            <a:off x="6199632" y="5349240"/>
-            <a:ext cx="5532120" cy="868680"/>
+            <a:off x="502920" y="5559552"/>
+            <a:ext cx="11201400" cy="768096"/>
           </a:xfrm>
           <a:prstGeom prst="roundRect">
             <a:avLst>
@@ -12213,12 +12146,10 @@
             </a:avLst>
           </a:prstGeom>
           <a:solidFill>
-            <a:srgbClr val="FFFFFF"/>
+            <a:srgbClr val="0E1F1A"/>
           </a:solidFill>
-          <a:ln w="12700">
-            <a:solidFill>
-              <a:srgbClr val="D8DFDB"/>
-            </a:solidFill>
+          <a:ln>
+            <a:noFill/>
           </a:ln>
           <a:effectLst/>
         </p:spPr>
@@ -12241,174 +12172,126 @@
           <a:lstStyle/>
           <a:p>
             <a:pPr algn="ctr"/>
-            <a:endParaRPr/>
-          </a:p>
-        </p:txBody>
-      </p:sp>
-      <p:sp>
-        <p:nvSpPr>
-          <p:cNvPr id="20" name="TextBox 19"/>
+          </a:p>
+        </p:txBody>
+      </p:sp>
+      <p:sp>
+        <p:nvSpPr>
+          <p:cNvPr id="35" name="TextBox 34"/>
           <p:cNvSpPr txBox="1"/>
           <p:nvPr/>
         </p:nvSpPr>
         <p:spPr>
           <a:xfrm>
-            <a:off x="6428232" y="5422392"/>
-            <a:ext cx="1920240" cy="640080"/>
-          </a:xfrm>
-          <a:prstGeom prst="rect">
-            <a:avLst/>
-          </a:prstGeom>
-          <a:noFill/>
-        </p:spPr>
-        <p:txBody>
-          <a:bodyPr wrap="square" anchor="t">
+            <a:off x="822960" y="5678424"/>
+            <a:ext cx="7772400" cy="548640"/>
+          </a:xfrm>
+          <a:prstGeom prst="rect">
+            <a:avLst/>
+          </a:prstGeom>
+          <a:noFill/>
+        </p:spPr>
+        <p:txBody>
+          <a:bodyPr wrap="square">
             <a:spAutoFit/>
           </a:bodyPr>
           <a:lstStyle/>
           <a:p>
             <a:pPr algn="l">
               <a:lnSpc>
-                <a:spcPct val="95000"/>
-              </a:lnSpc>
-              <a:spcAft>
-                <a:spcPts val="400"/>
-              </a:spcAft>
-            </a:pPr>
-            <a:r>
-              <a:rPr sz="1350" b="1" i="0">
-                <a:solidFill>
-                  <a:srgbClr val="0E1F1A"/>
-                </a:solidFill>
-                <a:latin typeface="Segoe UI"/>
-              </a:rPr>
-              <a:t>Privacy position</a:t>
-            </a:r>
-          </a:p>
-        </p:txBody>
-      </p:sp>
-      <p:sp>
-        <p:nvSpPr>
-          <p:cNvPr id="21" name="TextBox 20"/>
+                <a:spcPct val="100000"/>
+              </a:lnSpc>
+              <a:spcAft>
+                <a:spcPts val="400"/>
+              </a:spcAft>
+            </a:pPr>
+            <a:r>
+              <a:rPr sz="1500" b="1">
+                <a:solidFill>
+                  <a:srgbClr val="EEF4EF"/>
+                </a:solidFill>
+                <a:latin typeface="Segoe UI"/>
+              </a:rPr>
+              <a:t>Try it now — </a:t>
+            </a:r>
+            <a:r>
+              <a:rPr sz="1500" b="1">
+                <a:solidFill>
+                  <a:srgbClr val="FFB52E"/>
+                </a:solidFill>
+                <a:latin typeface="Segoe UI"/>
+              </a:rPr>
+              <a:t>tripme-khaki.vercel.app</a:t>
+            </a:r>
+            <a:r>
+              <a:rPr sz="1100" b="0">
+                <a:solidFill>
+                  <a:srgbClr val="9DB3AC"/>
+                </a:solidFill>
+                <a:latin typeface="Segoe UI"/>
+              </a:rPr>
+              <a:t>   ·   wireframes: /wireframes.html</a:t>
+            </a:r>
+          </a:p>
+        </p:txBody>
+      </p:sp>
+      <p:sp>
+        <p:nvSpPr>
+          <p:cNvPr id="36" name="TextBox 35"/>
           <p:cNvSpPr txBox="1"/>
           <p:nvPr/>
         </p:nvSpPr>
         <p:spPr>
           <a:xfrm>
-            <a:off x="8394192" y="5422392"/>
-            <a:ext cx="3246120" cy="731520"/>
-          </a:xfrm>
-          <a:prstGeom prst="rect">
-            <a:avLst/>
-          </a:prstGeom>
-          <a:noFill/>
-        </p:spPr>
-        <p:txBody>
-          <a:bodyPr wrap="square" anchor="t">
+            <a:off x="8503920" y="5687568"/>
+            <a:ext cx="3017520" cy="502920"/>
+          </a:xfrm>
+          <a:prstGeom prst="rect">
+            <a:avLst/>
+          </a:prstGeom>
+          <a:noFill/>
+        </p:spPr>
+        <p:txBody>
+          <a:bodyPr wrap="square">
             <a:spAutoFit/>
           </a:bodyPr>
           <a:lstStyle/>
           <a:p>
-            <a:pPr algn="l">
-              <a:lnSpc>
-                <a:spcPct val="100000"/>
-              </a:lnSpc>
-              <a:spcAft>
-                <a:spcPts val="400"/>
-              </a:spcAft>
-            </a:pPr>
-            <a:r>
-              <a:rPr sz="1050" b="0" i="0">
-                <a:solidFill>
-                  <a:srgbClr val="4E635C"/>
-                </a:solidFill>
-                <a:latin typeface="Segoe UI"/>
-              </a:rPr>
-              <a:t>trips never leave the browser; an account stores only name, email, picture</a:t>
-            </a:r>
-          </a:p>
-        </p:txBody>
-      </p:sp>
-      <p:sp>
-        <p:nvSpPr>
-          <p:cNvPr id="22" name="TextBox 21"/>
-          <p:cNvSpPr txBox="1"/>
-          <p:nvPr/>
-        </p:nvSpPr>
-        <p:spPr>
-          <a:xfrm>
-            <a:off x="502920" y="6473952"/>
-            <a:ext cx="8229600" cy="274320"/>
-          </a:xfrm>
-          <a:prstGeom prst="rect">
-            <a:avLst/>
-          </a:prstGeom>
-          <a:noFill/>
-        </p:spPr>
-        <p:txBody>
-          <a:bodyPr wrap="square" anchor="t">
-            <a:spAutoFit/>
-          </a:bodyPr>
-          <a:lstStyle/>
-          <a:p>
-            <a:pPr algn="l">
-              <a:lnSpc>
-                <a:spcPct val="100000"/>
-              </a:lnSpc>
-              <a:spcAft>
-                <a:spcPts val="400"/>
-              </a:spcAft>
-            </a:pPr>
-            <a:r>
-              <a:rPr sz="900" b="0" i="0">
-                <a:solidFill>
-                  <a:srgbClr val="4E635C"/>
-                </a:solidFill>
-                <a:latin typeface="Segoe UI"/>
-              </a:rPr>
-              <a:t>TripME · Team DEBUGGERS · tripme-khaki.vercel.app</a:t>
-            </a:r>
-          </a:p>
-        </p:txBody>
-      </p:sp>
-      <p:sp>
-        <p:nvSpPr>
-          <p:cNvPr id="23" name="TextBox 22"/>
-          <p:cNvSpPr txBox="1"/>
-          <p:nvPr/>
-        </p:nvSpPr>
-        <p:spPr>
-          <a:xfrm>
-            <a:off x="11247120" y="6473952"/>
-            <a:ext cx="548640" cy="274320"/>
-          </a:xfrm>
-          <a:prstGeom prst="rect">
-            <a:avLst/>
-          </a:prstGeom>
-          <a:noFill/>
-        </p:spPr>
-        <p:txBody>
-          <a:bodyPr wrap="square" anchor="t">
-            <a:spAutoFit/>
-          </a:bodyPr>
-          <a:lstStyle/>
-          <a:p>
             <a:pPr algn="r">
               <a:lnSpc>
-                <a:spcPct val="100000"/>
-              </a:lnSpc>
-              <a:spcAft>
-                <a:spcPts val="400"/>
-              </a:spcAft>
-            </a:pPr>
-            <a:r>
-              <a:rPr sz="900" b="0" i="0">
-                <a:solidFill>
-                  <a:srgbClr val="4E635C"/>
-                </a:solidFill>
-                <a:latin typeface="Segoe UI"/>
-              </a:rPr>
-              <a:t>5</a:t>
+                <a:spcPct val="105000"/>
+              </a:lnSpc>
+              <a:spcAft>
+                <a:spcPts val="400"/>
+              </a:spcAft>
+            </a:pPr>
+            <a:r>
+              <a:rPr sz="1250" b="1">
+                <a:solidFill>
+                  <a:srgbClr val="EEF4EF"/>
+                </a:solidFill>
+                <a:latin typeface="Segoe UI"/>
+              </a:rPr>
+              <a:t>One mood. One budget.</a:t>
+            </a:r>
+          </a:p>
+          <a:p>
+            <a:pPr algn="r">
+              <a:lnSpc>
+                <a:spcPct val="105000"/>
+              </a:lnSpc>
+              <a:spcAft>
+                <a:spcPts val="400"/>
+              </a:spcAft>
+            </a:pPr>
+            <a:r>
+              <a:rPr sz="1250" b="1">
+                <a:solidFill>
+                  <a:srgbClr val="EEF4EF"/>
+                </a:solidFill>
+                <a:latin typeface="Segoe UI"/>
+              </a:rPr>
+              <a:t>One complete trip.</a:t>
             </a:r>
           </a:p>
         </p:txBody>
@@ -12422,6 +12305,123 @@
 </file>
 
 <file path=ppt/slides/slide7.xml><?xml version="1.0" encoding="utf-8"?>
+<p:sld xmlns:a="http://schemas.openxmlformats.org/drawingml/2006/main" xmlns:r="http://schemas.openxmlformats.org/officeDocument/2006/relationships" xmlns:p="http://schemas.openxmlformats.org/presentationml/2006/main">
+  <p:cSld>
+    <p:bg>
+      <p:bgPr>
+        <a:solidFill>
+          <a:srgbClr val="0E332D"/>
+        </a:solidFill>
+        <a:effectLst/>
+      </p:bgPr>
+    </p:bg>
+    <p:spTree>
+      <p:nvGrpSpPr>
+        <p:cNvPr id="1" name=""/>
+        <p:cNvGrpSpPr/>
+        <p:nvPr/>
+      </p:nvGrpSpPr>
+      <p:grpSpPr>
+        <a:xfrm>
+          <a:off x="0" y="0"/>
+          <a:ext cx="0" cy="0"/>
+          <a:chOff x="0" y="0"/>
+          <a:chExt cx="0" cy="0"/>
+        </a:xfrm>
+      </p:grpSpPr>
+      <p:sp>
+        <p:nvSpPr>
+          <p:cNvPr id="2" name="TextBox 1"/>
+          <p:cNvSpPr txBox="1"/>
+          <p:nvPr/>
+        </p:nvSpPr>
+        <p:spPr>
+          <a:xfrm>
+            <a:off x="502920" y="2926080"/>
+            <a:ext cx="11155680" cy="731520"/>
+          </a:xfrm>
+          <a:prstGeom prst="rect">
+            <a:avLst/>
+          </a:prstGeom>
+          <a:noFill/>
+        </p:spPr>
+        <p:txBody>
+          <a:bodyPr wrap="square" anchor="t">
+            <a:spAutoFit/>
+          </a:bodyPr>
+          <a:lstStyle/>
+          <a:p>
+            <a:pPr algn="l">
+              <a:lnSpc>
+                <a:spcPct val="100000"/>
+              </a:lnSpc>
+              <a:spcAft>
+                <a:spcPts val="400"/>
+              </a:spcAft>
+            </a:pPr>
+            <a:r>
+              <a:rPr sz="4000" b="1" i="0">
+                <a:solidFill>
+                  <a:srgbClr val="EEF4EF"/>
+                </a:solidFill>
+                <a:latin typeface="Segoe UI"/>
+              </a:rPr>
+              <a:t>Appendix — for Q&amp;A</a:t>
+            </a:r>
+          </a:p>
+        </p:txBody>
+      </p:sp>
+      <p:sp>
+        <p:nvSpPr>
+          <p:cNvPr id="3" name="TextBox 2"/>
+          <p:cNvSpPr txBox="1"/>
+          <p:nvPr/>
+        </p:nvSpPr>
+        <p:spPr>
+          <a:xfrm>
+            <a:off x="502920" y="3703320"/>
+            <a:ext cx="11155680" cy="457200"/>
+          </a:xfrm>
+          <a:prstGeom prst="rect">
+            <a:avLst/>
+          </a:prstGeom>
+          <a:noFill/>
+        </p:spPr>
+        <p:txBody>
+          <a:bodyPr wrap="square" anchor="t">
+            <a:spAutoFit/>
+          </a:bodyPr>
+          <a:lstStyle/>
+          <a:p>
+            <a:pPr algn="l">
+              <a:lnSpc>
+                <a:spcPct val="100000"/>
+              </a:lnSpc>
+              <a:spcAft>
+                <a:spcPts val="400"/>
+              </a:spcAft>
+            </a:pPr>
+            <a:r>
+              <a:rPr sz="1500" b="0" i="0">
+                <a:solidFill>
+                  <a:srgbClr val="9DB3AC"/>
+                </a:solidFill>
+                <a:latin typeface="Segoe UI"/>
+              </a:rPr>
+              <a:t>Architecture &amp; PEAS · tech stack · testing · challenges we actually hit · ethics · prioritisation</a:t>
+            </a:r>
+          </a:p>
+        </p:txBody>
+      </p:sp>
+    </p:spTree>
+  </p:cSld>
+  <p:clrMapOvr>
+    <a:masterClrMapping/>
+  </p:clrMapOvr>
+</p:sld>
+</file>
+
+<file path=ppt/slides/slide8.xml><?xml version="1.0" encoding="utf-8"?>
 <p:sld xmlns:a="http://schemas.openxmlformats.org/drawingml/2006/main" xmlns:r="http://schemas.openxmlformats.org/officeDocument/2006/relationships" xmlns:p="http://schemas.openxmlformats.org/presentationml/2006/main">
   <p:cSld>
     <p:bg>
@@ -12448,14 +12448,14 @@
       </p:grpSpPr>
       <p:sp>
         <p:nvSpPr>
-          <p:cNvPr id="22" name="TextBox 21"/>
+          <p:cNvPr id="2" name="TextBox 1"/>
           <p:cNvSpPr txBox="1"/>
           <p:nvPr/>
         </p:nvSpPr>
         <p:spPr>
           <a:xfrm>
-            <a:off x="502920" y="6473952"/>
-            <a:ext cx="8229600" cy="274320"/>
+            <a:off x="502920" y="384048"/>
+            <a:ext cx="7315200" cy="365760"/>
           </a:xfrm>
           <a:prstGeom prst="rect">
             <a:avLst/>
@@ -12477,27 +12477,27 @@
               </a:spcAft>
             </a:pPr>
             <a:r>
-              <a:rPr sz="900" b="0" i="0">
-                <a:solidFill>
-                  <a:srgbClr val="4E635C"/>
-                </a:solidFill>
-                <a:latin typeface="Segoe UI"/>
-              </a:rPr>
-              <a:t>TripME · Team DEBUGGERS · tripme-khaki.vercel.app</a:t>
-            </a:r>
-          </a:p>
-        </p:txBody>
-      </p:sp>
-      <p:sp>
-        <p:nvSpPr>
-          <p:cNvPr id="23" name="TextBox 22"/>
+              <a:rPr sz="1200" b="1" i="0">
+                <a:solidFill>
+                  <a:srgbClr val="C58200"/>
+                </a:solidFill>
+                <a:latin typeface="Segoe UI"/>
+              </a:rPr>
+              <a:t>APPENDIX A1</a:t>
+            </a:r>
+          </a:p>
+        </p:txBody>
+      </p:sp>
+      <p:sp>
+        <p:nvSpPr>
+          <p:cNvPr id="3" name="TextBox 2"/>
           <p:cNvSpPr txBox="1"/>
           <p:nvPr/>
         </p:nvSpPr>
         <p:spPr>
           <a:xfrm>
-            <a:off x="11247120" y="6473952"/>
-            <a:ext cx="548640" cy="274320"/>
+            <a:off x="502920" y="658368"/>
+            <a:ext cx="11155680" cy="822960"/>
           </a:xfrm>
           <a:prstGeom prst="rect">
             <a:avLst/>
@@ -12510,7 +12510,7 @@
           </a:bodyPr>
           <a:lstStyle/>
           <a:p>
-            <a:pPr algn="r">
+            <a:pPr algn="l">
               <a:lnSpc>
                 <a:spcPct val="100000"/>
               </a:lnSpc>
@@ -12519,111 +12519,27 @@
               </a:spcAft>
             </a:pPr>
             <a:r>
-              <a:rPr sz="900" b="0" i="0">
-                <a:solidFill>
-                  <a:srgbClr val="4E635C"/>
-                </a:solidFill>
-                <a:latin typeface="Segoe UI"/>
-              </a:rPr>
-              <a:t>6</a:t>
-            </a:r>
-          </a:p>
-        </p:txBody>
-      </p:sp>
-      <p:sp>
-        <p:nvSpPr>
-          <p:cNvPr id="24" name="TextBox 23"/>
-          <p:cNvSpPr txBox="1"/>
-          <p:nvPr/>
-        </p:nvSpPr>
-        <p:spPr>
-          <a:xfrm>
-            <a:off x="548640" y="384048"/>
-            <a:ext cx="9144000" cy="365760"/>
-          </a:xfrm>
-          <a:prstGeom prst="rect">
-            <a:avLst/>
-          </a:prstGeom>
-          <a:noFill/>
-        </p:spPr>
-        <p:txBody>
-          <a:bodyPr wrap="square">
-            <a:spAutoFit/>
-          </a:bodyPr>
-          <a:lstStyle/>
-          <a:p>
-            <a:pPr algn="l">
-              <a:lnSpc>
-                <a:spcPct val="100000"/>
-              </a:lnSpc>
-              <a:spcAft>
-                <a:spcPts val="400"/>
-              </a:spcAft>
-            </a:pPr>
-            <a:r>
-              <a:rPr sz="1200" b="1">
-                <a:solidFill>
-                  <a:srgbClr val="C58200"/>
-                </a:solidFill>
-                <a:latin typeface="Segoe UI"/>
-              </a:rPr>
-              <a:t>KEY OUTCOMES &amp; IMPACT</a:t>
-            </a:r>
-          </a:p>
-        </p:txBody>
-      </p:sp>
-      <p:sp>
-        <p:nvSpPr>
-          <p:cNvPr id="25" name="TextBox 24"/>
-          <p:cNvSpPr txBox="1"/>
-          <p:nvPr/>
-        </p:nvSpPr>
-        <p:spPr>
-          <a:xfrm>
-            <a:off x="548640" y="658368"/>
-            <a:ext cx="11155680" cy="822960"/>
-          </a:xfrm>
-          <a:prstGeom prst="rect">
-            <a:avLst/>
-          </a:prstGeom>
-          <a:noFill/>
-        </p:spPr>
-        <p:txBody>
-          <a:bodyPr wrap="square">
-            <a:spAutoFit/>
-          </a:bodyPr>
-          <a:lstStyle/>
-          <a:p>
-            <a:pPr algn="l">
-              <a:lnSpc>
-                <a:spcPct val="100000"/>
-              </a:lnSpc>
-              <a:spcAft>
-                <a:spcPts val="400"/>
-              </a:spcAft>
-            </a:pPr>
-            <a:r>
-              <a:rPr sz="3000" b="1">
+              <a:rPr sz="2800" b="1" i="0">
                 <a:solidFill>
                   <a:srgbClr val="0E1F1A"/>
                 </a:solidFill>
                 <a:latin typeface="Segoe UI"/>
               </a:rPr>
-              <a:t>What TripME delivers — today, and measured</a:t>
-            </a:r>
-          </a:p>
-        </p:txBody>
-      </p:sp>
-      <p:sp>
-        <p:nvSpPr>
-          <p:cNvPr id="26" name="Rounded Rectangle 25"/>
+              <a:t>Agent architecture — formally specified (PEAS)</a:t>
+            </a:r>
+          </a:p>
+        </p:txBody>
+      </p:sp>
+      <p:sp>
+        <p:nvSpPr>
+          <p:cNvPr id="4" name="Rounded Rectangle 3"/>
           <p:cNvSpPr/>
           <p:nvPr/>
         </p:nvSpPr>
         <p:spPr>
           <a:xfrm>
-            <a:off x="502920" y="1554480"/>
-            <a:ext cx="5532120" cy="3017520"/>
+            <a:off x="502920" y="1645920"/>
+            <a:ext cx="11201400" cy="566928"/>
           </a:xfrm>
           <a:prstGeom prst="roundRect">
             <a:avLst>
@@ -12659,27 +12575,28 @@
           <a:lstStyle/>
           <a:p>
             <a:pPr algn="ctr"/>
-          </a:p>
-        </p:txBody>
-      </p:sp>
-      <p:sp>
-        <p:nvSpPr>
-          <p:cNvPr id="27" name="TextBox 26"/>
+            <a:endParaRPr/>
+          </a:p>
+        </p:txBody>
+      </p:sp>
+      <p:sp>
+        <p:nvSpPr>
+          <p:cNvPr id="5" name="TextBox 4"/>
           <p:cNvSpPr txBox="1"/>
           <p:nvPr/>
         </p:nvSpPr>
         <p:spPr>
           <a:xfrm>
-            <a:off x="731520" y="1691640"/>
-            <a:ext cx="5029200" cy="320040"/>
-          </a:xfrm>
-          <a:prstGeom prst="rect">
-            <a:avLst/>
-          </a:prstGeom>
-          <a:noFill/>
-        </p:spPr>
-        <p:txBody>
-          <a:bodyPr wrap="square">
+            <a:off x="731520" y="1728216"/>
+            <a:ext cx="2011680" cy="365760"/>
+          </a:xfrm>
+          <a:prstGeom prst="rect">
+            <a:avLst/>
+          </a:prstGeom>
+          <a:noFill/>
+        </p:spPr>
+        <p:txBody>
+          <a:bodyPr wrap="square" anchor="t">
             <a:spAutoFit/>
           </a:bodyPr>
           <a:lstStyle/>
@@ -12693,162 +12610,111 @@
               </a:spcAft>
             </a:pPr>
             <a:r>
-              <a:rPr sz="1100" b="1">
-                <a:solidFill>
-                  <a:srgbClr val="C58200"/>
-                </a:solidFill>
-                <a:latin typeface="Segoe UI"/>
-              </a:rPr>
-              <a:t>OUTCOMES — SHIPPED AND VERIFIED</a:t>
-            </a:r>
-          </a:p>
-        </p:txBody>
-      </p:sp>
-      <p:sp>
-        <p:nvSpPr>
-          <p:cNvPr id="28" name="TextBox 27"/>
+              <a:rPr sz="1300" b="1" i="0">
+                <a:solidFill>
+                  <a:srgbClr val="0E1F1A"/>
+                </a:solidFill>
+                <a:latin typeface="Segoe UI"/>
+              </a:rPr>
+              <a:t>Mood &amp; Intent</a:t>
+            </a:r>
+          </a:p>
+        </p:txBody>
+      </p:sp>
+      <p:sp>
+        <p:nvSpPr>
+          <p:cNvPr id="6" name="TextBox 5"/>
           <p:cNvSpPr txBox="1"/>
           <p:nvPr/>
         </p:nvSpPr>
         <p:spPr>
           <a:xfrm>
-            <a:off x="731520" y="2048256"/>
-            <a:ext cx="5120640" cy="2423160"/>
-          </a:xfrm>
-          <a:prstGeom prst="rect">
-            <a:avLst/>
-          </a:prstGeom>
-          <a:noFill/>
-        </p:spPr>
-        <p:txBody>
-          <a:bodyPr wrap="square">
+            <a:off x="2834640" y="1728216"/>
+            <a:ext cx="2011680" cy="365760"/>
+          </a:xfrm>
+          <a:prstGeom prst="rect">
+            <a:avLst/>
+          </a:prstGeom>
+          <a:noFill/>
+        </p:spPr>
+        <p:txBody>
+          <a:bodyPr wrap="square" anchor="t">
             <a:spAutoFit/>
           </a:bodyPr>
           <a:lstStyle/>
           <a:p>
             <a:pPr algn="l">
               <a:lnSpc>
-                <a:spcPct val="116000"/>
-              </a:lnSpc>
-              <a:spcAft>
-                <a:spcPts val="400"/>
-              </a:spcAft>
-            </a:pPr>
-            <a:r>
-              <a:rPr sz="1200" b="1">
-                <a:solidFill>
-                  <a:srgbClr val="0E1F1A"/>
-                </a:solidFill>
-                <a:latin typeface="Segoe UI"/>
-              </a:rPr>
-              <a:t>Complete MVP live</a:t>
-            </a:r>
-            <a:r>
-              <a:rPr sz="1200" b="0">
-                <a:solidFill>
-                  <a:srgbClr val="0E1F1A"/>
-                </a:solidFill>
-                <a:latin typeface="Segoe UI"/>
-              </a:rPr>
-              <a:t> — 18 features, all 6 travel paths, 7 languages, on a real URL</a:t>
-            </a:r>
-          </a:p>
-          <a:p>
-            <a:pPr algn="l">
-              <a:lnSpc>
-                <a:spcPct val="116000"/>
-              </a:lnSpc>
-              <a:spcAft>
-                <a:spcPts val="400"/>
-              </a:spcAft>
-            </a:pPr>
-            <a:r>
-              <a:rPr sz="1200" b="1">
-                <a:solidFill>
-                  <a:srgbClr val="0E1F1A"/>
-                </a:solidFill>
-                <a:latin typeface="Segoe UI"/>
-              </a:rPr>
-              <a:t>4–6 hours → under 60 seconds</a:t>
-            </a:r>
-            <a:r>
-              <a:rPr sz="1200" b="0">
-                <a:solidFill>
-                  <a:srgbClr val="0E1F1A"/>
-                </a:solidFill>
-                <a:latin typeface="Segoe UI"/>
-              </a:rPr>
-              <a:t> of agent time — measured and printed on every plan (34–58s)</a:t>
-            </a:r>
-          </a:p>
-          <a:p>
-            <a:pPr algn="l">
-              <a:lnSpc>
-                <a:spcPct val="116000"/>
-              </a:lnSpc>
-              <a:spcAft>
-                <a:spcPts val="400"/>
-              </a:spcAft>
-            </a:pPr>
-            <a:r>
-              <a:rPr sz="1200" b="1">
-                <a:solidFill>
-                  <a:srgbClr val="0E1F1A"/>
-                </a:solidFill>
-                <a:latin typeface="Segoe UI"/>
-              </a:rPr>
-              <a:t>Arbitration is real</a:t>
-            </a:r>
-            <a:r>
-              <a:rPr sz="1200" b="0">
-                <a:solidFill>
-                  <a:srgbClr val="0E1F1A"/>
-                </a:solidFill>
-                <a:latin typeface="Segoe UI"/>
-              </a:rPr>
-              <a:t> — the Referee rejected two agents’ work on a live run and re-planned it (9 calls, 58s)</a:t>
-            </a:r>
-          </a:p>
-          <a:p>
-            <a:pPr algn="l">
-              <a:lnSpc>
-                <a:spcPct val="116000"/>
-              </a:lnSpc>
-              <a:spcAft>
-                <a:spcPts val="400"/>
-              </a:spcAft>
-            </a:pPr>
-            <a:r>
-              <a:rPr sz="1200" b="1">
-                <a:solidFill>
-                  <a:srgbClr val="0E1F1A"/>
-                </a:solidFill>
-                <a:latin typeface="Segoe UI"/>
-              </a:rPr>
-              <a:t>Survived a provider outage</a:t>
-            </a:r>
-            <a:r>
-              <a:rPr sz="1200" b="0">
-                <a:solidFill>
-                  <a:srgbClr val="0E1F1A"/>
-                </a:solidFill>
-                <a:latin typeface="Segoe UI"/>
-              </a:rPr>
-              <a:t> — both original models were retired by Groq; failover absorbed it</a:t>
-            </a:r>
-          </a:p>
-        </p:txBody>
-      </p:sp>
-      <p:sp>
-        <p:nvSpPr>
-          <p:cNvPr id="29" name="Rounded Rectangle 28"/>
+                <a:spcPct val="100000"/>
+              </a:lnSpc>
+              <a:spcAft>
+                <a:spcPts val="400"/>
+              </a:spcAft>
+            </a:pPr>
+            <a:r>
+              <a:rPr sz="1150" b="1" i="0">
+                <a:solidFill>
+                  <a:srgbClr val="C58200"/>
+                </a:solidFill>
+                <a:latin typeface="Segoe UI"/>
+              </a:rPr>
+              <a:t>goal-based</a:t>
+            </a:r>
+          </a:p>
+        </p:txBody>
+      </p:sp>
+      <p:sp>
+        <p:nvSpPr>
+          <p:cNvPr id="7" name="TextBox 6"/>
+          <p:cNvSpPr txBox="1"/>
+          <p:nvPr/>
+        </p:nvSpPr>
+        <p:spPr>
+          <a:xfrm>
+            <a:off x="4937760" y="1728216"/>
+            <a:ext cx="6583680" cy="411480"/>
+          </a:xfrm>
+          <a:prstGeom prst="rect">
+            <a:avLst/>
+          </a:prstGeom>
+          <a:noFill/>
+        </p:spPr>
+        <p:txBody>
+          <a:bodyPr wrap="square" anchor="t">
+            <a:spAutoFit/>
+          </a:bodyPr>
+          <a:lstStyle/>
+          <a:p>
+            <a:pPr algn="l">
+              <a:lnSpc>
+                <a:spcPct val="100000"/>
+              </a:lnSpc>
+              <a:spcAft>
+                <a:spcPts val="400"/>
+              </a:spcAft>
+            </a:pPr>
+            <a:r>
+              <a:rPr sz="1150" b="0" i="0">
+                <a:solidFill>
+                  <a:srgbClr val="4E635C"/>
+                </a:solidFill>
+                <a:latin typeface="Segoe UI"/>
+              </a:rPr>
+              <a:t>accuracy of captured intent — never invents a preference</a:t>
+            </a:r>
+          </a:p>
+        </p:txBody>
+      </p:sp>
+      <p:sp>
+        <p:nvSpPr>
+          <p:cNvPr id="8" name="Rounded Rectangle 7"/>
           <p:cNvSpPr/>
           <p:nvPr/>
         </p:nvSpPr>
         <p:spPr>
           <a:xfrm>
-            <a:off x="6199632" y="1554480"/>
-            <a:ext cx="5532120" cy="3017520"/>
+            <a:off x="502920" y="2295144"/>
+            <a:ext cx="11201400" cy="566928"/>
           </a:xfrm>
           <a:prstGeom prst="roundRect">
             <a:avLst>
@@ -12856,10 +12722,12 @@
             </a:avLst>
           </a:prstGeom>
           <a:solidFill>
-            <a:srgbClr val="14453D"/>
+            <a:srgbClr val="FFFFFF"/>
           </a:solidFill>
-          <a:ln>
-            <a:noFill/>
+          <a:ln w="12700">
+            <a:solidFill>
+              <a:srgbClr val="D8DFDB"/>
+            </a:solidFill>
           </a:ln>
           <a:effectLst/>
         </p:spPr>
@@ -12882,27 +12750,28 @@
           <a:lstStyle/>
           <a:p>
             <a:pPr algn="ctr"/>
-          </a:p>
-        </p:txBody>
-      </p:sp>
-      <p:sp>
-        <p:nvSpPr>
-          <p:cNvPr id="30" name="TextBox 29"/>
+            <a:endParaRPr/>
+          </a:p>
+        </p:txBody>
+      </p:sp>
+      <p:sp>
+        <p:nvSpPr>
+          <p:cNvPr id="9" name="TextBox 8"/>
           <p:cNvSpPr txBox="1"/>
           <p:nvPr/>
         </p:nvSpPr>
         <p:spPr>
           <a:xfrm>
-            <a:off x="6428232" y="1691640"/>
-            <a:ext cx="5029200" cy="320040"/>
-          </a:xfrm>
-          <a:prstGeom prst="rect">
-            <a:avLst/>
-          </a:prstGeom>
-          <a:noFill/>
-        </p:spPr>
-        <p:txBody>
-          <a:bodyPr wrap="square">
+            <a:off x="731520" y="2377439"/>
+            <a:ext cx="2011680" cy="365760"/>
+          </a:xfrm>
+          <a:prstGeom prst="rect">
+            <a:avLst/>
+          </a:prstGeom>
+          <a:noFill/>
+        </p:spPr>
+        <p:txBody>
+          <a:bodyPr wrap="square" anchor="t">
             <a:spAutoFit/>
           </a:bodyPr>
           <a:lstStyle/>
@@ -12916,162 +12785,111 @@
               </a:spcAft>
             </a:pPr>
             <a:r>
-              <a:rPr sz="1100" b="1">
-                <a:solidFill>
-                  <a:srgbClr val="FFB52E"/>
-                </a:solidFill>
-                <a:latin typeface="Segoe UI"/>
-              </a:rPr>
-              <a:t>IMPACT — WHAT CHANGES FOR THE TRAVELLER</a:t>
-            </a:r>
-          </a:p>
-        </p:txBody>
-      </p:sp>
-      <p:sp>
-        <p:nvSpPr>
-          <p:cNvPr id="31" name="TextBox 30"/>
+              <a:rPr sz="1300" b="1" i="0">
+                <a:solidFill>
+                  <a:srgbClr val="0E1F1A"/>
+                </a:solidFill>
+                <a:latin typeface="Segoe UI"/>
+              </a:rPr>
+              <a:t>Discovery</a:t>
+            </a:r>
+          </a:p>
+        </p:txBody>
+      </p:sp>
+      <p:sp>
+        <p:nvSpPr>
+          <p:cNvPr id="10" name="TextBox 9"/>
           <p:cNvSpPr txBox="1"/>
           <p:nvPr/>
         </p:nvSpPr>
         <p:spPr>
           <a:xfrm>
-            <a:off x="6428232" y="2048256"/>
-            <a:ext cx="5120640" cy="2423160"/>
-          </a:xfrm>
-          <a:prstGeom prst="rect">
-            <a:avLst/>
-          </a:prstGeom>
-          <a:noFill/>
-        </p:spPr>
-        <p:txBody>
-          <a:bodyPr wrap="square">
+            <a:off x="2834640" y="2377439"/>
+            <a:ext cx="2011680" cy="365760"/>
+          </a:xfrm>
+          <a:prstGeom prst="rect">
+            <a:avLst/>
+          </a:prstGeom>
+          <a:noFill/>
+        </p:spPr>
+        <p:txBody>
+          <a:bodyPr wrap="square" anchor="t">
             <a:spAutoFit/>
           </a:bodyPr>
           <a:lstStyle/>
           <a:p>
             <a:pPr algn="l">
               <a:lnSpc>
-                <a:spcPct val="116000"/>
-              </a:lnSpc>
-              <a:spcAft>
-                <a:spcPts val="400"/>
-              </a:spcAft>
-            </a:pPr>
-            <a:r>
-              <a:rPr sz="1200" b="1">
-                <a:solidFill>
-                  <a:srgbClr val="FFFFFF"/>
-                </a:solidFill>
-                <a:latin typeface="Segoe UI"/>
-              </a:rPr>
-              <a:t>One brief replaces 6–8 apps</a:t>
-            </a:r>
-            <a:r>
-              <a:rPr sz="1200" b="0">
-                <a:solidFill>
-                  <a:srgbClr val="EEF4EF"/>
-                </a:solidFill>
-                <a:latin typeface="Segoe UI"/>
-              </a:rPr>
-              <a:t> — context entered once, carried end to end</a:t>
-            </a:r>
-          </a:p>
-          <a:p>
-            <a:pPr algn="l">
-              <a:lnSpc>
-                <a:spcPct val="116000"/>
-              </a:lnSpc>
-              <a:spcAft>
-                <a:spcPts val="400"/>
-              </a:spcAft>
-            </a:pPr>
-            <a:r>
-              <a:rPr sz="1200" b="1">
-                <a:solidFill>
-                  <a:srgbClr val="FFFFFF"/>
-                </a:solidFill>
-                <a:latin typeface="Segoe UI"/>
-              </a:rPr>
-              <a:t>Budget enforced during planning</a:t>
-            </a:r>
-            <a:r>
-              <a:rPr sz="1200" b="0">
-                <a:solidFill>
-                  <a:srgbClr val="EEF4EF"/>
-                </a:solidFill>
-                <a:latin typeface="Segoe UI"/>
-              </a:rPr>
-              <a:t> — not reconciled after the money is gone</a:t>
-            </a:r>
-          </a:p>
-          <a:p>
-            <a:pPr algn="l">
-              <a:lnSpc>
-                <a:spcPct val="116000"/>
-              </a:lnSpc>
-              <a:spcAft>
-                <a:spcPts val="400"/>
-              </a:spcAft>
-            </a:pPr>
-            <a:r>
-              <a:rPr sz="1200" b="1">
-                <a:solidFill>
-                  <a:srgbClr val="FFFFFF"/>
-                </a:solidFill>
-                <a:latin typeface="Segoe UI"/>
-              </a:rPr>
-              <a:t>Groups reach a defensible plan</a:t>
-            </a:r>
-            <a:r>
-              <a:rPr sz="1200" b="0">
-                <a:solidFill>
-                  <a:srgbClr val="EEF4EF"/>
-                </a:solidFill>
-                <a:latin typeface="Segoe UI"/>
-              </a:rPr>
-              <a:t> — a published concession matrix; nobody concedes twice</a:t>
-            </a:r>
-          </a:p>
-          <a:p>
-            <a:pPr algn="l">
-              <a:lnSpc>
-                <a:spcPct val="116000"/>
-              </a:lnSpc>
-              <a:spcAft>
-                <a:spcPts val="400"/>
-              </a:spcAft>
-            </a:pPr>
-            <a:r>
-              <a:rPr sz="1200" b="1">
-                <a:solidFill>
-                  <a:srgbClr val="FFFFFF"/>
-                </a:solidFill>
-                <a:latin typeface="Segoe UI"/>
-              </a:rPr>
-              <a:t>Honesty as shipped UI</a:t>
-            </a:r>
-            <a:r>
-              <a:rPr sz="1200" b="0">
-                <a:solidFill>
-                  <a:srgbClr val="EEF4EF"/>
-                </a:solidFill>
-                <a:latin typeface="Segoe UI"/>
-              </a:rPr>
-              <a:t> — simulated labelled, prices marked est., scope stated up front</a:t>
-            </a:r>
-          </a:p>
-        </p:txBody>
-      </p:sp>
-      <p:sp>
-        <p:nvSpPr>
-          <p:cNvPr id="32" name="Rounded Rectangle 31"/>
+                <a:spcPct val="100000"/>
+              </a:lnSpc>
+              <a:spcAft>
+                <a:spcPts val="400"/>
+              </a:spcAft>
+            </a:pPr>
+            <a:r>
+              <a:rPr sz="1150" b="1" i="0">
+                <a:solidFill>
+                  <a:srgbClr val="C58200"/>
+                </a:solidFill>
+                <a:latin typeface="Segoe UI"/>
+              </a:rPr>
+              <a:t>goal-based</a:t>
+            </a:r>
+          </a:p>
+        </p:txBody>
+      </p:sp>
+      <p:sp>
+        <p:nvSpPr>
+          <p:cNvPr id="11" name="TextBox 10"/>
+          <p:cNvSpPr txBox="1"/>
+          <p:nvPr/>
+        </p:nvSpPr>
+        <p:spPr>
+          <a:xfrm>
+            <a:off x="4937760" y="2377439"/>
+            <a:ext cx="6583680" cy="411480"/>
+          </a:xfrm>
+          <a:prstGeom prst="rect">
+            <a:avLst/>
+          </a:prstGeom>
+          <a:noFill/>
+        </p:spPr>
+        <p:txBody>
+          <a:bodyPr wrap="square" anchor="t">
+            <a:spAutoFit/>
+          </a:bodyPr>
+          <a:lstStyle/>
+          <a:p>
+            <a:pPr algn="l">
+              <a:lnSpc>
+                <a:spcPct val="100000"/>
+              </a:lnSpc>
+              <a:spcAft>
+                <a:spcPts val="400"/>
+              </a:spcAft>
+            </a:pPr>
+            <a:r>
+              <a:rPr sz="1150" b="0" i="0">
+                <a:solidFill>
+                  <a:srgbClr val="4E635C"/>
+                </a:solidFill>
+                <a:latin typeface="Segoe UI"/>
+              </a:rPr>
+              <a:t>match relevance; India-only; must explain any substitution</a:t>
+            </a:r>
+          </a:p>
+        </p:txBody>
+      </p:sp>
+      <p:sp>
+        <p:nvSpPr>
+          <p:cNvPr id="12" name="Rounded Rectangle 11"/>
           <p:cNvSpPr/>
           <p:nvPr/>
         </p:nvSpPr>
         <p:spPr>
           <a:xfrm>
-            <a:off x="502920" y="4736592"/>
-            <a:ext cx="11201400" cy="658368"/>
+            <a:off x="502920" y="2944368"/>
+            <a:ext cx="11201400" cy="566928"/>
           </a:xfrm>
           <a:prstGeom prst="roundRect">
             <a:avLst>
@@ -13107,27 +12925,28 @@
           <a:lstStyle/>
           <a:p>
             <a:pPr algn="ctr"/>
-          </a:p>
-        </p:txBody>
-      </p:sp>
-      <p:sp>
-        <p:nvSpPr>
-          <p:cNvPr id="33" name="TextBox 32"/>
+            <a:endParaRPr/>
+          </a:p>
+        </p:txBody>
+      </p:sp>
+      <p:sp>
+        <p:nvSpPr>
+          <p:cNvPr id="13" name="TextBox 12"/>
           <p:cNvSpPr txBox="1"/>
           <p:nvPr/>
         </p:nvSpPr>
         <p:spPr>
           <a:xfrm>
-            <a:off x="731520" y="4837176"/>
-            <a:ext cx="10789920" cy="457200"/>
-          </a:xfrm>
-          <a:prstGeom prst="rect">
-            <a:avLst/>
-          </a:prstGeom>
-          <a:noFill/>
-        </p:spPr>
-        <p:txBody>
-          <a:bodyPr wrap="square">
+            <a:off x="731520" y="3026663"/>
+            <a:ext cx="2011680" cy="365760"/>
+          </a:xfrm>
+          <a:prstGeom prst="rect">
+            <a:avLst/>
+          </a:prstGeom>
+          <a:noFill/>
+        </p:spPr>
+        <p:txBody>
+          <a:bodyPr wrap="square" anchor="t">
             <a:spAutoFit/>
           </a:bodyPr>
           <a:lstStyle/>
@@ -13141,36 +12960,111 @@
               </a:spcAft>
             </a:pPr>
             <a:r>
-              <a:rPr sz="1150" b="1">
-                <a:solidFill>
-                  <a:srgbClr val="14453D"/>
-                </a:solidFill>
-                <a:latin typeface="Segoe UI"/>
-              </a:rPr>
-              <a:t>Validation gates for the beta: </a:t>
-            </a:r>
-            <a:r>
-              <a:rPr sz="1150" b="0">
+              <a:rPr sz="1300" b="1" i="0">
+                <a:solidFill>
+                  <a:srgbClr val="0E1F1A"/>
+                </a:solidFill>
+                <a:latin typeface="Segoe UI"/>
+              </a:rPr>
+              <a:t>Budget</a:t>
+            </a:r>
+          </a:p>
+        </p:txBody>
+      </p:sp>
+      <p:sp>
+        <p:nvSpPr>
+          <p:cNvPr id="14" name="TextBox 13"/>
+          <p:cNvSpPr txBox="1"/>
+          <p:nvPr/>
+        </p:nvSpPr>
+        <p:spPr>
+          <a:xfrm>
+            <a:off x="2834640" y="3026663"/>
+            <a:ext cx="2011680" cy="365760"/>
+          </a:xfrm>
+          <a:prstGeom prst="rect">
+            <a:avLst/>
+          </a:prstGeom>
+          <a:noFill/>
+        </p:spPr>
+        <p:txBody>
+          <a:bodyPr wrap="square" anchor="t">
+            <a:spAutoFit/>
+          </a:bodyPr>
+          <a:lstStyle/>
+          <a:p>
+            <a:pPr algn="l">
+              <a:lnSpc>
+                <a:spcPct val="100000"/>
+              </a:lnSpc>
+              <a:spcAft>
+                <a:spcPts val="400"/>
+              </a:spcAft>
+            </a:pPr>
+            <a:r>
+              <a:rPr sz="1150" b="1" i="0">
+                <a:solidFill>
+                  <a:srgbClr val="C58200"/>
+                </a:solidFill>
+                <a:latin typeface="Segoe UI"/>
+              </a:rPr>
+              <a:t>utility-based</a:t>
+            </a:r>
+          </a:p>
+        </p:txBody>
+      </p:sp>
+      <p:sp>
+        <p:nvSpPr>
+          <p:cNvPr id="15" name="TextBox 14"/>
+          <p:cNvSpPr txBox="1"/>
+          <p:nvPr/>
+        </p:nvSpPr>
+        <p:spPr>
+          <a:xfrm>
+            <a:off x="4937760" y="3026663"/>
+            <a:ext cx="6583680" cy="411480"/>
+          </a:xfrm>
+          <a:prstGeom prst="rect">
+            <a:avLst/>
+          </a:prstGeom>
+          <a:noFill/>
+        </p:spPr>
+        <p:txBody>
+          <a:bodyPr wrap="square" anchor="t">
+            <a:spAutoFit/>
+          </a:bodyPr>
+          <a:lstStyle/>
+          <a:p>
+            <a:pPr algn="l">
+              <a:lnSpc>
+                <a:spcPct val="100000"/>
+              </a:lnSpc>
+              <a:spcAft>
+                <a:spcPts val="400"/>
+              </a:spcAft>
+            </a:pPr>
+            <a:r>
+              <a:rPr sz="1150" b="0" i="0">
                 <a:solidFill>
                   <a:srgbClr val="4E635C"/>
                 </a:solidFill>
                 <a:latin typeface="Segoe UI"/>
               </a:rPr>
-              <a:t>&gt;70% plan completion · &lt;60s median agent time · &gt;50% can explain the Referee · &gt;30% override something · &gt;25% confirm · &gt;20% return in 30 days</a:t>
-            </a:r>
-          </a:p>
-        </p:txBody>
-      </p:sp>
-      <p:sp>
-        <p:nvSpPr>
-          <p:cNvPr id="34" name="Rounded Rectangle 33"/>
+              <a:t>spend &amp; split correctness — arithmetic in code, never the model</a:t>
+            </a:r>
+          </a:p>
+        </p:txBody>
+      </p:sp>
+      <p:sp>
+        <p:nvSpPr>
+          <p:cNvPr id="16" name="Rounded Rectangle 15"/>
           <p:cNvSpPr/>
           <p:nvPr/>
         </p:nvSpPr>
         <p:spPr>
           <a:xfrm>
-            <a:off x="502920" y="5559552"/>
-            <a:ext cx="11201400" cy="768096"/>
+            <a:off x="502920" y="3593591"/>
+            <a:ext cx="11201400" cy="566928"/>
           </a:xfrm>
           <a:prstGeom prst="roundRect">
             <a:avLst>
@@ -13178,10 +13072,12 @@
             </a:avLst>
           </a:prstGeom>
           <a:solidFill>
-            <a:srgbClr val="0E1F1A"/>
+            <a:srgbClr val="FFFFFF"/>
           </a:solidFill>
-          <a:ln>
-            <a:noFill/>
+          <a:ln w="12700">
+            <a:solidFill>
+              <a:srgbClr val="D8DFDB"/>
+            </a:solidFill>
           </a:ln>
           <a:effectLst/>
         </p:spPr>
@@ -13204,173 +13100,20 @@
           <a:lstStyle/>
           <a:p>
             <a:pPr algn="ctr"/>
-          </a:p>
-        </p:txBody>
-      </p:sp>
-      <p:sp>
-        <p:nvSpPr>
-          <p:cNvPr id="35" name="TextBox 34"/>
+            <a:endParaRPr/>
+          </a:p>
+        </p:txBody>
+      </p:sp>
+      <p:sp>
+        <p:nvSpPr>
+          <p:cNvPr id="17" name="TextBox 16"/>
           <p:cNvSpPr txBox="1"/>
           <p:nvPr/>
         </p:nvSpPr>
         <p:spPr>
           <a:xfrm>
-            <a:off x="822960" y="5678424"/>
-            <a:ext cx="7772400" cy="548640"/>
-          </a:xfrm>
-          <a:prstGeom prst="rect">
-            <a:avLst/>
-          </a:prstGeom>
-          <a:noFill/>
-        </p:spPr>
-        <p:txBody>
-          <a:bodyPr wrap="square">
-            <a:spAutoFit/>
-          </a:bodyPr>
-          <a:lstStyle/>
-          <a:p>
-            <a:pPr algn="l">
-              <a:lnSpc>
-                <a:spcPct val="100000"/>
-              </a:lnSpc>
-              <a:spcAft>
-                <a:spcPts val="400"/>
-              </a:spcAft>
-            </a:pPr>
-            <a:r>
-              <a:rPr sz="1500" b="1">
-                <a:solidFill>
-                  <a:srgbClr val="EEF4EF"/>
-                </a:solidFill>
-                <a:latin typeface="Segoe UI"/>
-              </a:rPr>
-              <a:t>Try it now — </a:t>
-            </a:r>
-            <a:r>
-              <a:rPr sz="1500" b="1">
-                <a:solidFill>
-                  <a:srgbClr val="FFB52E"/>
-                </a:solidFill>
-                <a:latin typeface="Segoe UI"/>
-              </a:rPr>
-              <a:t>tripme-khaki.vercel.app</a:t>
-            </a:r>
-            <a:r>
-              <a:rPr sz="1100" b="0">
-                <a:solidFill>
-                  <a:srgbClr val="9DB3AC"/>
-                </a:solidFill>
-                <a:latin typeface="Segoe UI"/>
-              </a:rPr>
-              <a:t>   ·   wireframes: /wireframes.html</a:t>
-            </a:r>
-          </a:p>
-        </p:txBody>
-      </p:sp>
-      <p:sp>
-        <p:nvSpPr>
-          <p:cNvPr id="36" name="TextBox 35"/>
-          <p:cNvSpPr txBox="1"/>
-          <p:nvPr/>
-        </p:nvSpPr>
-        <p:spPr>
-          <a:xfrm>
-            <a:off x="8503920" y="5687568"/>
-            <a:ext cx="3017520" cy="502920"/>
-          </a:xfrm>
-          <a:prstGeom prst="rect">
-            <a:avLst/>
-          </a:prstGeom>
-          <a:noFill/>
-        </p:spPr>
-        <p:txBody>
-          <a:bodyPr wrap="square">
-            <a:spAutoFit/>
-          </a:bodyPr>
-          <a:lstStyle/>
-          <a:p>
-            <a:pPr algn="r">
-              <a:lnSpc>
-                <a:spcPct val="105000"/>
-              </a:lnSpc>
-              <a:spcAft>
-                <a:spcPts val="400"/>
-              </a:spcAft>
-            </a:pPr>
-            <a:r>
-              <a:rPr sz="1250" b="1">
-                <a:solidFill>
-                  <a:srgbClr val="EEF4EF"/>
-                </a:solidFill>
-                <a:latin typeface="Segoe UI"/>
-              </a:rPr>
-              <a:t>One mood. One budget.</a:t>
-            </a:r>
-          </a:p>
-          <a:p>
-            <a:pPr algn="r">
-              <a:lnSpc>
-                <a:spcPct val="105000"/>
-              </a:lnSpc>
-              <a:spcAft>
-                <a:spcPts val="400"/>
-              </a:spcAft>
-            </a:pPr>
-            <a:r>
-              <a:rPr sz="1250" b="1">
-                <a:solidFill>
-                  <a:srgbClr val="EEF4EF"/>
-                </a:solidFill>
-                <a:latin typeface="Segoe UI"/>
-              </a:rPr>
-              <a:t>One complete trip.</a:t>
-            </a:r>
-          </a:p>
-        </p:txBody>
-      </p:sp>
-    </p:spTree>
-  </p:cSld>
-  <p:clrMapOvr>
-    <a:masterClrMapping/>
-  </p:clrMapOvr>
-</p:sld>
-</file>
-
-<file path=ppt/slides/slide8.xml><?xml version="1.0" encoding="utf-8"?>
-<p:sld xmlns:a="http://schemas.openxmlformats.org/drawingml/2006/main" xmlns:r="http://schemas.openxmlformats.org/officeDocument/2006/relationships" xmlns:p="http://schemas.openxmlformats.org/presentationml/2006/main">
-  <p:cSld>
-    <p:bg>
-      <p:bgPr>
-        <a:solidFill>
-          <a:srgbClr val="0E332D"/>
-        </a:solidFill>
-        <a:effectLst/>
-      </p:bgPr>
-    </p:bg>
-    <p:spTree>
-      <p:nvGrpSpPr>
-        <p:cNvPr id="1" name=""/>
-        <p:cNvGrpSpPr/>
-        <p:nvPr/>
-      </p:nvGrpSpPr>
-      <p:grpSpPr>
-        <a:xfrm>
-          <a:off x="0" y="0"/>
-          <a:ext cx="0" cy="0"/>
-          <a:chOff x="0" y="0"/>
-          <a:chExt cx="0" cy="0"/>
-        </a:xfrm>
-      </p:grpSpPr>
-      <p:sp>
-        <p:nvSpPr>
-          <p:cNvPr id="2" name="TextBox 1"/>
-          <p:cNvSpPr txBox="1"/>
-          <p:nvPr/>
-        </p:nvSpPr>
-        <p:spPr>
-          <a:xfrm>
-            <a:off x="502920" y="2926080"/>
-            <a:ext cx="11155680" cy="731520"/>
+            <a:off x="731520" y="3675887"/>
+            <a:ext cx="2011680" cy="365760"/>
           </a:xfrm>
           <a:prstGeom prst="rect">
             <a:avLst/>
@@ -13392,27 +13135,27 @@
               </a:spcAft>
             </a:pPr>
             <a:r>
-              <a:rPr sz="4000" b="1" i="0">
-                <a:solidFill>
-                  <a:srgbClr val="EEF4EF"/>
-                </a:solidFill>
-                <a:latin typeface="Segoe UI"/>
-              </a:rPr>
-              <a:t>Appendix — for Q&amp;A</a:t>
-            </a:r>
-          </a:p>
-        </p:txBody>
-      </p:sp>
-      <p:sp>
-        <p:nvSpPr>
-          <p:cNvPr id="3" name="TextBox 2"/>
+              <a:rPr sz="1300" b="1" i="0">
+                <a:solidFill>
+                  <a:srgbClr val="0E1F1A"/>
+                </a:solidFill>
+                <a:latin typeface="Segoe UI"/>
+              </a:rPr>
+              <a:t>Itinerary</a:t>
+            </a:r>
+          </a:p>
+        </p:txBody>
+      </p:sp>
+      <p:sp>
+        <p:nvSpPr>
+          <p:cNvPr id="18" name="TextBox 17"/>
           <p:cNvSpPr txBox="1"/>
           <p:nvPr/>
         </p:nvSpPr>
         <p:spPr>
           <a:xfrm>
-            <a:off x="502920" y="3703320"/>
-            <a:ext cx="11155680" cy="457200"/>
+            <a:off x="2834640" y="3675887"/>
+            <a:ext cx="2011680" cy="365760"/>
           </a:xfrm>
           <a:prstGeom prst="rect">
             <a:avLst/>
@@ -13434,13 +13177,622 @@
               </a:spcAft>
             </a:pPr>
             <a:r>
-              <a:rPr sz="1500" b="0" i="0">
-                <a:solidFill>
-                  <a:srgbClr val="9DB3AC"/>
-                </a:solidFill>
-                <a:latin typeface="Segoe UI"/>
-              </a:rPr>
-              <a:t>Architecture &amp; PEAS · tech stack · testing · challenges we actually hit · ethics · prioritisation</a:t>
+              <a:rPr sz="1150" b="1" i="0">
+                <a:solidFill>
+                  <a:srgbClr val="C58200"/>
+                </a:solidFill>
+                <a:latin typeface="Segoe UI"/>
+              </a:rPr>
+              <a:t>utility-based</a:t>
+            </a:r>
+          </a:p>
+        </p:txBody>
+      </p:sp>
+      <p:sp>
+        <p:nvSpPr>
+          <p:cNvPr id="19" name="TextBox 18"/>
+          <p:cNvSpPr txBox="1"/>
+          <p:nvPr/>
+        </p:nvSpPr>
+        <p:spPr>
+          <a:xfrm>
+            <a:off x="4937760" y="3675887"/>
+            <a:ext cx="6583680" cy="411480"/>
+          </a:xfrm>
+          <a:prstGeom prst="rect">
+            <a:avLst/>
+          </a:prstGeom>
+          <a:noFill/>
+        </p:spPr>
+        <p:txBody>
+          <a:bodyPr wrap="square" anchor="t">
+            <a:spAutoFit/>
+          </a:bodyPr>
+          <a:lstStyle/>
+          <a:p>
+            <a:pPr algn="l">
+              <a:lnSpc>
+                <a:spcPct val="100000"/>
+              </a:lnSpc>
+              <a:spcAft>
+                <a:spcPts val="400"/>
+              </a:spcAft>
+            </a:pPr>
+            <a:r>
+              <a:rPr sz="1150" b="0" i="0">
+                <a:solidFill>
+                  <a:srgbClr val="4E635C"/>
+                </a:solidFill>
+                <a:latin typeface="Segoe UI"/>
+              </a:rPr>
+              <a:t>coherence &amp; pacing fit; places from open map data, not memory</a:t>
+            </a:r>
+          </a:p>
+        </p:txBody>
+      </p:sp>
+      <p:sp>
+        <p:nvSpPr>
+          <p:cNvPr id="20" name="Rounded Rectangle 19"/>
+          <p:cNvSpPr/>
+          <p:nvPr/>
+        </p:nvSpPr>
+        <p:spPr>
+          <a:xfrm>
+            <a:off x="502920" y="4242816"/>
+            <a:ext cx="11201400" cy="566928"/>
+          </a:xfrm>
+          <a:prstGeom prst="roundRect">
+            <a:avLst>
+              <a:gd name="adj" fmla="val 8000"/>
+            </a:avLst>
+          </a:prstGeom>
+          <a:solidFill>
+            <a:srgbClr val="FFFFFF"/>
+          </a:solidFill>
+          <a:ln w="12700">
+            <a:solidFill>
+              <a:srgbClr val="D8DFDB"/>
+            </a:solidFill>
+          </a:ln>
+          <a:effectLst/>
+        </p:spPr>
+        <p:style>
+          <a:lnRef idx="1">
+            <a:schemeClr val="accent1"/>
+          </a:lnRef>
+          <a:fillRef idx="3">
+            <a:schemeClr val="accent1"/>
+          </a:fillRef>
+          <a:effectRef idx="2">
+            <a:schemeClr val="accent1"/>
+          </a:effectRef>
+          <a:fontRef idx="minor">
+            <a:schemeClr val="lt1"/>
+          </a:fontRef>
+        </p:style>
+        <p:txBody>
+          <a:bodyPr rtlCol="0" anchor="ctr"/>
+          <a:lstStyle/>
+          <a:p>
+            <a:pPr algn="ctr"/>
+            <a:endParaRPr/>
+          </a:p>
+        </p:txBody>
+      </p:sp>
+      <p:sp>
+        <p:nvSpPr>
+          <p:cNvPr id="21" name="TextBox 20"/>
+          <p:cNvSpPr txBox="1"/>
+          <p:nvPr/>
+        </p:nvSpPr>
+        <p:spPr>
+          <a:xfrm>
+            <a:off x="731520" y="4325112"/>
+            <a:ext cx="2011680" cy="365760"/>
+          </a:xfrm>
+          <a:prstGeom prst="rect">
+            <a:avLst/>
+          </a:prstGeom>
+          <a:noFill/>
+        </p:spPr>
+        <p:txBody>
+          <a:bodyPr wrap="square" anchor="t">
+            <a:spAutoFit/>
+          </a:bodyPr>
+          <a:lstStyle/>
+          <a:p>
+            <a:pPr algn="l">
+              <a:lnSpc>
+                <a:spcPct val="100000"/>
+              </a:lnSpc>
+              <a:spcAft>
+                <a:spcPts val="400"/>
+              </a:spcAft>
+            </a:pPr>
+            <a:r>
+              <a:rPr sz="1300" b="1" i="0">
+                <a:solidFill>
+                  <a:srgbClr val="0E1F1A"/>
+                </a:solidFill>
+                <a:latin typeface="Segoe UI"/>
+              </a:rPr>
+              <a:t>Booking</a:t>
+            </a:r>
+          </a:p>
+        </p:txBody>
+      </p:sp>
+      <p:sp>
+        <p:nvSpPr>
+          <p:cNvPr id="22" name="TextBox 21"/>
+          <p:cNvSpPr txBox="1"/>
+          <p:nvPr/>
+        </p:nvSpPr>
+        <p:spPr>
+          <a:xfrm>
+            <a:off x="2834640" y="4325112"/>
+            <a:ext cx="2011680" cy="365760"/>
+          </a:xfrm>
+          <a:prstGeom prst="rect">
+            <a:avLst/>
+          </a:prstGeom>
+          <a:noFill/>
+        </p:spPr>
+        <p:txBody>
+          <a:bodyPr wrap="square" anchor="t">
+            <a:spAutoFit/>
+          </a:bodyPr>
+          <a:lstStyle/>
+          <a:p>
+            <a:pPr algn="l">
+              <a:lnSpc>
+                <a:spcPct val="100000"/>
+              </a:lnSpc>
+              <a:spcAft>
+                <a:spcPts val="400"/>
+              </a:spcAft>
+            </a:pPr>
+            <a:r>
+              <a:rPr sz="1150" b="1" i="0">
+                <a:solidFill>
+                  <a:srgbClr val="C58200"/>
+                </a:solidFill>
+                <a:latin typeface="Segoe UI"/>
+              </a:rPr>
+              <a:t>action, gated</a:t>
+            </a:r>
+          </a:p>
+        </p:txBody>
+      </p:sp>
+      <p:sp>
+        <p:nvSpPr>
+          <p:cNvPr id="23" name="TextBox 22"/>
+          <p:cNvSpPr txBox="1"/>
+          <p:nvPr/>
+        </p:nvSpPr>
+        <p:spPr>
+          <a:xfrm>
+            <a:off x="4937760" y="4325112"/>
+            <a:ext cx="6583680" cy="411480"/>
+          </a:xfrm>
+          <a:prstGeom prst="rect">
+            <a:avLst/>
+          </a:prstGeom>
+          <a:noFill/>
+        </p:spPr>
+        <p:txBody>
+          <a:bodyPr wrap="square" anchor="t">
+            <a:spAutoFit/>
+          </a:bodyPr>
+          <a:lstStyle/>
+          <a:p>
+            <a:pPr algn="l">
+              <a:lnSpc>
+                <a:spcPct val="100000"/>
+              </a:lnSpc>
+              <a:spcAft>
+                <a:spcPts val="400"/>
+              </a:spcAft>
+            </a:pPr>
+            <a:r>
+              <a:rPr sz="1150" b="0" i="0">
+                <a:solidFill>
+                  <a:srgbClr val="4E635C"/>
+                </a:solidFill>
+                <a:latin typeface="Segoe UI"/>
+              </a:rPr>
+              <a:t>simulated bookings; every item above threshold needs explicit approval</a:t>
+            </a:r>
+          </a:p>
+        </p:txBody>
+      </p:sp>
+      <p:sp>
+        <p:nvSpPr>
+          <p:cNvPr id="24" name="Rounded Rectangle 23"/>
+          <p:cNvSpPr/>
+          <p:nvPr/>
+        </p:nvSpPr>
+        <p:spPr>
+          <a:xfrm>
+            <a:off x="502920" y="4892040"/>
+            <a:ext cx="11201400" cy="566928"/>
+          </a:xfrm>
+          <a:prstGeom prst="roundRect">
+            <a:avLst>
+              <a:gd name="adj" fmla="val 8000"/>
+            </a:avLst>
+          </a:prstGeom>
+          <a:solidFill>
+            <a:srgbClr val="FFFFFF"/>
+          </a:solidFill>
+          <a:ln w="12700">
+            <a:solidFill>
+              <a:srgbClr val="D8DFDB"/>
+            </a:solidFill>
+          </a:ln>
+          <a:effectLst/>
+        </p:spPr>
+        <p:style>
+          <a:lnRef idx="1">
+            <a:schemeClr val="accent1"/>
+          </a:lnRef>
+          <a:fillRef idx="3">
+            <a:schemeClr val="accent1"/>
+          </a:fillRef>
+          <a:effectRef idx="2">
+            <a:schemeClr val="accent1"/>
+          </a:effectRef>
+          <a:fontRef idx="minor">
+            <a:schemeClr val="lt1"/>
+          </a:fontRef>
+        </p:style>
+        <p:txBody>
+          <a:bodyPr rtlCol="0" anchor="ctr"/>
+          <a:lstStyle/>
+          <a:p>
+            <a:pPr algn="ctr"/>
+            <a:endParaRPr/>
+          </a:p>
+        </p:txBody>
+      </p:sp>
+      <p:sp>
+        <p:nvSpPr>
+          <p:cNvPr id="25" name="TextBox 24"/>
+          <p:cNvSpPr txBox="1"/>
+          <p:nvPr/>
+        </p:nvSpPr>
+        <p:spPr>
+          <a:xfrm>
+            <a:off x="731520" y="4974336"/>
+            <a:ext cx="2011680" cy="365760"/>
+          </a:xfrm>
+          <a:prstGeom prst="rect">
+            <a:avLst/>
+          </a:prstGeom>
+          <a:noFill/>
+        </p:spPr>
+        <p:txBody>
+          <a:bodyPr wrap="square" anchor="t">
+            <a:spAutoFit/>
+          </a:bodyPr>
+          <a:lstStyle/>
+          <a:p>
+            <a:pPr algn="l">
+              <a:lnSpc>
+                <a:spcPct val="100000"/>
+              </a:lnSpc>
+              <a:spcAft>
+                <a:spcPts val="400"/>
+              </a:spcAft>
+            </a:pPr>
+            <a:r>
+              <a:rPr sz="1300" b="1" i="0">
+                <a:solidFill>
+                  <a:srgbClr val="0E1F1A"/>
+                </a:solidFill>
+                <a:latin typeface="Segoe UI"/>
+              </a:rPr>
+              <a:t>Referee</a:t>
+            </a:r>
+          </a:p>
+        </p:txBody>
+      </p:sp>
+      <p:sp>
+        <p:nvSpPr>
+          <p:cNvPr id="26" name="TextBox 25"/>
+          <p:cNvSpPr txBox="1"/>
+          <p:nvPr/>
+        </p:nvSpPr>
+        <p:spPr>
+          <a:xfrm>
+            <a:off x="2834640" y="4974336"/>
+            <a:ext cx="2011680" cy="365760"/>
+          </a:xfrm>
+          <a:prstGeom prst="rect">
+            <a:avLst/>
+          </a:prstGeom>
+          <a:noFill/>
+        </p:spPr>
+        <p:txBody>
+          <a:bodyPr wrap="square" anchor="t">
+            <a:spAutoFit/>
+          </a:bodyPr>
+          <a:lstStyle/>
+          <a:p>
+            <a:pPr algn="l">
+              <a:lnSpc>
+                <a:spcPct val="100000"/>
+              </a:lnSpc>
+              <a:spcAft>
+                <a:spcPts val="400"/>
+              </a:spcAft>
+            </a:pPr>
+            <a:r>
+              <a:rPr sz="1150" b="1" i="0">
+                <a:solidFill>
+                  <a:srgbClr val="C58200"/>
+                </a:solidFill>
+                <a:latin typeface="Segoe UI"/>
+              </a:rPr>
+              <a:t>utility + arbitration</a:t>
+            </a:r>
+          </a:p>
+        </p:txBody>
+      </p:sp>
+      <p:sp>
+        <p:nvSpPr>
+          <p:cNvPr id="27" name="TextBox 26"/>
+          <p:cNvSpPr txBox="1"/>
+          <p:nvPr/>
+        </p:nvSpPr>
+        <p:spPr>
+          <a:xfrm>
+            <a:off x="4937760" y="4974336"/>
+            <a:ext cx="6583680" cy="411480"/>
+          </a:xfrm>
+          <a:prstGeom prst="rect">
+            <a:avLst/>
+          </a:prstGeom>
+          <a:noFill/>
+        </p:spPr>
+        <p:txBody>
+          <a:bodyPr wrap="square" anchor="t">
+            <a:spAutoFit/>
+          </a:bodyPr>
+          <a:lstStyle/>
+          <a:p>
+            <a:pPr algn="l">
+              <a:lnSpc>
+                <a:spcPct val="100000"/>
+              </a:lnSpc>
+              <a:spcAft>
+                <a:spcPts val="400"/>
+              </a:spcAft>
+            </a:pPr>
+            <a:r>
+              <a:rPr sz="1150" b="0" i="0">
+                <a:solidFill>
+                  <a:srgbClr val="4E635C"/>
+                </a:solidFill>
+                <a:latin typeface="Segoe UI"/>
+              </a:rPr>
+              <a:t>conflicts in rupees; fairness floor; can send work backwards</a:t>
+            </a:r>
+          </a:p>
+        </p:txBody>
+      </p:sp>
+      <p:sp>
+        <p:nvSpPr>
+          <p:cNvPr id="28" name="Rounded Rectangle 27"/>
+          <p:cNvSpPr/>
+          <p:nvPr/>
+        </p:nvSpPr>
+        <p:spPr>
+          <a:xfrm>
+            <a:off x="502920" y="5541264"/>
+            <a:ext cx="11201400" cy="566928"/>
+          </a:xfrm>
+          <a:prstGeom prst="roundRect">
+            <a:avLst>
+              <a:gd name="adj" fmla="val 8000"/>
+            </a:avLst>
+          </a:prstGeom>
+          <a:solidFill>
+            <a:srgbClr val="FFFFFF"/>
+          </a:solidFill>
+          <a:ln w="12700">
+            <a:solidFill>
+              <a:srgbClr val="D8DFDB"/>
+            </a:solidFill>
+          </a:ln>
+          <a:effectLst/>
+        </p:spPr>
+        <p:style>
+          <a:lnRef idx="1">
+            <a:schemeClr val="accent1"/>
+          </a:lnRef>
+          <a:fillRef idx="3">
+            <a:schemeClr val="accent1"/>
+          </a:fillRef>
+          <a:effectRef idx="2">
+            <a:schemeClr val="accent1"/>
+          </a:effectRef>
+          <a:fontRef idx="minor">
+            <a:schemeClr val="lt1"/>
+          </a:fontRef>
+        </p:style>
+        <p:txBody>
+          <a:bodyPr rtlCol="0" anchor="ctr"/>
+          <a:lstStyle/>
+          <a:p>
+            <a:pPr algn="ctr"/>
+            <a:endParaRPr/>
+          </a:p>
+        </p:txBody>
+      </p:sp>
+      <p:sp>
+        <p:nvSpPr>
+          <p:cNvPr id="29" name="TextBox 28"/>
+          <p:cNvSpPr txBox="1"/>
+          <p:nvPr/>
+        </p:nvSpPr>
+        <p:spPr>
+          <a:xfrm>
+            <a:off x="731520" y="5623559"/>
+            <a:ext cx="2011680" cy="365760"/>
+          </a:xfrm>
+          <a:prstGeom prst="rect">
+            <a:avLst/>
+          </a:prstGeom>
+          <a:noFill/>
+        </p:spPr>
+        <p:txBody>
+          <a:bodyPr wrap="square" anchor="t">
+            <a:spAutoFit/>
+          </a:bodyPr>
+          <a:lstStyle/>
+          <a:p>
+            <a:pPr algn="l">
+              <a:lnSpc>
+                <a:spcPct val="100000"/>
+              </a:lnSpc>
+              <a:spcAft>
+                <a:spcPts val="400"/>
+              </a:spcAft>
+            </a:pPr>
+            <a:r>
+              <a:rPr sz="1300" b="1" i="0">
+                <a:solidFill>
+                  <a:srgbClr val="0E1F1A"/>
+                </a:solidFill>
+                <a:latin typeface="Segoe UI"/>
+              </a:rPr>
+              <a:t>Notification</a:t>
+            </a:r>
+          </a:p>
+        </p:txBody>
+      </p:sp>
+      <p:sp>
+        <p:nvSpPr>
+          <p:cNvPr id="30" name="TextBox 29"/>
+          <p:cNvSpPr txBox="1"/>
+          <p:nvPr/>
+        </p:nvSpPr>
+        <p:spPr>
+          <a:xfrm>
+            <a:off x="2834640" y="5623559"/>
+            <a:ext cx="2011680" cy="365760"/>
+          </a:xfrm>
+          <a:prstGeom prst="rect">
+            <a:avLst/>
+          </a:prstGeom>
+          <a:noFill/>
+        </p:spPr>
+        <p:txBody>
+          <a:bodyPr wrap="square" anchor="t">
+            <a:spAutoFit/>
+          </a:bodyPr>
+          <a:lstStyle/>
+          <a:p>
+            <a:pPr algn="l">
+              <a:lnSpc>
+                <a:spcPct val="100000"/>
+              </a:lnSpc>
+              <a:spcAft>
+                <a:spcPts val="400"/>
+              </a:spcAft>
+            </a:pPr>
+            <a:r>
+              <a:rPr sz="1150" b="1" i="0">
+                <a:solidFill>
+                  <a:srgbClr val="C58200"/>
+                </a:solidFill>
+                <a:latin typeface="Segoe UI"/>
+              </a:rPr>
+              <a:t>model-based reflex</a:t>
+            </a:r>
+          </a:p>
+        </p:txBody>
+      </p:sp>
+      <p:sp>
+        <p:nvSpPr>
+          <p:cNvPr id="31" name="TextBox 30"/>
+          <p:cNvSpPr txBox="1"/>
+          <p:nvPr/>
+        </p:nvSpPr>
+        <p:spPr>
+          <a:xfrm>
+            <a:off x="4937760" y="5623559"/>
+            <a:ext cx="6583680" cy="411480"/>
+          </a:xfrm>
+          <a:prstGeom prst="rect">
+            <a:avLst/>
+          </a:prstGeom>
+          <a:noFill/>
+        </p:spPr>
+        <p:txBody>
+          <a:bodyPr wrap="square" anchor="t">
+            <a:spAutoFit/>
+          </a:bodyPr>
+          <a:lstStyle/>
+          <a:p>
+            <a:pPr algn="l">
+              <a:lnSpc>
+                <a:spcPct val="100000"/>
+              </a:lnSpc>
+              <a:spcAft>
+                <a:spcPts val="400"/>
+              </a:spcAft>
+            </a:pPr>
+            <a:r>
+              <a:rPr sz="1150" b="0" i="0">
+                <a:solidFill>
+                  <a:srgbClr val="4E635C"/>
+                </a:solidFill>
+                <a:latin typeface="Segoe UI"/>
+              </a:rPr>
+              <a:t>time-anchored reminders; opt-in per trip, off by default</a:t>
+            </a:r>
+          </a:p>
+        </p:txBody>
+      </p:sp>
+      <p:sp>
+        <p:nvSpPr>
+          <p:cNvPr id="32" name="TextBox 31"/>
+          <p:cNvSpPr txBox="1"/>
+          <p:nvPr/>
+        </p:nvSpPr>
+        <p:spPr>
+          <a:xfrm>
+            <a:off x="502920" y="6309360"/>
+            <a:ext cx="11155680" cy="365760"/>
+          </a:xfrm>
+          <a:prstGeom prst="rect">
+            <a:avLst/>
+          </a:prstGeom>
+          <a:noFill/>
+        </p:spPr>
+        <p:txBody>
+          <a:bodyPr wrap="square" anchor="t">
+            <a:spAutoFit/>
+          </a:bodyPr>
+          <a:lstStyle/>
+          <a:p>
+            <a:pPr algn="l">
+              <a:lnSpc>
+                <a:spcPct val="100000"/>
+              </a:lnSpc>
+              <a:spcAft>
+                <a:spcPts val="400"/>
+              </a:spcAft>
+            </a:pPr>
+            <a:r>
+              <a:rPr sz="1200" b="1" i="0">
+                <a:solidFill>
+                  <a:srgbClr val="14453D"/>
+                </a:solidFill>
+                <a:latin typeface="Segoe UI"/>
+              </a:rPr>
+              <a:t>Design rule: as much autonomy as the stakes of the decision can safely support — and no more.</a:t>
             </a:r>
           </a:p>
         </p:txBody>
@@ -13515,7 +13867,7 @@
                 </a:solidFill>
                 <a:latin typeface="Segoe UI"/>
               </a:rPr>
-              <a:t>APPENDIX A1</a:t>
+              <a:t>APPENDIX A2</a:t>
             </a:r>
           </a:p>
         </p:txBody>
@@ -13557,7 +13909,7 @@
                 </a:solidFill>
                 <a:latin typeface="Segoe UI"/>
               </a:rPr>
-              <a:t>Agent architecture — formally specified (PEAS)</a:t>
+              <a:t>Tech: what we built with vs the funded version</a:t>
             </a:r>
           </a:p>
         </p:txBody>
@@ -13571,7 +13923,7 @@
         <p:spPr>
           <a:xfrm>
             <a:off x="502920" y="1645920"/>
-            <a:ext cx="11201400" cy="566928"/>
+            <a:ext cx="5532120" cy="4206240"/>
           </a:xfrm>
           <a:prstGeom prst="roundRect">
             <a:avLst>
@@ -13619,8 +13971,8 @@
         </p:nvSpPr>
         <p:spPr>
           <a:xfrm>
-            <a:off x="731520" y="1728216"/>
-            <a:ext cx="2011680" cy="365760"/>
+            <a:off x="731520" y="1783080"/>
+            <a:ext cx="5029200" cy="365760"/>
           </a:xfrm>
           <a:prstGeom prst="rect">
             <a:avLst/>
@@ -13642,13 +13994,13 @@
               </a:spcAft>
             </a:pPr>
             <a:r>
-              <a:rPr sz="1300" b="1" i="0">
-                <a:solidFill>
-                  <a:srgbClr val="0E1F1A"/>
-                </a:solidFill>
-                <a:latin typeface="Segoe UI"/>
-              </a:rPr>
-              <a:t>Mood &amp; Intent</a:t>
+              <a:rPr sz="1200" b="1" i="0">
+                <a:solidFill>
+                  <a:srgbClr val="14453D"/>
+                </a:solidFill>
+                <a:latin typeface="Segoe UI"/>
+              </a:rPr>
+              <a:t>ACTUALLY BUILT</a:t>
             </a:r>
           </a:p>
         </p:txBody>
@@ -13661,8 +14013,8 @@
         </p:nvSpPr>
         <p:spPr>
           <a:xfrm>
-            <a:off x="2834640" y="1728216"/>
-            <a:ext cx="2011680" cy="365760"/>
+            <a:off x="731520" y="2148840"/>
+            <a:ext cx="5120640" cy="3566160"/>
           </a:xfrm>
           <a:prstGeom prst="rect">
             <a:avLst/>
@@ -13677,76 +14029,129 @@
           <a:p>
             <a:pPr algn="l">
               <a:lnSpc>
-                <a:spcPct val="100000"/>
-              </a:lnSpc>
-              <a:spcAft>
-                <a:spcPts val="400"/>
-              </a:spcAft>
-            </a:pPr>
-            <a:r>
-              <a:rPr sz="1150" b="1" i="0">
-                <a:solidFill>
-                  <a:srgbClr val="C58200"/>
-                </a:solidFill>
-                <a:latin typeface="Segoe UI"/>
-              </a:rPr>
-              <a:t>goal-based</a:t>
-            </a:r>
-          </a:p>
-        </p:txBody>
-      </p:sp>
-      <p:sp>
-        <p:nvSpPr>
-          <p:cNvPr id="7" name="TextBox 6"/>
-          <p:cNvSpPr txBox="1"/>
-          <p:nvPr/>
-        </p:nvSpPr>
-        <p:spPr>
-          <a:xfrm>
-            <a:off x="4937760" y="1728216"/>
-            <a:ext cx="6583680" cy="411480"/>
-          </a:xfrm>
-          <a:prstGeom prst="rect">
-            <a:avLst/>
-          </a:prstGeom>
-          <a:noFill/>
-        </p:spPr>
-        <p:txBody>
-          <a:bodyPr wrap="square" anchor="t">
-            <a:spAutoFit/>
-          </a:bodyPr>
-          <a:lstStyle/>
-          <a:p>
-            <a:pPr algn="l">
-              <a:lnSpc>
-                <a:spcPct val="100000"/>
-              </a:lnSpc>
-              <a:spcAft>
-                <a:spcPts val="400"/>
-              </a:spcAft>
-            </a:pPr>
-            <a:r>
-              <a:rPr sz="1150" b="0" i="0">
-                <a:solidFill>
-                  <a:srgbClr val="4E635C"/>
-                </a:solidFill>
-                <a:latin typeface="Segoe UI"/>
-              </a:rPr>
-              <a:t>accuracy of captured intent — never invents a preference</a:t>
-            </a:r>
-          </a:p>
-        </p:txBody>
-      </p:sp>
-      <p:sp>
-        <p:nvSpPr>
-          <p:cNvPr id="8" name="Rounded Rectangle 7"/>
+                <a:spcPct val="118000"/>
+              </a:lnSpc>
+              <a:spcAft>
+                <a:spcPts val="400"/>
+              </a:spcAft>
+            </a:pPr>
+            <a:r>
+              <a:rPr sz="1200" b="0" i="0">
+                <a:solidFill>
+                  <a:srgbClr val="0E1F1A"/>
+                </a:solidFill>
+                <a:latin typeface="Segoe UI"/>
+              </a:rPr>
+              <a:t>Next.js App Router + TypeScript on Vercel — push-to-deploy</a:t>
+            </a:r>
+          </a:p>
+          <a:p>
+            <a:pPr algn="l">
+              <a:lnSpc>
+                <a:spcPct val="118000"/>
+              </a:lnSpc>
+              <a:spcAft>
+                <a:spcPts val="400"/>
+              </a:spcAft>
+            </a:pPr>
+            <a:r>
+              <a:rPr sz="1200" b="0" i="0">
+                <a:solidFill>
+                  <a:srgbClr val="0E1F1A"/>
+                </a:solidFill>
+                <a:latin typeface="Segoe UI"/>
+              </a:rPr>
+              <a:t>Groq: llama-3.3-70b · gpt-oss-120b · llama-3.1-8b — per-agent failover chains</a:t>
+            </a:r>
+          </a:p>
+          <a:p>
+            <a:pPr algn="l">
+              <a:lnSpc>
+                <a:spcPct val="118000"/>
+              </a:lnSpc>
+              <a:spcAft>
+                <a:spcPts val="400"/>
+              </a:spcAft>
+            </a:pPr>
+            <a:r>
+              <a:rPr sz="1200" b="0" i="0">
+                <a:solidFill>
+                  <a:srgbClr val="0E1F1A"/>
+                </a:solidFill>
+                <a:latin typeface="Segoe UI"/>
+              </a:rPr>
+              <a:t>Failover on 429 / 400 / 413 / 422 / 503 — quota becomes a slowdown, not an outage</a:t>
+            </a:r>
+          </a:p>
+          <a:p>
+            <a:pPr algn="l">
+              <a:lnSpc>
+                <a:spcPct val="118000"/>
+              </a:lnSpc>
+              <a:spcAft>
+                <a:spcPts val="400"/>
+              </a:spcAft>
+            </a:pPr>
+            <a:r>
+              <a:rPr sz="1200" b="0" i="0">
+                <a:solidFill>
+                  <a:srgbClr val="0E1F1A"/>
+                </a:solidFill>
+                <a:latin typeface="Segoe UI"/>
+              </a:rPr>
+              <a:t>OpenStreetMap + Nominatim + Wikipedia — real, keyless, licensed places &amp; photos</a:t>
+            </a:r>
+          </a:p>
+          <a:p>
+            <a:pPr algn="l">
+              <a:lnSpc>
+                <a:spcPct val="118000"/>
+              </a:lnSpc>
+              <a:spcAft>
+                <a:spcPts val="400"/>
+              </a:spcAft>
+            </a:pPr>
+            <a:r>
+              <a:rPr sz="1200" b="0" i="0">
+                <a:solidFill>
+                  <a:srgbClr val="0E1F1A"/>
+                </a:solidFill>
+                <a:latin typeface="Segoe UI"/>
+              </a:rPr>
+              <a:t>Auth.js + Google OAuth + password-less demo user · trips stay in the browser</a:t>
+            </a:r>
+          </a:p>
+          <a:p>
+            <a:pPr algn="l">
+              <a:lnSpc>
+                <a:spcPct val="118000"/>
+              </a:lnSpc>
+              <a:spcAft>
+                <a:spcPts val="400"/>
+              </a:spcAft>
+            </a:pPr>
+            <a:r>
+              <a:rPr sz="1200" b="0" i="0">
+                <a:solidFill>
+                  <a:srgbClr val="0E1F1A"/>
+                </a:solidFill>
+                <a:latin typeface="Segoe UI"/>
+              </a:rPr>
+              <a:t>Total infrastructure cost: ₹0 — every dependency inside a free tier</a:t>
+            </a:r>
+          </a:p>
+        </p:txBody>
+      </p:sp>
+      <p:sp>
+        <p:nvSpPr>
+          <p:cNvPr id="7" name="Rounded Rectangle 6"/>
           <p:cNvSpPr/>
           <p:nvPr/>
         </p:nvSpPr>
         <p:spPr>
           <a:xfrm>
-            <a:off x="502920" y="2295144"/>
-            <a:ext cx="11201400" cy="566928"/>
+            <a:off x="6199632" y="1645920"/>
+            <a:ext cx="5532120" cy="4206240"/>
           </a:xfrm>
           <a:prstGeom prst="roundRect">
             <a:avLst>
@@ -13788,14 +14193,14 @@
       </p:sp>
       <p:sp>
         <p:nvSpPr>
-          <p:cNvPr id="9" name="TextBox 8"/>
+          <p:cNvPr id="8" name="TextBox 7"/>
           <p:cNvSpPr txBox="1"/>
           <p:nvPr/>
         </p:nvSpPr>
         <p:spPr>
           <a:xfrm>
-            <a:off x="731520" y="2377439"/>
-            <a:ext cx="2011680" cy="365760"/>
+            <a:off x="6428232" y="1783080"/>
+            <a:ext cx="5029200" cy="365760"/>
           </a:xfrm>
           <a:prstGeom prst="rect">
             <a:avLst/>
@@ -13817,27 +14222,27 @@
               </a:spcAft>
             </a:pPr>
             <a:r>
-              <a:rPr sz="1300" b="1" i="0">
-                <a:solidFill>
-                  <a:srgbClr val="0E1F1A"/>
-                </a:solidFill>
-                <a:latin typeface="Segoe UI"/>
-              </a:rPr>
-              <a:t>Discovery</a:t>
-            </a:r>
-          </a:p>
-        </p:txBody>
-      </p:sp>
-      <p:sp>
-        <p:nvSpPr>
-          <p:cNvPr id="10" name="TextBox 9"/>
+              <a:rPr sz="1200" b="1" i="0">
+                <a:solidFill>
+                  <a:srgbClr val="C58200"/>
+                </a:solidFill>
+                <a:latin typeface="Segoe UI"/>
+              </a:rPr>
+              <a:t>FUNDED VERSION — AND WHY NOT NOW</a:t>
+            </a:r>
+          </a:p>
+        </p:txBody>
+      </p:sp>
+      <p:sp>
+        <p:nvSpPr>
+          <p:cNvPr id="9" name="TextBox 8"/>
           <p:cNvSpPr txBox="1"/>
           <p:nvPr/>
         </p:nvSpPr>
         <p:spPr>
           <a:xfrm>
-            <a:off x="2834640" y="2377439"/>
-            <a:ext cx="2011680" cy="365760"/>
+            <a:off x="6428232" y="2148840"/>
+            <a:ext cx="5120640" cy="3017520"/>
           </a:xfrm>
           <a:prstGeom prst="rect">
             <a:avLst/>
@@ -13852,34 +14257,91 @@
           <a:p>
             <a:pPr algn="l">
               <a:lnSpc>
-                <a:spcPct val="100000"/>
-              </a:lnSpc>
-              <a:spcAft>
-                <a:spcPts val="400"/>
-              </a:spcAft>
-            </a:pPr>
-            <a:r>
-              <a:rPr sz="1150" b="1" i="0">
-                <a:solidFill>
-                  <a:srgbClr val="C58200"/>
-                </a:solidFill>
-                <a:latin typeface="Segoe UI"/>
-              </a:rPr>
-              <a:t>goal-based</a:t>
-            </a:r>
-          </a:p>
-        </p:txBody>
-      </p:sp>
-      <p:sp>
-        <p:nvSpPr>
-          <p:cNvPr id="11" name="TextBox 10"/>
+                <a:spcPct val="118000"/>
+              </a:lnSpc>
+              <a:spcAft>
+                <a:spcPts val="400"/>
+              </a:spcAft>
+            </a:pPr>
+            <a:r>
+              <a:rPr sz="1200" b="0" i="0">
+                <a:solidFill>
+                  <a:srgbClr val="0E1F1A"/>
+                </a:solidFill>
+                <a:latin typeface="Segoe UI"/>
+              </a:rPr>
+              <a:t>LangGraph-class runtime — retries, checkpointing, observability at scale</a:t>
+            </a:r>
+          </a:p>
+          <a:p>
+            <a:pPr algn="l">
+              <a:lnSpc>
+                <a:spcPct val="118000"/>
+              </a:lnSpc>
+              <a:spcAft>
+                <a:spcPts val="400"/>
+              </a:spcAft>
+            </a:pPr>
+            <a:r>
+              <a:rPr sz="1200" b="0" i="0">
+                <a:solidFill>
+                  <a:srgbClr val="0E1F1A"/>
+                </a:solidFill>
+                <a:latin typeface="Segoe UI"/>
+              </a:rPr>
+              <a:t>Vector store for cross-trip preference memory; relational store for transactions</a:t>
+            </a:r>
+          </a:p>
+          <a:p>
+            <a:pPr algn="l">
+              <a:lnSpc>
+                <a:spcPct val="118000"/>
+              </a:lnSpc>
+              <a:spcAft>
+                <a:spcPts val="400"/>
+              </a:spcAft>
+            </a:pPr>
+            <a:r>
+              <a:rPr sz="1200" b="0" i="0">
+                <a:solidFill>
+                  <a:srgbClr val="0E1F1A"/>
+                </a:solidFill>
+                <a:latin typeface="Segoe UI"/>
+              </a:rPr>
+              <a:t>FCM/APNs push, SMS &amp; voice gateways — closed-app reminder delivery</a:t>
+            </a:r>
+          </a:p>
+          <a:p>
+            <a:pPr algn="l">
+              <a:lnSpc>
+                <a:spcPct val="118000"/>
+              </a:lnSpc>
+              <a:spcAft>
+                <a:spcPts val="400"/>
+              </a:spcAft>
+            </a:pPr>
+            <a:r>
+              <a:rPr sz="1200" b="0" i="0">
+                <a:solidFill>
+                  <a:srgbClr val="0E1F1A"/>
+                </a:solidFill>
+                <a:latin typeface="Segoe UI"/>
+              </a:rPr>
+              <a:t>Amadeus/Travelport, Uber/Ola, IRCTC behind one adapter — real bookings</a:t>
+            </a:r>
+          </a:p>
+        </p:txBody>
+      </p:sp>
+      <p:sp>
+        <p:nvSpPr>
+          <p:cNvPr id="10" name="TextBox 9"/>
           <p:cNvSpPr txBox="1"/>
           <p:nvPr/>
         </p:nvSpPr>
         <p:spPr>
           <a:xfrm>
-            <a:off x="4937760" y="2377439"/>
-            <a:ext cx="6583680" cy="411480"/>
+            <a:off x="6428232" y="5029200"/>
+            <a:ext cx="5120640" cy="731520"/>
           </a:xfrm>
           <a:prstGeom prst="rect">
             <a:avLst/>
@@ -13901,930 +14363,13 @@
               </a:spcAft>
             </a:pPr>
             <a:r>
-              <a:rPr sz="1150" b="0" i="0">
+              <a:rPr sz="1200" b="1" i="0">
                 <a:solidFill>
                   <a:srgbClr val="4E635C"/>
                 </a:solidFill>
                 <a:latin typeface="Segoe UI"/>
               </a:rPr>
-              <a:t>match relevance; India-only; must explain any substitution</a:t>
-            </a:r>
-          </a:p>
-        </p:txBody>
-      </p:sp>
-      <p:sp>
-        <p:nvSpPr>
-          <p:cNvPr id="12" name="Rounded Rectangle 11"/>
-          <p:cNvSpPr/>
-          <p:nvPr/>
-        </p:nvSpPr>
-        <p:spPr>
-          <a:xfrm>
-            <a:off x="502920" y="2944368"/>
-            <a:ext cx="11201400" cy="566928"/>
-          </a:xfrm>
-          <a:prstGeom prst="roundRect">
-            <a:avLst>
-              <a:gd name="adj" fmla="val 8000"/>
-            </a:avLst>
-          </a:prstGeom>
-          <a:solidFill>
-            <a:srgbClr val="FFFFFF"/>
-          </a:solidFill>
-          <a:ln w="12700">
-            <a:solidFill>
-              <a:srgbClr val="D8DFDB"/>
-            </a:solidFill>
-          </a:ln>
-          <a:effectLst/>
-        </p:spPr>
-        <p:style>
-          <a:lnRef idx="1">
-            <a:schemeClr val="accent1"/>
-          </a:lnRef>
-          <a:fillRef idx="3">
-            <a:schemeClr val="accent1"/>
-          </a:fillRef>
-          <a:effectRef idx="2">
-            <a:schemeClr val="accent1"/>
-          </a:effectRef>
-          <a:fontRef idx="minor">
-            <a:schemeClr val="lt1"/>
-          </a:fontRef>
-        </p:style>
-        <p:txBody>
-          <a:bodyPr rtlCol="0" anchor="ctr"/>
-          <a:lstStyle/>
-          <a:p>
-            <a:pPr algn="ctr"/>
-            <a:endParaRPr/>
-          </a:p>
-        </p:txBody>
-      </p:sp>
-      <p:sp>
-        <p:nvSpPr>
-          <p:cNvPr id="13" name="TextBox 12"/>
-          <p:cNvSpPr txBox="1"/>
-          <p:nvPr/>
-        </p:nvSpPr>
-        <p:spPr>
-          <a:xfrm>
-            <a:off x="731520" y="3026663"/>
-            <a:ext cx="2011680" cy="365760"/>
-          </a:xfrm>
-          <a:prstGeom prst="rect">
-            <a:avLst/>
-          </a:prstGeom>
-          <a:noFill/>
-        </p:spPr>
-        <p:txBody>
-          <a:bodyPr wrap="square" anchor="t">
-            <a:spAutoFit/>
-          </a:bodyPr>
-          <a:lstStyle/>
-          <a:p>
-            <a:pPr algn="l">
-              <a:lnSpc>
-                <a:spcPct val="100000"/>
-              </a:lnSpc>
-              <a:spcAft>
-                <a:spcPts val="400"/>
-              </a:spcAft>
-            </a:pPr>
-            <a:r>
-              <a:rPr sz="1300" b="1" i="0">
-                <a:solidFill>
-                  <a:srgbClr val="0E1F1A"/>
-                </a:solidFill>
-                <a:latin typeface="Segoe UI"/>
-              </a:rPr>
-              <a:t>Budget</a:t>
-            </a:r>
-          </a:p>
-        </p:txBody>
-      </p:sp>
-      <p:sp>
-        <p:nvSpPr>
-          <p:cNvPr id="14" name="TextBox 13"/>
-          <p:cNvSpPr txBox="1"/>
-          <p:nvPr/>
-        </p:nvSpPr>
-        <p:spPr>
-          <a:xfrm>
-            <a:off x="2834640" y="3026663"/>
-            <a:ext cx="2011680" cy="365760"/>
-          </a:xfrm>
-          <a:prstGeom prst="rect">
-            <a:avLst/>
-          </a:prstGeom>
-          <a:noFill/>
-        </p:spPr>
-        <p:txBody>
-          <a:bodyPr wrap="square" anchor="t">
-            <a:spAutoFit/>
-          </a:bodyPr>
-          <a:lstStyle/>
-          <a:p>
-            <a:pPr algn="l">
-              <a:lnSpc>
-                <a:spcPct val="100000"/>
-              </a:lnSpc>
-              <a:spcAft>
-                <a:spcPts val="400"/>
-              </a:spcAft>
-            </a:pPr>
-            <a:r>
-              <a:rPr sz="1150" b="1" i="0">
-                <a:solidFill>
-                  <a:srgbClr val="C58200"/>
-                </a:solidFill>
-                <a:latin typeface="Segoe UI"/>
-              </a:rPr>
-              <a:t>utility-based</a:t>
-            </a:r>
-          </a:p>
-        </p:txBody>
-      </p:sp>
-      <p:sp>
-        <p:nvSpPr>
-          <p:cNvPr id="15" name="TextBox 14"/>
-          <p:cNvSpPr txBox="1"/>
-          <p:nvPr/>
-        </p:nvSpPr>
-        <p:spPr>
-          <a:xfrm>
-            <a:off x="4937760" y="3026663"/>
-            <a:ext cx="6583680" cy="411480"/>
-          </a:xfrm>
-          <a:prstGeom prst="rect">
-            <a:avLst/>
-          </a:prstGeom>
-          <a:noFill/>
-        </p:spPr>
-        <p:txBody>
-          <a:bodyPr wrap="square" anchor="t">
-            <a:spAutoFit/>
-          </a:bodyPr>
-          <a:lstStyle/>
-          <a:p>
-            <a:pPr algn="l">
-              <a:lnSpc>
-                <a:spcPct val="100000"/>
-              </a:lnSpc>
-              <a:spcAft>
-                <a:spcPts val="400"/>
-              </a:spcAft>
-            </a:pPr>
-            <a:r>
-              <a:rPr sz="1150" b="0" i="0">
-                <a:solidFill>
-                  <a:srgbClr val="4E635C"/>
-                </a:solidFill>
-                <a:latin typeface="Segoe UI"/>
-              </a:rPr>
-              <a:t>spend &amp; split correctness — arithmetic in code, never the model</a:t>
-            </a:r>
-          </a:p>
-        </p:txBody>
-      </p:sp>
-      <p:sp>
-        <p:nvSpPr>
-          <p:cNvPr id="16" name="Rounded Rectangle 15"/>
-          <p:cNvSpPr/>
-          <p:nvPr/>
-        </p:nvSpPr>
-        <p:spPr>
-          <a:xfrm>
-            <a:off x="502920" y="3593591"/>
-            <a:ext cx="11201400" cy="566928"/>
-          </a:xfrm>
-          <a:prstGeom prst="roundRect">
-            <a:avLst>
-              <a:gd name="adj" fmla="val 8000"/>
-            </a:avLst>
-          </a:prstGeom>
-          <a:solidFill>
-            <a:srgbClr val="FFFFFF"/>
-          </a:solidFill>
-          <a:ln w="12700">
-            <a:solidFill>
-              <a:srgbClr val="D8DFDB"/>
-            </a:solidFill>
-          </a:ln>
-          <a:effectLst/>
-        </p:spPr>
-        <p:style>
-          <a:lnRef idx="1">
-            <a:schemeClr val="accent1"/>
-          </a:lnRef>
-          <a:fillRef idx="3">
-            <a:schemeClr val="accent1"/>
-          </a:fillRef>
-          <a:effectRef idx="2">
-            <a:schemeClr val="accent1"/>
-          </a:effectRef>
-          <a:fontRef idx="minor">
-            <a:schemeClr val="lt1"/>
-          </a:fontRef>
-        </p:style>
-        <p:txBody>
-          <a:bodyPr rtlCol="0" anchor="ctr"/>
-          <a:lstStyle/>
-          <a:p>
-            <a:pPr algn="ctr"/>
-            <a:endParaRPr/>
-          </a:p>
-        </p:txBody>
-      </p:sp>
-      <p:sp>
-        <p:nvSpPr>
-          <p:cNvPr id="17" name="TextBox 16"/>
-          <p:cNvSpPr txBox="1"/>
-          <p:nvPr/>
-        </p:nvSpPr>
-        <p:spPr>
-          <a:xfrm>
-            <a:off x="731520" y="3675887"/>
-            <a:ext cx="2011680" cy="365760"/>
-          </a:xfrm>
-          <a:prstGeom prst="rect">
-            <a:avLst/>
-          </a:prstGeom>
-          <a:noFill/>
-        </p:spPr>
-        <p:txBody>
-          <a:bodyPr wrap="square" anchor="t">
-            <a:spAutoFit/>
-          </a:bodyPr>
-          <a:lstStyle/>
-          <a:p>
-            <a:pPr algn="l">
-              <a:lnSpc>
-                <a:spcPct val="100000"/>
-              </a:lnSpc>
-              <a:spcAft>
-                <a:spcPts val="400"/>
-              </a:spcAft>
-            </a:pPr>
-            <a:r>
-              <a:rPr sz="1300" b="1" i="0">
-                <a:solidFill>
-                  <a:srgbClr val="0E1F1A"/>
-                </a:solidFill>
-                <a:latin typeface="Segoe UI"/>
-              </a:rPr>
-              <a:t>Itinerary</a:t>
-            </a:r>
-          </a:p>
-        </p:txBody>
-      </p:sp>
-      <p:sp>
-        <p:nvSpPr>
-          <p:cNvPr id="18" name="TextBox 17"/>
-          <p:cNvSpPr txBox="1"/>
-          <p:nvPr/>
-        </p:nvSpPr>
-        <p:spPr>
-          <a:xfrm>
-            <a:off x="2834640" y="3675887"/>
-            <a:ext cx="2011680" cy="365760"/>
-          </a:xfrm>
-          <a:prstGeom prst="rect">
-            <a:avLst/>
-          </a:prstGeom>
-          <a:noFill/>
-        </p:spPr>
-        <p:txBody>
-          <a:bodyPr wrap="square" anchor="t">
-            <a:spAutoFit/>
-          </a:bodyPr>
-          <a:lstStyle/>
-          <a:p>
-            <a:pPr algn="l">
-              <a:lnSpc>
-                <a:spcPct val="100000"/>
-              </a:lnSpc>
-              <a:spcAft>
-                <a:spcPts val="400"/>
-              </a:spcAft>
-            </a:pPr>
-            <a:r>
-              <a:rPr sz="1150" b="1" i="0">
-                <a:solidFill>
-                  <a:srgbClr val="C58200"/>
-                </a:solidFill>
-                <a:latin typeface="Segoe UI"/>
-              </a:rPr>
-              <a:t>utility-based</a:t>
-            </a:r>
-          </a:p>
-        </p:txBody>
-      </p:sp>
-      <p:sp>
-        <p:nvSpPr>
-          <p:cNvPr id="19" name="TextBox 18"/>
-          <p:cNvSpPr txBox="1"/>
-          <p:nvPr/>
-        </p:nvSpPr>
-        <p:spPr>
-          <a:xfrm>
-            <a:off x="4937760" y="3675887"/>
-            <a:ext cx="6583680" cy="411480"/>
-          </a:xfrm>
-          <a:prstGeom prst="rect">
-            <a:avLst/>
-          </a:prstGeom>
-          <a:noFill/>
-        </p:spPr>
-        <p:txBody>
-          <a:bodyPr wrap="square" anchor="t">
-            <a:spAutoFit/>
-          </a:bodyPr>
-          <a:lstStyle/>
-          <a:p>
-            <a:pPr algn="l">
-              <a:lnSpc>
-                <a:spcPct val="100000"/>
-              </a:lnSpc>
-              <a:spcAft>
-                <a:spcPts val="400"/>
-              </a:spcAft>
-            </a:pPr>
-            <a:r>
-              <a:rPr sz="1150" b="0" i="0">
-                <a:solidFill>
-                  <a:srgbClr val="4E635C"/>
-                </a:solidFill>
-                <a:latin typeface="Segoe UI"/>
-              </a:rPr>
-              <a:t>coherence &amp; pacing fit; places from open map data, not memory</a:t>
-            </a:r>
-          </a:p>
-        </p:txBody>
-      </p:sp>
-      <p:sp>
-        <p:nvSpPr>
-          <p:cNvPr id="20" name="Rounded Rectangle 19"/>
-          <p:cNvSpPr/>
-          <p:nvPr/>
-        </p:nvSpPr>
-        <p:spPr>
-          <a:xfrm>
-            <a:off x="502920" y="4242816"/>
-            <a:ext cx="11201400" cy="566928"/>
-          </a:xfrm>
-          <a:prstGeom prst="roundRect">
-            <a:avLst>
-              <a:gd name="adj" fmla="val 8000"/>
-            </a:avLst>
-          </a:prstGeom>
-          <a:solidFill>
-            <a:srgbClr val="FFFFFF"/>
-          </a:solidFill>
-          <a:ln w="12700">
-            <a:solidFill>
-              <a:srgbClr val="D8DFDB"/>
-            </a:solidFill>
-          </a:ln>
-          <a:effectLst/>
-        </p:spPr>
-        <p:style>
-          <a:lnRef idx="1">
-            <a:schemeClr val="accent1"/>
-          </a:lnRef>
-          <a:fillRef idx="3">
-            <a:schemeClr val="accent1"/>
-          </a:fillRef>
-          <a:effectRef idx="2">
-            <a:schemeClr val="accent1"/>
-          </a:effectRef>
-          <a:fontRef idx="minor">
-            <a:schemeClr val="lt1"/>
-          </a:fontRef>
-        </p:style>
-        <p:txBody>
-          <a:bodyPr rtlCol="0" anchor="ctr"/>
-          <a:lstStyle/>
-          <a:p>
-            <a:pPr algn="ctr"/>
-            <a:endParaRPr/>
-          </a:p>
-        </p:txBody>
-      </p:sp>
-      <p:sp>
-        <p:nvSpPr>
-          <p:cNvPr id="21" name="TextBox 20"/>
-          <p:cNvSpPr txBox="1"/>
-          <p:nvPr/>
-        </p:nvSpPr>
-        <p:spPr>
-          <a:xfrm>
-            <a:off x="731520" y="4325112"/>
-            <a:ext cx="2011680" cy="365760"/>
-          </a:xfrm>
-          <a:prstGeom prst="rect">
-            <a:avLst/>
-          </a:prstGeom>
-          <a:noFill/>
-        </p:spPr>
-        <p:txBody>
-          <a:bodyPr wrap="square" anchor="t">
-            <a:spAutoFit/>
-          </a:bodyPr>
-          <a:lstStyle/>
-          <a:p>
-            <a:pPr algn="l">
-              <a:lnSpc>
-                <a:spcPct val="100000"/>
-              </a:lnSpc>
-              <a:spcAft>
-                <a:spcPts val="400"/>
-              </a:spcAft>
-            </a:pPr>
-            <a:r>
-              <a:rPr sz="1300" b="1" i="0">
-                <a:solidFill>
-                  <a:srgbClr val="0E1F1A"/>
-                </a:solidFill>
-                <a:latin typeface="Segoe UI"/>
-              </a:rPr>
-              <a:t>Booking</a:t>
-            </a:r>
-          </a:p>
-        </p:txBody>
-      </p:sp>
-      <p:sp>
-        <p:nvSpPr>
-          <p:cNvPr id="22" name="TextBox 21"/>
-          <p:cNvSpPr txBox="1"/>
-          <p:nvPr/>
-        </p:nvSpPr>
-        <p:spPr>
-          <a:xfrm>
-            <a:off x="2834640" y="4325112"/>
-            <a:ext cx="2011680" cy="365760"/>
-          </a:xfrm>
-          <a:prstGeom prst="rect">
-            <a:avLst/>
-          </a:prstGeom>
-          <a:noFill/>
-        </p:spPr>
-        <p:txBody>
-          <a:bodyPr wrap="square" anchor="t">
-            <a:spAutoFit/>
-          </a:bodyPr>
-          <a:lstStyle/>
-          <a:p>
-            <a:pPr algn="l">
-              <a:lnSpc>
-                <a:spcPct val="100000"/>
-              </a:lnSpc>
-              <a:spcAft>
-                <a:spcPts val="400"/>
-              </a:spcAft>
-            </a:pPr>
-            <a:r>
-              <a:rPr sz="1150" b="1" i="0">
-                <a:solidFill>
-                  <a:srgbClr val="C58200"/>
-                </a:solidFill>
-                <a:latin typeface="Segoe UI"/>
-              </a:rPr>
-              <a:t>action, gated</a:t>
-            </a:r>
-          </a:p>
-        </p:txBody>
-      </p:sp>
-      <p:sp>
-        <p:nvSpPr>
-          <p:cNvPr id="23" name="TextBox 22"/>
-          <p:cNvSpPr txBox="1"/>
-          <p:nvPr/>
-        </p:nvSpPr>
-        <p:spPr>
-          <a:xfrm>
-            <a:off x="4937760" y="4325112"/>
-            <a:ext cx="6583680" cy="411480"/>
-          </a:xfrm>
-          <a:prstGeom prst="rect">
-            <a:avLst/>
-          </a:prstGeom>
-          <a:noFill/>
-        </p:spPr>
-        <p:txBody>
-          <a:bodyPr wrap="square" anchor="t">
-            <a:spAutoFit/>
-          </a:bodyPr>
-          <a:lstStyle/>
-          <a:p>
-            <a:pPr algn="l">
-              <a:lnSpc>
-                <a:spcPct val="100000"/>
-              </a:lnSpc>
-              <a:spcAft>
-                <a:spcPts val="400"/>
-              </a:spcAft>
-            </a:pPr>
-            <a:r>
-              <a:rPr sz="1150" b="0" i="0">
-                <a:solidFill>
-                  <a:srgbClr val="4E635C"/>
-                </a:solidFill>
-                <a:latin typeface="Segoe UI"/>
-              </a:rPr>
-              <a:t>simulated bookings; every item above threshold needs explicit approval</a:t>
-            </a:r>
-          </a:p>
-        </p:txBody>
-      </p:sp>
-      <p:sp>
-        <p:nvSpPr>
-          <p:cNvPr id="24" name="Rounded Rectangle 23"/>
-          <p:cNvSpPr/>
-          <p:nvPr/>
-        </p:nvSpPr>
-        <p:spPr>
-          <a:xfrm>
-            <a:off x="502920" y="4892040"/>
-            <a:ext cx="11201400" cy="566928"/>
-          </a:xfrm>
-          <a:prstGeom prst="roundRect">
-            <a:avLst>
-              <a:gd name="adj" fmla="val 8000"/>
-            </a:avLst>
-          </a:prstGeom>
-          <a:solidFill>
-            <a:srgbClr val="FFFFFF"/>
-          </a:solidFill>
-          <a:ln w="12700">
-            <a:solidFill>
-              <a:srgbClr val="D8DFDB"/>
-            </a:solidFill>
-          </a:ln>
-          <a:effectLst/>
-        </p:spPr>
-        <p:style>
-          <a:lnRef idx="1">
-            <a:schemeClr val="accent1"/>
-          </a:lnRef>
-          <a:fillRef idx="3">
-            <a:schemeClr val="accent1"/>
-          </a:fillRef>
-          <a:effectRef idx="2">
-            <a:schemeClr val="accent1"/>
-          </a:effectRef>
-          <a:fontRef idx="minor">
-            <a:schemeClr val="lt1"/>
-          </a:fontRef>
-        </p:style>
-        <p:txBody>
-          <a:bodyPr rtlCol="0" anchor="ctr"/>
-          <a:lstStyle/>
-          <a:p>
-            <a:pPr algn="ctr"/>
-            <a:endParaRPr/>
-          </a:p>
-        </p:txBody>
-      </p:sp>
-      <p:sp>
-        <p:nvSpPr>
-          <p:cNvPr id="25" name="TextBox 24"/>
-          <p:cNvSpPr txBox="1"/>
-          <p:nvPr/>
-        </p:nvSpPr>
-        <p:spPr>
-          <a:xfrm>
-            <a:off x="731520" y="4974336"/>
-            <a:ext cx="2011680" cy="365760"/>
-          </a:xfrm>
-          <a:prstGeom prst="rect">
-            <a:avLst/>
-          </a:prstGeom>
-          <a:noFill/>
-        </p:spPr>
-        <p:txBody>
-          <a:bodyPr wrap="square" anchor="t">
-            <a:spAutoFit/>
-          </a:bodyPr>
-          <a:lstStyle/>
-          <a:p>
-            <a:pPr algn="l">
-              <a:lnSpc>
-                <a:spcPct val="100000"/>
-              </a:lnSpc>
-              <a:spcAft>
-                <a:spcPts val="400"/>
-              </a:spcAft>
-            </a:pPr>
-            <a:r>
-              <a:rPr sz="1300" b="1" i="0">
-                <a:solidFill>
-                  <a:srgbClr val="0E1F1A"/>
-                </a:solidFill>
-                <a:latin typeface="Segoe UI"/>
-              </a:rPr>
-              <a:t>Referee</a:t>
-            </a:r>
-          </a:p>
-        </p:txBody>
-      </p:sp>
-      <p:sp>
-        <p:nvSpPr>
-          <p:cNvPr id="26" name="TextBox 25"/>
-          <p:cNvSpPr txBox="1"/>
-          <p:nvPr/>
-        </p:nvSpPr>
-        <p:spPr>
-          <a:xfrm>
-            <a:off x="2834640" y="4974336"/>
-            <a:ext cx="2011680" cy="365760"/>
-          </a:xfrm>
-          <a:prstGeom prst="rect">
-            <a:avLst/>
-          </a:prstGeom>
-          <a:noFill/>
-        </p:spPr>
-        <p:txBody>
-          <a:bodyPr wrap="square" anchor="t">
-            <a:spAutoFit/>
-          </a:bodyPr>
-          <a:lstStyle/>
-          <a:p>
-            <a:pPr algn="l">
-              <a:lnSpc>
-                <a:spcPct val="100000"/>
-              </a:lnSpc>
-              <a:spcAft>
-                <a:spcPts val="400"/>
-              </a:spcAft>
-            </a:pPr>
-            <a:r>
-              <a:rPr sz="1150" b="1" i="0">
-                <a:solidFill>
-                  <a:srgbClr val="C58200"/>
-                </a:solidFill>
-                <a:latin typeface="Segoe UI"/>
-              </a:rPr>
-              <a:t>utility + arbitration</a:t>
-            </a:r>
-          </a:p>
-        </p:txBody>
-      </p:sp>
-      <p:sp>
-        <p:nvSpPr>
-          <p:cNvPr id="27" name="TextBox 26"/>
-          <p:cNvSpPr txBox="1"/>
-          <p:nvPr/>
-        </p:nvSpPr>
-        <p:spPr>
-          <a:xfrm>
-            <a:off x="4937760" y="4974336"/>
-            <a:ext cx="6583680" cy="411480"/>
-          </a:xfrm>
-          <a:prstGeom prst="rect">
-            <a:avLst/>
-          </a:prstGeom>
-          <a:noFill/>
-        </p:spPr>
-        <p:txBody>
-          <a:bodyPr wrap="square" anchor="t">
-            <a:spAutoFit/>
-          </a:bodyPr>
-          <a:lstStyle/>
-          <a:p>
-            <a:pPr algn="l">
-              <a:lnSpc>
-                <a:spcPct val="100000"/>
-              </a:lnSpc>
-              <a:spcAft>
-                <a:spcPts val="400"/>
-              </a:spcAft>
-            </a:pPr>
-            <a:r>
-              <a:rPr sz="1150" b="0" i="0">
-                <a:solidFill>
-                  <a:srgbClr val="4E635C"/>
-                </a:solidFill>
-                <a:latin typeface="Segoe UI"/>
-              </a:rPr>
-              <a:t>conflicts in rupees; fairness floor; can send work backwards</a:t>
-            </a:r>
-          </a:p>
-        </p:txBody>
-      </p:sp>
-      <p:sp>
-        <p:nvSpPr>
-          <p:cNvPr id="28" name="Rounded Rectangle 27"/>
-          <p:cNvSpPr/>
-          <p:nvPr/>
-        </p:nvSpPr>
-        <p:spPr>
-          <a:xfrm>
-            <a:off x="502920" y="5541264"/>
-            <a:ext cx="11201400" cy="566928"/>
-          </a:xfrm>
-          <a:prstGeom prst="roundRect">
-            <a:avLst>
-              <a:gd name="adj" fmla="val 8000"/>
-            </a:avLst>
-          </a:prstGeom>
-          <a:solidFill>
-            <a:srgbClr val="FFFFFF"/>
-          </a:solidFill>
-          <a:ln w="12700">
-            <a:solidFill>
-              <a:srgbClr val="D8DFDB"/>
-            </a:solidFill>
-          </a:ln>
-          <a:effectLst/>
-        </p:spPr>
-        <p:style>
-          <a:lnRef idx="1">
-            <a:schemeClr val="accent1"/>
-          </a:lnRef>
-          <a:fillRef idx="3">
-            <a:schemeClr val="accent1"/>
-          </a:fillRef>
-          <a:effectRef idx="2">
-            <a:schemeClr val="accent1"/>
-          </a:effectRef>
-          <a:fontRef idx="minor">
-            <a:schemeClr val="lt1"/>
-          </a:fontRef>
-        </p:style>
-        <p:txBody>
-          <a:bodyPr rtlCol="0" anchor="ctr"/>
-          <a:lstStyle/>
-          <a:p>
-            <a:pPr algn="ctr"/>
-            <a:endParaRPr/>
-          </a:p>
-        </p:txBody>
-      </p:sp>
-      <p:sp>
-        <p:nvSpPr>
-          <p:cNvPr id="29" name="TextBox 28"/>
-          <p:cNvSpPr txBox="1"/>
-          <p:nvPr/>
-        </p:nvSpPr>
-        <p:spPr>
-          <a:xfrm>
-            <a:off x="731520" y="5623559"/>
-            <a:ext cx="2011680" cy="365760"/>
-          </a:xfrm>
-          <a:prstGeom prst="rect">
-            <a:avLst/>
-          </a:prstGeom>
-          <a:noFill/>
-        </p:spPr>
-        <p:txBody>
-          <a:bodyPr wrap="square" anchor="t">
-            <a:spAutoFit/>
-          </a:bodyPr>
-          <a:lstStyle/>
-          <a:p>
-            <a:pPr algn="l">
-              <a:lnSpc>
-                <a:spcPct val="100000"/>
-              </a:lnSpc>
-              <a:spcAft>
-                <a:spcPts val="400"/>
-              </a:spcAft>
-            </a:pPr>
-            <a:r>
-              <a:rPr sz="1300" b="1" i="0">
-                <a:solidFill>
-                  <a:srgbClr val="0E1F1A"/>
-                </a:solidFill>
-                <a:latin typeface="Segoe UI"/>
-              </a:rPr>
-              <a:t>Notification</a:t>
-            </a:r>
-          </a:p>
-        </p:txBody>
-      </p:sp>
-      <p:sp>
-        <p:nvSpPr>
-          <p:cNvPr id="30" name="TextBox 29"/>
-          <p:cNvSpPr txBox="1"/>
-          <p:nvPr/>
-        </p:nvSpPr>
-        <p:spPr>
-          <a:xfrm>
-            <a:off x="2834640" y="5623559"/>
-            <a:ext cx="2011680" cy="365760"/>
-          </a:xfrm>
-          <a:prstGeom prst="rect">
-            <a:avLst/>
-          </a:prstGeom>
-          <a:noFill/>
-        </p:spPr>
-        <p:txBody>
-          <a:bodyPr wrap="square" anchor="t">
-            <a:spAutoFit/>
-          </a:bodyPr>
-          <a:lstStyle/>
-          <a:p>
-            <a:pPr algn="l">
-              <a:lnSpc>
-                <a:spcPct val="100000"/>
-              </a:lnSpc>
-              <a:spcAft>
-                <a:spcPts val="400"/>
-              </a:spcAft>
-            </a:pPr>
-            <a:r>
-              <a:rPr sz="1150" b="1" i="0">
-                <a:solidFill>
-                  <a:srgbClr val="C58200"/>
-                </a:solidFill>
-                <a:latin typeface="Segoe UI"/>
-              </a:rPr>
-              <a:t>model-based reflex</a:t>
-            </a:r>
-          </a:p>
-        </p:txBody>
-      </p:sp>
-      <p:sp>
-        <p:nvSpPr>
-          <p:cNvPr id="31" name="TextBox 30"/>
-          <p:cNvSpPr txBox="1"/>
-          <p:nvPr/>
-        </p:nvSpPr>
-        <p:spPr>
-          <a:xfrm>
-            <a:off x="4937760" y="5623559"/>
-            <a:ext cx="6583680" cy="411480"/>
-          </a:xfrm>
-          <a:prstGeom prst="rect">
-            <a:avLst/>
-          </a:prstGeom>
-          <a:noFill/>
-        </p:spPr>
-        <p:txBody>
-          <a:bodyPr wrap="square" anchor="t">
-            <a:spAutoFit/>
-          </a:bodyPr>
-          <a:lstStyle/>
-          <a:p>
-            <a:pPr algn="l">
-              <a:lnSpc>
-                <a:spcPct val="100000"/>
-              </a:lnSpc>
-              <a:spcAft>
-                <a:spcPts val="400"/>
-              </a:spcAft>
-            </a:pPr>
-            <a:r>
-              <a:rPr sz="1150" b="0" i="0">
-                <a:solidFill>
-                  <a:srgbClr val="4E635C"/>
-                </a:solidFill>
-                <a:latin typeface="Segoe UI"/>
-              </a:rPr>
-              <a:t>time-anchored reminders; opt-in per trip, off by default</a:t>
-            </a:r>
-          </a:p>
-        </p:txBody>
-      </p:sp>
-      <p:sp>
-        <p:nvSpPr>
-          <p:cNvPr id="32" name="TextBox 31"/>
-          <p:cNvSpPr txBox="1"/>
-          <p:nvPr/>
-        </p:nvSpPr>
-        <p:spPr>
-          <a:xfrm>
-            <a:off x="502920" y="6309360"/>
-            <a:ext cx="11155680" cy="365760"/>
-          </a:xfrm>
-          <a:prstGeom prst="rect">
-            <a:avLst/>
-          </a:prstGeom>
-          <a:noFill/>
-        </p:spPr>
-        <p:txBody>
-          <a:bodyPr wrap="square" anchor="t">
-            <a:spAutoFit/>
-          </a:bodyPr>
-          <a:lstStyle/>
-          <a:p>
-            <a:pPr algn="l">
-              <a:lnSpc>
-                <a:spcPct val="100000"/>
-              </a:lnSpc>
-              <a:spcAft>
-                <a:spcPts val="400"/>
-              </a:spcAft>
-            </a:pPr>
-            <a:r>
-              <a:rPr sz="1200" b="1" i="0">
-                <a:solidFill>
-                  <a:srgbClr val="14453D"/>
-                </a:solidFill>
-                <a:latin typeface="Segoe UI"/>
-              </a:rPr>
-              <a:t>Design rule: as much autonomy as the stakes of the decision can safely support — and no more.</a:t>
+              <a:t>Adding these before validation would be infrastructure without a user.</a:t>
             </a:r>
           </a:p>
         </p:txBody>
